--- a/lectures/week-10/index.pptx
+++ b/lectures/week-10/index.pptx
@@ -8,6 +8,7 @@
     <p:sldId id="256" r:id="rId2"/>
     <p:sldId id="257" r:id="rId3"/>
     <p:sldId id="258" r:id="rId4"/>
+    <p:sldId id="259" r:id="rId5"/>
   </p:sldIdLst>
   <p:sldSz cx="9144000" cy="5143500" type="screen16x9"/>
   <p:notesSz cx="6858000" cy="9144000"/>
@@ -3207,12 +3208,12 @@
       </p:grpSpPr>
       <p:sp>
         <p:nvSpPr>
-          <p:cNvPr id="2" name="Title 1"/>
-          <p:cNvSpPr>
-            <a:spLocks noGrp="1"/>
-          </p:cNvSpPr>
-          <p:nvPr>
-            <p:ph type="title"/>
+          <p:cNvPr id="3" name="Content Placeholder 2"/>
+          <p:cNvSpPr>
+            <a:spLocks noGrp="1"/>
+          </p:cNvSpPr>
+          <p:nvPr>
+            <p:ph idx="1"/>
           </p:nvPr>
         </p:nvSpPr>
         <p:spPr/>
@@ -3224,109 +3225,12 @@
               <a:buNone/>
             </a:pPr>
             <a:r>
+              <a:rPr b="1"/>
+              <a:t>Draft Material:</a:t>
+            </a:r>
+            <a:r>
               <a:rPr/>
-              <a:t>Coming Soon</a:t>
-            </a:r>
-          </a:p>
-        </p:txBody>
-      </p:sp>
-      <p:sp>
-        <p:nvSpPr>
-          <p:cNvPr id="3" name="Content Placeholder 2"/>
-          <p:cNvSpPr>
-            <a:spLocks noGrp="1"/>
-          </p:cNvSpPr>
-          <p:nvPr>
-            <p:ph idx="1"/>
-          </p:nvPr>
-        </p:nvSpPr>
-        <p:spPr/>
-        <p:txBody>
-          <a:bodyPr/>
-          <a:lstStyle/>
-          <a:p>
-            <a:pPr lvl="0" indent="0" marL="0">
-              <a:buNone/>
-            </a:pPr>
-            <a:r>
-              <a:rPr/>
-              <a:t>This lecture is under development.</a:t>
-            </a:r>
-          </a:p>
-          <a:p>
-            <a:pPr lvl="0" indent="0" marL="0">
-              <a:buNone/>
-            </a:pPr>
-            <a:r>
-              <a:rPr/>
-              <a:t>Content to adapt from previous course:</a:t>
-            </a:r>
-          </a:p>
-          <a:p>
-            <a:pPr lvl="0" indent="0" marL="0">
-              <a:buNone/>
-            </a:pPr>
-            <a:r>
-              <a:rPr b="1"/>
-              <a:t>From Robustness lecture:</a:t>
-            </a:r>
-          </a:p>
-          <a:p>
-            <a:pPr lvl="0"/>
-            <a:r>
-              <a:rPr/>
-              <a:t>Definition: “insensitivity of system design to errors” (Matalas)</a:t>
-            </a:r>
-          </a:p>
-          <a:p>
-            <a:pPr lvl="0"/>
-            <a:r>
-              <a:rPr/>
-              <a:t>Robustness metrics taxonomy (Herman et al.)</a:t>
-            </a:r>
-          </a:p>
-          <a:p>
-            <a:pPr lvl="0"/>
-            <a:r>
-              <a:rPr/>
-              <a:t>Regret and satisficing approaches</a:t>
-            </a:r>
-          </a:p>
-          <a:p>
-            <a:pPr lvl="0"/>
-            <a:r>
-              <a:rPr/>
-              <a:t>Bottom-up vs. top-down analysis</a:t>
-            </a:r>
-          </a:p>
-          <a:p>
-            <a:pPr lvl="0" indent="0" marL="0">
-              <a:buNone/>
-            </a:pPr>
-            <a:r>
-              <a:rPr b="1"/>
-              <a:t>From Deep Uncertainty lecture:</a:t>
-            </a:r>
-          </a:p>
-          <a:p>
-            <a:pPr lvl="0"/>
-            <a:r>
-              <a:rPr/>
-              <a:t>Spectrum of uncertainty</a:t>
-            </a:r>
-          </a:p>
-          <a:p>
-            <a:pPr lvl="0"/>
-            <a:r>
-              <a:rPr/>
-              <a:t>Lempert-Schneider debate</a:t>
-            </a:r>
-          </a:p>
-          <a:p>
-            <a:pPr lvl="0"/>
-            <a:r>
-              <a:rPr/>
-              <a:t>When probabilities help vs. exploratory approaches</a:t>
+              <a:t> This content is under development and subject to change.</a:t>
             </a:r>
           </a:p>
         </p:txBody>
@@ -3337,6 +3241,154 @@
 </file>
 
 <file path=ppt/slides/slide3.xml><?xml version="1.0" encoding="utf-8"?>
+<p:sld xmlns:a="http://schemas.openxmlformats.org/drawingml/2006/main" xmlns:r="http://schemas.openxmlformats.org/officeDocument/2006/relationships" xmlns:p="http://schemas.openxmlformats.org/presentationml/2006/main">
+  <p:cSld>
+    <p:spTree>
+      <p:nvGrpSpPr>
+        <p:cNvPr id="1" name=""/>
+        <p:cNvGrpSpPr/>
+        <p:nvPr/>
+      </p:nvGrpSpPr>
+      <p:grpSpPr>
+        <a:xfrm>
+          <a:off x="0" y="0"/>
+          <a:ext cx="0" cy="0"/>
+          <a:chOff x="0" y="0"/>
+          <a:chExt cx="0" cy="0"/>
+        </a:xfrm>
+      </p:grpSpPr>
+      <p:sp>
+        <p:nvSpPr>
+          <p:cNvPr id="2" name="Title 1"/>
+          <p:cNvSpPr>
+            <a:spLocks noGrp="1"/>
+          </p:cNvSpPr>
+          <p:nvPr>
+            <p:ph type="title"/>
+          </p:nvPr>
+        </p:nvSpPr>
+        <p:spPr/>
+        <p:txBody>
+          <a:bodyPr/>
+          <a:lstStyle/>
+          <a:p>
+            <a:pPr lvl="0" indent="0" marL="0">
+              <a:buNone/>
+            </a:pPr>
+            <a:r>
+              <a:rPr/>
+              <a:t>Coming Soon</a:t>
+            </a:r>
+          </a:p>
+        </p:txBody>
+      </p:sp>
+      <p:sp>
+        <p:nvSpPr>
+          <p:cNvPr id="3" name="Content Placeholder 2"/>
+          <p:cNvSpPr>
+            <a:spLocks noGrp="1"/>
+          </p:cNvSpPr>
+          <p:nvPr>
+            <p:ph idx="1"/>
+          </p:nvPr>
+        </p:nvSpPr>
+        <p:spPr/>
+        <p:txBody>
+          <a:bodyPr/>
+          <a:lstStyle/>
+          <a:p>
+            <a:pPr lvl="0" indent="0" marL="0">
+              <a:buNone/>
+            </a:pPr>
+            <a:r>
+              <a:rPr/>
+              <a:t>This lecture is under development.</a:t>
+            </a:r>
+          </a:p>
+          <a:p>
+            <a:pPr lvl="0" indent="0" marL="0">
+              <a:buNone/>
+            </a:pPr>
+            <a:r>
+              <a:rPr/>
+              <a:t>Content to adapt from previous course:</a:t>
+            </a:r>
+          </a:p>
+          <a:p>
+            <a:pPr lvl="0" indent="0" marL="0">
+              <a:buNone/>
+            </a:pPr>
+            <a:r>
+              <a:rPr b="1"/>
+              <a:t>From Robustness lecture:</a:t>
+            </a:r>
+          </a:p>
+          <a:p>
+            <a:pPr lvl="0"/>
+            <a:r>
+              <a:rPr/>
+              <a:t>Definition: “insensitivity of system design to errors” (Matalas)</a:t>
+            </a:r>
+          </a:p>
+          <a:p>
+            <a:pPr lvl="0"/>
+            <a:r>
+              <a:rPr/>
+              <a:t>Robustness metrics taxonomy (Herman et al.)</a:t>
+            </a:r>
+          </a:p>
+          <a:p>
+            <a:pPr lvl="0"/>
+            <a:r>
+              <a:rPr/>
+              <a:t>Regret and satisficing approaches</a:t>
+            </a:r>
+          </a:p>
+          <a:p>
+            <a:pPr lvl="0"/>
+            <a:r>
+              <a:rPr/>
+              <a:t>Bottom-up vs. top-down analysis</a:t>
+            </a:r>
+          </a:p>
+          <a:p>
+            <a:pPr lvl="0" indent="0" marL="0">
+              <a:buNone/>
+            </a:pPr>
+            <a:r>
+              <a:rPr b="1"/>
+              <a:t>From Deep Uncertainty lecture:</a:t>
+            </a:r>
+          </a:p>
+          <a:p>
+            <a:pPr lvl="0"/>
+            <a:r>
+              <a:rPr/>
+              <a:t>Spectrum of uncertainty</a:t>
+            </a:r>
+          </a:p>
+          <a:p>
+            <a:pPr lvl="0"/>
+            <a:r>
+              <a:rPr/>
+              <a:t>Lempert-Schneider debate</a:t>
+            </a:r>
+          </a:p>
+          <a:p>
+            <a:pPr lvl="0"/>
+            <a:r>
+              <a:rPr/>
+              <a:t>When probabilities help vs. exploratory approaches</a:t>
+            </a:r>
+          </a:p>
+        </p:txBody>
+      </p:sp>
+    </p:spTree>
+  </p:cSld>
+</p:sld>
+</file>
+
+<file path=ppt/slides/slide4.xml><?xml version="1.0" encoding="utf-8"?>
 <p:sld xmlns:a="http://schemas.openxmlformats.org/drawingml/2006/main" xmlns:r="http://schemas.openxmlformats.org/officeDocument/2006/relationships" xmlns:p="http://schemas.openxmlformats.org/presentationml/2006/main">
   <p:cSld>
     <p:spTree>

--- a/lectures/week-10/index.pptx
+++ b/lectures/week-10/index.pptx
@@ -3118,7 +3118,7 @@
             </a:pPr>
             <a:r>
               <a:rPr/>
-              <a:t>Robustness &amp; Deep Uncertainty</a:t>
+              <a:t>Exploratory Modeling &amp; Scenario Discovery</a:t>
             </a:r>
           </a:p>
         </p:txBody>
@@ -3303,82 +3303,6 @@
             <a:r>
               <a:rPr/>
               <a:t>This lecture is under development.</a:t>
-            </a:r>
-          </a:p>
-          <a:p>
-            <a:pPr lvl="0" indent="0" marL="0">
-              <a:buNone/>
-            </a:pPr>
-            <a:r>
-              <a:rPr/>
-              <a:t>Content to adapt from previous course:</a:t>
-            </a:r>
-          </a:p>
-          <a:p>
-            <a:pPr lvl="0" indent="0" marL="0">
-              <a:buNone/>
-            </a:pPr>
-            <a:r>
-              <a:rPr b="1"/>
-              <a:t>From Robustness lecture:</a:t>
-            </a:r>
-          </a:p>
-          <a:p>
-            <a:pPr lvl="0"/>
-            <a:r>
-              <a:rPr/>
-              <a:t>Definition: “insensitivity of system design to errors” (Matalas)</a:t>
-            </a:r>
-          </a:p>
-          <a:p>
-            <a:pPr lvl="0"/>
-            <a:r>
-              <a:rPr/>
-              <a:t>Robustness metrics taxonomy (Herman et al.)</a:t>
-            </a:r>
-          </a:p>
-          <a:p>
-            <a:pPr lvl="0"/>
-            <a:r>
-              <a:rPr/>
-              <a:t>Regret and satisficing approaches</a:t>
-            </a:r>
-          </a:p>
-          <a:p>
-            <a:pPr lvl="0"/>
-            <a:r>
-              <a:rPr/>
-              <a:t>Bottom-up vs. top-down analysis</a:t>
-            </a:r>
-          </a:p>
-          <a:p>
-            <a:pPr lvl="0" indent="0" marL="0">
-              <a:buNone/>
-            </a:pPr>
-            <a:r>
-              <a:rPr b="1"/>
-              <a:t>From Deep Uncertainty lecture:</a:t>
-            </a:r>
-          </a:p>
-          <a:p>
-            <a:pPr lvl="0"/>
-            <a:r>
-              <a:rPr/>
-              <a:t>Spectrum of uncertainty</a:t>
-            </a:r>
-          </a:p>
-          <a:p>
-            <a:pPr lvl="0"/>
-            <a:r>
-              <a:rPr/>
-              <a:t>Lempert-Schneider debate</a:t>
-            </a:r>
-          </a:p>
-          <a:p>
-            <a:pPr lvl="0"/>
-            <a:r>
-              <a:rPr/>
-              <a:t>When probabilities help vs. exploratory approaches</a:t>
             </a:r>
           </a:p>
         </p:txBody>

--- a/lectures/week-10/index.pptx
+++ b/lectures/week-10/index.pptx
@@ -4,11 +4,21 @@
   <p:sldMasterIdLst>
     <p:sldMasterId id="2147483648" r:id="rId1"/>
   </p:sldMasterIdLst>
+  <p:notesMasterIdLst>
+    <p:notesMasterId r:id="rId13"/>
+  </p:notesMasterIdLst>
   <p:sldIdLst>
     <p:sldId id="256" r:id="rId2"/>
     <p:sldId id="257" r:id="rId3"/>
     <p:sldId id="258" r:id="rId4"/>
     <p:sldId id="259" r:id="rId5"/>
+    <p:sldId id="260" r:id="rId6"/>
+    <p:sldId id="261" r:id="rId7"/>
+    <p:sldId id="262" r:id="rId8"/>
+    <p:sldId id="263" r:id="rId9"/>
+    <p:sldId id="264" r:id="rId10"/>
+    <p:sldId id="265" r:id="rId11"/>
+    <p:sldId id="266" r:id="rId12"/>
   </p:sldIdLst>
   <p:sldSz cx="9144000" cy="5143500" type="screen16x9"/>
   <p:notesSz cx="6858000" cy="9144000"/>
@@ -124,6 +134,1345 @@
     </p:ext>
   </p:extLst>
 </p:presentation>
+</file>
+
+<file path=ppt/notesMasters/notesMaster1.xml><?xml version="1.0" encoding="utf-8"?>
+<p:notesMaster xmlns:a="http://schemas.openxmlformats.org/drawingml/2006/main" xmlns:r="http://schemas.openxmlformats.org/officeDocument/2006/relationships" xmlns:p="http://schemas.openxmlformats.org/presentationml/2006/main">
+  <p:cSld>
+    <p:bg>
+      <p:bgRef idx="1001">
+        <a:schemeClr val="bg1"/>
+      </p:bgRef>
+    </p:bg>
+    <p:spTree>
+      <p:nvGrpSpPr>
+        <p:cNvPr id="1" name=""/>
+        <p:cNvGrpSpPr/>
+        <p:nvPr/>
+      </p:nvGrpSpPr>
+      <p:grpSpPr>
+        <a:xfrm>
+          <a:off x="0" y="0"/>
+          <a:ext cx="0" cy="0"/>
+          <a:chOff x="0" y="0"/>
+          <a:chExt cx="0" cy="0"/>
+        </a:xfrm>
+      </p:grpSpPr>
+      <p:sp>
+        <p:nvSpPr>
+          <p:cNvPr id="2" name="Header Placeholder 1"/>
+          <p:cNvSpPr>
+            <a:spLocks noGrp="1"/>
+          </p:cNvSpPr>
+          <p:nvPr>
+            <p:ph type="hdr" sz="quarter"/>
+          </p:nvPr>
+        </p:nvSpPr>
+        <p:spPr>
+          <a:xfrm>
+            <a:off x="0" y="0"/>
+            <a:ext cx="2971800" cy="458788"/>
+          </a:xfrm>
+          <a:prstGeom prst="rect">
+            <a:avLst/>
+          </a:prstGeom>
+        </p:spPr>
+        <p:txBody>
+          <a:bodyPr vert="horz" lIns="91440" tIns="45720" rIns="91440" bIns="45720" rtlCol="0"/>
+          <a:lstStyle>
+            <a:lvl1pPr algn="l">
+              <a:defRPr sz="1200"/>
+            </a:lvl1pPr>
+          </a:lstStyle>
+          <a:p>
+            <a:endParaRPr lang="en-US"/>
+          </a:p>
+        </p:txBody>
+      </p:sp>
+      <p:sp>
+        <p:nvSpPr>
+          <p:cNvPr id="3" name="Date Placeholder 2"/>
+          <p:cNvSpPr>
+            <a:spLocks noGrp="1"/>
+          </p:cNvSpPr>
+          <p:nvPr>
+            <p:ph type="dt" idx="1"/>
+          </p:nvPr>
+        </p:nvSpPr>
+        <p:spPr>
+          <a:xfrm>
+            <a:off x="3884613" y="0"/>
+            <a:ext cx="2971800" cy="458788"/>
+          </a:xfrm>
+          <a:prstGeom prst="rect">
+            <a:avLst/>
+          </a:prstGeom>
+        </p:spPr>
+        <p:txBody>
+          <a:bodyPr vert="horz" lIns="91440" tIns="45720" rIns="91440" bIns="45720" rtlCol="0"/>
+          <a:lstStyle>
+            <a:lvl1pPr algn="r">
+              <a:defRPr sz="1200"/>
+            </a:lvl1pPr>
+          </a:lstStyle>
+          <a:p>
+            <a:fld id="{0F9C1CCF-B725-44A7-AA57-5E433BD85C9F}" type="datetimeFigureOut">
+              <a:rPr lang="en-US" smtClean="0"/>
+              <a:t>1/2/22</a:t>
+            </a:fld>
+            <a:endParaRPr lang="en-US"/>
+          </a:p>
+        </p:txBody>
+      </p:sp>
+      <p:sp>
+        <p:nvSpPr>
+          <p:cNvPr id="4" name="Slide Image Placeholder 3"/>
+          <p:cNvSpPr>
+            <a:spLocks noGrp="1" noRot="1" noChangeAspect="1"/>
+          </p:cNvSpPr>
+          <p:nvPr>
+            <p:ph type="sldImg" idx="2"/>
+          </p:nvPr>
+        </p:nvSpPr>
+        <p:spPr>
+          <a:xfrm>
+            <a:off x="685800" y="1143000"/>
+            <a:ext cx="5486400" cy="3086100"/>
+          </a:xfrm>
+          <a:prstGeom prst="rect">
+            <a:avLst/>
+          </a:prstGeom>
+          <a:noFill/>
+          <a:ln w="12700">
+            <a:solidFill>
+              <a:prstClr val="black"/>
+            </a:solidFill>
+          </a:ln>
+        </p:spPr>
+        <p:txBody>
+          <a:bodyPr vert="horz" lIns="91440" tIns="45720" rIns="91440" bIns="45720" rtlCol="0" anchor="ctr"/>
+          <a:lstStyle/>
+          <a:p>
+            <a:endParaRPr lang="en-US"/>
+          </a:p>
+        </p:txBody>
+      </p:sp>
+      <p:sp>
+        <p:nvSpPr>
+          <p:cNvPr id="5" name="Notes Placeholder 4"/>
+          <p:cNvSpPr>
+            <a:spLocks noGrp="1"/>
+          </p:cNvSpPr>
+          <p:nvPr>
+            <p:ph type="body" sz="quarter" idx="3"/>
+          </p:nvPr>
+        </p:nvSpPr>
+        <p:spPr>
+          <a:xfrm>
+            <a:off x="685800" y="4400550"/>
+            <a:ext cx="5486400" cy="3600450"/>
+          </a:xfrm>
+          <a:prstGeom prst="rect">
+            <a:avLst/>
+          </a:prstGeom>
+        </p:spPr>
+        <p:txBody>
+          <a:bodyPr vert="horz" lIns="91440" tIns="45720" rIns="91440" bIns="45720" rtlCol="0"/>
+          <a:lstStyle/>
+          <a:p>
+            <a:pPr lvl="0"/>
+            <a:r>
+              <a:rPr lang="en-US"/>
+              <a:t>Click to edit Master text styles</a:t>
+            </a:r>
+          </a:p>
+          <a:p>
+            <a:pPr lvl="1"/>
+            <a:r>
+              <a:rPr lang="en-US"/>
+              <a:t>Second level</a:t>
+            </a:r>
+          </a:p>
+          <a:p>
+            <a:pPr lvl="2"/>
+            <a:r>
+              <a:rPr lang="en-US"/>
+              <a:t>Third level</a:t>
+            </a:r>
+          </a:p>
+          <a:p>
+            <a:pPr lvl="3"/>
+            <a:r>
+              <a:rPr lang="en-US"/>
+              <a:t>Fourth level</a:t>
+            </a:r>
+          </a:p>
+          <a:p>
+            <a:pPr lvl="4"/>
+            <a:r>
+              <a:rPr lang="en-US"/>
+              <a:t>Fifth level</a:t>
+            </a:r>
+          </a:p>
+        </p:txBody>
+      </p:sp>
+      <p:sp>
+        <p:nvSpPr>
+          <p:cNvPr id="6" name="Footer Placeholder 5"/>
+          <p:cNvSpPr>
+            <a:spLocks noGrp="1"/>
+          </p:cNvSpPr>
+          <p:nvPr>
+            <p:ph type="ftr" sz="quarter" idx="4"/>
+          </p:nvPr>
+        </p:nvSpPr>
+        <p:spPr>
+          <a:xfrm>
+            <a:off x="0" y="8685213"/>
+            <a:ext cx="2971800" cy="458787"/>
+          </a:xfrm>
+          <a:prstGeom prst="rect">
+            <a:avLst/>
+          </a:prstGeom>
+        </p:spPr>
+        <p:txBody>
+          <a:bodyPr vert="horz" lIns="91440" tIns="45720" rIns="91440" bIns="45720" rtlCol="0" anchor="b"/>
+          <a:lstStyle>
+            <a:lvl1pPr algn="l">
+              <a:defRPr sz="1200"/>
+            </a:lvl1pPr>
+          </a:lstStyle>
+          <a:p>
+            <a:endParaRPr lang="en-US"/>
+          </a:p>
+        </p:txBody>
+      </p:sp>
+      <p:sp>
+        <p:nvSpPr>
+          <p:cNvPr id="7" name="Slide Number Placeholder 6"/>
+          <p:cNvSpPr>
+            <a:spLocks noGrp="1"/>
+          </p:cNvSpPr>
+          <p:nvPr>
+            <p:ph type="sldNum" sz="quarter" idx="5"/>
+          </p:nvPr>
+        </p:nvSpPr>
+        <p:spPr>
+          <a:xfrm>
+            <a:off x="3884613" y="8685213"/>
+            <a:ext cx="2971800" cy="458787"/>
+          </a:xfrm>
+          <a:prstGeom prst="rect">
+            <a:avLst/>
+          </a:prstGeom>
+        </p:spPr>
+        <p:txBody>
+          <a:bodyPr vert="horz" lIns="91440" tIns="45720" rIns="91440" bIns="45720" rtlCol="0" anchor="b"/>
+          <a:lstStyle>
+            <a:lvl1pPr algn="r">
+              <a:defRPr sz="1200"/>
+            </a:lvl1pPr>
+          </a:lstStyle>
+          <a:p>
+            <a:fld id="{18BDFEC3-8487-43E8-A154-7C12CBC1FFF2}" type="slidenum">
+              <a:rPr lang="en-US" smtClean="0"/>
+              <a:t>‹#›</a:t>
+            </a:fld>
+            <a:endParaRPr lang="en-US"/>
+          </a:p>
+        </p:txBody>
+      </p:sp>
+    </p:spTree>
+    <p:extLst>
+      <p:ext uri="{BB962C8B-B14F-4D97-AF65-F5344CB8AC3E}">
+        <p14:creationId xmlns:p14="http://schemas.microsoft.com/office/powerpoint/2010/main" val="3782709779"/>
+      </p:ext>
+    </p:extLst>
+  </p:cSld>
+  <p:clrMap bg1="lt1" tx1="dk1" bg2="lt2" tx2="dk2" accent1="accent1" accent2="accent2" accent3="accent3" accent4="accent4" accent5="accent5" accent6="accent6" hlink="hlink" folHlink="folHlink"/>
+  <p:notesStyle>
+    <a:lvl1pPr marL="0" algn="l" defTabSz="914400" rtl="0" eaLnBrk="1" latinLnBrk="0" hangingPunct="1">
+      <a:defRPr sz="1200" kern="1200">
+        <a:solidFill>
+          <a:schemeClr val="tx1"/>
+        </a:solidFill>
+        <a:latin typeface="+mn-lt"/>
+        <a:ea typeface="+mn-ea"/>
+        <a:cs typeface="+mn-cs"/>
+      </a:defRPr>
+    </a:lvl1pPr>
+    <a:lvl2pPr marL="457200" algn="l" defTabSz="914400" rtl="0" eaLnBrk="1" latinLnBrk="0" hangingPunct="1">
+      <a:defRPr sz="1200" kern="1200">
+        <a:solidFill>
+          <a:schemeClr val="tx1"/>
+        </a:solidFill>
+        <a:latin typeface="+mn-lt"/>
+        <a:ea typeface="+mn-ea"/>
+        <a:cs typeface="+mn-cs"/>
+      </a:defRPr>
+    </a:lvl2pPr>
+    <a:lvl3pPr marL="914400" algn="l" defTabSz="914400" rtl="0" eaLnBrk="1" latinLnBrk="0" hangingPunct="1">
+      <a:defRPr sz="1200" kern="1200">
+        <a:solidFill>
+          <a:schemeClr val="tx1"/>
+        </a:solidFill>
+        <a:latin typeface="+mn-lt"/>
+        <a:ea typeface="+mn-ea"/>
+        <a:cs typeface="+mn-cs"/>
+      </a:defRPr>
+    </a:lvl3pPr>
+    <a:lvl4pPr marL="1371600" algn="l" defTabSz="914400" rtl="0" eaLnBrk="1" latinLnBrk="0" hangingPunct="1">
+      <a:defRPr sz="1200" kern="1200">
+        <a:solidFill>
+          <a:schemeClr val="tx1"/>
+        </a:solidFill>
+        <a:latin typeface="+mn-lt"/>
+        <a:ea typeface="+mn-ea"/>
+        <a:cs typeface="+mn-cs"/>
+      </a:defRPr>
+    </a:lvl4pPr>
+    <a:lvl5pPr marL="1828800" algn="l" defTabSz="914400" rtl="0" eaLnBrk="1" latinLnBrk="0" hangingPunct="1">
+      <a:defRPr sz="1200" kern="1200">
+        <a:solidFill>
+          <a:schemeClr val="tx1"/>
+        </a:solidFill>
+        <a:latin typeface="+mn-lt"/>
+        <a:ea typeface="+mn-ea"/>
+        <a:cs typeface="+mn-cs"/>
+      </a:defRPr>
+    </a:lvl5pPr>
+    <a:lvl6pPr marL="2286000" algn="l" defTabSz="914400" rtl="0" eaLnBrk="1" latinLnBrk="0" hangingPunct="1">
+      <a:defRPr sz="1200" kern="1200">
+        <a:solidFill>
+          <a:schemeClr val="tx1"/>
+        </a:solidFill>
+        <a:latin typeface="+mn-lt"/>
+        <a:ea typeface="+mn-ea"/>
+        <a:cs typeface="+mn-cs"/>
+      </a:defRPr>
+    </a:lvl6pPr>
+    <a:lvl7pPr marL="2743200" algn="l" defTabSz="914400" rtl="0" eaLnBrk="1" latinLnBrk="0" hangingPunct="1">
+      <a:defRPr sz="1200" kern="1200">
+        <a:solidFill>
+          <a:schemeClr val="tx1"/>
+        </a:solidFill>
+        <a:latin typeface="+mn-lt"/>
+        <a:ea typeface="+mn-ea"/>
+        <a:cs typeface="+mn-cs"/>
+      </a:defRPr>
+    </a:lvl7pPr>
+    <a:lvl8pPr marL="3200400" algn="l" defTabSz="914400" rtl="0" eaLnBrk="1" latinLnBrk="0" hangingPunct="1">
+      <a:defRPr sz="1200" kern="1200">
+        <a:solidFill>
+          <a:schemeClr val="tx1"/>
+        </a:solidFill>
+        <a:latin typeface="+mn-lt"/>
+        <a:ea typeface="+mn-ea"/>
+        <a:cs typeface="+mn-cs"/>
+      </a:defRPr>
+    </a:lvl8pPr>
+    <a:lvl9pPr marL="3657600" algn="l" defTabSz="914400" rtl="0" eaLnBrk="1" latinLnBrk="0" hangingPunct="1">
+      <a:defRPr sz="1200" kern="1200">
+        <a:solidFill>
+          <a:schemeClr val="tx1"/>
+        </a:solidFill>
+        <a:latin typeface="+mn-lt"/>
+        <a:ea typeface="+mn-ea"/>
+        <a:cs typeface="+mn-cs"/>
+      </a:defRPr>
+    </a:lvl9pPr>
+  </p:notesStyle>
+</p:notesMaster>
+</file>
+
+<file path=ppt/notesSlides/notesSlide1.xml><?xml version="1.0" encoding="utf-8"?>
+<p:notes xmlns:a="http://schemas.openxmlformats.org/drawingml/2006/main" xmlns:r="http://schemas.openxmlformats.org/officeDocument/2006/relationships" xmlns:p="http://schemas.openxmlformats.org/presentationml/2006/main">
+  <p:cSld>
+    <p:spTree>
+      <p:nvGrpSpPr>
+        <p:cNvPr id="1" name=""/>
+        <p:cNvGrpSpPr/>
+        <p:nvPr/>
+      </p:nvGrpSpPr>
+      <p:grpSpPr>
+        <a:xfrm>
+          <a:off x="0" y="0"/>
+          <a:ext cx="0" cy="0"/>
+          <a:chOff x="0" y="0"/>
+          <a:chExt cx="0" cy="0"/>
+        </a:xfrm>
+      </p:grpSpPr>
+      <p:sp>
+        <p:nvSpPr>
+          <p:cNvPr id="2" name="Slide Image Placeholder 1"/>
+          <p:cNvSpPr>
+            <a:spLocks noGrp="1" noRot="1" noChangeAspect="1"/>
+          </p:cNvSpPr>
+          <p:nvPr>
+            <p:ph type="sldImg"/>
+          </p:nvPr>
+        </p:nvSpPr>
+        <p:spPr/>
+      </p:sp>
+      <p:sp>
+        <p:nvSpPr>
+          <p:cNvPr id="3" name="Notes Placeholder 2"/>
+          <p:cNvSpPr>
+            <a:spLocks noGrp="1"/>
+          </p:cNvSpPr>
+          <p:nvPr>
+            <p:ph type="body" idx="1"/>
+          </p:nvPr>
+        </p:nvSpPr>
+        <p:spPr/>
+        <p:txBody>
+          <a:bodyPr/>
+          <a:lstStyle/>
+          <a:p>
+            <a:pPr lvl="0" indent="0" marL="0">
+              <a:buNone/>
+            </a:pPr>
+            <a:r>
+              <a:rPr/>
+              <a:t>Target: 1:03. “What drives failure?” is fundamentally different from “what’s the best policy?” — it doesn’t require aggregating over scenarios.</a:t>
+            </a:r>
+          </a:p>
+          <a:p>
+            <a:pPr lvl="0" indent="0" marL="0">
+              <a:buNone/>
+            </a:pPr>
+          </a:p>
+          <a:p>
+            <a:pPr lvl="0" indent="0" marL="0">
+              <a:buNone/>
+            </a:pPr>
+            <a:r>
+              <a:rPr/>
+              <a:t>Target: 1:06. Parametric = what we’ve been sampling (MC, GSA). Structural = harder, requires multi-model ensembles. When both are large → deep uncertainty → need exploratory modeling.</a:t>
+            </a:r>
+          </a:p>
+          <a:p>
+            <a:pPr lvl="0" indent="0" marL="0">
+              <a:buNone/>
+            </a:pPr>
+          </a:p>
+          <a:p>
+            <a:pPr lvl="0" indent="0" marL="0">
+              <a:buNone/>
+            </a:pPr>
+            <a:r>
+              <a:rPr/>
+              <a:t>Target: 1:08.</a:t>
+            </a:r>
+          </a:p>
+        </p:txBody>
+      </p:sp>
+      <p:sp>
+        <p:nvSpPr>
+          <p:cNvPr id="4" name="Slide Number Placeholder 3"/>
+          <p:cNvSpPr>
+            <a:spLocks noGrp="1"/>
+          </p:cNvSpPr>
+          <p:nvPr>
+            <p:ph type="sldNum" sz="quarter" idx="10"/>
+          </p:nvPr>
+        </p:nvSpPr>
+        <p:spPr/>
+        <p:txBody>
+          <a:bodyPr/>
+          <a:lstStyle/>
+          <a:p>
+            <a:fld id="{18BDFEC3-8487-43E8-A154-7C12CBC1FFF2}" type="slidenum">
+              <a:rPr lang="en-US"/>
+              <a:t>2</a:t>
+            </a:fld>
+            <a:endParaRPr lang="en-US"/>
+          </a:p>
+        </p:txBody>
+      </p:sp>
+    </p:spTree>
+  </p:cSld>
+</p:notes>
+</file>
+
+<file path=ppt/notesSlides/notesSlide2.xml><?xml version="1.0" encoding="utf-8"?>
+<p:notes xmlns:a="http://schemas.openxmlformats.org/drawingml/2006/main" xmlns:r="http://schemas.openxmlformats.org/officeDocument/2006/relationships" xmlns:p="http://schemas.openxmlformats.org/presentationml/2006/main">
+  <p:cSld>
+    <p:spTree>
+      <p:nvGrpSpPr>
+        <p:cNvPr id="1" name=""/>
+        <p:cNvGrpSpPr/>
+        <p:nvPr/>
+      </p:nvGrpSpPr>
+      <p:grpSpPr>
+        <a:xfrm>
+          <a:off x="0" y="0"/>
+          <a:ext cx="0" cy="0"/>
+          <a:chOff x="0" y="0"/>
+          <a:chExt cx="0" cy="0"/>
+        </a:xfrm>
+      </p:grpSpPr>
+      <p:sp>
+        <p:nvSpPr>
+          <p:cNvPr id="2" name="Slide Image Placeholder 1"/>
+          <p:cNvSpPr>
+            <a:spLocks noGrp="1" noRot="1" noChangeAspect="1"/>
+          </p:cNvSpPr>
+          <p:nvPr>
+            <p:ph type="sldImg"/>
+          </p:nvPr>
+        </p:nvSpPr>
+        <p:spPr/>
+      </p:sp>
+      <p:sp>
+        <p:nvSpPr>
+          <p:cNvPr id="3" name="Notes Placeholder 2"/>
+          <p:cNvSpPr>
+            <a:spLocks noGrp="1"/>
+          </p:cNvSpPr>
+          <p:nvPr>
+            <p:ph type="body" idx="1"/>
+          </p:nvPr>
+        </p:nvSpPr>
+        <p:spPr/>
+        <p:txBody>
+          <a:bodyPr/>
+          <a:lstStyle/>
+          <a:p>
+            <a:pPr lvl="0" indent="0" marL="0">
+              <a:buNone/>
+            </a:pPr>
+            <a:r>
+              <a:rPr/>
+              <a:t>Target: 1:08.</a:t>
+            </a:r>
+          </a:p>
+        </p:txBody>
+      </p:sp>
+      <p:sp>
+        <p:nvSpPr>
+          <p:cNvPr id="4" name="Slide Number Placeholder 3"/>
+          <p:cNvSpPr>
+            <a:spLocks noGrp="1"/>
+          </p:cNvSpPr>
+          <p:nvPr>
+            <p:ph type="sldNum" sz="quarter" idx="10"/>
+          </p:nvPr>
+        </p:nvSpPr>
+        <p:spPr/>
+        <p:txBody>
+          <a:bodyPr/>
+          <a:lstStyle/>
+          <a:p>
+            <a:fld id="{18BDFEC3-8487-43E8-A154-7C12CBC1FFF2}" type="slidenum">
+              <a:rPr lang="en-US"/>
+              <a:t>3</a:t>
+            </a:fld>
+            <a:endParaRPr lang="en-US"/>
+          </a:p>
+        </p:txBody>
+      </p:sp>
+    </p:spTree>
+  </p:cSld>
+</p:notes>
+</file>
+
+<file path=ppt/notesSlides/notesSlide3.xml><?xml version="1.0" encoding="utf-8"?>
+<p:notes xmlns:a="http://schemas.openxmlformats.org/drawingml/2006/main" xmlns:r="http://schemas.openxmlformats.org/officeDocument/2006/relationships" xmlns:p="http://schemas.openxmlformats.org/presentationml/2006/main">
+  <p:cSld>
+    <p:spTree>
+      <p:nvGrpSpPr>
+        <p:cNvPr id="1" name=""/>
+        <p:cNvGrpSpPr/>
+        <p:nvPr/>
+      </p:nvGrpSpPr>
+      <p:grpSpPr>
+        <a:xfrm>
+          <a:off x="0" y="0"/>
+          <a:ext cx="0" cy="0"/>
+          <a:chOff x="0" y="0"/>
+          <a:chExt cx="0" cy="0"/>
+        </a:xfrm>
+      </p:grpSpPr>
+      <p:sp>
+        <p:nvSpPr>
+          <p:cNvPr id="2" name="Slide Image Placeholder 1"/>
+          <p:cNvSpPr>
+            <a:spLocks noGrp="1" noRot="1" noChangeAspect="1"/>
+          </p:cNvSpPr>
+          <p:nvPr>
+            <p:ph type="sldImg"/>
+          </p:nvPr>
+        </p:nvSpPr>
+        <p:spPr/>
+      </p:sp>
+      <p:sp>
+        <p:nvSpPr>
+          <p:cNvPr id="3" name="Notes Placeholder 2"/>
+          <p:cNvSpPr>
+            <a:spLocks noGrp="1"/>
+          </p:cNvSpPr>
+          <p:nvPr>
+            <p:ph type="body" idx="1"/>
+          </p:nvPr>
+        </p:nvSpPr>
+        <p:spPr/>
+        <p:txBody>
+          <a:bodyPr/>
+          <a:lstStyle/>
+          <a:p>
+            <a:pPr lvl="0" indent="0" marL="0">
+              <a:buNone/>
+            </a:pPr>
+            <a:r>
+              <a:rPr/>
+              <a:t>Target: 1:14. Key pushback response: “Can you validate a 2100 SLR projection? No. So what do we do with those models?” Not admitting defeat — using computation for what it’s good at: exploring a large space systematically.</a:t>
+            </a:r>
+          </a:p>
+          <a:p>
+            <a:pPr lvl="0" indent="0" marL="0">
+              <a:buNone/>
+            </a:pPr>
+          </a:p>
+          <a:p>
+            <a:pPr lvl="0" indent="0" marL="0">
+              <a:buNone/>
+            </a:pPr>
+            <a:r>
+              <a:rPr/>
+              <a:t>Target: 1:17. 60s think, 30s pair, cold-call 2-3. Consolidative: weather (&lt; 10 days), bridge loads, orbits. Exploratory: 50-year flood risk, pandemic policy, energy transitions. Distinguishing factor: can you validate on the relevant timescale?</a:t>
+            </a:r>
+          </a:p>
+          <a:p>
+            <a:pPr lvl="0" indent="0" marL="0">
+              <a:buNone/>
+            </a:pPr>
+          </a:p>
+          <a:p>
+            <a:pPr lvl="0" indent="0" marL="0">
+              <a:buNone/>
+            </a:pPr>
+            <a:r>
+              <a:rPr/>
+              <a:t>Target: 1:19. Key distinction from standard MC: exploratory modeling varies X and L simultaneously — “what happens under different policies AND different futures?”</a:t>
+            </a:r>
+          </a:p>
+        </p:txBody>
+      </p:sp>
+      <p:sp>
+        <p:nvSpPr>
+          <p:cNvPr id="4" name="Slide Number Placeholder 3"/>
+          <p:cNvSpPr>
+            <a:spLocks noGrp="1"/>
+          </p:cNvSpPr>
+          <p:nvPr>
+            <p:ph type="sldNum" sz="quarter" idx="10"/>
+          </p:nvPr>
+        </p:nvSpPr>
+        <p:spPr/>
+        <p:txBody>
+          <a:bodyPr/>
+          <a:lstStyle/>
+          <a:p>
+            <a:fld id="{18BDFEC3-8487-43E8-A154-7C12CBC1FFF2}" type="slidenum">
+              <a:rPr lang="en-US"/>
+              <a:t>5</a:t>
+            </a:fld>
+            <a:endParaRPr lang="en-US"/>
+          </a:p>
+        </p:txBody>
+      </p:sp>
+    </p:spTree>
+  </p:cSld>
+</p:notes>
+</file>
+
+<file path=ppt/notesSlides/notesSlide4.xml><?xml version="1.0" encoding="utf-8"?>
+<p:notes xmlns:a="http://schemas.openxmlformats.org/drawingml/2006/main" xmlns:r="http://schemas.openxmlformats.org/officeDocument/2006/relationships" xmlns:p="http://schemas.openxmlformats.org/presentationml/2006/main">
+  <p:cSld>
+    <p:spTree>
+      <p:nvGrpSpPr>
+        <p:cNvPr id="1" name=""/>
+        <p:cNvGrpSpPr/>
+        <p:nvPr/>
+      </p:nvGrpSpPr>
+      <p:grpSpPr>
+        <a:xfrm>
+          <a:off x="0" y="0"/>
+          <a:ext cx="0" cy="0"/>
+          <a:chOff x="0" y="0"/>
+          <a:chExt cx="0" cy="0"/>
+        </a:xfrm>
+      </p:grpSpPr>
+      <p:sp>
+        <p:nvSpPr>
+          <p:cNvPr id="2" name="Slide Image Placeholder 1"/>
+          <p:cNvSpPr>
+            <a:spLocks noGrp="1" noRot="1" noChangeAspect="1"/>
+          </p:cNvSpPr>
+          <p:nvPr>
+            <p:ph type="sldImg"/>
+          </p:nvPr>
+        </p:nvSpPr>
+        <p:spPr/>
+      </p:sp>
+      <p:sp>
+        <p:nvSpPr>
+          <p:cNvPr id="3" name="Notes Placeholder 2"/>
+          <p:cNvSpPr>
+            <a:spLocks noGrp="1"/>
+          </p:cNvSpPr>
+          <p:nvPr>
+            <p:ph type="body" idx="1"/>
+          </p:nvPr>
+        </p:nvSpPr>
+        <p:spPr/>
+        <p:txBody>
+          <a:bodyPr/>
+          <a:lstStyle/>
+          <a:p>
+            <a:pPr lvl="0" indent="0" marL="0">
+              <a:buNone/>
+            </a:pPr>
+            <a:r>
+              <a:rPr/>
+              <a:t>Target: 1:20.</a:t>
+            </a:r>
+          </a:p>
+          <a:p>
+            <a:pPr lvl="0" indent="0" marL="0">
+              <a:buNone/>
+            </a:pPr>
+          </a:p>
+          <a:p>
+            <a:pPr lvl="0" indent="0" marL="0">
+              <a:buNone/>
+            </a:pPr>
+            <a:r>
+              <a:rPr/>
+              <a:t>Target: 1:23. Step 3 is a value judgment — the failure threshold is the analyst’s choice. Lab 8 implements all five steps. Multi-policy example: Lamontagne et al. vary the policy lever alongside uncertainties.</a:t>
+            </a:r>
+          </a:p>
+        </p:txBody>
+      </p:sp>
+      <p:sp>
+        <p:nvSpPr>
+          <p:cNvPr id="4" name="Slide Number Placeholder 3"/>
+          <p:cNvSpPr>
+            <a:spLocks noGrp="1"/>
+          </p:cNvSpPr>
+          <p:nvPr>
+            <p:ph type="sldNum" sz="quarter" idx="10"/>
+          </p:nvPr>
+        </p:nvSpPr>
+        <p:spPr/>
+        <p:txBody>
+          <a:bodyPr/>
+          <a:lstStyle/>
+          <a:p>
+            <a:fld id="{18BDFEC3-8487-43E8-A154-7C12CBC1FFF2}" type="slidenum">
+              <a:rPr lang="en-US"/>
+              <a:t>6</a:t>
+            </a:fld>
+            <a:endParaRPr lang="en-US"/>
+          </a:p>
+        </p:txBody>
+      </p:sp>
+    </p:spTree>
+  </p:cSld>
+</p:notes>
+</file>
+
+<file path=ppt/notesSlides/notesSlide5.xml><?xml version="1.0" encoding="utf-8"?>
+<p:notes xmlns:a="http://schemas.openxmlformats.org/drawingml/2006/main" xmlns:r="http://schemas.openxmlformats.org/officeDocument/2006/relationships" xmlns:p="http://schemas.openxmlformats.org/presentationml/2006/main">
+  <p:cSld>
+    <p:spTree>
+      <p:nvGrpSpPr>
+        <p:cNvPr id="1" name=""/>
+        <p:cNvGrpSpPr/>
+        <p:nvPr/>
+      </p:nvGrpSpPr>
+      <p:grpSpPr>
+        <a:xfrm>
+          <a:off x="0" y="0"/>
+          <a:ext cx="0" cy="0"/>
+          <a:chOff x="0" y="0"/>
+          <a:chExt cx="0" cy="0"/>
+        </a:xfrm>
+      </p:grpSpPr>
+      <p:sp>
+        <p:nvSpPr>
+          <p:cNvPr id="2" name="Slide Image Placeholder 1"/>
+          <p:cNvSpPr>
+            <a:spLocks noGrp="1" noRot="1" noChangeAspect="1"/>
+          </p:cNvSpPr>
+          <p:nvPr>
+            <p:ph type="sldImg"/>
+          </p:nvPr>
+        </p:nvSpPr>
+        <p:spPr/>
+      </p:sp>
+      <p:sp>
+        <p:nvSpPr>
+          <p:cNvPr id="3" name="Notes Placeholder 2"/>
+          <p:cNvSpPr>
+            <a:spLocks noGrp="1"/>
+          </p:cNvSpPr>
+          <p:nvPr>
+            <p:ph type="body" idx="1"/>
+          </p:nvPr>
+        </p:nvSpPr>
+        <p:spPr/>
+        <p:txBody>
+          <a:bodyPr/>
+          <a:lstStyle/>
+          <a:p>
+            <a:pPr lvl="0" indent="0" marL="0">
+              <a:buNone/>
+            </a:pPr>
+            <a:r>
+              <a:rPr/>
+              <a:t>Target: 1:25. Lab 8 uses PRIM. Today: logistic regression via Lamontagne, then PRIM.</a:t>
+            </a:r>
+          </a:p>
+          <a:p>
+            <a:pPr lvl="0" indent="0" marL="0">
+              <a:buNone/>
+            </a:pPr>
+          </a:p>
+          <a:p>
+            <a:pPr lvl="0" indent="0" marL="0">
+              <a:buNone/>
+            </a:pPr>
+            <a:r>
+              <a:rPr/>
+              <a:t>Target: 1:28. Greedy algorithm — locally optimal splits, not globally optimal. This is why trees can be unstable. Gini penalizes impurity quadratically: 50/50 is much worse than 70/30, driving the algorithm to find the most informative splits first.</a:t>
+            </a:r>
+          </a:p>
+          <a:p>
+            <a:pPr lvl="0" indent="0" marL="0">
+              <a:buNone/>
+            </a:pPr>
+          </a:p>
+          <a:p>
+            <a:pPr lvl="0" indent="0" marL="0">
+              <a:buNone/>
+            </a:pPr>
+            <a:r>
+              <a:rPr/>
+              <a:t>Target: 1:31. 30s think, then 2-3 responses. Key answer: communicability. “Fails when SLR &gt; X and discount rate &lt; Y” can go in a report. A forest gives a probability but no simple explanation.</a:t>
+            </a:r>
+          </a:p>
+        </p:txBody>
+      </p:sp>
+      <p:sp>
+        <p:nvSpPr>
+          <p:cNvPr id="4" name="Slide Number Placeholder 3"/>
+          <p:cNvSpPr>
+            <a:spLocks noGrp="1"/>
+          </p:cNvSpPr>
+          <p:nvPr>
+            <p:ph type="sldNum" sz="quarter" idx="10"/>
+          </p:nvPr>
+        </p:nvSpPr>
+        <p:spPr/>
+        <p:txBody>
+          <a:bodyPr/>
+          <a:lstStyle/>
+          <a:p>
+            <a:fld id="{18BDFEC3-8487-43E8-A154-7C12CBC1FFF2}" type="slidenum">
+              <a:rPr lang="en-US"/>
+              <a:t>7</a:t>
+            </a:fld>
+            <a:endParaRPr lang="en-US"/>
+          </a:p>
+        </p:txBody>
+      </p:sp>
+    </p:spTree>
+  </p:cSld>
+</p:notes>
+</file>
+
+<file path=ppt/notesSlides/notesSlide6.xml><?xml version="1.0" encoding="utf-8"?>
+<p:notes xmlns:a="http://schemas.openxmlformats.org/drawingml/2006/main" xmlns:r="http://schemas.openxmlformats.org/officeDocument/2006/relationships" xmlns:p="http://schemas.openxmlformats.org/presentationml/2006/main">
+  <p:cSld>
+    <p:spTree>
+      <p:nvGrpSpPr>
+        <p:cNvPr id="1" name=""/>
+        <p:cNvGrpSpPr/>
+        <p:nvPr/>
+      </p:nvGrpSpPr>
+      <p:grpSpPr>
+        <a:xfrm>
+          <a:off x="0" y="0"/>
+          <a:ext cx="0" cy="0"/>
+          <a:chOff x="0" y="0"/>
+          <a:chExt cx="0" cy="0"/>
+        </a:xfrm>
+      </p:grpSpPr>
+      <p:sp>
+        <p:nvSpPr>
+          <p:cNvPr id="2" name="Slide Image Placeholder 1"/>
+          <p:cNvSpPr>
+            <a:spLocks noGrp="1" noRot="1" noChangeAspect="1"/>
+          </p:cNvSpPr>
+          <p:nvPr>
+            <p:ph type="sldImg"/>
+          </p:nvPr>
+        </p:nvSpPr>
+        <p:spPr/>
+      </p:sp>
+      <p:sp>
+        <p:nvSpPr>
+          <p:cNvPr id="3" name="Notes Placeholder 2"/>
+          <p:cNvSpPr>
+            <a:spLocks noGrp="1"/>
+          </p:cNvSpPr>
+          <p:nvPr>
+            <p:ph type="body" idx="1"/>
+          </p:nvPr>
+        </p:nvSpPr>
+        <p:spPr/>
+        <p:txBody>
+          <a:bodyPr/>
+          <a:lstStyle/>
+          <a:p>
+            <a:pPr lvl="0" indent="0" marL="0">
+              <a:buNone/>
+            </a:pPr>
+            <a:r>
+              <a:rPr/>
+              <a:t>Target: 1:33. Same geometry as PRIM boxes, but CART splits top-down while PRIM peels from outside in. Draw the 2D partition on the board if time allows.</a:t>
+            </a:r>
+          </a:p>
+          <a:p>
+            <a:pPr lvl="0" indent="0" marL="0">
+              <a:buNone/>
+            </a:pPr>
+          </a:p>
+          <a:p>
+            <a:pPr lvl="0" indent="0" marL="0">
+              <a:buNone/>
+            </a:pPr>
+            <a:r>
+              <a:rPr/>
+              <a:t>Target: 1:35. 90s write, 60s pairs, cold-call 2-3. Key point: failure definition is a value judgment — different definitions → different scenario discovery results. Their intuition may be wrong; that’s what SD is for.</a:t>
+            </a:r>
+          </a:p>
+          <a:p>
+            <a:pPr lvl="0" indent="0" marL="0">
+              <a:buNone/>
+            </a:pPr>
+          </a:p>
+          <a:p>
+            <a:pPr lvl="0" indent="0" marL="0">
+              <a:buNone/>
+            </a:pPr>
+            <a:r>
+              <a:rPr/>
+              <a:t>Target: 1:37. Not predicting which scenario is “likely” — asking: given this combination of inputs, what’s the probability of failure? Key limitation: decision boundary is a hyperplane (flat). Failures in a corner of input space require interaction terms.</a:t>
+            </a:r>
+          </a:p>
+          <a:p>
+            <a:pPr lvl="0" indent="0" marL="0">
+              <a:buNone/>
+            </a:pPr>
+          </a:p>
+          <a:p>
+            <a:pPr lvl="0" indent="0" marL="0">
+              <a:buNone/>
+            </a:pPr>
+            <a:r>
+              <a:rPr/>
+              <a:t>Target: 1:40. Connection to GSA: Sobol indices rank by variance explained; logistic regression ranks by log-odds and gives direction (positive/negative).</a:t>
+            </a:r>
+          </a:p>
+          <a:p>
+            <a:pPr lvl="0" indent="0" marL="0">
+              <a:buNone/>
+            </a:pPr>
+          </a:p>
+          <a:p>
+            <a:pPr lvl="0" indent="0" marL="0">
+              <a:buNone/>
+            </a:pPr>
+            <a:r>
+              <a:rPr/>
+              <a:t>Target: 1:42. GSA and scenario discovery complement each other: GSA tells you which factors matter, SD tells you where things go wrong. Wednesday digs into the figures.</a:t>
+            </a:r>
+          </a:p>
+          <a:p>
+            <a:pPr lvl="0" indent="0" marL="0">
+              <a:buNone/>
+            </a:pPr>
+          </a:p>
+          <a:p>
+            <a:pPr lvl="0" indent="0" marL="0">
+              <a:buNone/>
+            </a:pPr>
+            <a:r>
+              <a:rPr/>
+              <a:t>Target: 1:44. Near-term warming is locked in (physics); long-term depends on what we do now. SD gives you “what drives outcomes,” not “what will happen.” For Wednesday: why do time-varying Sobol indices (Fig 2b-d) tell a different story than time-aggregated (Fig 2a)?</a:t>
+            </a:r>
+          </a:p>
+          <a:p>
+            <a:pPr lvl="0" indent="0" marL="0">
+              <a:buNone/>
+            </a:pPr>
+          </a:p>
+          <a:p>
+            <a:pPr lvl="0" indent="0" marL="0">
+              <a:buNone/>
+            </a:pPr>
+            <a:r>
+              <a:rPr/>
+              <a:t>Target: 1:46. Box = axis-aligned rectangle. Key design choice: interpretability — communicable to non-technical audiences. “Patient” contrasts with CART’s larger splits. Students implement PRIM in Lab 8.</a:t>
+            </a:r>
+          </a:p>
+          <a:p>
+            <a:pPr lvl="0" indent="0" marL="0">
+              <a:buNone/>
+            </a:pPr>
+          </a:p>
+          <a:p>
+            <a:pPr lvl="0" indent="0" marL="0">
+              <a:buNone/>
+            </a:pPr>
+            <a:r>
+              <a:rPr/>
+              <a:t>Target: 1:47. Coverage = recall. Density = precision. Full space → coverage 1, density = base rate. Tiny box → density ~1, low coverage.</a:t>
+            </a:r>
+          </a:p>
+          <a:p>
+            <a:pPr lvl="0" indent="0" marL="0">
+              <a:buNone/>
+            </a:pPr>
+          </a:p>
+          <a:p>
+            <a:pPr lvl="0" indent="0" marL="0">
+              <a:buNone/>
+            </a:pPr>
+            <a:r>
+              <a:rPr/>
+              <a:t>Target: 1:48. Analogy: fishing net. Large net = high coverage, lots of bycatch. Fine mesh = high density, small haul. Safety-critical → prefer coverage. Communication → prefer density. Knee-point usually works well.</a:t>
+            </a:r>
+          </a:p>
+        </p:txBody>
+      </p:sp>
+      <p:sp>
+        <p:nvSpPr>
+          <p:cNvPr id="4" name="Slide Number Placeholder 3"/>
+          <p:cNvSpPr>
+            <a:spLocks noGrp="1"/>
+          </p:cNvSpPr>
+          <p:nvPr>
+            <p:ph type="sldNum" sz="quarter" idx="10"/>
+          </p:nvPr>
+        </p:nvSpPr>
+        <p:spPr/>
+        <p:txBody>
+          <a:bodyPr/>
+          <a:lstStyle/>
+          <a:p>
+            <a:fld id="{18BDFEC3-8487-43E8-A154-7C12CBC1FFF2}" type="slidenum">
+              <a:rPr lang="en-US"/>
+              <a:t>8</a:t>
+            </a:fld>
+            <a:endParaRPr lang="en-US"/>
+          </a:p>
+        </p:txBody>
+      </p:sp>
+    </p:spTree>
+  </p:cSld>
+</p:notes>
+</file>
+
+<file path=ppt/notesSlides/notesSlide7.xml><?xml version="1.0" encoding="utf-8"?>
+<p:notes xmlns:a="http://schemas.openxmlformats.org/drawingml/2006/main" xmlns:r="http://schemas.openxmlformats.org/officeDocument/2006/relationships" xmlns:p="http://schemas.openxmlformats.org/presentationml/2006/main">
+  <p:cSld>
+    <p:spTree>
+      <p:nvGrpSpPr>
+        <p:cNvPr id="1" name=""/>
+        <p:cNvGrpSpPr/>
+        <p:nvPr/>
+      </p:nvGrpSpPr>
+      <p:grpSpPr>
+        <a:xfrm>
+          <a:off x="0" y="0"/>
+          <a:ext cx="0" cy="0"/>
+          <a:chOff x="0" y="0"/>
+          <a:chExt cx="0" cy="0"/>
+        </a:xfrm>
+      </p:grpSpPr>
+      <p:sp>
+        <p:nvSpPr>
+          <p:cNvPr id="2" name="Slide Image Placeholder 1"/>
+          <p:cNvSpPr>
+            <a:spLocks noGrp="1" noRot="1" noChangeAspect="1"/>
+          </p:cNvSpPr>
+          <p:nvPr>
+            <p:ph type="sldImg"/>
+          </p:nvPr>
+        </p:nvSpPr>
+        <p:spPr/>
+      </p:sp>
+      <p:sp>
+        <p:nvSpPr>
+          <p:cNvPr id="3" name="Notes Placeholder 2"/>
+          <p:cNvSpPr>
+            <a:spLocks noGrp="1"/>
+          </p:cNvSpPr>
+          <p:nvPr>
+            <p:ph type="body" idx="1"/>
+          </p:nvPr>
+        </p:nvSpPr>
+        <p:spPr/>
+        <p:txBody>
+          <a:bodyPr/>
+          <a:lstStyle/>
+          <a:p>
+            <a:pPr lvl="0" indent="0" marL="0">
+              <a:buNone/>
+            </a:pPr>
+            <a:r>
+              <a:rPr/>
+              <a:t>Target: 1:49. 60s write, 3-4 responses. Box A: high coverage, low density. Box B: good balance. Box C: very specific, misses most failures. No “right” answer — the choice depends on values and context.</a:t>
+            </a:r>
+          </a:p>
+          <a:p>
+            <a:pPr lvl="0" indent="0" marL="0">
+              <a:buNone/>
+            </a:pPr>
+          </a:p>
+          <a:p>
+            <a:pPr lvl="0" indent="0" marL="0">
+              <a:buNone/>
+            </a:pPr>
+            <a:r>
+              <a:rPr/>
+              <a:t>Target: 1:50. Preview only — keep conceptual, math is on next slide.</a:t>
+            </a:r>
+          </a:p>
+          <a:p>
+            <a:pPr lvl="0" indent="0" marL="0">
+              <a:buNone/>
+            </a:pPr>
+          </a:p>
+          <a:p>
+            <a:pPr lvl="0" indent="0" marL="0">
+              <a:buNone/>
+            </a:pPr>
+            <a:r>
+              <a:rPr/>
+              <a:t>Target: 1:50. High alpha → more sensitive to water level (bad for risk growth, good for dike effectiveness). Students will discover this through PRIM on Friday.</a:t>
+            </a:r>
+          </a:p>
+        </p:txBody>
+      </p:sp>
+      <p:sp>
+        <p:nvSpPr>
+          <p:cNvPr id="4" name="Slide Number Placeholder 3"/>
+          <p:cNvSpPr>
+            <a:spLocks noGrp="1"/>
+          </p:cNvSpPr>
+          <p:nvPr>
+            <p:ph type="sldNum" sz="quarter" idx="10"/>
+          </p:nvPr>
+        </p:nvSpPr>
+        <p:spPr/>
+        <p:txBody>
+          <a:bodyPr/>
+          <a:lstStyle/>
+          <a:p>
+            <a:fld id="{18BDFEC3-8487-43E8-A154-7C12CBC1FFF2}" type="slidenum">
+              <a:rPr lang="en-US"/>
+              <a:t>9</a:t>
+            </a:fld>
+            <a:endParaRPr lang="en-US"/>
+          </a:p>
+        </p:txBody>
+      </p:sp>
+    </p:spTree>
+  </p:cSld>
+</p:notes>
+</file>
+
+<file path=ppt/notesSlides/notesSlide8.xml><?xml version="1.0" encoding="utf-8"?>
+<p:notes xmlns:a="http://schemas.openxmlformats.org/drawingml/2006/main" xmlns:r="http://schemas.openxmlformats.org/officeDocument/2006/relationships" xmlns:p="http://schemas.openxmlformats.org/presentationml/2006/main">
+  <p:cSld>
+    <p:spTree>
+      <p:nvGrpSpPr>
+        <p:cNvPr id="1" name=""/>
+        <p:cNvGrpSpPr/>
+        <p:nvPr/>
+      </p:nvGrpSpPr>
+      <p:grpSpPr>
+        <a:xfrm>
+          <a:off x="0" y="0"/>
+          <a:ext cx="0" cy="0"/>
+          <a:chOff x="0" y="0"/>
+          <a:chExt cx="0" cy="0"/>
+        </a:xfrm>
+      </p:grpSpPr>
+      <p:sp>
+        <p:nvSpPr>
+          <p:cNvPr id="2" name="Slide Image Placeholder 1"/>
+          <p:cNvSpPr>
+            <a:spLocks noGrp="1" noRot="1" noChangeAspect="1"/>
+          </p:cNvSpPr>
+          <p:nvPr>
+            <p:ph type="sldImg"/>
+          </p:nvPr>
+        </p:nvSpPr>
+        <p:spPr/>
+      </p:sp>
+      <p:sp>
+        <p:nvSpPr>
+          <p:cNvPr id="3" name="Notes Placeholder 2"/>
+          <p:cNvSpPr>
+            <a:spLocks noGrp="1"/>
+          </p:cNvSpPr>
+          <p:nvPr>
+            <p:ph type="body" idx="1"/>
+          </p:nvPr>
+        </p:nvSpPr>
+        <p:spPr/>
+        <p:txBody>
+          <a:bodyPr/>
+          <a:lstStyle/>
+          <a:p>
+            <a:pPr lvl="0" indent="0" marL="0">
+              <a:buNone/>
+            </a:pPr>
+            <a:r>
+              <a:rPr/>
+              <a:t>Target: 1:50. Don’t spoil the twist — let them discover that changing the failure definition changes which uncertainties matter.</a:t>
+            </a:r>
+          </a:p>
+          <a:p>
+            <a:pPr lvl="0" indent="0" marL="0">
+              <a:buNone/>
+            </a:pPr>
+          </a:p>
+          <a:p>
+            <a:pPr lvl="0" indent="0" marL="0">
+              <a:buNone/>
+            </a:pPr>
+            <a:r>
+              <a:rPr/>
+              <a:t>Target: 1:50. Memo 1 reminder: students should have a complete XLRM diagram and narrative.</a:t>
+            </a:r>
+          </a:p>
+        </p:txBody>
+      </p:sp>
+      <p:sp>
+        <p:nvSpPr>
+          <p:cNvPr id="4" name="Slide Number Placeholder 3"/>
+          <p:cNvSpPr>
+            <a:spLocks noGrp="1"/>
+          </p:cNvSpPr>
+          <p:nvPr>
+            <p:ph type="sldNum" sz="quarter" idx="10"/>
+          </p:nvPr>
+        </p:nvSpPr>
+        <p:spPr/>
+        <p:txBody>
+          <a:bodyPr/>
+          <a:lstStyle/>
+          <a:p>
+            <a:fld id="{18BDFEC3-8487-43E8-A154-7C12CBC1FFF2}" type="slidenum">
+              <a:rPr lang="en-US"/>
+              <a:t>10</a:t>
+            </a:fld>
+            <a:endParaRPr lang="en-US"/>
+          </a:p>
+        </p:txBody>
+      </p:sp>
+    </p:spTree>
+  </p:cSld>
+</p:notes>
+</file>
+
+<file path=ppt/notesSlides/notesSlide9.xml><?xml version="1.0" encoding="utf-8"?>
+<p:notes xmlns:a="http://schemas.openxmlformats.org/drawingml/2006/main" xmlns:r="http://schemas.openxmlformats.org/officeDocument/2006/relationships" xmlns:p="http://schemas.openxmlformats.org/presentationml/2006/main">
+  <p:cSld>
+    <p:spTree>
+      <p:nvGrpSpPr>
+        <p:cNvPr id="1" name=""/>
+        <p:cNvGrpSpPr/>
+        <p:nvPr/>
+      </p:nvGrpSpPr>
+      <p:grpSpPr>
+        <a:xfrm>
+          <a:off x="0" y="0"/>
+          <a:ext cx="0" cy="0"/>
+          <a:chOff x="0" y="0"/>
+          <a:chExt cx="0" cy="0"/>
+        </a:xfrm>
+      </p:grpSpPr>
+      <p:sp>
+        <p:nvSpPr>
+          <p:cNvPr id="2" name="Slide Image Placeholder 1"/>
+          <p:cNvSpPr>
+            <a:spLocks noGrp="1" noRot="1" noChangeAspect="1"/>
+          </p:cNvSpPr>
+          <p:nvPr>
+            <p:ph type="sldImg"/>
+          </p:nvPr>
+        </p:nvSpPr>
+        <p:spPr/>
+      </p:sp>
+      <p:sp>
+        <p:nvSpPr>
+          <p:cNvPr id="3" name="Notes Placeholder 2"/>
+          <p:cNvSpPr>
+            <a:spLocks noGrp="1"/>
+          </p:cNvSpPr>
+          <p:nvPr>
+            <p:ph type="body" idx="1"/>
+          </p:nvPr>
+        </p:nvSpPr>
+        <p:spPr/>
+        <p:txBody>
+          <a:bodyPr/>
+          <a:lstStyle/>
+          <a:p>
+            <a:pPr lvl="0" indent="0" marL="0">
+              <a:buNone/>
+            </a:pPr>
+            <a:r>
+              <a:rPr/>
+              <a:t>Target: 1:50. Take names verbally. Each person also preps one discussion question. &lt; 6 students: combine slots 5+6. &gt; 6: split Fig 2b-d into individual panels.</a:t>
+            </a:r>
+          </a:p>
+        </p:txBody>
+      </p:sp>
+      <p:sp>
+        <p:nvSpPr>
+          <p:cNvPr id="4" name="Slide Number Placeholder 3"/>
+          <p:cNvSpPr>
+            <a:spLocks noGrp="1"/>
+          </p:cNvSpPr>
+          <p:nvPr>
+            <p:ph type="sldNum" sz="quarter" idx="10"/>
+          </p:nvPr>
+        </p:nvSpPr>
+        <p:spPr/>
+        <p:txBody>
+          <a:bodyPr/>
+          <a:lstStyle/>
+          <a:p>
+            <a:fld id="{18BDFEC3-8487-43E8-A154-7C12CBC1FFF2}" type="slidenum">
+              <a:rPr lang="en-US"/>
+              <a:t>11</a:t>
+            </a:fld>
+            <a:endParaRPr lang="en-US"/>
+          </a:p>
+        </p:txBody>
+      </p:sp>
+    </p:spTree>
+  </p:cSld>
+</p:notes>
 </file>
 
 <file path=ppt/slideLayouts/slideLayout1.xml><?xml version="1.0" encoding="utf-8"?>
@@ -3154,7 +4503,7 @@
             <a:br/>
             <a:r>
               <a:rPr/>
-              <a:t>Dr. James Doss-Gollin</a:t>
+              <a:t>James Doss-Gollin</a:t>
             </a:r>
           </a:p>
         </p:txBody>
@@ -3180,6 +4529,703 @@
             <a:r>
               <a:rPr/>
               <a:t>2026-03-23</a:t>
+            </a:r>
+          </a:p>
+        </p:txBody>
+      </p:sp>
+    </p:spTree>
+  </p:cSld>
+</p:sld>
+</file>
+
+<file path=ppt/slides/slide10.xml><?xml version="1.0" encoding="utf-8"?>
+<p:sld xmlns:a="http://schemas.openxmlformats.org/drawingml/2006/main" xmlns:r="http://schemas.openxmlformats.org/officeDocument/2006/relationships" xmlns:p="http://schemas.openxmlformats.org/presentationml/2006/main">
+  <p:cSld>
+    <p:spTree>
+      <p:nvGrpSpPr>
+        <p:cNvPr id="1" name=""/>
+        <p:cNvGrpSpPr/>
+        <p:nvPr/>
+      </p:nvGrpSpPr>
+      <p:grpSpPr>
+        <a:xfrm>
+          <a:off x="0" y="0"/>
+          <a:ext cx="0" cy="0"/>
+          <a:chOff x="0" y="0"/>
+          <a:chExt cx="0" cy="0"/>
+        </a:xfrm>
+      </p:grpSpPr>
+      <p:sp>
+        <p:nvSpPr>
+          <p:cNvPr id="4" name="Text Placeholder 3"/>
+          <p:cNvSpPr>
+            <a:spLocks noGrp="1"/>
+          </p:cNvSpPr>
+          <p:nvPr>
+            <p:ph idx="2" sz="half" type="body"/>
+          </p:nvPr>
+        </p:nvSpPr>
+        <p:spPr/>
+        <p:txBody>
+          <a:bodyPr/>
+          <a:lstStyle/>
+          <a:p>
+            <a:pPr lvl="0" indent="0" marL="0">
+              <a:buNone/>
+            </a:pPr>
+            <a:r>
+              <a:rPr/>
+              <a:t>. . .</a:t>
+            </a:r>
+          </a:p>
+          <a:p>
+            <a:pPr lvl="0" indent="0" marL="0">
+              <a:buNone/>
+            </a:pPr>
+            <a:r>
+              <a:rPr/>
+              <a:t>Your task: fix a policy, run 1,000 scenarios, label success/failure, and use PRIM to find </a:t>
+            </a:r>
+            <a:r>
+              <a:rPr b="1"/>
+              <a:t>which uncertainties drive failure</a:t>
+            </a:r>
+            <a:r>
+              <a:rPr/>
+              <a:t>.</a:t>
+            </a:r>
+          </a:p>
+          <a:p>
+            <a:pPr lvl="0" indent="0" marL="0">
+              <a:buNone/>
+            </a:pPr>
+            <a:r>
+              <a:rPr/>
+              <a:t>. . .</a:t>
+            </a:r>
+          </a:p>
+          <a:p>
+            <a:pPr lvl="0" indent="0" marL="0">
+              <a:buNone/>
+            </a:pPr>
+            <a:r>
+              <a:rPr/>
+              <a:t>The twist: changing </a:t>
+            </a:r>
+            <a:r>
+              <a:rPr i="1"/>
+              <a:t>how you define failure</a:t>
+            </a:r>
+            <a:r>
+              <a:rPr/>
+              <a:t> changes </a:t>
+            </a:r>
+            <a:r>
+              <a:rPr i="1"/>
+              <a:t>which uncertainties matter</a:t>
+            </a:r>
+            <a:r>
+              <a:rPr/>
+              <a:t>.</a:t>
+            </a:r>
+          </a:p>
+          <a:p>
+            <a:pPr lvl="0" indent="0" marL="0">
+              <a:spcBef>
+                <a:spcPts val="3000"/>
+              </a:spcBef>
+              <a:buNone/>
+            </a:pPr>
+            <a:r>
+              <a:rPr b="1"/>
+              <a:t>Looking Ahead</a:t>
+            </a:r>
+          </a:p>
+          <a:p>
+            <a:pPr lvl="0" indent="0" marL="0">
+              <a:buNone/>
+            </a:pPr>
+            <a:r>
+              <a:rPr b="1"/>
+              <a:t>Wednesday</a:t>
+            </a:r>
+            <a:r>
+              <a:rPr/>
+              <a:t>: Figure discussion of Lamontagne et al. (2019)</a:t>
+            </a:r>
+          </a:p>
+          <a:p>
+            <a:pPr lvl="0" indent="0" marL="0">
+              <a:buNone/>
+            </a:pPr>
+            <a:r>
+              <a:rPr b="1"/>
+              <a:t>Friday</a:t>
+            </a:r>
+            <a:r>
+              <a:rPr/>
+              <a:t>: Lab 8 — Scenario Discovery on the Eijgenraam dike model + </a:t>
+            </a:r>
+            <a:r>
+              <a:rPr b="1"/>
+              <a:t>Memo 1 due</a:t>
+            </a:r>
+          </a:p>
+          <a:p>
+            <a:pPr lvl="0" indent="0" marL="0">
+              <a:spcBef>
+                <a:spcPts val="3000"/>
+              </a:spcBef>
+              <a:buNone/>
+            </a:pPr>
+            <a:r>
+              <a:rPr b="1"/>
+              <a:t>Figure Discussion Sign-Up</a:t>
+            </a:r>
+          </a:p>
+          <a:p>
+            <a:pPr lvl="0" indent="0" marL="0">
+              <a:buNone/>
+            </a:pPr>
+            <a:r>
+              <a:rPr/>
+              <a:t>Wednesday’s discussion: each person leads a </a:t>
+            </a:r>
+            <a:r>
+              <a:rPr b="1"/>
+              <a:t>3-minute walkthrough</a:t>
+            </a:r>
+            <a:r>
+              <a:rPr/>
+              <a:t> of one figure from Lamontagne et al. (2019).</a:t>
+            </a:r>
+          </a:p>
+        </p:txBody>
+      </p:sp>
+      <p:graphicFrame>
+        <p:nvGraphicFramePr>
+          <p:cNvPr id="6" name="Content Placeholder 5"/>
+          <p:cNvGraphicFramePr>
+            <a:graphicFrameLocks noGrp="1"/>
+          </p:cNvGraphicFramePr>
+          <p:nvPr>
+            <p:ph idx="1"/>
+          </p:nvPr>
+        </p:nvGraphicFramePr>
+        <p:xfrm>
+          <a:off x="3568700" y="203200"/>
+          <a:ext cx="5105400" cy="4381500"/>
+        </p:xfrm>
+        <a:graphic>
+          <a:graphicData uri="http://schemas.openxmlformats.org/drawingml/2006/table">
+            <a:tbl>
+              <a:tblPr firstRow="1" bandRow="1">
+                <a:tableStyleId>{5C22544A-7EE6-4342-B048-85BDC9FD1C3A}</a:tableStyleId>
+              </a:tblPr>
+              <a:tblGrid>
+                <a:gridCol w="1701800"/>
+                <a:gridCol w="1701800"/>
+                <a:gridCol w="1701800"/>
+              </a:tblGrid>
+              <a:tr h="0">
+                <a:tc>
+                  <a:txBody>
+                    <a:bodyPr/>
+                    <a:lstStyle/>
+                    <a:p>
+                      <a:pPr lvl="0" indent="0" marL="0" algn="l">
+                        <a:buNone/>
+                      </a:pPr>
+                      <a:r>
+                        <a:rPr/>
+                        <a:t>Slot</a:t>
+                      </a:r>
+                    </a:p>
+                  </a:txBody>
+                  <a:tcPr/>
+                </a:tc>
+                <a:tc>
+                  <a:txBody>
+                    <a:bodyPr/>
+                    <a:lstStyle/>
+                    <a:p>
+                      <a:pPr lvl="0" indent="0" marL="0" algn="l">
+                        <a:buNone/>
+                      </a:pPr>
+                      <a:r>
+                        <a:rPr/>
+                        <a:t>Figure(s)</a:t>
+                      </a:r>
+                    </a:p>
+                  </a:txBody>
+                  <a:tcPr/>
+                </a:tc>
+                <a:tc>
+                  <a:txBody>
+                    <a:bodyPr/>
+                    <a:lstStyle/>
+                    <a:p>
+                      <a:pPr lvl="0" indent="0" marL="0" algn="l">
+                        <a:buNone/>
+                      </a:pPr>
+                      <a:r>
+                        <a:rPr/>
+                        <a:t>Focus</a:t>
+                      </a:r>
+                    </a:p>
+                  </a:txBody>
+                  <a:tcPr/>
+                </a:tc>
+              </a:tr>
+              <a:tr h="0">
+                <a:tc>
+                  <a:txBody>
+                    <a:bodyPr/>
+                    <a:lstStyle/>
+                    <a:p>
+                      <a:pPr lvl="0" indent="0" marL="0" algn="l">
+                        <a:buNone/>
+                      </a:pPr>
+                      <a:r>
+                        <a:rPr/>
+                        <a:t>1</a:t>
+                      </a:r>
+                    </a:p>
+                  </a:txBody>
+                </a:tc>
+                <a:tc>
+                  <a:txBody>
+                    <a:bodyPr/>
+                    <a:lstStyle/>
+                    <a:p>
+                      <a:pPr lvl="0" indent="0" marL="0" algn="l">
+                        <a:buNone/>
+                      </a:pPr>
+                      <a:r>
+                        <a:rPr/>
+                        <a:t>Fig 1a</a:t>
+                      </a:r>
+                    </a:p>
+                  </a:txBody>
+                </a:tc>
+                <a:tc>
+                  <a:txBody>
+                    <a:bodyPr/>
+                    <a:lstStyle/>
+                    <a:p>
+                      <a:pPr lvl="0" indent="0" marL="0" algn="l">
+                        <a:buNone/>
+                      </a:pPr>
+                      <a:r>
+                        <a:rPr/>
+                        <a:t>Sampling the policy space</a:t>
+                      </a:r>
+                    </a:p>
+                  </a:txBody>
+                </a:tc>
+              </a:tr>
+              <a:tr h="0">
+                <a:tc>
+                  <a:txBody>
+                    <a:bodyPr/>
+                    <a:lstStyle/>
+                    <a:p>
+                      <a:pPr lvl="0" indent="0" marL="0" algn="l">
+                        <a:buNone/>
+                      </a:pPr>
+                      <a:r>
+                        <a:rPr/>
+                        <a:t>2</a:t>
+                      </a:r>
+                    </a:p>
+                  </a:txBody>
+                </a:tc>
+                <a:tc>
+                  <a:txBody>
+                    <a:bodyPr/>
+                    <a:lstStyle/>
+                    <a:p>
+                      <a:pPr lvl="0" indent="0" marL="0" algn="l">
+                        <a:buNone/>
+                      </a:pPr>
+                      <a:r>
+                        <a:rPr/>
+                        <a:t>Fig 1b–d</a:t>
+                      </a:r>
+                    </a:p>
+                  </a:txBody>
+                </a:tc>
+                <a:tc>
+                  <a:txBody>
+                    <a:bodyPr/>
+                    <a:lstStyle/>
+                    <a:p>
+                      <a:pPr lvl="0" indent="0" marL="0" algn="l">
+                        <a:buNone/>
+                      </a:pPr>
+                      <a:r>
+                        <a:rPr/>
+                        <a:t>Tradeoff clouds &amp; “tolerable” windows</a:t>
+                      </a:r>
+                    </a:p>
+                  </a:txBody>
+                </a:tc>
+              </a:tr>
+              <a:tr h="0">
+                <a:tc>
+                  <a:txBody>
+                    <a:bodyPr/>
+                    <a:lstStyle/>
+                    <a:p>
+                      <a:pPr lvl="0" indent="0" marL="0" algn="l">
+                        <a:buNone/>
+                      </a:pPr>
+                      <a:r>
+                        <a:rPr/>
+                        <a:t>3</a:t>
+                      </a:r>
+                    </a:p>
+                  </a:txBody>
+                </a:tc>
+                <a:tc>
+                  <a:txBody>
+                    <a:bodyPr/>
+                    <a:lstStyle/>
+                    <a:p>
+                      <a:pPr lvl="0" indent="0" marL="0" algn="l">
+                        <a:buNone/>
+                      </a:pPr>
+                      <a:r>
+                        <a:rPr/>
+                        <a:t>Fig 2a</a:t>
+                      </a:r>
+                    </a:p>
+                  </a:txBody>
+                </a:tc>
+                <a:tc>
+                  <a:txBody>
+                    <a:bodyPr/>
+                    <a:lstStyle/>
+                    <a:p>
+                      <a:pPr lvl="0" indent="0" marL="0" algn="l">
+                        <a:buNone/>
+                      </a:pPr>
+                      <a:r>
+                        <a:rPr/>
+                        <a:t>Time-aggregated Sobol sensitivities</a:t>
+                      </a:r>
+                    </a:p>
+                  </a:txBody>
+                </a:tc>
+              </a:tr>
+              <a:tr h="0">
+                <a:tc>
+                  <a:txBody>
+                    <a:bodyPr/>
+                    <a:lstStyle/>
+                    <a:p>
+                      <a:pPr lvl="0" indent="0" marL="0" algn="l">
+                        <a:buNone/>
+                      </a:pPr>
+                      <a:r>
+                        <a:rPr/>
+                        <a:t>4</a:t>
+                      </a:r>
+                    </a:p>
+                  </a:txBody>
+                </a:tc>
+                <a:tc>
+                  <a:txBody>
+                    <a:bodyPr/>
+                    <a:lstStyle/>
+                    <a:p>
+                      <a:pPr lvl="0" indent="0" marL="0" algn="l">
+                        <a:buNone/>
+                      </a:pPr>
+                      <a:r>
+                        <a:rPr/>
+                        <a:t>Fig 2b–d</a:t>
+                      </a:r>
+                    </a:p>
+                  </a:txBody>
+                </a:tc>
+                <a:tc>
+                  <a:txBody>
+                    <a:bodyPr/>
+                    <a:lstStyle/>
+                    <a:p>
+                      <a:pPr lvl="0" indent="0" marL="0" algn="l">
+                        <a:buNone/>
+                      </a:pPr>
+                      <a:r>
+                        <a:rPr/>
+                        <a:t>Time-varying sensitivities</a:t>
+                      </a:r>
+                    </a:p>
+                  </a:txBody>
+                </a:tc>
+              </a:tr>
+              <a:tr h="0">
+                <a:tc>
+                  <a:txBody>
+                    <a:bodyPr/>
+                    <a:lstStyle/>
+                    <a:p>
+                      <a:pPr lvl="0" indent="0" marL="0" algn="l">
+                        <a:buNone/>
+                      </a:pPr>
+                      <a:r>
+                        <a:rPr/>
+                        <a:t>5</a:t>
+                      </a:r>
+                    </a:p>
+                  </a:txBody>
+                </a:tc>
+                <a:tc>
+                  <a:txBody>
+                    <a:bodyPr/>
+                    <a:lstStyle/>
+                    <a:p>
+                      <a:pPr lvl="0" indent="0" marL="0" algn="l">
+                        <a:buNone/>
+                      </a:pPr>
+                      <a:r>
+                        <a:rPr/>
+                        <a:t>Fig 3a–b</a:t>
+                      </a:r>
+                    </a:p>
+                  </a:txBody>
+                </a:tc>
+                <a:tc>
+                  <a:txBody>
+                    <a:bodyPr/>
+                    <a:lstStyle/>
+                    <a:p>
+                      <a:pPr lvl="0" indent="0" marL="0" algn="l">
+                        <a:buNone/>
+                      </a:pPr>
+                      <a:r>
+                        <a:rPr/>
+                        <a:t>Robust pathways at low climate sensitivity</a:t>
+                      </a:r>
+                    </a:p>
+                  </a:txBody>
+                </a:tc>
+              </a:tr>
+              <a:tr h="0">
+                <a:tc>
+                  <a:txBody>
+                    <a:bodyPr/>
+                    <a:lstStyle/>
+                    <a:p>
+                      <a:pPr lvl="0" indent="0" marL="0" algn="l">
+                        <a:buNone/>
+                      </a:pPr>
+                      <a:r>
+                        <a:rPr/>
+                        <a:t>6</a:t>
+                      </a:r>
+                    </a:p>
+                  </a:txBody>
+                </a:tc>
+                <a:tc>
+                  <a:txBody>
+                    <a:bodyPr/>
+                    <a:lstStyle/>
+                    <a:p>
+                      <a:pPr lvl="0" indent="0" marL="0" algn="l">
+                        <a:buNone/>
+                      </a:pPr>
+                      <a:r>
+                        <a:rPr/>
+                        <a:t>Fig 3c + conclusion</a:t>
+                      </a:r>
+                    </a:p>
+                  </a:txBody>
+                </a:tc>
+                <a:tc>
+                  <a:txBody>
+                    <a:bodyPr/>
+                    <a:lstStyle/>
+                    <a:p>
+                      <a:pPr lvl="0" indent="0" marL="0" algn="l">
+                        <a:buNone/>
+                      </a:pPr>
+                      <a:r>
+                        <a:rPr/>
+                        <a:t>Median sensitivity &amp; headline message</a:t>
+                      </a:r>
+                    </a:p>
+                  </a:txBody>
+                </a:tc>
+              </a:tr>
+            </a:tbl>
+          </a:graphicData>
+        </a:graphic>
+      </p:graphicFrame>
+    </p:spTree>
+  </p:cSld>
+</p:sld>
+</file>
+
+<file path=ppt/slides/slide11.xml><?xml version="1.0" encoding="utf-8"?>
+<p:sld xmlns:a="http://schemas.openxmlformats.org/drawingml/2006/main" xmlns:r="http://schemas.openxmlformats.org/officeDocument/2006/relationships" xmlns:p="http://schemas.openxmlformats.org/presentationml/2006/main">
+  <p:cSld>
+    <p:spTree>
+      <p:nvGrpSpPr>
+        <p:cNvPr id="1" name=""/>
+        <p:cNvGrpSpPr/>
+        <p:nvPr/>
+      </p:nvGrpSpPr>
+      <p:grpSpPr>
+        <a:xfrm>
+          <a:off x="0" y="0"/>
+          <a:ext cx="0" cy="0"/>
+          <a:chOff x="0" y="0"/>
+          <a:chExt cx="0" cy="0"/>
+        </a:xfrm>
+      </p:grpSpPr>
+      <p:sp>
+        <p:nvSpPr>
+          <p:cNvPr id="3" name="Content Placeholder 2"/>
+          <p:cNvSpPr>
+            <a:spLocks noGrp="1"/>
+          </p:cNvSpPr>
+          <p:nvPr>
+            <p:ph idx="1"/>
+          </p:nvPr>
+        </p:nvSpPr>
+        <p:spPr/>
+        <p:txBody>
+          <a:bodyPr/>
+          <a:lstStyle/>
+          <a:p>
+            <a:pPr lvl="0" indent="0" marL="0">
+              <a:buNone/>
+            </a:pPr>
+            <a:r>
+              <a:rPr b="1"/>
+              <a:t>Sign up now!</a:t>
+            </a:r>
+          </a:p>
+          <a:p>
+            <a:pPr lvl="0" indent="0" marL="0">
+              <a:spcBef>
+                <a:spcPts val="3000"/>
+              </a:spcBef>
+              <a:buNone/>
+            </a:pPr>
+            <a:r>
+              <a:rPr b="1"/>
+              <a:t>References</a:t>
+            </a:r>
+          </a:p>
+          <a:p>
+            <a:pPr lvl="0" indent="0" marL="0">
+              <a:buNone/>
+            </a:pPr>
+            <a:r>
+              <a:rPr/>
+              <a:t>Bankes, Steve. 1993. “Exploratory Modeling for Policy Analysis.” </a:t>
+            </a:r>
+            <a:r>
+              <a:rPr i="1"/>
+              <a:t>Operations Research</a:t>
+            </a:r>
+            <a:r>
+              <a:rPr/>
+              <a:t> 41 (3): 435–49. </a:t>
+            </a:r>
+            <a:r>
+              <a:rPr>
+                <a:hlinkClick r:id="rId3"/>
+              </a:rPr>
+              <a:t>https://doi.org/10/c7rgcr</a:t>
+            </a:r>
+            <a:r>
+              <a:rPr/>
+              <a:t>.</a:t>
+            </a:r>
+          </a:p>
+          <a:p>
+            <a:pPr lvl="0" indent="0" marL="0">
+              <a:buNone/>
+            </a:pPr>
+            <a:r>
+              <a:rPr/>
+              <a:t>Eijgenraam, Carel, Jarl Kind, Carlijn Bak, Ruud Brekelmans, Dick den Hertog, Matthijs Duits, Kees Roos, Pieter Vermeer, and Wim Kuijken. 2014. “Economically Efficient Standards to Protect the Netherlands Against Flooding.” </a:t>
+            </a:r>
+            <a:r>
+              <a:rPr i="1"/>
+              <a:t>INFORMS Journal on Applied Analytics</a:t>
+            </a:r>
+            <a:r>
+              <a:rPr/>
+              <a:t> 44 (1): 7–21. </a:t>
+            </a:r>
+            <a:r>
+              <a:rPr>
+                <a:hlinkClick r:id="rId4"/>
+              </a:rPr>
+              <a:t>https://doi.org/10.1287/inte.2013.0721</a:t>
+            </a:r>
+            <a:r>
+              <a:rPr/>
+              <a:t>.</a:t>
+            </a:r>
+          </a:p>
+          <a:p>
+            <a:pPr lvl="0" indent="0" marL="0">
+              <a:buNone/>
+            </a:pPr>
+            <a:r>
+              <a:rPr/>
+              <a:t>Lamontagne, J. R., P. M. Reed, G. Marangoni, K. Keller, and G. G. Garner. 2019. “Robust Abatement Pathways to Tolerable Climate Futures Require Immediate Global Action.” </a:t>
+            </a:r>
+            <a:r>
+              <a:rPr i="1"/>
+              <a:t>Nature Climate Change</a:t>
+            </a:r>
+            <a:r>
+              <a:rPr/>
+              <a:t> 9 (4): 290–94. </a:t>
+            </a:r>
+            <a:r>
+              <a:rPr>
+                <a:hlinkClick r:id="rId5"/>
+              </a:rPr>
+              <a:t>https://doi.org/10.1038/s41558-019-0426-8</a:t>
+            </a:r>
+            <a:r>
+              <a:rPr/>
+              <a:t>.</a:t>
+            </a:r>
+          </a:p>
+          <a:p>
+            <a:pPr lvl="0" indent="0" marL="0">
+              <a:buNone/>
+            </a:pPr>
+            <a:r>
+              <a:rPr/>
+              <a:t>Srikrishnan, Vivek, David C. Lafferty, Tony E. Wong, Jonathan R. Lamontagne, Julianne D. Quinn, Sanjib Sharma, Nusrat J. Molla, et al. 2022. “Uncertainty Analysis in Multi-Sector Systems: Considerations for Risk Analysis, Projection, and Planning for Complex Systems.” </a:t>
+            </a:r>
+            <a:r>
+              <a:rPr i="1"/>
+              <a:t>Earth’s Future</a:t>
+            </a:r>
+            <a:r>
+              <a:rPr/>
+              <a:t> 10 (8): e2021EF002644. </a:t>
+            </a:r>
+            <a:r>
+              <a:rPr>
+                <a:hlinkClick r:id="rId6"/>
+              </a:rPr>
+              <a:t>https://doi.org/10.1029/2021EF002644</a:t>
+            </a:r>
+            <a:r>
+              <a:rPr/>
+              <a:t>.</a:t>
             </a:r>
           </a:p>
         </p:txBody>
@@ -3208,12 +5254,12 @@
       </p:grpSpPr>
       <p:sp>
         <p:nvSpPr>
-          <p:cNvPr id="3" name="Content Placeholder 2"/>
-          <p:cNvSpPr>
-            <a:spLocks noGrp="1"/>
-          </p:cNvSpPr>
-          <p:nvPr>
-            <p:ph idx="1"/>
+          <p:cNvPr id="4" name="Text Placeholder 3"/>
+          <p:cNvSpPr>
+            <a:spLocks noGrp="1"/>
+          </p:cNvSpPr>
+          <p:nvPr>
+            <p:ph idx="2" sz="half" type="body"/>
           </p:nvPr>
         </p:nvSpPr>
         <p:spPr/>
@@ -3222,21 +5268,567 @@
           <a:lstStyle/>
           <a:p>
             <a:pPr lvl="0" indent="0" marL="0">
+              <a:spcBef>
+                <a:spcPts val="3000"/>
+              </a:spcBef>
               <a:buNone/>
             </a:pPr>
             <a:r>
               <a:rPr b="1"/>
-              <a:t>Draft Material:</a:t>
-            </a:r>
-            <a:r>
-              <a:rPr/>
-              <a:t> This content is under development and subject to change.</a:t>
+              <a:t>From Lab 7: What Drove Failure?</a:t>
+            </a:r>
+          </a:p>
+          <a:p>
+            <a:pPr lvl="0" indent="0" marL="0">
+              <a:buNone/>
+            </a:pPr>
+            <a:r>
+              <a:rPr/>
+              <a:t>So far you have three tools for analyzing decisions under uncertainty:</a:t>
+            </a:r>
+          </a:p>
+          <a:p>
+            <a:pPr lvl="0"/>
+            <a:r>
+              <a:rPr b="1"/>
+              <a:t>GSA</a:t>
+            </a:r>
+            <a:r>
+              <a:rPr/>
+              <a:t> (Week 7): which inputs explain the most variance in outcomes?</a:t>
+            </a:r>
+          </a:p>
+          <a:p>
+            <a:pPr lvl="0"/>
+            <a:r>
+              <a:rPr b="1"/>
+              <a:t>Value of Information</a:t>
+            </a:r>
+            <a:r>
+              <a:rPr/>
+              <a:t> (Week 8): would learning more change your decision?</a:t>
+            </a:r>
+          </a:p>
+          <a:p>
+            <a:pPr lvl="0"/>
+            <a:r>
+              <a:rPr b="1"/>
+              <a:t>Robustness</a:t>
+            </a:r>
+            <a:r>
+              <a:rPr/>
+              <a:t> (Week 8): how well does a policy hold up across scenarios?</a:t>
+            </a:r>
+          </a:p>
+          <a:p>
+            <a:pPr lvl="0" indent="0" marL="0">
+              <a:buNone/>
+            </a:pPr>
+            <a:r>
+              <a:rPr/>
+              <a:t>. . .</a:t>
+            </a:r>
+          </a:p>
+          <a:p>
+            <a:pPr lvl="0" indent="0" marL="0">
+              <a:buNone/>
+            </a:pPr>
+            <a:r>
+              <a:rPr/>
+              <a:t>Today: </a:t>
+            </a:r>
+            <a:r>
+              <a:rPr b="1"/>
+              <a:t>which conditions in that ensemble actually drove failure?</a:t>
+            </a:r>
+          </a:p>
+          <a:p>
+            <a:pPr lvl="0" indent="0" marL="0">
+              <a:spcBef>
+                <a:spcPts val="3000"/>
+              </a:spcBef>
+              <a:buNone/>
+            </a:pPr>
+            <a:r>
+              <a:rPr b="1"/>
+              <a:t>Uncertainty in Simulation Models</a:t>
+            </a:r>
+          </a:p>
+          <a:p>
+            <a:pPr lvl="0" indent="0" marL="0">
+              <a:buNone/>
+            </a:pPr>
+            <a:r>
+              <a:rPr/>
+              <a:t>Srikrishnan et al. (2022) distinguish three sources of uncertainty in coupled human-natural systems:</a:t>
+            </a:r>
+          </a:p>
+          <a:p>
+            <a:pPr lvl="0"/>
+            <a:r>
+              <a:rPr b="1"/>
+              <a:t>Parametric uncertainty</a:t>
+            </a:r>
+            <a:r>
+              <a:rPr/>
+              <a:t>: we know the model structure, but not the exact parameter values</a:t>
+            </a:r>
+            <a:br/>
+            <a:r>
+              <a:rPr i="1"/>
+              <a:t>Example: climate sensitivity, damage function coefficients</a:t>
+            </a:r>
+            <a:br/>
+            <a:r>
+              <a:rPr/>
+              <a:t>This is the target of Monte Carlo sampling and GSA (Weeks 4, 7).</a:t>
+            </a:r>
+          </a:p>
+          <a:p>
+            <a:pPr lvl="0"/>
+            <a:r>
+              <a:rPr b="1"/>
+              <a:t>Structural uncertainty</a:t>
+            </a:r>
+            <a:r>
+              <a:rPr/>
+              <a:t>: we don’t agree on which equations represent the system</a:t>
+            </a:r>
+            <a:br/>
+            <a:r>
+              <a:rPr i="1"/>
+              <a:t>Example: ice sheet dynamics, damage function form, discount rate model</a:t>
+            </a:r>
+            <a:br/>
+            <a:r>
+              <a:rPr/>
+              <a:t>Requires running multiple model structures — a multi-model ensemble.</a:t>
+            </a:r>
+          </a:p>
+          <a:p>
+            <a:pPr lvl="0"/>
+            <a:r>
+              <a:rPr b="1"/>
+              <a:t>Sampling uncertainty</a:t>
+            </a:r>
+            <a:r>
+              <a:rPr/>
+              <a:t>: finite samples from stochastic processes</a:t>
+            </a:r>
+            <a:br/>
+            <a:r>
+              <a:rPr i="1"/>
+              <a:t>Example: 30 years of storm surge records from a non-stationary climate</a:t>
+            </a:r>
+            <a:br/>
+            <a:r>
+              <a:rPr/>
+              <a:t>Addressable with more data or better sampling designs, but never fully eliminated.</a:t>
+            </a:r>
+          </a:p>
+          <a:p>
+            <a:pPr lvl="0" indent="0" marL="0">
+              <a:spcBef>
+                <a:spcPts val="3000"/>
+              </a:spcBef>
+              <a:buNone/>
+            </a:pPr>
+            <a:r>
+              <a:rPr b="1"/>
+              <a:t>Defining uncertainty</a:t>
+            </a:r>
+          </a:p>
+        </p:txBody>
+      </p:sp>
+      <p:pic>
+        <p:nvPicPr>
+          <p:cNvPr descr="srikrishnan_fig1.png" id="0" name="Picture 1"/>
+          <p:cNvPicPr>
+            <a:picLocks noGrp="1" noChangeAspect="1"/>
+          </p:cNvPicPr>
+          <p:nvPr/>
+        </p:nvPicPr>
+        <p:blipFill>
+          <a:blip r:embed="rId3"/>
+          <a:stretch>
+            <a:fillRect/>
+          </a:stretch>
+        </p:blipFill>
+        <p:spPr bwMode="auto">
+          <a:xfrm>
+            <a:off x="3619500" y="203200"/>
+            <a:ext cx="5003800" cy="3873500"/>
+          </a:xfrm>
+          <a:prstGeom prst="rect">
+            <a:avLst/>
+          </a:prstGeom>
+          <a:noFill/>
+          <a:ln w="9525">
+            <a:noFill/>
+            <a:headEnd/>
+            <a:tailEnd/>
+          </a:ln>
+        </p:spPr>
+      </p:pic>
+      <p:sp>
+        <p:nvSpPr>
+          <p:cNvPr id="1" name="TextBox 3"/>
+          <p:cNvSpPr txBox="1"/>
+          <p:nvPr/>
+        </p:nvSpPr>
+        <p:spPr>
+          <a:xfrm>
+            <a:off x="3568700" y="4076700"/>
+            <a:ext cx="5105400" cy="508000"/>
+          </a:xfrm>
+          <a:prstGeom prst="rect">
+            <a:avLst/>
+          </a:prstGeom>
+          <a:noFill/>
+        </p:spPr>
+        <p:txBody>
+          <a:bodyPr/>
+          <a:lstStyle/>
+          <a:p>
+            <a:pPr lvl="0" indent="0" marL="0" algn="ctr">
+              <a:buNone/>
+            </a:pPr>
+            <a:r>
+              <a:rPr/>
+              <a:t>Figure 1: Srikrishnan et al. (2022)</a:t>
             </a:r>
           </a:p>
         </p:txBody>
       </p:sp>
     </p:spTree>
   </p:cSld>
+  <p:timing>
+    <p:tnLst>
+      <p:par>
+        <p:cTn id="1" dur="indefinite" restart="never" nodeType="tmRoot">
+          <p:childTnLst>
+            <p:seq concurrent="1" nextAc="seek">
+              <p:cTn id="2" dur="indefinite" nodeType="mainSeq">
+                <p:childTnLst>
+                  <p:par>
+                    <p:cTn id="3" fill="hold">
+                      <p:stCondLst>
+                        <p:cond delay="indefinite"/>
+                      </p:stCondLst>
+                      <p:childTnLst>
+                        <p:par>
+                          <p:cTn id="4" fill="hold">
+                            <p:stCondLst>
+                              <p:cond delay="0"/>
+                            </p:stCondLst>
+                            <p:childTnLst>
+                              <p:par>
+                                <p:cTn id="5" presetID="1" presetClass="entr" presetSubtype="0" fill="hold" grpId="0" nodeType="clickEffect">
+                                  <p:stCondLst>
+                                    <p:cond delay="0"/>
+                                  </p:stCondLst>
+                                  <p:childTnLst>
+                                    <p:set>
+                                      <p:cBhvr>
+                                        <p:cTn id="6" dur="1" fill="hold">
+                                          <p:stCondLst>
+                                            <p:cond delay="0"/>
+                                          </p:stCondLst>
+                                        </p:cTn>
+                                        <p:tgtEl>
+                                          <p:spTgt spid="4">
+                                            <p:txEl>
+                                              <p:pRg st="2" end="2"/>
+                                            </p:txEl>
+                                          </p:spTgt>
+                                        </p:tgtEl>
+                                        <p:attrNameLst>
+                                          <p:attrName>style.visibility</p:attrName>
+                                        </p:attrNameLst>
+                                      </p:cBhvr>
+                                      <p:to>
+                                        <p:strVal val="visible"/>
+                                      </p:to>
+                                    </p:set>
+                                  </p:childTnLst>
+                                </p:cTn>
+                              </p:par>
+                            </p:childTnLst>
+                          </p:cTn>
+                        </p:par>
+                      </p:childTnLst>
+                    </p:cTn>
+                  </p:par>
+                  <p:par>
+                    <p:cTn id="7" fill="hold">
+                      <p:stCondLst>
+                        <p:cond delay="indefinite"/>
+                      </p:stCondLst>
+                      <p:childTnLst>
+                        <p:par>
+                          <p:cTn id="8" fill="hold">
+                            <p:stCondLst>
+                              <p:cond delay="0"/>
+                            </p:stCondLst>
+                            <p:childTnLst>
+                              <p:par>
+                                <p:cTn id="9" presetID="1" presetClass="entr" presetSubtype="0" fill="hold" grpId="0" nodeType="clickEffect">
+                                  <p:stCondLst>
+                                    <p:cond delay="0"/>
+                                  </p:stCondLst>
+                                  <p:childTnLst>
+                                    <p:set>
+                                      <p:cBhvr>
+                                        <p:cTn id="10" dur="1" fill="hold">
+                                          <p:stCondLst>
+                                            <p:cond delay="0"/>
+                                          </p:stCondLst>
+                                        </p:cTn>
+                                        <p:tgtEl>
+                                          <p:spTgt spid="4">
+                                            <p:txEl>
+                                              <p:pRg st="3" end="3"/>
+                                            </p:txEl>
+                                          </p:spTgt>
+                                        </p:tgtEl>
+                                        <p:attrNameLst>
+                                          <p:attrName>style.visibility</p:attrName>
+                                        </p:attrNameLst>
+                                      </p:cBhvr>
+                                      <p:to>
+                                        <p:strVal val="visible"/>
+                                      </p:to>
+                                    </p:set>
+                                  </p:childTnLst>
+                                </p:cTn>
+                              </p:par>
+                            </p:childTnLst>
+                          </p:cTn>
+                        </p:par>
+                      </p:childTnLst>
+                    </p:cTn>
+                  </p:par>
+                  <p:par>
+                    <p:cTn id="11" fill="hold">
+                      <p:stCondLst>
+                        <p:cond delay="indefinite"/>
+                      </p:stCondLst>
+                      <p:childTnLst>
+                        <p:par>
+                          <p:cTn id="12" fill="hold">
+                            <p:stCondLst>
+                              <p:cond delay="0"/>
+                            </p:stCondLst>
+                            <p:childTnLst>
+                              <p:par>
+                                <p:cTn id="13" presetID="1" presetClass="entr" presetSubtype="0" fill="hold" grpId="0" nodeType="clickEffect">
+                                  <p:stCondLst>
+                                    <p:cond delay="0"/>
+                                  </p:stCondLst>
+                                  <p:childTnLst>
+                                    <p:set>
+                                      <p:cBhvr>
+                                        <p:cTn id="14" dur="1" fill="hold">
+                                          <p:stCondLst>
+                                            <p:cond delay="0"/>
+                                          </p:stCondLst>
+                                        </p:cTn>
+                                        <p:tgtEl>
+                                          <p:spTgt spid="4">
+                                            <p:txEl>
+                                              <p:pRg st="4" end="4"/>
+                                            </p:txEl>
+                                          </p:spTgt>
+                                        </p:tgtEl>
+                                        <p:attrNameLst>
+                                          <p:attrName>style.visibility</p:attrName>
+                                        </p:attrNameLst>
+                                      </p:cBhvr>
+                                      <p:to>
+                                        <p:strVal val="visible"/>
+                                      </p:to>
+                                    </p:set>
+                                  </p:childTnLst>
+                                </p:cTn>
+                              </p:par>
+                            </p:childTnLst>
+                          </p:cTn>
+                        </p:par>
+                      </p:childTnLst>
+                    </p:cTn>
+                  </p:par>
+                  <p:par>
+                    <p:cTn id="15" fill="hold">
+                      <p:stCondLst>
+                        <p:cond delay="indefinite"/>
+                      </p:stCondLst>
+                      <p:childTnLst>
+                        <p:par>
+                          <p:cTn id="16" fill="hold">
+                            <p:stCondLst>
+                              <p:cond delay="0"/>
+                            </p:stCondLst>
+                            <p:childTnLst>
+                              <p:par>
+                                <p:cTn id="17" presetID="1" presetClass="entr" presetSubtype="0" fill="hold" grpId="0" nodeType="clickEffect">
+                                  <p:stCondLst>
+                                    <p:cond delay="0"/>
+                                  </p:stCondLst>
+                                  <p:childTnLst>
+                                    <p:set>
+                                      <p:cBhvr>
+                                        <p:cTn id="18" dur="1" fill="hold">
+                                          <p:stCondLst>
+                                            <p:cond delay="0"/>
+                                          </p:stCondLst>
+                                        </p:cTn>
+                                        <p:tgtEl>
+                                          <p:spTgt spid="4">
+                                            <p:txEl>
+                                              <p:pRg st="9" end="9"/>
+                                            </p:txEl>
+                                          </p:spTgt>
+                                        </p:tgtEl>
+                                        <p:attrNameLst>
+                                          <p:attrName>style.visibility</p:attrName>
+                                        </p:attrNameLst>
+                                      </p:cBhvr>
+                                      <p:to>
+                                        <p:strVal val="visible"/>
+                                      </p:to>
+                                    </p:set>
+                                  </p:childTnLst>
+                                </p:cTn>
+                              </p:par>
+                            </p:childTnLst>
+                          </p:cTn>
+                        </p:par>
+                      </p:childTnLst>
+                    </p:cTn>
+                  </p:par>
+                  <p:par>
+                    <p:cTn id="19" fill="hold">
+                      <p:stCondLst>
+                        <p:cond delay="indefinite"/>
+                      </p:stCondLst>
+                      <p:childTnLst>
+                        <p:par>
+                          <p:cTn id="20" fill="hold">
+                            <p:stCondLst>
+                              <p:cond delay="0"/>
+                            </p:stCondLst>
+                            <p:childTnLst>
+                              <p:par>
+                                <p:cTn id="21" presetID="1" presetClass="entr" presetSubtype="0" fill="hold" grpId="0" nodeType="clickEffect">
+                                  <p:stCondLst>
+                                    <p:cond delay="0"/>
+                                  </p:stCondLst>
+                                  <p:childTnLst>
+                                    <p:set>
+                                      <p:cBhvr>
+                                        <p:cTn id="22" dur="1" fill="hold">
+                                          <p:stCondLst>
+                                            <p:cond delay="0"/>
+                                          </p:stCondLst>
+                                        </p:cTn>
+                                        <p:tgtEl>
+                                          <p:spTgt spid="4">
+                                            <p:txEl>
+                                              <p:pRg st="10" end="10"/>
+                                            </p:txEl>
+                                          </p:spTgt>
+                                        </p:tgtEl>
+                                        <p:attrNameLst>
+                                          <p:attrName>style.visibility</p:attrName>
+                                        </p:attrNameLst>
+                                      </p:cBhvr>
+                                      <p:to>
+                                        <p:strVal val="visible"/>
+                                      </p:to>
+                                    </p:set>
+                                  </p:childTnLst>
+                                </p:cTn>
+                              </p:par>
+                            </p:childTnLst>
+                          </p:cTn>
+                        </p:par>
+                      </p:childTnLst>
+                    </p:cTn>
+                  </p:par>
+                  <p:par>
+                    <p:cTn id="23" fill="hold">
+                      <p:stCondLst>
+                        <p:cond delay="indefinite"/>
+                      </p:stCondLst>
+                      <p:childTnLst>
+                        <p:par>
+                          <p:cTn id="24" fill="hold">
+                            <p:stCondLst>
+                              <p:cond delay="0"/>
+                            </p:stCondLst>
+                            <p:childTnLst>
+                              <p:par>
+                                <p:cTn id="25" presetID="1" presetClass="entr" presetSubtype="0" fill="hold" grpId="0" nodeType="clickEffect">
+                                  <p:stCondLst>
+                                    <p:cond delay="0"/>
+                                  </p:stCondLst>
+                                  <p:childTnLst>
+                                    <p:set>
+                                      <p:cBhvr>
+                                        <p:cTn id="26" dur="1" fill="hold">
+                                          <p:stCondLst>
+                                            <p:cond delay="0"/>
+                                          </p:stCondLst>
+                                        </p:cTn>
+                                        <p:tgtEl>
+                                          <p:spTgt spid="4">
+                                            <p:txEl>
+                                              <p:pRg st="11" end="11"/>
+                                            </p:txEl>
+                                          </p:spTgt>
+                                        </p:tgtEl>
+                                        <p:attrNameLst>
+                                          <p:attrName>style.visibility</p:attrName>
+                                        </p:attrNameLst>
+                                      </p:cBhvr>
+                                      <p:to>
+                                        <p:strVal val="visible"/>
+                                      </p:to>
+                                    </p:set>
+                                  </p:childTnLst>
+                                </p:cTn>
+                              </p:par>
+                            </p:childTnLst>
+                          </p:cTn>
+                        </p:par>
+                      </p:childTnLst>
+                    </p:cTn>
+                  </p:par>
+                </p:childTnLst>
+              </p:cTn>
+              <p:prevCondLst>
+                <p:cond evt="onPrev" delay="0">
+                  <p:tgtEl>
+                    <p:sldTgt/>
+                  </p:tgtEl>
+                </p:cond>
+              </p:prevCondLst>
+              <p:nextCondLst>
+                <p:cond evt="onNext" delay="0">
+                  <p:tgtEl>
+                    <p:sldTgt/>
+                  </p:tgtEl>
+                </p:cond>
+              </p:nextCondLst>
+            </p:seq>
+          </p:childTnLst>
+        </p:cTn>
+      </p:par>
+    </p:tnLst>
+    <p:bldLst>
+      <p:bldP spid="4" grpId="0" uiExpand="1" build="p"/>
+    </p:bldLst>
+  </p:timing>
 </p:sld>
 </file>
 
@@ -3277,7 +5869,7 @@
             </a:pPr>
             <a:r>
               <a:rPr/>
-              <a:t>Coming Soon</a:t>
+              <a:t>Exploratory Modeling</a:t>
             </a:r>
           </a:p>
         </p:txBody>
@@ -3298,11 +5890,23 @@
           <a:lstStyle/>
           <a:p>
             <a:pPr lvl="0" indent="0" marL="0">
-              <a:buNone/>
-            </a:pPr>
-            <a:r>
-              <a:rPr/>
-              <a:t>This lecture is under development.</a:t>
+              <a:spcBef>
+                <a:spcPts val="3000"/>
+              </a:spcBef>
+              <a:buNone/>
+            </a:pPr>
+            <a:r>
+              <a:rPr b="1"/>
+              <a:t>Consolidative vs. Exploratory Modeling</a:t>
+            </a:r>
+          </a:p>
+          <a:p>
+            <a:pPr lvl="0" indent="0" marL="0">
+              <a:buNone/>
+            </a:pPr>
+            <a:r>
+              <a:rPr/>
+              <a:t>Bankes (1993) identifies two fundamentally different uses of simulation models:</a:t>
             </a:r>
           </a:p>
         </p:txBody>
@@ -3331,12 +5935,12 @@
       </p:grpSpPr>
       <p:sp>
         <p:nvSpPr>
-          <p:cNvPr id="2" name="Title 1"/>
-          <p:cNvSpPr>
-            <a:spLocks noGrp="1"/>
-          </p:cNvSpPr>
-          <p:nvPr>
-            <p:ph type="title"/>
+          <p:cNvPr id="3" name="Content Placeholder 2"/>
+          <p:cNvSpPr>
+            <a:spLocks noGrp="1"/>
+          </p:cNvSpPr>
+          <p:nvPr>
+            <p:ph idx="1" sz="half"/>
           </p:nvPr>
         </p:nvSpPr>
         <p:spPr/>
@@ -3348,8 +5952,110 @@
               <a:buNone/>
             </a:pPr>
             <a:r>
-              <a:rPr/>
-              <a:t>References</a:t>
+              <a:rPr b="1"/>
+              <a:t>Consolidative modeling</a:t>
+            </a:r>
+          </a:p>
+          <a:p>
+            <a:pPr lvl="0"/>
+            <a:r>
+              <a:rPr/>
+              <a:t>Synthesize all available knowledge into one best model</a:t>
+            </a:r>
+          </a:p>
+          <a:p>
+            <a:pPr lvl="0"/>
+            <a:r>
+              <a:rPr/>
+              <a:t>Use it to </a:t>
+            </a:r>
+            <a:r>
+              <a:rPr b="1"/>
+              <a:t>predict</a:t>
+            </a:r>
+            <a:r>
+              <a:rPr/>
+              <a:t> outcomes</a:t>
+            </a:r>
+          </a:p>
+          <a:p>
+            <a:pPr lvl="0"/>
+            <a:r>
+              <a:rPr/>
+              <a:t>Works when you can validate the model against data over the relevant horizon</a:t>
+            </a:r>
+          </a:p>
+          <a:p>
+            <a:pPr lvl="0" indent="0" marL="0">
+              <a:buNone/>
+            </a:pPr>
+            <a:r>
+              <a:rPr i="1"/>
+              <a:t>Examples: calibrated GCMs for physical climate projection, structural engineering load analysis, tidal prediction</a:t>
+            </a:r>
+          </a:p>
+        </p:txBody>
+      </p:sp>
+      <p:sp>
+        <p:nvSpPr>
+          <p:cNvPr id="4" name="Content Placeholder 3"/>
+          <p:cNvSpPr>
+            <a:spLocks noGrp="1"/>
+          </p:cNvSpPr>
+          <p:nvPr>
+            <p:ph idx="2" sz="half"/>
+          </p:nvPr>
+        </p:nvSpPr>
+        <p:spPr/>
+        <p:txBody>
+          <a:bodyPr/>
+          <a:lstStyle/>
+          <a:p>
+            <a:pPr lvl="0" indent="0" marL="0">
+              <a:buNone/>
+            </a:pPr>
+            <a:r>
+              <a:rPr b="1"/>
+              <a:t>Exploratory modeling</a:t>
+            </a:r>
+          </a:p>
+          <a:p>
+            <a:pPr lvl="0"/>
+            <a:r>
+              <a:rPr/>
+              <a:t>Use computation to systematically explore the </a:t>
+            </a:r>
+            <a:r>
+              <a:rPr i="1"/>
+              <a:t>space</a:t>
+            </a:r>
+            <a:r>
+              <a:rPr/>
+              <a:t> of plausible models and assumptions</a:t>
+            </a:r>
+          </a:p>
+          <a:p>
+            <a:pPr lvl="0"/>
+            <a:r>
+              <a:rPr/>
+              <a:t>Each run is a </a:t>
+            </a:r>
+            <a:r>
+              <a:rPr b="1"/>
+              <a:t>computational experiment</a:t>
+            </a:r>
+            <a:r>
+              <a:rPr/>
+              <a:t> probing one corner of the assumption space</a:t>
+            </a:r>
+          </a:p>
+          <a:p>
+            <a:pPr lvl="0" indent="0" marL="0">
+              <a:buNone/>
+            </a:pPr>
+            <a:r>
+              <a:rPr i="1"/>
+              <a:t>Examples: century-scale climate adaptation, integrated assessment of climate policy</a:t>
             </a:r>
           </a:p>
         </p:txBody>
@@ -3357,6 +6063,1078 @@
     </p:spTree>
   </p:cSld>
 </p:sld>
+</file>
+
+<file path=ppt/slides/slide5.xml><?xml version="1.0" encoding="utf-8"?>
+<p:sld xmlns:a="http://schemas.openxmlformats.org/drawingml/2006/main" xmlns:r="http://schemas.openxmlformats.org/officeDocument/2006/relationships" xmlns:p="http://schemas.openxmlformats.org/presentationml/2006/main">
+  <p:cSld>
+    <p:spTree>
+      <p:nvGrpSpPr>
+        <p:cNvPr id="1" name=""/>
+        <p:cNvGrpSpPr/>
+        <p:nvPr/>
+      </p:nvGrpSpPr>
+      <p:grpSpPr>
+        <a:xfrm>
+          <a:off x="0" y="0"/>
+          <a:ext cx="0" cy="0"/>
+          <a:chOff x="0" y="0"/>
+          <a:chExt cx="0" cy="0"/>
+        </a:xfrm>
+      </p:grpSpPr>
+      <mc:AlternateContent xmlns:mc="http://schemas.openxmlformats.org/markup-compatibility/2006">
+        <mc:Choice xmlns:a14="http://schemas.microsoft.com/office/drawing/2010/main" Requires="a14">
+          <p:sp>
+            <p:nvSpPr>
+              <p:cNvPr id="3" name="Content Placeholder 2"/>
+              <p:cNvSpPr>
+                <a:spLocks noGrp="1"/>
+              </p:cNvSpPr>
+              <p:nvPr>
+                <p:ph idx="1"/>
+              </p:nvPr>
+            </p:nvSpPr>
+            <p:spPr/>
+            <p:txBody>
+              <a:bodyPr/>
+              <a:lstStyle/>
+              <a:p>
+                <a:pPr lvl="0" indent="0" marL="0">
+                  <a:buNone/>
+                </a:pPr>
+                <a:r>
+                  <a:rPr/>
+                  <a:t>. . .</a:t>
+                </a:r>
+              </a:p>
+              <a:p>
+                <a:pPr lvl="0" indent="0" marL="0">
+                  <a:buNone/>
+                </a:pPr>
+                <a:r>
+                  <a:rPr/>
+                  <a:t>The key criterion: </a:t>
+                </a:r>
+                <a:r>
+                  <a:rPr b="1"/>
+                  <a:t>can you validate the model?</a:t>
+                </a:r>
+                <a:r>
+                  <a:rPr/>
+                  <a:t> For decadal-to-century scale socio-environmental systems, the answer is usually no.</a:t>
+                </a:r>
+              </a:p>
+              <a:p>
+                <a:pPr lvl="0" indent="0" marL="0">
+                  <a:spcBef>
+                    <a:spcPts val="3000"/>
+                  </a:spcBef>
+                  <a:buNone/>
+                </a:pPr>
+                <a:r>
+                  <a:rPr b="1"/>
+                  <a:t>Discussion: When Is Consolidative Modeling Enough?</a:t>
+                </a:r>
+              </a:p>
+              <a:p>
+                <a:pPr lvl="0" indent="0" marL="1270000">
+                  <a:buNone/>
+                </a:pPr>
+                <a:r>
+                  <a:rPr sz="2000" b="1"/>
+                  <a:t>Think-Pair-Share (90 seconds)</a:t>
+                </a:r>
+              </a:p>
+              <a:p>
+                <a:pPr lvl="0" indent="0" marL="1270000">
+                  <a:buNone/>
+                </a:pPr>
+                <a:r>
+                  <a:rPr sz="2000"/>
+                  <a:t>Give two examples of problems where a consolidative model is appropriate, and one where it is not. What distinguishes them?</a:t>
+                </a:r>
+              </a:p>
+              <a:p>
+                <a:pPr lvl="0" indent="0" marL="0">
+                  <a:spcBef>
+                    <a:spcPts val="3000"/>
+                  </a:spcBef>
+                  <a:buNone/>
+                </a:pPr>
+                <a:r>
+                  <a:rPr b="1"/>
+                  <a:t>What Exploratory Modeling Requires</a:t>
+                </a:r>
+              </a:p>
+              <a:p>
+                <a:pPr lvl="0" indent="0" marL="0">
+                  <a:buNone/>
+                </a:pPr>
+                <a:r>
+                  <a:rPr/>
+                  <a:t>Running thousands of scenarios across uncertain parameters </a:t>
+                </a:r>
+                <a:r>
+                  <a:rPr i="1"/>
+                  <a:t>and</a:t>
+                </a:r>
+                <a:r>
+                  <a:rPr/>
+                  <a:t> policy choices:</a:t>
+                </a:r>
+              </a:p>
+              <a:p>
+                <a:pPr lvl="0" indent="0" marL="0">
+                  <a:buNone/>
+                </a:pPr>
+                <a14:m>
+                  <m:oMathPara xmlns:m="http://schemas.openxmlformats.org/officeDocument/2006/math">
+                    <m:oMathParaPr>
+                      <m:jc m:val="center"/>
+                    </m:oMathParaPr>
+                    <m:oMath>
+                      <m:d>
+                        <m:dPr>
+                          <m:begChr m:val="("/>
+                          <m:sepChr m:val=""/>
+                          <m:endChr m:val=")"/>
+                          <m:grow/>
+                        </m:dPr>
+                        <m:e>
+                          <m:r>
+                            <m:rPr>
+                              <m:sty m:val="b"/>
+                            </m:rPr>
+                            <m:t>X</m:t>
+                          </m:r>
+                          <m:r>
+                            <m:rPr>
+                              <m:sty m:val="p"/>
+                            </m:rPr>
+                            <m:t>,</m:t>
+                          </m:r>
+                          <m:r>
+                            <m:rPr>
+                              <m:sty m:val="b"/>
+                            </m:rPr>
+                            <m:t>L</m:t>
+                          </m:r>
+                        </m:e>
+                      </m:d>
+                      <m:limUpp>
+                        <m:e>
+                          <m:r>
+                            <m:rPr>
+                              <m:sty m:val="p"/>
+                            </m:rPr>
+                            <m:t>→</m:t>
+                          </m:r>
+                        </m:e>
+                        <m:lim>
+                          <m:r>
+                            <m:rPr>
+                              <m:sty m:val="b"/>
+                            </m:rPr>
+                            <m:t>R</m:t>
+                          </m:r>
+                        </m:lim>
+                      </m:limUpp>
+                      <m:r>
+                        <m:rPr>
+                          <m:sty m:val="b"/>
+                        </m:rPr>
+                        <m:t>M</m:t>
+                      </m:r>
+                    </m:oMath>
+                  </m:oMathPara>
+                </a14:m>
+              </a:p>
+              <a:p>
+                <a:pPr lvl="0" indent="0" marL="0">
+                  <a:buNone/>
+                </a:pPr>
+                <a:r>
+                  <a:rPr/>
+                  <a:t>. . .</a:t>
+                </a:r>
+              </a:p>
+              <a:p>
+                <a:pPr lvl="0"/>
+                <a:r>
+                  <a:rPr b="1"/>
+                  <a:t>X</a:t>
+                </a:r>
+                <a:r>
+                  <a:rPr/>
+                  <a:t>: uncertain inputs — varied across their plausible range</a:t>
+                </a:r>
+              </a:p>
+              <a:p>
+                <a:pPr lvl="0"/>
+                <a:r>
+                  <a:rPr b="1"/>
+                  <a:t>L</a:t>
+                </a:r>
+                <a:r>
+                  <a:rPr/>
+                  <a:t>: policy levers — varied to compare strategies</a:t>
+                </a:r>
+              </a:p>
+              <a:p>
+                <a:pPr lvl="0"/>
+                <a:r>
+                  <a:rPr b="1"/>
+                  <a:t>R</a:t>
+                </a:r>
+                <a:r>
+                  <a:rPr/>
+                  <a:t>: system model — the simulation being run</a:t>
+                </a:r>
+              </a:p>
+              <a:p>
+                <a:pPr lvl="0"/>
+                <a:r>
+                  <a:rPr b="1"/>
+                  <a:t>M</a:t>
+                </a:r>
+                <a:r>
+                  <a:rPr/>
+                  <a:t>: metrics — the outcomes we track</a:t>
+                </a:r>
+              </a:p>
+              <a:p>
+                <a:pPr lvl="0" indent="0" marL="0">
+                  <a:buNone/>
+                </a:pPr>
+                <a:r>
+                  <a:rPr/>
+                  <a:t>. . .</a:t>
+                </a:r>
+              </a:p>
+              <a:p>
+                <a:pPr lvl="0" indent="0" marL="0">
+                  <a:buNone/>
+                </a:pPr>
+                <a:r>
+                  <a:rPr/>
+                  <a:t>A large ensemble maps the </a:t>
+                </a:r>
+                <a:r>
+                  <a:rPr b="1"/>
+                  <a:t>outcome space</a:t>
+                </a:r>
+                <a:r>
+                  <a:rPr/>
+                  <a:t>: how metrics vary across the full space of assumptions and decisions.</a:t>
+                </a:r>
+              </a:p>
+            </p:txBody>
+          </p:sp>
+        </mc:Choice>
+      </mc:AlternateContent>
+    </p:spTree>
+  </p:cSld>
+</p:sld>
+</file>
+
+<file path=ppt/slides/slide6.xml><?xml version="1.0" encoding="utf-8"?>
+<p:sld xmlns:a="http://schemas.openxmlformats.org/drawingml/2006/main" xmlns:r="http://schemas.openxmlformats.org/officeDocument/2006/relationships" xmlns:p="http://schemas.openxmlformats.org/presentationml/2006/main">
+  <p:cSld>
+    <p:spTree>
+      <p:nvGrpSpPr>
+        <p:cNvPr id="1" name=""/>
+        <p:cNvGrpSpPr/>
+        <p:nvPr/>
+      </p:nvGrpSpPr>
+      <p:grpSpPr>
+        <a:xfrm>
+          <a:off x="0" y="0"/>
+          <a:ext cx="0" cy="0"/>
+          <a:chOff x="0" y="0"/>
+          <a:chExt cx="0" cy="0"/>
+        </a:xfrm>
+      </p:grpSpPr>
+      <p:sp>
+        <p:nvSpPr>
+          <p:cNvPr id="2" name="Title 1"/>
+          <p:cNvSpPr>
+            <a:spLocks noGrp="1"/>
+          </p:cNvSpPr>
+          <p:nvPr>
+            <p:ph type="title"/>
+          </p:nvPr>
+        </p:nvSpPr>
+        <p:spPr>
+          <a:xfrm>
+            <a:off x="457201" y="204787"/>
+            <a:ext cx="3008313" cy="871538"/>
+          </a:xfrm>
+        </p:spPr>
+        <p:txBody>
+          <a:bodyPr/>
+          <a:lstStyle/>
+          <a:p>
+            <a:pPr lvl="0" indent="0" marL="0">
+              <a:buNone/>
+            </a:pPr>
+            <a:r>
+              <a:rPr/>
+              <a:t>Scenario Discovery</a:t>
+            </a:r>
+          </a:p>
+        </p:txBody>
+      </p:sp>
+      <mc:AlternateContent xmlns:mc="http://schemas.openxmlformats.org/markup-compatibility/2006">
+        <mc:Choice xmlns:a14="http://schemas.microsoft.com/office/drawing/2010/main" Requires="a14">
+          <p:sp>
+            <p:nvSpPr>
+              <p:cNvPr id="4" name="Text Placeholder 3"/>
+              <p:cNvSpPr>
+                <a:spLocks noGrp="1"/>
+              </p:cNvSpPr>
+              <p:nvPr>
+                <p:ph idx="2" sz="half" type="body"/>
+              </p:nvPr>
+            </p:nvSpPr>
+            <p:spPr/>
+            <p:txBody>
+              <a:bodyPr/>
+              <a:lstStyle/>
+              <a:p>
+                <a:pPr lvl="0" indent="0" marL="0">
+                  <a:spcBef>
+                    <a:spcPts val="3000"/>
+                  </a:spcBef>
+                  <a:buNone/>
+                </a:pPr>
+                <a:r>
+                  <a:rPr b="1"/>
+                  <a:t>The Scenario Discovery Workflow</a:t>
+                </a:r>
+              </a:p>
+              <a:p>
+                <a:pPr lvl="0" indent="-342900" marL="342900">
+                  <a:buAutoNum type="arabicPeriod"/>
+                </a:pPr>
+                <a:r>
+                  <a:rPr b="1"/>
+                  <a:t>Define</a:t>
+                </a:r>
+                <a:r>
+                  <a:rPr/>
+                  <a:t> one or many policies to evaluate</a:t>
+                </a:r>
+                <a:br/>
+                <a:r>
+                  <a:rPr i="1"/>
+                  <a:t>e.g., elevate house by 1 meter; or compare 0.5m, 1m, 1.5m elevations</a:t>
+                </a:r>
+              </a:p>
+              <a:p>
+                <a:pPr lvl="0" indent="-342900" marL="342900">
+                  <a:buAutoNum type="arabicPeriod"/>
+                </a:pPr>
+                <a:r>
+                  <a:rPr b="1"/>
+                  <a:t>Run</a:t>
+                </a:r>
+                <a:r>
+                  <a:rPr/>
+                  <a:t> the model across a large ensemble: </a:t>
+                </a:r>
+                <a14:m>
+                  <m:oMath xmlns:m="http://schemas.openxmlformats.org/officeDocument/2006/math">
+                    <m:r>
+                      <m:t>N</m:t>
+                    </m:r>
+                  </m:oMath>
+                </a14:m>
+                <a:r>
+                  <a:rPr/>
+                  <a:t> draws of uncertain inputs </a:t>
+                </a:r>
+                <a14:m>
+                  <m:oMath xmlns:m="http://schemas.openxmlformats.org/officeDocument/2006/math">
+                    <m:r>
+                      <m:rPr>
+                        <m:sty m:val="b"/>
+                      </m:rPr>
+                      <m:t>X</m:t>
+                    </m:r>
+                  </m:oMath>
+                </a14:m>
+              </a:p>
+              <a:p>
+                <a:pPr lvl="0" indent="-342900" marL="342900">
+                  <a:buAutoNum type="arabicPeriod"/>
+                </a:pPr>
+                <a:r>
+                  <a:rPr b="1"/>
+                  <a:t>Label</a:t>
+                </a:r>
+                <a:r>
+                  <a:rPr/>
+                  <a:t> each run: success (</a:t>
+                </a:r>
+                <a14:m>
+                  <m:oMath xmlns:m="http://schemas.openxmlformats.org/officeDocument/2006/math">
+                    <m:r>
+                      <m:t>y</m:t>
+                    </m:r>
+                    <m:r>
+                      <m:rPr>
+                        <m:sty m:val="p"/>
+                      </m:rPr>
+                      <m:t>=</m:t>
+                    </m:r>
+                    <m:r>
+                      <m:t>0</m:t>
+                    </m:r>
+                  </m:oMath>
+                </a14:m>
+                <a:r>
+                  <a:rPr/>
+                  <a:t>) or failure (</a:t>
+                </a:r>
+                <a14:m>
+                  <m:oMath xmlns:m="http://schemas.openxmlformats.org/officeDocument/2006/math">
+                    <m:r>
+                      <m:t>y</m:t>
+                    </m:r>
+                    <m:r>
+                      <m:rPr>
+                        <m:sty m:val="p"/>
+                      </m:rPr>
+                      <m:t>=</m:t>
+                    </m:r>
+                    <m:r>
+                      <m:t>1</m:t>
+                    </m:r>
+                  </m:oMath>
+                </a14:m>
+                <a:r>
+                  <a:rPr/>
+                  <a:t>) based on a metric threshold</a:t>
+                </a:r>
+              </a:p>
+              <a:p>
+                <a:pPr lvl="0" indent="-342900" marL="342900">
+                  <a:buAutoNum type="arabicPeriod"/>
+                </a:pPr>
+                <a:r>
+                  <a:rPr b="1"/>
+                  <a:t>Classify</a:t>
+                </a:r>
+                <a:r>
+                  <a:rPr/>
+                  <a:t>: find which regions of </a:t>
+                </a:r>
+                <a14:m>
+                  <m:oMath xmlns:m="http://schemas.openxmlformats.org/officeDocument/2006/math">
+                    <m:r>
+                      <m:rPr>
+                        <m:sty m:val="b"/>
+                      </m:rPr>
+                      <m:t>X</m:t>
+                    </m:r>
+                  </m:oMath>
+                </a14:m>
+                <a:r>
+                  <a:rPr/>
+                  <a:t>-space concentrate failures</a:t>
+                </a:r>
+              </a:p>
+              <a:p>
+                <a:pPr lvl="0" indent="-342900" marL="342900">
+                  <a:buAutoNum type="arabicPeriod"/>
+                </a:pPr>
+                <a:r>
+                  <a:rPr b="1"/>
+                  <a:t>Interpret</a:t>
+                </a:r>
+                <a:r>
+                  <a:rPr/>
+                  <a:t>: translate the classification into narrative scenarios</a:t>
+                </a:r>
+              </a:p>
+              <a:p>
+                <a:pPr lvl="0" indent="0" marL="0">
+                  <a:buNone/>
+                </a:pPr>
+                <a:r>
+                  <a:rPr/>
+                  <a:t>. . .</a:t>
+                </a:r>
+              </a:p>
+              <a:p>
+                <a:pPr lvl="0" indent="0" marL="0">
+                  <a:buNone/>
+                </a:pPr>
+                <a:r>
+                  <a:rPr/>
+                  <a:t>Sometimes we want to find what breaks a </a:t>
+                </a:r>
+                <a:r>
+                  <a:rPr i="1"/>
+                  <a:t>single</a:t>
+                </a:r>
+                <a:r>
+                  <a:rPr/>
+                  <a:t> policy. Sometimes we want to compare which scenarios break </a:t>
+                </a:r>
+                <a:r>
+                  <a:rPr i="1"/>
+                  <a:t>different</a:t>
+                </a:r>
+                <a:r>
+                  <a:rPr/>
+                  <a:t> policies.</a:t>
+                </a:r>
+              </a:p>
+              <a:p>
+                <a:pPr lvl="0" indent="0" marL="0">
+                  <a:spcBef>
+                    <a:spcPts val="3000"/>
+                  </a:spcBef>
+                  <a:buNone/>
+                </a:pPr>
+                <a:r>
+                  <a:rPr b="1"/>
+                  <a:t>How Do We Classify? A Spectrum of Methods</a:t>
+                </a:r>
+              </a:p>
+              <a:p>
+                <a:pPr lvl="0" indent="0" marL="0">
+                  <a:buNone/>
+                </a:pPr>
+                <a:r>
+                  <a:rPr/>
+                  <a:t>Three common approaches, each with different tradeoffs:</a:t>
+                </a:r>
+              </a:p>
+              <a:p>
+                <a:pPr lvl="0" indent="0" marL="0">
+                  <a:buNone/>
+                </a:pPr>
+                <a:r>
+                  <a:rPr/>
+                  <a:t>. . .</a:t>
+                </a:r>
+              </a:p>
+            </p:txBody>
+          </p:sp>
+        </mc:Choice>
+      </mc:AlternateContent>
+      <p:graphicFrame>
+        <p:nvGraphicFramePr>
+          <p:cNvPr id="6" name="Content Placeholder 5"/>
+          <p:cNvGraphicFramePr>
+            <a:graphicFrameLocks noGrp="1"/>
+          </p:cNvGraphicFramePr>
+          <p:nvPr>
+            <p:ph idx="1"/>
+          </p:nvPr>
+        </p:nvGraphicFramePr>
+        <p:xfrm>
+          <a:off x="3568700" y="203200"/>
+          <a:ext cx="5105400" cy="4381500"/>
+        </p:xfrm>
+        <a:graphic>
+          <a:graphicData uri="http://schemas.openxmlformats.org/drawingml/2006/table">
+            <a:tbl>
+              <a:tblPr firstRow="1" bandRow="1">
+                <a:tableStyleId>{5C22544A-7EE6-4342-B048-85BDC9FD1C3A}</a:tableStyleId>
+              </a:tblPr>
+              <a:tblGrid>
+                <a:gridCol w="1701800"/>
+                <a:gridCol w="1701800"/>
+                <a:gridCol w="1701800"/>
+              </a:tblGrid>
+              <a:tr h="0">
+                <a:tc>
+                  <a:txBody>
+                    <a:bodyPr/>
+                    <a:lstStyle/>
+                    <a:p>
+                      <a:pPr lvl="0" indent="0" marL="0" algn="l">
+                        <a:buNone/>
+                      </a:pPr>
+                      <a:r>
+                        <a:rPr/>
+                        <a:t>Method</a:t>
+                      </a:r>
+                    </a:p>
+                  </a:txBody>
+                  <a:tcPr/>
+                </a:tc>
+                <a:tc>
+                  <a:txBody>
+                    <a:bodyPr/>
+                    <a:lstStyle/>
+                    <a:p>
+                      <a:pPr lvl="0" indent="0" marL="0" algn="l">
+                        <a:buNone/>
+                      </a:pPr>
+                      <a:r>
+                        <a:rPr/>
+                        <a:t>Strength</a:t>
+                      </a:r>
+                    </a:p>
+                  </a:txBody>
+                  <a:tcPr/>
+                </a:tc>
+                <a:tc>
+                  <a:txBody>
+                    <a:bodyPr/>
+                    <a:lstStyle/>
+                    <a:p>
+                      <a:pPr lvl="0" indent="0" marL="0" algn="l">
+                        <a:buNone/>
+                      </a:pPr>
+                      <a:r>
+                        <a:rPr/>
+                        <a:t>Weakness</a:t>
+                      </a:r>
+                    </a:p>
+                  </a:txBody>
+                  <a:tcPr/>
+                </a:tc>
+              </a:tr>
+              <a:tr h="0">
+                <a:tc>
+                  <a:txBody>
+                    <a:bodyPr/>
+                    <a:lstStyle/>
+                    <a:p>
+                      <a:pPr lvl="0" indent="0" marL="0" algn="l">
+                        <a:buNone/>
+                      </a:pPr>
+                      <a:r>
+                        <a:rPr b="1"/>
+                        <a:t>Logistic regression</a:t>
+                      </a:r>
+                    </a:p>
+                  </a:txBody>
+                </a:tc>
+                <a:tc>
+                  <a:txBody>
+                    <a:bodyPr/>
+                    <a:lstStyle/>
+                    <a:p>
+                      <a:pPr lvl="0" indent="0" marL="0" algn="l">
+                        <a:buNone/>
+                      </a:pPr>
+                      <a:r>
+                        <a:rPr/>
+                        <a:t>Familiar; interpretable coefficients; probabilistic output</a:t>
+                      </a:r>
+                    </a:p>
+                  </a:txBody>
+                </a:tc>
+                <a:tc>
+                  <a:txBody>
+                    <a:bodyPr/>
+                    <a:lstStyle/>
+                    <a:p>
+                      <a:pPr lvl="0" indent="0" marL="0" algn="l">
+                        <a:buNone/>
+                      </a:pPr>
+                      <a:r>
+                        <a:rPr/>
+                        <a:t>Assumes linear decision boundary</a:t>
+                      </a:r>
+                    </a:p>
+                  </a:txBody>
+                </a:tc>
+              </a:tr>
+              <a:tr h="0">
+                <a:tc>
+                  <a:txBody>
+                    <a:bodyPr/>
+                    <a:lstStyle/>
+                    <a:p>
+                      <a:pPr lvl="0" indent="0" marL="0" algn="l">
+                        <a:buNone/>
+                      </a:pPr>
+                      <a:r>
+                        <a:rPr b="1"/>
+                        <a:t>CART</a:t>
+                      </a:r>
+                    </a:p>
+                  </a:txBody>
+                </a:tc>
+                <a:tc>
+                  <a:txBody>
+                    <a:bodyPr/>
+                    <a:lstStyle/>
+                    <a:p>
+                      <a:pPr lvl="0" indent="0" marL="0" algn="l">
+                        <a:buNone/>
+                      </a:pPr>
+                      <a:r>
+                        <a:rPr/>
+                        <a:t>Visual; handles interactions; no linearity assumption</a:t>
+                      </a:r>
+                    </a:p>
+                  </a:txBody>
+                </a:tc>
+                <a:tc>
+                  <a:txBody>
+                    <a:bodyPr/>
+                    <a:lstStyle/>
+                    <a:p>
+                      <a:pPr lvl="0" indent="0" marL="0" algn="l">
+                        <a:buNone/>
+                      </a:pPr>
+                      <a:r>
+                        <a:rPr/>
+                        <a:t>Can overfit; splits can be unstable</a:t>
+                      </a:r>
+                    </a:p>
+                  </a:txBody>
+                </a:tc>
+              </a:tr>
+              <a:tr h="0">
+                <a:tc>
+                  <a:txBody>
+                    <a:bodyPr/>
+                    <a:lstStyle/>
+                    <a:p>
+                      <a:pPr lvl="0" indent="0" marL="0" algn="l">
+                        <a:buNone/>
+                      </a:pPr>
+                      <a:r>
+                        <a:rPr b="1"/>
+                        <a:t>PRIM</a:t>
+                      </a:r>
+                    </a:p>
+                  </a:txBody>
+                </a:tc>
+                <a:tc>
+                  <a:txBody>
+                    <a:bodyPr/>
+                    <a:lstStyle/>
+                    <a:p>
+                      <a:pPr lvl="0" indent="0" marL="0" algn="l">
+                        <a:buNone/>
+                      </a:pPr>
+                      <a:r>
+                        <a:rPr/>
+                        <a:t>Designed for scenario discovery; coverage/density tradeoff</a:t>
+                      </a:r>
+                    </a:p>
+                  </a:txBody>
+                </a:tc>
+                <a:tc>
+                  <a:txBody>
+                    <a:bodyPr/>
+                    <a:lstStyle/>
+                    <a:p>
+                      <a:pPr lvl="0" indent="0" marL="0" algn="l">
+                        <a:buNone/>
+                      </a:pPr>
+                      <a:r>
+                        <a:rPr/>
+                        <a:t>Less familiar; requires tuning</a:t>
+                      </a:r>
+                    </a:p>
+                  </a:txBody>
+                </a:tc>
+              </a:tr>
+            </a:tbl>
+          </a:graphicData>
+        </a:graphic>
+      </p:graphicFrame>
+    </p:spTree>
+  </p:cSld>
+  <p:timing>
+    <p:tnLst>
+      <p:par>
+        <p:cTn id="1" dur="indefinite" restart="never" nodeType="tmRoot">
+          <p:childTnLst>
+            <p:seq concurrent="1" nextAc="seek">
+              <p:cTn id="2" dur="indefinite" nodeType="mainSeq">
+                <p:childTnLst>
+                  <p:par>
+                    <p:cTn id="3" fill="hold">
+                      <p:stCondLst>
+                        <p:cond delay="indefinite"/>
+                      </p:stCondLst>
+                      <p:childTnLst>
+                        <p:par>
+                          <p:cTn id="4" fill="hold">
+                            <p:stCondLst>
+                              <p:cond delay="0"/>
+                            </p:stCondLst>
+                            <p:childTnLst>
+                              <p:par>
+                                <p:cTn id="5" presetID="1" presetClass="entr" presetSubtype="0" fill="hold" grpId="0" nodeType="clickEffect">
+                                  <p:stCondLst>
+                                    <p:cond delay="0"/>
+                                  </p:stCondLst>
+                                  <p:childTnLst>
+                                    <p:set>
+                                      <p:cBhvr>
+                                        <p:cTn id="6" dur="1" fill="hold">
+                                          <p:stCondLst>
+                                            <p:cond delay="0"/>
+                                          </p:stCondLst>
+                                        </p:cTn>
+                                        <p:tgtEl>
+                                          <p:spTgt spid="4">
+                                            <p:txEl>
+                                              <p:pRg st="1" end="1"/>
+                                            </p:txEl>
+                                          </p:spTgt>
+                                        </p:tgtEl>
+                                        <p:attrNameLst>
+                                          <p:attrName>style.visibility</p:attrName>
+                                        </p:attrNameLst>
+                                      </p:cBhvr>
+                                      <p:to>
+                                        <p:strVal val="visible"/>
+                                      </p:to>
+                                    </p:set>
+                                  </p:childTnLst>
+                                </p:cTn>
+                              </p:par>
+                            </p:childTnLst>
+                          </p:cTn>
+                        </p:par>
+                      </p:childTnLst>
+                    </p:cTn>
+                  </p:par>
+                  <p:par>
+                    <p:cTn id="7" fill="hold">
+                      <p:stCondLst>
+                        <p:cond delay="indefinite"/>
+                      </p:stCondLst>
+                      <p:childTnLst>
+                        <p:par>
+                          <p:cTn id="8" fill="hold">
+                            <p:stCondLst>
+                              <p:cond delay="0"/>
+                            </p:stCondLst>
+                            <p:childTnLst>
+                              <p:par>
+                                <p:cTn id="9" presetID="1" presetClass="entr" presetSubtype="0" fill="hold" grpId="0" nodeType="clickEffect">
+                                  <p:stCondLst>
+                                    <p:cond delay="0"/>
+                                  </p:stCondLst>
+                                  <p:childTnLst>
+                                    <p:set>
+                                      <p:cBhvr>
+                                        <p:cTn id="10" dur="1" fill="hold">
+                                          <p:stCondLst>
+                                            <p:cond delay="0"/>
+                                          </p:stCondLst>
+                                        </p:cTn>
+                                        <p:tgtEl>
+                                          <p:spTgt spid="4">
+                                            <p:txEl>
+                                              <p:pRg st="2" end="2"/>
+                                            </p:txEl>
+                                          </p:spTgt>
+                                        </p:tgtEl>
+                                        <p:attrNameLst>
+                                          <p:attrName>style.visibility</p:attrName>
+                                        </p:attrNameLst>
+                                      </p:cBhvr>
+                                      <p:to>
+                                        <p:strVal val="visible"/>
+                                      </p:to>
+                                    </p:set>
+                                  </p:childTnLst>
+                                </p:cTn>
+                              </p:par>
+                            </p:childTnLst>
+                          </p:cTn>
+                        </p:par>
+                      </p:childTnLst>
+                    </p:cTn>
+                  </p:par>
+                  <p:par>
+                    <p:cTn id="11" fill="hold">
+                      <p:stCondLst>
+                        <p:cond delay="indefinite"/>
+                      </p:stCondLst>
+                      <p:childTnLst>
+                        <p:par>
+                          <p:cTn id="12" fill="hold">
+                            <p:stCondLst>
+                              <p:cond delay="0"/>
+                            </p:stCondLst>
+                            <p:childTnLst>
+                              <p:par>
+                                <p:cTn id="13" presetID="1" presetClass="entr" presetSubtype="0" fill="hold" grpId="0" nodeType="clickEffect">
+                                  <p:stCondLst>
+                                    <p:cond delay="0"/>
+                                  </p:stCondLst>
+                                  <p:childTnLst>
+                                    <p:set>
+                                      <p:cBhvr>
+                                        <p:cTn id="14" dur="1" fill="hold">
+                                          <p:stCondLst>
+                                            <p:cond delay="0"/>
+                                          </p:stCondLst>
+                                        </p:cTn>
+                                        <p:tgtEl>
+                                          <p:spTgt spid="4">
+                                            <p:txEl>
+                                              <p:pRg st="3" end="3"/>
+                                            </p:txEl>
+                                          </p:spTgt>
+                                        </p:tgtEl>
+                                        <p:attrNameLst>
+                                          <p:attrName>style.visibility</p:attrName>
+                                        </p:attrNameLst>
+                                      </p:cBhvr>
+                                      <p:to>
+                                        <p:strVal val="visible"/>
+                                      </p:to>
+                                    </p:set>
+                                  </p:childTnLst>
+                                </p:cTn>
+                              </p:par>
+                            </p:childTnLst>
+                          </p:cTn>
+                        </p:par>
+                      </p:childTnLst>
+                    </p:cTn>
+                  </p:par>
+                  <p:par>
+                    <p:cTn id="15" fill="hold">
+                      <p:stCondLst>
+                        <p:cond delay="indefinite"/>
+                      </p:stCondLst>
+                      <p:childTnLst>
+                        <p:par>
+                          <p:cTn id="16" fill="hold">
+                            <p:stCondLst>
+                              <p:cond delay="0"/>
+                            </p:stCondLst>
+                            <p:childTnLst>
+                              <p:par>
+                                <p:cTn id="17" presetID="1" presetClass="entr" presetSubtype="0" fill="hold" grpId="0" nodeType="clickEffect">
+                                  <p:stCondLst>
+                                    <p:cond delay="0"/>
+                                  </p:stCondLst>
+                                  <p:childTnLst>
+                                    <p:set>
+                                      <p:cBhvr>
+                                        <p:cTn id="18" dur="1" fill="hold">
+                                          <p:stCondLst>
+                                            <p:cond delay="0"/>
+                                          </p:stCondLst>
+                                        </p:cTn>
+                                        <p:tgtEl>
+                                          <p:spTgt spid="4">
+                                            <p:txEl>
+                                              <p:pRg st="4" end="4"/>
+                                            </p:txEl>
+                                          </p:spTgt>
+                                        </p:tgtEl>
+                                        <p:attrNameLst>
+                                          <p:attrName>style.visibility</p:attrName>
+                                        </p:attrNameLst>
+                                      </p:cBhvr>
+                                      <p:to>
+                                        <p:strVal val="visible"/>
+                                      </p:to>
+                                    </p:set>
+                                  </p:childTnLst>
+                                </p:cTn>
+                              </p:par>
+                            </p:childTnLst>
+                          </p:cTn>
+                        </p:par>
+                      </p:childTnLst>
+                    </p:cTn>
+                  </p:par>
+                  <p:par>
+                    <p:cTn id="19" fill="hold">
+                      <p:stCondLst>
+                        <p:cond delay="indefinite"/>
+                      </p:stCondLst>
+                      <p:childTnLst>
+                        <p:par>
+                          <p:cTn id="20" fill="hold">
+                            <p:stCondLst>
+                              <p:cond delay="0"/>
+                            </p:stCondLst>
+                            <p:childTnLst>
+                              <p:par>
+                                <p:cTn id="21" presetID="1" presetClass="entr" presetSubtype="0" fill="hold" grpId="0" nodeType="clickEffect">
+                                  <p:stCondLst>
+                                    <p:cond delay="0"/>
+                                  </p:stCondLst>
+                                  <p:childTnLst>
+                                    <p:set>
+                                      <p:cBhvr>
+                                        <p:cTn id="22" dur="1" fill="hold">
+                                          <p:stCondLst>
+                                            <p:cond delay="0"/>
+                                          </p:stCondLst>
+                                        </p:cTn>
+                                        <p:tgtEl>
+                                          <p:spTgt spid="4">
+                                            <p:txEl>
+                                              <p:pRg st="5" end="5"/>
+                                            </p:txEl>
+                                          </p:spTgt>
+                                        </p:tgtEl>
+                                        <p:attrNameLst>
+                                          <p:attrName>style.visibility</p:attrName>
+                                        </p:attrNameLst>
+                                      </p:cBhvr>
+                                      <p:to>
+                                        <p:strVal val="visible"/>
+                                      </p:to>
+                                    </p:set>
+                                  </p:childTnLst>
+                                </p:cTn>
+                              </p:par>
+                            </p:childTnLst>
+                          </p:cTn>
+                        </p:par>
+                      </p:childTnLst>
+                    </p:cTn>
+                  </p:par>
+                </p:childTnLst>
+              </p:cTn>
+              <p:prevCondLst>
+                <p:cond evt="onPrev" delay="0">
+                  <p:tgtEl>
+                    <p:sldTgt/>
+                  </p:tgtEl>
+                </p:cond>
+              </p:prevCondLst>
+              <p:nextCondLst>
+                <p:cond evt="onNext" delay="0">
+                  <p:tgtEl>
+                    <p:sldTgt/>
+                  </p:tgtEl>
+                </p:cond>
+              </p:nextCondLst>
+            </p:seq>
+          </p:childTnLst>
+        </p:cTn>
+      </p:par>
+    </p:tnLst>
+    <p:bldLst>
+      <p:bldP spid="4" grpId="0" uiExpand="1" build="p"/>
+    </p:bldLst>
+  </p:timing>
+</p:sld>
+</file>
+
+<file path=ppt/slides/slide7.xml><?xml version="1.0" encoding="UTF-8"?><p:sld xmlns:a="http://schemas.openxmlformats.org/drawingml/2006/main" xmlns:r="http://schemas.openxmlformats.org/officeDocument/2006/relationships" xmlns:p="http://schemas.openxmlformats.org/presentationml/2006/main"><p:cSld><p:spTree><p:nvGrpSpPr><p:cNvPr id="1" name="" /><p:cNvGrpSpPr /><p:nvPr /></p:nvGrpSpPr><p:grpSpPr><a:xfrm><a:off x="0" y="0" /><a:ext cx="0" cy="0" /><a:chOff x="0" y="0" /><a:chExt cx="0" cy="0" /></a:xfrm></p:grpSpPr><mc:AlternateContent xmlns:mc="http://schemas.openxmlformats.org/markup-compatibility/2006"><mc:Choice xmlns:a14="http://schemas.microsoft.com/office/drawing/2010/main" Requires="a14"><p:sp><p:nvSpPr><p:cNvPr id="4" name="Text Placeholder 3" /><p:cNvSpPr><a:spLocks noGrp="1" /></p:cNvSpPr><p:nvPr><p:ph idx="2" sz="half" type="body" /></p:nvPr></p:nvSpPr><p:spPr /><p:txBody><a:bodyPr /><a:lstStyle /><a:p><a:pPr lvl="0" indent="0" marL="0"><a:buNone /></a:pPr><a:r><a:rPr /><a:t>. . .</a:t></a:r></a:p><a:p><a:pPr lvl="0" indent="0" marL="0"><a:buNone /></a:pPr><a:r><a:rPr /><a:t>The right choice depends on the problem — interpretability often matters more than classification accuracy.</a:t></a:r></a:p><a:p><a:pPr lvl="0" indent="0" marL="0"><a:spcBef><a:spcPts val="3000" /></a:spcBef><a:buNone /></a:pPr><a:r><a:rPr b="1" /><a:t>CART: Recursive Splitting</a:t></a:r></a:p><a:p><a:pPr lvl="0" indent="0" marL="0"><a:buNone /></a:pPr><a:r><a:rPr /><a:t>CART partitions the input space by recursive binary splits. At each node, find the variable </a:t></a:r><a14:m><m:oMath xmlns:m="http://schemas.openxmlformats.org/officeDocument/2006/math"><m:sSub><m:e><m:r><m:t>X</m:t></m:r></m:e><m:sub><m:r><m:t>k</m:t></m:r></m:sub></m:sSub></m:oMath></a14:m><a:r><a:rPr /><a:t> and threshold </a:t></a:r><a14:m><m:oMath xmlns:m="http://schemas.openxmlformats.org/officeDocument/2006/math"><m:r><m:t>t</m:t></m:r></m:oMath></a14:m><a:r><a:rPr /><a:t> that minimizes </a:t></a:r><a:r><a:rPr b="1" /><a:t>Gini impurity</a:t></a:r><a:r><a:rPr /><a:t> in the two resulting child nodes:</a:t></a:r></a:p><a:p><a:pPr lvl="0" indent="0" marL="0"><a:buNone /></a:pPr><a14:m><m:oMathPara xmlns:m="http://schemas.openxmlformats.org/officeDocument/2006/math"><m:oMathParaPr><m:jc m:val="center" /></m:oMathParaPr><m:oMath><m:sSub><m:e><m:r><m:t>G</m:t></m:r></m:e><m:sub><m:r><m:t>m</m:t></m:r></m:sub></m:sSub><m:r><m:rPr><m:sty m:val="p" /></m:rPr><m:t>=</m:t></m:r><m:r><m:t>2</m:t></m:r><m:r><m:t> </m:t></m:r><m:sSub><m:e><m:r><m:t>p</m:t></m:r></m:e><m:sub><m:r><m:t>m</m:t></m:r></m:sub></m:sSub><m:r><m:t> </m:t></m:r><m:d><m:dPr><m:begChr m:val="(" /><m:sepChr m:val="" /><m:endChr m:val=")" /><m:grow /></m:dPr><m:e><m:r><m:t>1</m:t></m:r><m:r><m:rPr><m:sty m:val="p" /></m:rPr><m:t>−</m:t></m:r><m:sSub><m:e><m:r><m:t>p</m:t></m:r></m:e><m:sub><m:r><m:t>m</m:t></m:r></m:sub></m:sSub></m:e></m:d></m:oMath></m:oMathPara></a14:m></a:p><a:p><a:pPr lvl="0" indent="0" marL="0"><a:buNone /></a:pPr><a:r><a:rPr /><a:t>where </a:t></a:r><a14:m><m:oMath xmlns:m="http://schemas.openxmlformats.org/officeDocument/2006/math"><m:sSub><m:e><m:r><m:t>p</m:t></m:r></m:e><m:sub><m:r><m:t>m</m:t></m:r></m:sub></m:sSub></m:oMath></a14:m><a:r><a:rPr /><a:t> is the fraction of failures in node </a:t></a:r><a14:m><m:oMath xmlns:m="http://schemas.openxmlformats.org/officeDocument/2006/math"><m:r><m:t>m</m:t></m:r></m:oMath></a14:m><a:r><a:rPr /><a:t> (</a:t></a:r><a14:m><m:oMath xmlns:m="http://schemas.openxmlformats.org/officeDocument/2006/math"><m:sSub><m:e><m:r><m:t>G</m:t></m:r></m:e><m:sub><m:r><m:t>m</m:t></m:r></m:sub></m:sSub><m:r><m:rPr><m:sty m:val="p" /></m:rPr><m:t>=</m:t></m:r><m:r><m:t>0</m:t></m:r></m:oMath></a14:m><a:r><a:rPr /><a:t> is pure; </a:t></a:r><a14:m><m:oMath xmlns:m="http://schemas.openxmlformats.org/officeDocument/2006/math"><m:sSub><m:e><m:r><m:t>G</m:t></m:r></m:e><m:sub><m:r><m:t>m</m:t></m:r></m:sub></m:sSub><m:r><m:rPr><m:sty m:val="p" /></m:rPr><m:t>=</m:t></m:r><m:r><m:t>0.5</m:t></m:r></m:oMath></a14:m><a:r><a:rPr /><a:t> is maximally mixed).</a:t></a:r></a:p><a:p><a:pPr lvl="0" indent="0" marL="0"><a:buNone /></a:pPr><a:r><a:rPr /><a:t>. . .</a:t></a:r></a:p><a:p><a:pPr lvl="0" indent="0" marL="0"><a:buNone /></a:pPr><a14:m><m:oMathPara xmlns:m="http://schemas.openxmlformats.org/officeDocument/2006/math"><m:oMathParaPr><m:jc m:val="center" /></m:oMathParaPr><m:oMath><m:r><m:rPr><m:nor /><m:sty m:val="p" /></m:rPr><m:t>Best split: </m:t></m:r><m:limLow><m:e><m:r><m:rPr><m:sty m:val="p" /></m:rPr><m:t>arg</m:t></m:r><m:r><m:rPr><m:sty m:val="p" /></m:rPr><m:t>min</m:t></m:r></m:e><m:lim><m:sSub><m:e><m:r><m:t>X</m:t></m:r></m:e><m:sub><m:r><m:t>k</m:t></m:r></m:sub></m:sSub><m:r><m:rPr><m:sty m:val="p" /></m:rPr><m:t>,</m:t></m:r><m:r><m:t> </m:t></m:r><m:r><m:t>t</m:t></m:r></m:lim></m:limLow><m:r><m:t> </m:t></m:r><m:f><m:fPr><m:type m:val="bar" /></m:fPr><m:num><m:sSub><m:e><m:r><m:t>N</m:t></m:r></m:e><m:sub><m:r><m:t>L</m:t></m:r></m:sub></m:sSub></m:num><m:den><m:r><m:t>N</m:t></m:r></m:den></m:f><m:sSub><m:e><m:r><m:t>G</m:t></m:r></m:e><m:sub><m:r><m:t>L</m:t></m:r></m:sub></m:sSub><m:r><m:rPr><m:sty m:val="p" /></m:rPr><m:t>+</m:t></m:r><m:f><m:fPr><m:type m:val="bar" /></m:fPr><m:num><m:sSub><m:e><m:r><m:t>N</m:t></m:r></m:e><m:sub><m:r><m:t>R</m:t></m:r></m:sub></m:sSub></m:num><m:den><m:r><m:t>N</m:t></m:r></m:den></m:f><m:sSub><m:e><m:r><m:t>G</m:t></m:r></m:e><m:sub><m:r><m:t>R</m:t></m:r></m:sub></m:sSub></m:oMath></m:oMathPara></a14:m></a:p><a:p><a:pPr lvl="0" indent="0" marL="0"><a:buNone /></a:pPr><a:r><a:rPr /><a:t>. . .</a:t></a:r></a:p><a:p><a:pPr lvl="0" indent="0" marL="0"><a:buNone /></a:pPr><a:r><a:rPr /><a:t>Why minimize Gini? Each split should make the children as </a:t></a:r><a:r><a:rPr i="1" /><a:t>pure</a:t></a:r><a:r><a:rPr /><a:t> as possible — nodes where almost all scenarios are failures, or almost none are.</a:t></a:r></a:p><a:p><a:pPr lvl="0" indent="0" marL="0"><a:spcBef><a:spcPts val="3000" /></a:spcBef><a:buNone /></a:pPr><a:r><a:rPr b="1" /><a:t>CART vs. Random Forests</a:t></a:r></a:p><a:p><a:pPr lvl="0" indent="0" marL="0"><a:buNone /></a:pPr><a:r><a:rPr /><a:t>A single CART tree is a </a:t></a:r><a:r><a:rPr b="1" /><a:t>deterministic</a:t></a:r><a:r><a:rPr /><a:t> partition: one tree, one set of rules.</a:t></a:r></a:p><a:p><a:pPr lvl="0" indent="0" marL="0"><a:buNone /></a:pPr><a:r><a:rPr /><a:t>. . .</a:t></a:r></a:p><a:p><a:pPr lvl="0" indent="0" marL="0"><a:buNone /></a:pPr><a:r><a:rPr /><a:t>A </a:t></a:r><a:r><a:rPr b="1" /><a:t>random forest</a:t></a:r><a:r><a:rPr /><a:t> builds hundreds of trees, each on a random subsample of the data and features, then averages their predictions.</a:t></a:r></a:p><a:p><a:pPr lvl="0" /><a:r><a:rPr /><a:t>Random forests are more accurate and more stable</a:t></a:r></a:p><a:p><a:pPr lvl="0" /><a:r><a:rPr /><a:t>But the output is a black box — you can’t read off simple “if/then” rules</a:t></a:r></a:p><a:p><a:pPr lvl="0" /><a:r><a:rPr /><a:t>For scenario discovery, we want </a:t></a:r><a:r><a:rPr i="1" /><a:t>interpretable boundaries</a:t></a:r><a:r><a:rPr /><a:t>, not maximum accuracy</a:t></a:r></a:p><a:p><a:pPr lvl="0" indent="0" marL="0"><a:buNone /></a:pPr><a:r><a:rPr /><a:t>. . .</a:t></a:r></a:p><a:p><a:pPr lvl="0" indent="0" marL="1270000"><a:buNone /></a:pPr><a:r><a:rPr sz="2000" b="1" /><a:t>Discussion</a:t></a:r></a:p><a:p><a:pPr lvl="0" indent="0" marL="1270000"><a:buNone /></a:pPr><a:r><a:rPr sz="2000" /><a:t>Why might a decision-maker prefer a single, less accurate tree over a more accurate but opaque ensemble?</a:t></a:r></a:p><a:p><a:pPr lvl="0" indent="0" marL="0"><a:spcBef><a:spcPts val="3000" /></a:spcBef><a:buNone /></a:pPr><a:r><a:rPr b="1" /><a:t>CART: From Tree to Partition</a:t></a:r></a:p><a:p><a:pPr lvl="0" indent="0" marL="0"><a:buNone /></a:pPr><a:r><a:rPr /><a:t>Each leaf predicts the </a:t></a:r><a:r><a:rPr b="1" /><a:t>majority class</a:t></a:r><a:r><a:rPr /><a:t> — failure (</a:t></a:r><a14:m><m:oMath xmlns:m="http://schemas.openxmlformats.org/officeDocument/2006/math"><m:r><m:t>y</m:t></m:r><m:r><m:rPr><m:sty m:val="p" /></m:rPr><m:t>=</m:t></m:r><m:r><m:t>1</m:t></m:r></m:oMath></a14:m><a:r><a:rPr /><a:t>) if more than half its scenarios are failures.</a:t></a:r></a:p><a:p><a:pPr lvl="0" indent="0" marL="0"><a:buNone /></a:pPr><a:r><a:rPr /><a:t>. . .</a:t></a:r></a:p><a:p><a:pPr lvl="0" indent="0" marL="0"><a:buNone /></a:pPr><a:r><a:rPr /><a:t>Example: a two-level tree on SLR rate and flood damage might produce:</a:t></a:r></a:p></p:txBody></p:sp></mc:Choice></mc:AlternateContent><p:graphicFrame><p:nvGraphicFramePr><p:cNvPr id="6" name="Content Placeholder 5" /><p:cNvGraphicFramePr><a:graphicFrameLocks noGrp="1" /></p:cNvGraphicFramePr><p:nvPr><p:ph idx="1" /></p:nvPr></p:nvGraphicFramePr><p:xfrm><a:off x="3568700" y="203200" /><a:ext cx="5105400" cy="4381500" /></p:xfrm><a:graphic><a:graphicData uri="http://schemas.openxmlformats.org/drawingml/2006/table"><a:tbl><a:tblPr firstRow="1" bandRow="1"><a:tableStyleId>{5C22544A-7EE6-4342-B048-85BDC9FD1C3A}</a:tableStyleId></a:tblPr><a:tblGrid><a:gridCol w="1270000" /><a:gridCol w="1270000" /><a:gridCol w="1270000" /><a:gridCol w="1270000" /></a:tblGrid><a:tr h="0"><a:tc><a:txBody><a:bodyPr /><a:lstStyle /><a:p><a:pPr lvl="0" indent="0" marL="0" algn="l"><a:buNone /></a:pPr><a:r><a:rPr /><a:t>Leaf</a:t></a:r></a:p></a:txBody><a:tcPr /></a:tc><a:tc><a:txBody><a:bodyPr /><a:lstStyle /><a:p><a:pPr lvl="0" indent="0" marL="0" algn="ctr"><a:buNone /></a:pPr><a:r><a:rPr /><a:t>SLR (m/century)</a:t></a:r></a:p></a:txBody><a:tcPr /></a:tc><a:tc><a:txBody><a:bodyPr /><a:lstStyle /><a:p><a:pPr lvl="0" indent="0" marL="0" algn="ctr"><a:buNone /></a:pPr><a:r><a:rPr /><a:t>Flood Damage ($B)</a:t></a:r></a:p></a:txBody><a:tcPr /></a:tc><a:tc><a:txBody><a:bodyPr /><a:lstStyle /><a:p><a:pPr lvl="0" indent="0" marL="0" algn="ctr"><a:buNone /></a:pPr><a:r><a:rPr /><a:t>Majority</a:t></a:r></a:p></a:txBody><a:tcPr /></a:tc></a:tr><a:tr h="0"><a:tc><a:txBody><a:bodyPr /><a:lstStyle /><a:p><a:pPr lvl="0" indent="0" marL="0" algn="l"><a:buNone /></a:pPr><a:r><a:rPr /><a:t>1</a:t></a:r></a:p></a:txBody></a:tc><a:tc><a:txBody><a:bodyPr /><a:lstStyle /><a:p><a:pPr lvl="0" indent="0" marL="0" algn="ctr"><a:buNone /></a:pPr><a14:m><m:oMath xmlns:m="http://schemas.openxmlformats.org/officeDocument/2006/math"><m:r><m:rPr><m:sty m:val="p" /></m:rPr><m:t>≤</m:t></m:r><m:r><m:t>0.5</m:t></m:r></m:oMath></a14:m></a:p></a:txBody></a:tc><a:tc><a:txBody><a:bodyPr /><a:lstStyle /><a:p><a:pPr lvl="0" indent="0" marL="0" algn="ctr"><a:buNone /></a:pPr><a:r><a:rPr /><a:t>any</a:t></a:r></a:p></a:txBody></a:tc><a:tc><a:txBody><a:bodyPr /><a:lstStyle /><a:p><a:pPr lvl="0" indent="0" marL="0" algn="ctr"><a:buNone /></a:pPr><a:r><a:rPr /><a:t>success</a:t></a:r></a:p></a:txBody></a:tc></a:tr><a:tr h="0"><a:tc><a:txBody><a:bodyPr /><a:lstStyle /><a:p><a:pPr lvl="0" indent="0" marL="0" algn="l"><a:buNone /></a:pPr><a:r><a:rPr /><a:t>2</a:t></a:r></a:p></a:txBody></a:tc><a:tc><a:txBody><a:bodyPr /><a:lstStyle /><a:p><a:pPr lvl="0" indent="0" marL="0" algn="ctr"><a:buNone /></a:pPr><a14:m><m:oMath xmlns:m="http://schemas.openxmlformats.org/officeDocument/2006/math"><m:r><m:rPr><m:sty m:val="p" /></m:rPr><m:t>&gt;</m:t></m:r><m:r><m:t>0.5</m:t></m:r></m:oMath></a14:m></a:p></a:txBody></a:tc><a:tc><a:txBody><a:bodyPr /><a:lstStyle /><a:p><a:pPr lvl="0" indent="0" marL="0" algn="ctr"><a:buNone /></a:pPr><a14:m><m:oMath xmlns:m="http://schemas.openxmlformats.org/officeDocument/2006/math"><m:r><m:rPr><m:sty m:val="p" /></m:rPr><m:t>≤</m:t></m:r><m:r><m:t>2</m:t></m:r></m:oMath></a14:m></a:p></a:txBody></a:tc><a:tc><a:txBody><a:bodyPr /><a:lstStyle /><a:p><a:pPr lvl="0" indent="0" marL="0" algn="ctr"><a:buNone /></a:pPr><a:r><a:rPr /><a:t>success</a:t></a:r></a:p></a:txBody></a:tc></a:tr><a:tr h="0"><a:tc><a:txBody><a:bodyPr /><a:lstStyle /><a:p><a:pPr lvl="0" indent="0" marL="0" algn="l"><a:buNone /></a:pPr><a:r><a:rPr /><a:t>3</a:t></a:r></a:p></a:txBody></a:tc><a:tc><a:txBody><a:bodyPr /><a:lstStyle /><a:p><a:pPr lvl="0" indent="0" marL="0" algn="ctr"><a:buNone /></a:pPr><a14:m><m:oMath xmlns:m="http://schemas.openxmlformats.org/officeDocument/2006/math"><m:r><m:rPr><m:sty m:val="p" /></m:rPr><m:t>&gt;</m:t></m:r><m:r><m:t>0.5</m:t></m:r></m:oMath></a14:m></a:p></a:txBody></a:tc><a:tc><a:txBody><a:bodyPr /><a:lstStyle /><a:p><a:pPr lvl="0" indent="0" marL="0" algn="ctr"><a:buNone /></a:pPr><a14:m><m:oMath xmlns:m="http://schemas.openxmlformats.org/officeDocument/2006/math"><m:r><m:rPr><m:sty m:val="p" /></m:rPr><m:t>&gt;</m:t></m:r><m:r><m:t>2</m:t></m:r></m:oMath></a14:m></a:p></a:txBody></a:tc><a:tc><a:txBody><a:bodyPr /><a:lstStyle /><a:p><a:pPr lvl="0" indent="0" marL="0" algn="ctr"><a:buNone /></a:pPr><a:r><a:rPr b="1" /><a:t>failure</a:t></a:r></a:p></a:txBody></a:tc></a:tr></a:tbl></a:graphicData></a:graphic></p:graphicFrame></p:spTree></p:cSld><p:timing><p:tnLst><p:par><p:cTn id="1" dur="indefinite" restart="never" nodeType="tmRoot"><p:childTnLst><p:seq concurrent="1" nextAc="seek"><p:cTn id="2" dur="indefinite" nodeType="mainSeq"><p:childTnLst><p:par><p:cTn id="3" fill="hold"><p:stCondLst><p:cond delay="indefinite" /></p:stCondLst><p:childTnLst><p:par><p:cTn id="4" fill="hold"><p:stCondLst><p:cond delay="0" /></p:stCondLst><p:childTnLst><p:par><p:cTn id="5" presetID="1" presetClass="entr" presetSubtype="0" fill="hold" grpId="0" nodeType="clickEffect"><p:stCondLst><p:cond delay="0" /></p:stCondLst><p:childTnLst><p:set><p:cBhvr><p:cTn id="6" dur="1" fill="hold"><p:stCondLst><p:cond delay="0" /></p:stCondLst></p:cTn><p:tgtEl><p:spTgt spid="4"><p:txEl><p:pRg st="14" end="14" /></p:txEl></p:spTgt></p:tgtEl><p:attrNameLst><p:attrName>style.visibility</p:attrName></p:attrNameLst></p:cBhvr><p:to><p:strVal val="visible" /></p:to></p:set></p:childTnLst></p:cTn></p:par></p:childTnLst></p:cTn></p:par></p:childTnLst></p:cTn></p:par><p:par><p:cTn id="7" fill="hold"><p:stCondLst><p:cond delay="indefinite" /></p:stCondLst><p:childTnLst><p:par><p:cTn id="8" fill="hold"><p:stCondLst><p:cond delay="0" /></p:stCondLst><p:childTnLst><p:par><p:cTn id="9" presetID="1" presetClass="entr" presetSubtype="0" fill="hold" grpId="0" nodeType="clickEffect"><p:stCondLst><p:cond delay="0" /></p:stCondLst><p:childTnLst><p:set><p:cBhvr><p:cTn id="10" dur="1" fill="hold"><p:stCondLst><p:cond delay="0" /></p:stCondLst></p:cTn><p:tgtEl><p:spTgt spid="4"><p:txEl><p:pRg st="15" end="15" /></p:txEl></p:spTgt></p:tgtEl><p:attrNameLst><p:attrName>style.visibility</p:attrName></p:attrNameLst></p:cBhvr><p:to><p:strVal val="visible" /></p:to></p:set></p:childTnLst></p:cTn></p:par></p:childTnLst></p:cTn></p:par></p:childTnLst></p:cTn></p:par><p:par><p:cTn id="11" fill="hold"><p:stCondLst><p:cond delay="indefinite" /></p:stCondLst><p:childTnLst><p:par><p:cTn id="12" fill="hold"><p:stCondLst><p:cond delay="0" /></p:stCondLst><p:childTnLst><p:par><p:cTn id="13" presetID="1" presetClass="entr" presetSubtype="0" fill="hold" grpId="0" nodeType="clickEffect"><p:stCondLst><p:cond delay="0" /></p:stCondLst><p:childTnLst><p:set><p:cBhvr><p:cTn id="14" dur="1" fill="hold"><p:stCondLst><p:cond delay="0" /></p:stCondLst></p:cTn><p:tgtEl><p:spTgt spid="4"><p:txEl><p:pRg st="16" end="16" /></p:txEl></p:spTgt></p:tgtEl><p:attrNameLst><p:attrName>style.visibility</p:attrName></p:attrNameLst></p:cBhvr><p:to><p:strVal val="visible" /></p:to></p:set></p:childTnLst></p:cTn></p:par></p:childTnLst></p:cTn></p:par></p:childTnLst></p:cTn></p:par></p:childTnLst></p:cTn><p:prevCondLst><p:cond evt="onPrev" delay="0"><p:tgtEl><p:sldTgt /></p:tgtEl></p:cond></p:prevCondLst><p:nextCondLst><p:cond evt="onNext" delay="0"><p:tgtEl><p:sldTgt /></p:tgtEl></p:cond></p:nextCondLst></p:seq></p:childTnLst></p:cTn></p:par></p:tnLst><p:bldLst><p:bldP spid="4" grpId="0" uiExpand="1" build="p" /></p:bldLst></p:timing></p:sld>
+</file>
+
+<file path=ppt/slides/slide8.xml><?xml version="1.0" encoding="UTF-8"?><p:sld xmlns:a="http://schemas.openxmlformats.org/drawingml/2006/main" xmlns:r="http://schemas.openxmlformats.org/officeDocument/2006/relationships" xmlns:p="http://schemas.openxmlformats.org/presentationml/2006/main"><p:cSld><p:spTree><p:nvGrpSpPr><p:cNvPr id="1" name="" /><p:cNvGrpSpPr /><p:nvPr /></p:nvGrpSpPr><p:grpSpPr><a:xfrm><a:off x="0" y="0" /><a:ext cx="0" cy="0" /><a:chOff x="0" y="0" /><a:chExt cx="0" cy="0" /></a:xfrm></p:grpSpPr><mc:AlternateContent xmlns:mc="http://schemas.openxmlformats.org/markup-compatibility/2006"><mc:Choice xmlns:a14="http://schemas.microsoft.com/office/drawing/2010/main" Requires="a14"><p:sp><p:nvSpPr><p:cNvPr id="4" name="Text Placeholder 3" /><p:cNvSpPr><a:spLocks noGrp="1" /></p:cNvSpPr><p:nvPr><p:ph idx="2" sz="half" type="body" /></p:nvPr></p:nvSpPr><p:spPr /><p:txBody><a:bodyPr /><a:lstStyle /><a:p><a:pPr lvl="0" indent="0" marL="0"><a:buNone /></a:pPr><a:r><a:rPr /><a:t>. . .</a:t></a:r></a:p><a:p><a:pPr lvl="0" indent="0" marL="0"><a:buNone /></a:pPr><a:r><a:rPr /><a:t>Result: interpretable “if/then” rules — but boundaries are fixed top-down, not iteratively refined.</a:t></a:r></a:p><a:p><a:pPr lvl="0" indent="0" marL="0"><a:spcBef><a:spcPts val="3000" /></a:spcBef><a:buNone /></a:pPr><a:r><a:rPr b="1" /><a:t>Think-Pair-Share: Labeling Failures</a:t></a:r></a:p><a:p><a:pPr lvl="0" indent="0" marL="1270000"><a:buNone /></a:pPr><a:r><a:rPr sz="2000" b="1" /><a:t>Scenario</a:t></a:r></a:p><a:p><a:pPr lvl="0" indent="0" marL="1270000"><a:buNone /></a:pPr><a:r><a:rPr sz="2000" /><a:t>A city is evaluating a coastal sea wall sized for a 1-in-50-year storm surge, at a cost of $200M. Uncertain inputs: storm surge magnitude, sea level rise rate, future population exposure, discount rate, construction cost overrun.</a:t></a:r></a:p><a:p><a:pPr lvl="0" indent="0" marL="1270000"><a:buNone /></a:pPr><a:r><a:rPr sz="2000" b="1" /><a:t>Write (90 seconds)</a:t></a:r></a:p><a:p><a:pPr lvl="0" indent="0" marL="1270000"><a:buNone /></a:pPr><a:r><a:rPr sz="2000" /><a:t>In one sentence, define what “failure” means for this decision. Then write which two inputs you expect most drive failures and why.</a:t></a:r></a:p><a:p><a:pPr lvl="0" indent="0" marL="0"><a:buNone /></a:pPr><a:r><a:rPr b="1" /><a:t>Pair</a:t></a:r><a:r><a:rPr /><a:t>: Compare with your neighbor. Did you define failure the same way?</a:t></a:r></a:p><a:p><a:pPr lvl="0" indent="0" marL="0"><a:spcBef><a:spcPts val="3000" /></a:spcBef><a:buNone /></a:pPr><a:r><a:rPr b="1" /><a:t>Logistic Regression: The Model</a:t></a:r></a:p><a:p><a:pPr lvl="0" indent="0" marL="0"><a:buNone /></a:pPr><a:r><a:rPr /><a:t>For scenario </a:t></a:r><a14:m><m:oMath xmlns:m="http://schemas.openxmlformats.org/officeDocument/2006/math"><m:r><m:t>i</m:t></m:r></m:oMath></a14:m><a:r><a:rPr /><a:t> with input vector </a:t></a:r><a14:m><m:oMath xmlns:m="http://schemas.openxmlformats.org/officeDocument/2006/math"><m:sSub><m:e><m:r><m:rPr><m:sty m:val="b" /></m:rPr><m:t>z</m:t></m:r></m:e><m:sub><m:r><m:t>i</m:t></m:r></m:sub></m:sSub></m:oMath></a14:m><a:r><a:rPr /><a:t>, model the log-odds of failure:</a:t></a:r></a:p><a:p><a:pPr lvl="0" indent="0" marL="0"><a:buNone /></a:pPr><a14:m><m:oMathPara xmlns:m="http://schemas.openxmlformats.org/officeDocument/2006/math"><m:oMathParaPr><m:jc m:val="center" /></m:oMathParaPr><m:oMath><m:r><m:rPr><m:sty m:val="p" /></m:rPr><m:t>log</m:t></m:r><m:f><m:fPr><m:type m:val="bar" /></m:fPr><m:num><m:sSub><m:e><m:r><m:t>p</m:t></m:r></m:e><m:sub><m:r><m:t>i</m:t></m:r></m:sub></m:sSub></m:num><m:den><m:r><m:t>1</m:t></m:r><m:r><m:rPr><m:sty m:val="p" /></m:rPr><m:t>−</m:t></m:r><m:sSub><m:e><m:r><m:t>p</m:t></m:r></m:e><m:sub><m:r><m:t>i</m:t></m:r></m:sub></m:sSub></m:den></m:f><m:r><m:rPr><m:sty m:val="p" /></m:rPr><m:t>=</m:t></m:r><m:sSub><m:e><m:r><m:t>b</m:t></m:r></m:e><m:sub><m:r><m:t>0</m:t></m:r></m:sub></m:sSub><m:r><m:rPr><m:sty m:val="p" /></m:rPr><m:t>+</m:t></m:r><m:sSub><m:e><m:r><m:t>b</m:t></m:r></m:e><m:sub><m:r><m:t>1</m:t></m:r></m:sub></m:sSub><m:sSub><m:e><m:r><m:t>z</m:t></m:r></m:e><m:sub><m:r><m:t>i</m:t></m:r><m:r><m:t>1</m:t></m:r></m:sub></m:sSub><m:r><m:rPr><m:sty m:val="p" /></m:rPr><m:t>+</m:t></m:r><m:sSub><m:e><m:r><m:t>b</m:t></m:r></m:e><m:sub><m:r><m:t>2</m:t></m:r></m:sub></m:sSub><m:sSub><m:e><m:r><m:t>z</m:t></m:r></m:e><m:sub><m:r><m:t>i</m:t></m:r><m:r><m:t>2</m:t></m:r></m:sub></m:sSub><m:r><m:rPr><m:sty m:val="p" /></m:rPr><m:t>+</m:t></m:r><m:r><m:rPr><m:sty m:val="p" /></m:rPr><m:t>⋯</m:t></m:r><m:r><m:rPr><m:sty m:val="p" /></m:rPr><m:t>=</m:t></m:r><m:sSup><m:e><m:r><m:rPr><m:sty m:val="b" /></m:rPr><m:t>b</m:t></m:r></m:e><m:sup><m:r><m:rPr><m:sty m:val="p" /></m:rPr><m:t>⊤</m:t></m:r></m:sup></m:sSup><m:sSub><m:e><m:r><m:rPr><m:sty m:val="b" /></m:rPr><m:t>z</m:t></m:r></m:e><m:sub><m:r><m:t>i</m:t></m:r></m:sub></m:sSub></m:oMath></m:oMathPara></a14:m></a:p><a:p><a:pPr lvl="0" indent="0" marL="0"><a:buNone /></a:pPr><a:r><a:rPr /><a:t>. . .</a:t></a:r></a:p><a:p><a:pPr lvl="0" indent="0" marL="0"><a:buNone /></a:pPr><a:r><a:rPr /><a:t>Solving for </a:t></a:r><a14:m><m:oMath xmlns:m="http://schemas.openxmlformats.org/officeDocument/2006/math"><m:sSub><m:e><m:r><m:t>p</m:t></m:r></m:e><m:sub><m:r><m:t>i</m:t></m:r></m:sub></m:sSub></m:oMath></a14:m><a:r><a:rPr /><a:t> gives the </a:t></a:r><a:r><a:rPr b="1" /><a:t>sigmoid function</a:t></a:r><a:r><a:rPr /><a:t>:</a:t></a:r></a:p><a:p><a:pPr lvl="0" indent="0" marL="0"><a:buNone /></a:pPr><a14:m><m:oMathPara xmlns:m="http://schemas.openxmlformats.org/officeDocument/2006/math"><m:oMathParaPr><m:jc m:val="center" /></m:oMathParaPr><m:oMath><m:sSub><m:e><m:r><m:t>p</m:t></m:r></m:e><m:sub><m:r><m:t>i</m:t></m:r></m:sub></m:sSub><m:r><m:rPr><m:sty m:val="p" /></m:rPr><m:t>=</m:t></m:r><m:f><m:fPr><m:type m:val="bar" /></m:fPr><m:num><m:r><m:t>1</m:t></m:r></m:num><m:den><m:r><m:t>1</m:t></m:r><m:r><m:rPr><m:sty m:val="p" /></m:rPr><m:t>+</m:t></m:r><m:sSup><m:e><m:r><m:t>e</m:t></m:r></m:e><m:sup><m:r><m:rPr><m:sty m:val="p" /></m:rPr><m:t>−</m:t></m:r><m:sSup><m:e><m:r><m:rPr><m:sty m:val="b" /></m:rPr><m:t>b</m:t></m:r></m:e><m:sup><m:r><m:rPr><m:sty m:val="p" /></m:rPr><m:t>⊤</m:t></m:r></m:sup></m:sSup><m:sSub><m:e><m:r><m:rPr><m:sty m:val="b" /></m:rPr><m:t>z</m:t></m:r></m:e><m:sub><m:r><m:t>i</m:t></m:r></m:sub></m:sSub></m:sup></m:sSup></m:den></m:f></m:oMath></m:oMathPara></a14:m></a:p><a:p><a:pPr lvl="0" indent="0" marL="0"><a:buNone /></a:pPr><a:r><a:rPr /><a:t>. . .</a:t></a:r></a:p><a:p><a:pPr lvl="0" indent="0" marL="0"><a:buNone /></a:pPr><a14:m><m:oMath xmlns:m="http://schemas.openxmlformats.org/officeDocument/2006/math"><m:sSub><m:e><m:r><m:t>p</m:t></m:r></m:e><m:sub><m:r><m:t>i</m:t></m:r></m:sub></m:sSub><m:r><m:rPr><m:sty m:val="p" /></m:rPr><m:t>∈</m:t></m:r><m:d><m:dPr><m:begChr m:val="(" /><m:sepChr m:val="" /><m:endChr m:val=")" /><m:grow /></m:dPr><m:e><m:r><m:t>0</m:t></m:r><m:r><m:rPr><m:sty m:val="p" /></m:rPr><m:t>,</m:t></m:r><m:r><m:t>1</m:t></m:r></m:e></m:d></m:oMath></a14:m><a:r><a:rPr /><a:t> always. Classify as failure if </a:t></a:r><a14:m><m:oMath xmlns:m="http://schemas.openxmlformats.org/officeDocument/2006/math"><m:sSub><m:e><m:r><m:t>p</m:t></m:r></m:e><m:sub><m:r><m:t>i</m:t></m:r></m:sub></m:sSub><m:r><m:rPr><m:sty m:val="p" /></m:rPr><m:t>≥</m:t></m:r><m:r><m:t>0.5</m:t></m:r></m:oMath></a14:m><a:r><a:rPr /><a:t>, which is equivalent to </a:t></a:r><a14:m><m:oMath xmlns:m="http://schemas.openxmlformats.org/officeDocument/2006/math"><m:sSup><m:e><m:r><m:rPr><m:sty m:val="b" /></m:rPr><m:t>b</m:t></m:r></m:e><m:sup><m:r><m:rPr><m:sty m:val="p" /></m:rPr><m:t>⊤</m:t></m:r></m:sup></m:sSup><m:sSub><m:e><m:r><m:rPr><m:sty m:val="b" /></m:rPr><m:t>z</m:t></m:r></m:e><m:sub><m:r><m:t>i</m:t></m:r></m:sub></m:sSub><m:r><m:rPr><m:sty m:val="p" /></m:rPr><m:t>≥</m:t></m:r><m:r><m:t>0</m:t></m:r></m:oMath></a14:m><a:r><a:rPr /><a:t>.</a:t></a:r></a:p><a:p><a:pPr lvl="0" indent="0" marL="0"><a:spcBef><a:spcPts val="3000" /></a:spcBef><a:buNone /></a:pPr><a:r><a:rPr b="1" /><a:t>Interpreting Logistic Regression</a:t></a:r></a:p><a:p><a:pPr lvl="0" indent="0" marL="0"><a:buNone /></a:pPr><a:r><a:rPr /><a:t>The quantity </a:t></a:r><a14:m><m:oMath xmlns:m="http://schemas.openxmlformats.org/officeDocument/2006/math"><m:r><m:rPr><m:sty m:val="p" /></m:rPr><m:t>log</m:t></m:r><m:f><m:fPr><m:type m:val="bar" /></m:fPr><m:num><m:r><m:t>p</m:t></m:r></m:num><m:den><m:r><m:t>1</m:t></m:r><m:r><m:rPr><m:sty m:val="p" /></m:rPr><m:t>−</m:t></m:r><m:r><m:t>p</m:t></m:r></m:den></m:f></m:oMath></a14:m><a:r><a:rPr /><a:t> is the </a:t></a:r><a:r><a:rPr b="1" /><a:t>log-odds</a:t></a:r><a:r><a:rPr /><a:t> — the logarithm of the odds of failure. A fitted coefficient </a:t></a:r><a14:m><m:oMath xmlns:m="http://schemas.openxmlformats.org/officeDocument/2006/math"><m:sSub><m:e><m:r><m:t>b</m:t></m:r></m:e><m:sub><m:r><m:t>k</m:t></m:r></m:sub></m:sSub></m:oMath></a14:m><a:r><a:rPr /><a:t> tells you: a one-unit increase in </a:t></a:r><a14:m><m:oMath xmlns:m="http://schemas.openxmlformats.org/officeDocument/2006/math"><m:sSub><m:e><m:r><m:t>X</m:t></m:r></m:e><m:sub><m:r><m:t>k</m:t></m:r></m:sub></m:sSub></m:oMath></a14:m><a:r><a:rPr /><a:t> shifts the log-odds by </a:t></a:r><a14:m><m:oMath xmlns:m="http://schemas.openxmlformats.org/officeDocument/2006/math"><m:sSub><m:e><m:r><m:t>b</m:t></m:r></m:e><m:sub><m:r><m:t>k</m:t></m:r></m:sub></m:sSub></m:oMath></a14:m><a:r><a:rPr /><a:t>.</a:t></a:r></a:p><a:p><a:pPr lvl="0" indent="0" marL="0"><a:buNone /></a:pPr><a:r><a:rPr /><a:t>. . .</a:t></a:r></a:p><a:p><a:pPr lvl="0" indent="0" marL="0"><a:buNone /></a:pPr><a:r><a:rPr /><a:t>The </a:t></a:r><a:r><a:rPr b="1" /><a:t>odds ratio</a:t></a:r><a:r><a:rPr /><a:t> </a:t></a:r><a14:m><m:oMath xmlns:m="http://schemas.openxmlformats.org/officeDocument/2006/math"><m:sSup><m:e><m:r><m:t>e</m:t></m:r></m:e><m:sup><m:sSub><m:e><m:r><m:t>b</m:t></m:r></m:e><m:sub><m:r><m:t>k</m:t></m:r></m:sub></m:sSub></m:sup></m:sSup></m:oMath></a14:m><a:r><a:rPr /><a:t> gives a multiplicative interpretation:</a:t></a:r></a:p><a:p><a:pPr lvl="0" indent="0" marL="1270000"><a:buNone /></a:pPr><a:r><a:rPr sz="2000" /><a:t>“A one-unit increase in </a:t></a:r><a14:m><m:oMath xmlns:m="http://schemas.openxmlformats.org/officeDocument/2006/math"><m:sSub><m:e><m:r><m:t>X</m:t></m:r></m:e><m:sub><m:r><m:t>k</m:t></m:r></m:sub></m:sSub></m:oMath></a14:m><a:r><a:rPr sz="2000" /><a:t> multiplies the odds of failure by </a:t></a:r><a14:m><m:oMath xmlns:m="http://schemas.openxmlformats.org/officeDocument/2006/math"><m:sSup><m:e><m:r><m:t>e</m:t></m:r></m:e><m:sup><m:sSub><m:e><m:r><m:t>b</m:t></m:r></m:e><m:sub><m:r><m:t>k</m:t></m:r></m:sub></m:sSub></m:sup></m:sSup></m:oMath></a14:m><a:r><a:rPr sz="2000" /><a:t>.”</a:t></a:r></a:p><a:p><a:pPr lvl="0" indent="0" marL="0"><a:buNone /></a:pPr><a:r><a:rPr i="1" /><a:t>Example: if </a:t></a:r><a14:m><m:oMath xmlns:m="http://schemas.openxmlformats.org/officeDocument/2006/math"><m:sSub><m:e><m:r><m:t>b</m:t></m:r></m:e><m:sub><m:r><m:t>k</m:t></m:r></m:sub></m:sSub><m:r><m:rPr><m:sty m:val="p" /></m:rPr><m:t>=</m:t></m:r><m:r><m:t>0.7</m:t></m:r></m:oMath></a14:m><a:r><a:rPr i="1" /><a:t>, then </a:t></a:r><a14:m><m:oMath xmlns:m="http://schemas.openxmlformats.org/officeDocument/2006/math"><m:sSup><m:e><m:r><m:t>e</m:t></m:r></m:e><m:sup><m:r><m:t>0.7</m:t></m:r></m:sup></m:sSup><m:r><m:rPr><m:sty m:val="p" /></m:rPr><m:t>≈</m:t></m:r><m:r><m:t>2</m:t></m:r></m:oMath></a14:m><a:r><a:rPr i="1" /><a:t> — a unit increase in </a:t></a:r><a14:m><m:oMath xmlns:m="http://schemas.openxmlformats.org/officeDocument/2006/math"><m:sSub><m:e><m:r><m:t>X</m:t></m:r></m:e><m:sub><m:r><m:t>k</m:t></m:r></m:sub></m:sSub></m:oMath></a14:m><a:r><a:rPr i="1" /><a:t> doubles the odds of failure.</a:t></a:r></a:p><a:p><a:pPr lvl="0" indent="0" marL="0"><a:buNone /></a:pPr><a:r><a:rPr /><a:t>. . .</a:t></a:r></a:p><a:p><a:pPr lvl="0" indent="0" marL="0"><a:buNone /></a:pPr><a:r><a:rPr /><a:t>Rank inputs by </a:t></a:r><a14:m><m:oMath xmlns:m="http://schemas.openxmlformats.org/officeDocument/2006/math"><m:d><m:dPr><m:begChr m:val="|" /><m:sepChr m:val="" /><m:endChr m:val="|" /><m:grow /></m:dPr><m:e><m:sSub><m:e><m:r><m:t>b</m:t></m:r></m:e><m:sub><m:r><m:t>k</m:t></m:r></m:sub></m:sSub></m:e></m:d></m:oMath></a14:m><a:r><a:rPr /><a:t> (after standardizing) to answer: </a:t></a:r><a:r><a:rPr b="1" /><a:t>which inputs most drive failure?</a:t></a:r></a:p><a:p><a:pPr lvl="0" indent="0" marL="0"><a:spcBef><a:spcPts val="3000" /></a:spcBef><a:buNone /></a:pPr><a:r><a:rPr b="1" /><a:t>Lamontagne et al. (2019): The Setup</a:t></a:r></a:p><a:p><a:pPr lvl="0" indent="0" marL="0"><a:buNone /></a:pPr><a:r><a:rPr /><a:t>Lamontagne et al. (2019) ask: what abatement pathways lead to </a:t></a:r><a:r><a:rPr i="1" /><a:t>tolerable</a:t></a:r><a:r><a:rPr /><a:t> climate/economic futures, given deep uncertainty about human-Earth system (HES) dynamics?</a:t></a:r></a:p><a:p><a:pPr lvl="0" indent="0" marL="0"><a:buNone /></a:pPr><a:r><a:rPr /><a:t>. . .</a:t></a:r></a:p><a:p><a:pPr lvl="0" indent="0" marL="0"><a:buNone /></a:pPr><a:r><a:rPr b="1" /><a:t>Model</a:t></a:r><a:r><a:rPr /><a:t>: DICE integrated assessment model (climate + economy coupled)</a:t></a:r></a:p><a:p><a:pPr lvl="0" indent="0" marL="0"><a:buNone /></a:pPr><a:r><a:rPr b="1" /><a:t>Ensemble</a:t></a:r><a:r><a:rPr /><a:t>: 5,200,000 scenarios — 24 HES uncertain parameters + abatement growth rate (</a:t></a:r><a14:m><m:oMath xmlns:m="http://schemas.openxmlformats.org/officeDocument/2006/math"><m:r><m:t>α</m:t></m:r></m:oMath></a14:m><a:r><a:rPr /><a:t>)</a:t></a:r></a:p><a:p><a:pPr lvl="0" indent="0" marL="0"><a:buNone /></a:pPr><a:r><a:rPr b="1" /><a:t>Failure label</a:t></a:r><a:r><a:rPr /><a:t>: “intolerable” if warming </a:t></a:r><a14:m><m:oMath xmlns:m="http://schemas.openxmlformats.org/officeDocument/2006/math"><m:r><m:rPr><m:sty m:val="p" /></m:rPr><m:t>&gt;</m:t></m:r><m:sSup><m:e><m:r><m:t>2</m:t></m:r></m:e><m:sup><m:r><m:rPr><m:sty m:val="p" /></m:rPr><m:t>∘</m:t></m:r></m:sup></m:sSup></m:oMath></a14:m><a:r><a:rPr /><a:t>C in 2100, OR abatement cost </a:t></a:r><a14:m><m:oMath xmlns:m="http://schemas.openxmlformats.org/officeDocument/2006/math"><m:r><m:rPr><m:sty m:val="p" /></m:rPr><m:t>&gt;</m:t></m:r><m:r><m:t>3</m:t></m:r><m:r><m:rPr><m:sty m:val="p" /></m:rPr><m:t>%</m:t></m:r></m:oMath></a14:m><a:r><a:rPr /><a:t> of GWP, OR climate damages </a:t></a:r><a14:m><m:oMath xmlns:m="http://schemas.openxmlformats.org/officeDocument/2006/math"><m:r><m:rPr><m:sty m:val="p" /></m:rPr><m:t>&gt;</m:t></m:r><m:r><m:t>2</m:t></m:r><m:r><m:rPr><m:sty m:val="p" /></m:rPr><m:t>%</m:t></m:r></m:oMath></a14:m><a:r><a:rPr /><a:t> of GWP</a:t></a:r></a:p><a:p><a:pPr lvl="0" indent="0" marL="0"><a:buNone /></a:pPr><a:r><a:rPr /><a:t>. . .</a:t></a:r></a:p><a:p><a:pPr lvl="0" indent="0" marL="0"><a:buNone /></a:pPr><a:r><a:rPr /><a:t>Their methodology combines two tools you already know:</a:t></a:r></a:p><a:p><a:pPr lvl="0" indent="-342900" marL="342900"><a:buAutoNum type="arabicPeriod" /></a:pPr><a:r><a:rPr b="1" /><a:t>Sobol sensitivity analysis</a:t></a:r><a:r><a:rPr /><a:t> (Week 7) to rank the 24 uncertain parameters by importance — identifying which factors explain the most variance</a:t></a:r></a:p><a:p><a:pPr lvl="0" indent="-342900" marL="342900"><a:buAutoNum type="arabicPeriod" /></a:pPr><a:r><a:rPr b="1" /><a:t>Logistic regression</a:t></a:r><a:r><a:rPr /><a:t> (scenario discovery) to map how failure probability varies across the dominant factors — identifying </a:t></a:r><a:r><a:rPr i="1" /><a:t>where</a:t></a:r><a:r><a:rPr /><a:t> in the input space failure concentrates</a:t></a:r></a:p><a:p><a:pPr lvl="0" indent="0" marL="0"><a:spcBef><a:spcPts val="3000" /></a:spcBef><a:buNone /></a:pPr><a:r><a:rPr b="1" /><a:t>Lamontagne et al. (2019): The Finding</a:t></a:r></a:p><a:p><a:pPr lvl="0" indent="0" marL="0"><a:buNone /></a:pPr><a:r><a:rPr /><a:t>After labeling 5.2M runs as tolerable/intolerable, logistic regression on the dominant inputs shows:</a:t></a:r></a:p><a:p><a:pPr lvl="0" indent="0" marL="0"><a:buNone /></a:pPr><a:r><a:rPr /><a:t>. . .</a:t></a:r></a:p><a:p><a:pPr lvl="0" indent="0" marL="0"><a:buNone /></a:pPr><a:r><a:rPr /><a:t>The primary control on 2100 warming is the </a:t></a:r><a:r><a:rPr b="1" /><a:t>abatement growth rate</a:t></a:r><a:r><a:rPr /><a:t> — a societal choice, not an exogenous physical uncertainty.</a:t></a:r></a:p><a:p><a:pPr lvl="0" indent="0" marL="0"><a:buNone /></a:pPr><a:r><a:rPr /><a:t>. . .</a:t></a:r></a:p><a:p><a:pPr lvl="0" indent="0" marL="0"><a:buNone /></a:pPr><a:r><a:rPr /><a:t>Near-term warming is controlled by climate sensitivity (a physical parameter). Long-term warming is controlled by earlier abatement actions (a policy choice).</a:t></a:r></a:p><a:p><a:pPr lvl="0" indent="0" marL="0"><a:buNone /></a:pPr><a:r><a:rPr /><a:t>. . .</a:t></a:r></a:p><a:p><a:pPr lvl="0" indent="0" marL="0"><a:buNone /></a:pPr><a:r><a:rPr /><a:t>It is mostly a question of </a:t></a:r><a:r><a:rPr b="1" /><a:t>whether we choose</a:t></a:r><a:r><a:rPr /><a:t> to limit warming — not whether we </a:t></a:r><a:r><a:rPr i="1" /><a:t>can</a:t></a:r><a:r><a:rPr /><a:t>.</a:t></a:r></a:p><a:p><a:pPr lvl="0" indent="0" marL="0"><a:buNone /></a:pPr><a:r><a:rPr /><a:t>. . .</a:t></a:r></a:p><a:p><a:pPr lvl="0" indent="0" marL="0"><a:buNone /></a:pPr><a:r><a:rPr /><a:t>Wednesday we will dig into the figures: how the Sobol indices shift over time (Fig 2), and what the logistic regression contours look like (Fig 3).</a:t></a:r></a:p><a:p><a:pPr lvl="0" indent="0" marL="0"><a:spcBef><a:spcPts val="3000" /></a:spcBef><a:buNone /></a:pPr><a:r><a:rPr b="1" /><a:t>PRIM: Patient Rule Induction Method</a:t></a:r></a:p><a:p><a:pPr lvl="0" indent="0" marL="0"><a:buNone /></a:pPr><a:r><a:rPr /><a:t>PRIM finds a </a:t></a:r><a:r><a:rPr b="1" /><a:t>box</a:t></a:r><a:r><a:rPr /><a:t> in the input space that concentrates failures:</a:t></a:r></a:p><a:p><a:pPr lvl="0" indent="0" marL="0"><a:buNone /></a:pPr><a14:m><m:oMathPara xmlns:m="http://schemas.openxmlformats.org/officeDocument/2006/math"><m:oMathParaPr><m:jc m:val="center" /></m:oMathParaPr><m:oMath><m:sSub><m:e><m:r><m:t>a</m:t></m:r></m:e><m:sub><m:r><m:t>k</m:t></m:r></m:sub></m:sSub><m:r><m:rPr><m:sty m:val="p" /></m:rPr><m:t>≤</m:t></m:r><m:sSub><m:e><m:r><m:t>X</m:t></m:r></m:e><m:sub><m:r><m:t>k</m:t></m:r></m:sub></m:sSub><m:r><m:rPr><m:sty m:val="p" /></m:rPr><m:t>≤</m:t></m:r><m:sSub><m:e><m:r><m:t>b</m:t></m:r></m:e><m:sub><m:r><m:t>k</m:t></m:r></m:sub></m:sSub><m:r><m:t> </m:t></m:r><m:r><m:rPr><m:nor /><m:sty m:val="p" /></m:rPr><m:t>for each input </m:t></m:r><m:r><m:t>k</m:t></m:r></m:oMath></m:oMathPara></a14:m></a:p><a:p><a:pPr lvl="0" indent="0" marL="0"><a:buNone /></a:pPr><a:r><a:rPr /><a:t>. . .</a:t></a:r></a:p><a:p><a:pPr lvl="0" indent="0" marL="0"><a:buNone /></a:pPr><a:r><a:rPr b="1" /><a:t>Interpretation</a:t></a:r><a:r><a:rPr /><a:t>: “The strategy fails when SLR </a:t></a:r><a14:m><m:oMath xmlns:m="http://schemas.openxmlformats.org/officeDocument/2006/math"><m:r><m:rPr><m:sty m:val="p" /></m:rPr><m:t>&gt;</m:t></m:r><m:r><m:t>0.8</m:t></m:r><m:r><m:t> </m:t></m:r><m:r><m:rPr><m:nor /><m:sty m:val="p" /></m:rPr><m:t>m</m:t></m:r></m:oMath></a14:m><a:r><a:rPr /><a:t> AND storm surge return period </a:t></a:r><a14:m><m:oMath xmlns:m="http://schemas.openxmlformats.org/officeDocument/2006/math"><m:r><m:rPr><m:sty m:val="p" /></m:rPr><m:t>&lt;</m:t></m:r><m:r><m:t>25</m:t></m:r><m:r><m:t> </m:t></m:r><m:r><m:rPr><m:nor /><m:sty m:val="p" /></m:rPr><m:t>years</m:t></m:r></m:oMath></a14:m><a:r><a:rPr /><a:t>” is a PRIM box in two dimensions.</a:t></a:r></a:p><a:p><a:pPr lvl="0" indent="0" marL="0"><a:buNone /></a:pPr><a:r><a:rPr /><a:t>. . .</a:t></a:r></a:p><a:p><a:pPr lvl="0" indent="0" marL="0"><a:buNone /></a:pPr><a:r><a:rPr /><a:t>“Patient” refers to the algorithm: PRIM peels small slices from the box one at a time. Each peel removes the thinnest slice with the fewest failures.</a:t></a:r></a:p><a:p><a:pPr lvl="0" indent="0" marL="0"><a:spcBef><a:spcPts val="3000" /></a:spcBef><a:buNone /></a:pPr><a:r><a:rPr b="1" /><a:t>PRIM: Coverage and Density</a:t></a:r></a:p><a:p><a:pPr lvl="0" indent="0" marL="0"><a:buNone /></a:pPr><a:r><a:rPr /><a:t>For a box </a:t></a:r><a14:m><m:oMath xmlns:m="http://schemas.openxmlformats.org/officeDocument/2006/math"><m:r><m:t>B</m:t></m:r></m:oMath></a14:m><a:r><a:rPr /><a:t> over an ensemble with </a:t></a:r><a14:m><m:oMath xmlns:m="http://schemas.openxmlformats.org/officeDocument/2006/math"><m:r><m:t>N</m:t></m:r></m:oMath></a14:m><a:r><a:rPr /><a:t> total runs, </a:t></a:r><a14:m><m:oMath xmlns:m="http://schemas.openxmlformats.org/officeDocument/2006/math"><m:sSub><m:e><m:r><m:t>N</m:t></m:r></m:e><m:sub><m:r><m:t>f</m:t></m:r></m:sub></m:sSub></m:oMath></a14:m><a:r><a:rPr /><a:t> of which are failures:</a:t></a:r></a:p><a:p><a:pPr lvl="0" indent="0" marL="0"><a:buNone /></a:pPr><a:r><a:rPr /><a:t>. . .</a:t></a:r></a:p><a:p><a:pPr lvl="0" indent="0" marL="0"><a:buNone /></a:pPr><a14:m><m:oMathPara xmlns:m="http://schemas.openxmlformats.org/officeDocument/2006/math"><m:oMathParaPr><m:jc m:val="center" /></m:oMathParaPr><m:oMath><m:r><m:rPr><m:nor /><m:sty m:val="p" /></m:rPr><m:t>Coverage</m:t></m:r><m:r><m:rPr><m:sty m:val="p" /></m:rPr><m:t>=</m:t></m:r><m:f><m:fPr><m:type m:val="bar" /></m:fPr><m:num><m:d><m:dPr><m:begChr m:val="|" /><m:sepChr m:val="" /><m:endChr m:val="|" /><m:grow /></m:dPr><m:e><m:r><m:rPr><m:sty m:val="p" /></m:rPr><m:t>{</m:t></m:r><m:r><m:rPr><m:nor /><m:sty m:val="p" /></m:rPr><m:t>failures inside </m:t></m:r><m:r><m:t>B</m:t></m:r><m:r><m:rPr><m:sty m:val="p" /></m:rPr><m:t>}</m:t></m:r></m:e></m:d></m:num><m:den><m:sSub><m:e><m:r><m:t>N</m:t></m:r></m:e><m:sub><m:r><m:t>f</m:t></m:r></m:sub></m:sSub></m:den></m:f><m:r><m:t>  </m:t></m:r><m:r><m:rPr><m:nor /><m:sty m:val="p" /></m:rPr><m:t>(recall)</m:t></m:r></m:oMath></m:oMathPara></a14:m></a:p><a:p><a:pPr lvl="0" indent="0" marL="0"><a:buNone /></a:pPr><a:r><a:rPr i="1" /><a:t>What fraction of all failures does the box capture?</a:t></a:r></a:p><a:p><a:pPr lvl="0" indent="0" marL="0"><a:buNone /></a:pPr><a:r><a:rPr /><a:t>. . .</a:t></a:r></a:p><a:p><a:pPr lvl="0" indent="0" marL="0"><a:buNone /></a:pPr><a14:m><m:oMathPara xmlns:m="http://schemas.openxmlformats.org/officeDocument/2006/math"><m:oMathParaPr><m:jc m:val="center" /></m:oMathParaPr><m:oMath><m:r><m:rPr><m:nor /><m:sty m:val="p" /></m:rPr><m:t>Density</m:t></m:r><m:r><m:rPr><m:sty m:val="p" /></m:rPr><m:t>=</m:t></m:r><m:f><m:fPr><m:type m:val="bar" /></m:fPr><m:num><m:d><m:dPr><m:begChr m:val="|" /><m:sepChr m:val="" /><m:endChr m:val="|" /><m:grow /></m:dPr><m:e><m:r><m:rPr><m:sty m:val="p" /></m:rPr><m:t>{</m:t></m:r><m:r><m:rPr><m:nor /><m:sty m:val="p" /></m:rPr><m:t>failures inside </m:t></m:r><m:r><m:t>B</m:t></m:r><m:r><m:rPr><m:sty m:val="p" /></m:rPr><m:t>}</m:t></m:r></m:e></m:d></m:num><m:den><m:d><m:dPr><m:begChr m:val="|" /><m:sepChr m:val="" /><m:endChr m:val="|" /><m:grow /></m:dPr><m:e><m:r><m:rPr><m:sty m:val="p" /></m:rPr><m:t>{</m:t></m:r><m:r><m:rPr><m:nor /><m:sty m:val="p" /></m:rPr><m:t>scenarios inside </m:t></m:r><m:r><m:t>B</m:t></m:r><m:r><m:rPr><m:sty m:val="p" /></m:rPr><m:t>}</m:t></m:r></m:e></m:d></m:den></m:f><m:r><m:t>  </m:t></m:r><m:r><m:rPr><m:nor /><m:sty m:val="p" /></m:rPr><m:t>(precision)</m:t></m:r></m:oMath></m:oMathPara></a14:m></a:p><a:p><a:pPr lvl="0" indent="0" marL="0"><a:buNone /></a:pPr><a:r><a:rPr i="1" /><a:t>Of all scenarios in the box, what fraction are failures?</a:t></a:r></a:p><a:p><a:pPr lvl="0" indent="0" marL="0"><a:spcBef><a:spcPts val="3000" /></a:spcBef><a:buNone /></a:pPr><a:r><a:rPr b="1" /><a:t>The Coverage–Density Trade-off</a:t></a:r></a:p><a:p><a:pPr lvl="0" indent="0" marL="0"><a:buNone /></a:pPr><a:r><a:rPr /><a:t>PRIM starts with the full input space and </a:t></a:r><a:r><a:rPr b="1" /><a:t>peels</a:t></a:r><a:r><a:rPr /><a:t> away small slices to increase density, recording coverage as it goes.</a:t></a:r></a:p><a:p><a:pPr lvl="0" indent="0" marL="0"><a:buNone /></a:pPr><a:r><a:rPr /><a:t>. . .</a:t></a:r></a:p><a:p><a:pPr lvl="0" indent="0" marL="0"><a:buNone /></a:pPr><a:r><a:rPr /><a:t>The output is a </a:t></a:r><a:r><a:rPr b="1" /><a:t>peeling trajectory</a:t></a:r><a:r><a:rPr /><a:t>: a set of nested boxes tracing the Pareto frontier in coverage–density space.</a:t></a:r></a:p><a:p><a:pPr lvl="0" /><a:r><a:rPr /><a:t>Start: large box, high coverage, low density</a:t></a:r></a:p><a:p><a:pPr lvl="0" /><a:r><a:rPr /><a:t>Peel: remove slices where failures are sparse</a:t></a:r></a:p><a:p><a:pPr lvl="0" /><a:r><a:rPr /><a:t>End: small box, high density, low coverage</a:t></a:r></a:p><a:p><a:pPr lvl="0" /><a:r><a:rPr /><a:t>The analyst </a:t></a:r><a:r><a:rPr b="1" /><a:t>chooses</a:t></a:r><a:r><a:rPr /><a:t> the box that best matches their decision context</a:t></a:r></a:p><a:p><a:pPr lvl="0" indent="0" marL="0"><a:spcBef><a:spcPts val="3000" /></a:spcBef><a:buNone /></a:pPr><a:r><a:rPr b="1" /><a:t>Write-and-Respond: Interpreting a PRIM Box</a:t></a:r></a:p><a:p><a:pPr lvl="0" indent="0" marL="0"><a:buNone /></a:pPr><a:r><a:rPr /><a:t>PRIM analysis of a 1-meter house elevation policy returns:</a:t></a:r></a:p></p:txBody></p:sp></mc:Choice></mc:AlternateContent><p:graphicFrame><p:nvGraphicFramePr><p:cNvPr id="6" name="Content Placeholder 5" /><p:cNvGraphicFramePr><a:graphicFrameLocks noGrp="1" /></p:cNvGraphicFramePr><p:nvPr><p:ph idx="1" /></p:nvPr></p:nvGraphicFramePr><p:xfrm><a:off x="3568700" y="203200" /><a:ext cx="5105400" cy="4381500" /></p:xfrm><a:graphic><a:graphicData uri="http://schemas.openxmlformats.org/drawingml/2006/table"><a:tbl><a:tblPr firstRow="1" bandRow="1"><a:tableStyleId>{5C22544A-7EE6-4342-B048-85BDC9FD1C3A}</a:tableStyleId></a:tblPr><a:tblGrid><a:gridCol w="1016000" /><a:gridCol w="1016000" /><a:gridCol w="1016000" /><a:gridCol w="1016000" /><a:gridCol w="1016000" /></a:tblGrid><a:tr h="0"><a:tc><a:txBody><a:bodyPr /><a:lstStyle /><a:p><a:pPr lvl="0" indent="0" marL="0" algn="l"><a:buNone /></a:pPr><a:r><a:rPr /><a:t>Box</a:t></a:r></a:p></a:txBody><a:tcPr /></a:tc><a:tc><a:txBody><a:bodyPr /><a:lstStyle /><a:p><a:pPr lvl="0" indent="0" marL="0" algn="ctr"><a:buNone /></a:pPr><a:r><a:rPr /><a:t>SLR Rate (m/century)</a:t></a:r></a:p></a:txBody><a:tcPr /></a:tc><a:tc><a:txBody><a:bodyPr /><a:lstStyle /><a:p><a:pPr lvl="0" indent="0" marL="0" algn="ctr"><a:buNone /></a:pPr><a:r><a:rPr /><a:t>Storm Return Period</a:t></a:r></a:p></a:txBody><a:tcPr /></a:tc><a:tc><a:txBody><a:bodyPr /><a:lstStyle /><a:p><a:pPr lvl="0" indent="0" marL="0" algn="ctr"><a:buNone /></a:pPr><a:r><a:rPr /><a:t>Coverage</a:t></a:r></a:p></a:txBody><a:tcPr /></a:tc><a:tc><a:txBody><a:bodyPr /><a:lstStyle /><a:p><a:pPr lvl="0" indent="0" marL="0" algn="ctr"><a:buNone /></a:pPr><a:r><a:rPr /><a:t>Density</a:t></a:r></a:p></a:txBody><a:tcPr /></a:tc></a:tr><a:tr h="0"><a:tc><a:txBody><a:bodyPr /><a:lstStyle /><a:p><a:pPr lvl="0" indent="0" marL="0" algn="l"><a:buNone /></a:pPr><a:r><a:rPr /><a:t>A</a:t></a:r></a:p></a:txBody></a:tc><a:tc><a:txBody><a:bodyPr /><a:lstStyle /><a:p><a:pPr lvl="0" indent="0" marL="0" algn="ctr"><a:buNone /></a:pPr><a14:m><m:oMath xmlns:m="http://schemas.openxmlformats.org/officeDocument/2006/math"><m:r><m:rPr><m:sty m:val="p" /></m:rPr><m:t>&gt;</m:t></m:r><m:r><m:t>0.4</m:t></m:r></m:oMath></a14:m></a:p></a:txBody></a:tc><a:tc><a:txBody><a:bodyPr /><a:lstStyle /><a:p><a:pPr lvl="0" indent="0" marL="0" algn="ctr"><a:buNone /></a:pPr><a:r><a:rPr /><a:t>any</a:t></a:r></a:p></a:txBody></a:tc><a:tc><a:txBody><a:bodyPr /><a:lstStyle /><a:p><a:pPr lvl="0" indent="0" marL="0" algn="ctr"><a:buNone /></a:pPr><a:r><a:rPr /><a:t>94%</a:t></a:r></a:p></a:txBody></a:tc><a:tc><a:txBody><a:bodyPr /><a:lstStyle /><a:p><a:pPr lvl="0" indent="0" marL="0" algn="ctr"><a:buNone /></a:pPr><a:r><a:rPr /><a:t>31%</a:t></a:r></a:p></a:txBody></a:tc></a:tr><a:tr h="0"><a:tc><a:txBody><a:bodyPr /><a:lstStyle /><a:p><a:pPr lvl="0" indent="0" marL="0" algn="l"><a:buNone /></a:pPr><a:r><a:rPr /><a:t>B</a:t></a:r></a:p></a:txBody></a:tc><a:tc><a:txBody><a:bodyPr /><a:lstStyle /><a:p><a:pPr lvl="0" indent="0" marL="0" algn="ctr"><a:buNone /></a:pPr><a14:m><m:oMath xmlns:m="http://schemas.openxmlformats.org/officeDocument/2006/math"><m:r><m:rPr><m:sty m:val="p" /></m:rPr><m:t>&gt;</m:t></m:r><m:r><m:t>0.8</m:t></m:r></m:oMath></a14:m></a:p></a:txBody></a:tc><a:tc><a:txBody><a:bodyPr /><a:lstStyle /><a:p><a:pPr lvl="0" indent="0" marL="0" algn="ctr"><a:buNone /></a:pPr><a14:m><m:oMath xmlns:m="http://schemas.openxmlformats.org/officeDocument/2006/math"><m:r><m:rPr><m:sty m:val="p" /></m:rPr><m:t>&lt;</m:t></m:r><m:r><m:t>25</m:t></m:r></m:oMath></a14:m><a:r><a:rPr /><a:t> yr</a:t></a:r></a:p></a:txBody></a:tc><a:tc><a:txBody><a:bodyPr /><a:lstStyle /><a:p><a:pPr lvl="0" indent="0" marL="0" algn="ctr"><a:buNone /></a:pPr><a:r><a:rPr /><a:t>71%</a:t></a:r></a:p></a:txBody></a:tc><a:tc><a:txBody><a:bodyPr /><a:lstStyle /><a:p><a:pPr lvl="0" indent="0" marL="0" algn="ctr"><a:buNone /></a:pPr><a:r><a:rPr /><a:t>82%</a:t></a:r></a:p></a:txBody></a:tc></a:tr><a:tr h="0"><a:tc><a:txBody><a:bodyPr /><a:lstStyle /><a:p><a:pPr lvl="0" indent="0" marL="0" algn="l"><a:buNone /></a:pPr><a:r><a:rPr /><a:t>C</a:t></a:r></a:p></a:txBody></a:tc><a:tc><a:txBody><a:bodyPr /><a:lstStyle /><a:p><a:pPr lvl="0" indent="0" marL="0" algn="ctr"><a:buNone /></a:pPr><a14:m><m:oMath xmlns:m="http://schemas.openxmlformats.org/officeDocument/2006/math"><m:r><m:rPr><m:sty m:val="p" /></m:rPr><m:t>&gt;</m:t></m:r><m:r><m:t>1.1</m:t></m:r></m:oMath></a14:m></a:p></a:txBody></a:tc><a:tc><a:txBody><a:bodyPr /><a:lstStyle /><a:p><a:pPr lvl="0" indent="0" marL="0" algn="ctr"><a:buNone /></a:pPr><a14:m><m:oMath xmlns:m="http://schemas.openxmlformats.org/officeDocument/2006/math"><m:r><m:rPr><m:sty m:val="p" /></m:rPr><m:t>&lt;</m:t></m:r><m:r><m:t>10</m:t></m:r></m:oMath></a14:m><a:r><a:rPr /><a:t> yr</a:t></a:r></a:p></a:txBody></a:tc><a:tc><a:txBody><a:bodyPr /><a:lstStyle /><a:p><a:pPr lvl="0" indent="0" marL="0" algn="ctr"><a:buNone /></a:pPr><a:r><a:rPr /><a:t>34%</a:t></a:r></a:p></a:txBody></a:tc><a:tc><a:txBody><a:bodyPr /><a:lstStyle /><a:p><a:pPr lvl="0" indent="0" marL="0" algn="ctr"><a:buNone /></a:pPr><a:r><a:rPr /><a:t>96%</a:t></a:r></a:p></a:txBody></a:tc></a:tr></a:tbl></a:graphicData></a:graphic></p:graphicFrame></p:spTree></p:cSld><p:timing><p:tnLst><p:par><p:cTn id="1" dur="indefinite" restart="never" nodeType="tmRoot"><p:childTnLst><p:seq concurrent="1" nextAc="seek"><p:cTn id="2" dur="indefinite" nodeType="mainSeq"><p:childTnLst><p:par><p:cTn id="3" fill="hold"><p:stCondLst><p:cond delay="indefinite" /></p:stCondLst><p:childTnLst><p:par><p:cTn id="4" fill="hold"><p:stCondLst><p:cond delay="0" /></p:stCondLst><p:childTnLst><p:par><p:cTn id="5" presetID="1" presetClass="entr" presetSubtype="0" fill="hold" grpId="0" nodeType="clickEffect"><p:stCondLst><p:cond delay="0" /></p:stCondLst><p:childTnLst><p:set><p:cBhvr><p:cTn id="6" dur="1" fill="hold"><p:stCondLst><p:cond delay="0" /></p:stCondLst></p:cTn><p:tgtEl><p:spTgt spid="4"><p:txEl><p:pRg st="32" end="32" /></p:txEl></p:spTgt></p:tgtEl><p:attrNameLst><p:attrName>style.visibility</p:attrName></p:attrNameLst></p:cBhvr><p:to><p:strVal val="visible" /></p:to></p:set></p:childTnLst></p:cTn></p:par></p:childTnLst></p:cTn></p:par></p:childTnLst></p:cTn></p:par><p:par><p:cTn id="7" fill="hold"><p:stCondLst><p:cond delay="indefinite" /></p:stCondLst><p:childTnLst><p:par><p:cTn id="8" fill="hold"><p:stCondLst><p:cond delay="0" /></p:stCondLst><p:childTnLst><p:par><p:cTn id="9" presetID="1" presetClass="entr" presetSubtype="0" fill="hold" grpId="0" nodeType="clickEffect"><p:stCondLst><p:cond delay="0" /></p:stCondLst><p:childTnLst><p:set><p:cBhvr><p:cTn id="10" dur="1" fill="hold"><p:stCondLst><p:cond delay="0" /></p:stCondLst></p:cTn><p:tgtEl><p:spTgt spid="4"><p:txEl><p:pRg st="33" end="33" /></p:txEl></p:spTgt></p:tgtEl><p:attrNameLst><p:attrName>style.visibility</p:attrName></p:attrNameLst></p:cBhvr><p:to><p:strVal val="visible" /></p:to></p:set></p:childTnLst></p:cTn></p:par></p:childTnLst></p:cTn></p:par></p:childTnLst></p:cTn></p:par><p:par><p:cTn id="11" fill="hold"><p:stCondLst><p:cond delay="indefinite" /></p:stCondLst><p:childTnLst><p:par><p:cTn id="12" fill="hold"><p:stCondLst><p:cond delay="0" /></p:stCondLst><p:childTnLst><p:par><p:cTn id="13" presetID="1" presetClass="entr" presetSubtype="0" fill="hold" grpId="0" nodeType="clickEffect"><p:stCondLst><p:cond delay="0" /></p:stCondLst><p:childTnLst><p:set><p:cBhvr><p:cTn id="14" dur="1" fill="hold"><p:stCondLst><p:cond delay="0" /></p:stCondLst></p:cTn><p:tgtEl><p:spTgt spid="4"><p:txEl><p:pRg st="63" end="63" /></p:txEl></p:spTgt></p:tgtEl><p:attrNameLst><p:attrName>style.visibility</p:attrName></p:attrNameLst></p:cBhvr><p:to><p:strVal val="visible" /></p:to></p:set></p:childTnLst></p:cTn></p:par></p:childTnLst></p:cTn></p:par></p:childTnLst></p:cTn></p:par><p:par><p:cTn id="15" fill="hold"><p:stCondLst><p:cond delay="indefinite" /></p:stCondLst><p:childTnLst><p:par><p:cTn id="16" fill="hold"><p:stCondLst><p:cond delay="0" /></p:stCondLst><p:childTnLst><p:par><p:cTn id="17" presetID="1" presetClass="entr" presetSubtype="0" fill="hold" grpId="0" nodeType="clickEffect"><p:stCondLst><p:cond delay="0" /></p:stCondLst><p:childTnLst><p:set><p:cBhvr><p:cTn id="18" dur="1" fill="hold"><p:stCondLst><p:cond delay="0" /></p:stCondLst></p:cTn><p:tgtEl><p:spTgt spid="4"><p:txEl><p:pRg st="64" end="64" /></p:txEl></p:spTgt></p:tgtEl><p:attrNameLst><p:attrName>style.visibility</p:attrName></p:attrNameLst></p:cBhvr><p:to><p:strVal val="visible" /></p:to></p:set></p:childTnLst></p:cTn></p:par></p:childTnLst></p:cTn></p:par></p:childTnLst></p:cTn></p:par><p:par><p:cTn id="19" fill="hold"><p:stCondLst><p:cond delay="indefinite" /></p:stCondLst><p:childTnLst><p:par><p:cTn id="20" fill="hold"><p:stCondLst><p:cond delay="0" /></p:stCondLst><p:childTnLst><p:par><p:cTn id="21" presetID="1" presetClass="entr" presetSubtype="0" fill="hold" grpId="0" nodeType="clickEffect"><p:stCondLst><p:cond delay="0" /></p:stCondLst><p:childTnLst><p:set><p:cBhvr><p:cTn id="22" dur="1" fill="hold"><p:stCondLst><p:cond delay="0" /></p:stCondLst></p:cTn><p:tgtEl><p:spTgt spid="4"><p:txEl><p:pRg st="65" end="65" /></p:txEl></p:spTgt></p:tgtEl><p:attrNameLst><p:attrName>style.visibility</p:attrName></p:attrNameLst></p:cBhvr><p:to><p:strVal val="visible" /></p:to></p:set></p:childTnLst></p:cTn></p:par></p:childTnLst></p:cTn></p:par></p:childTnLst></p:cTn></p:par><p:par><p:cTn id="23" fill="hold"><p:stCondLst><p:cond delay="indefinite" /></p:stCondLst><p:childTnLst><p:par><p:cTn id="24" fill="hold"><p:stCondLst><p:cond delay="0" /></p:stCondLst><p:childTnLst><p:par><p:cTn id="25" presetID="1" presetClass="entr" presetSubtype="0" fill="hold" grpId="0" nodeType="clickEffect"><p:stCondLst><p:cond delay="0" /></p:stCondLst><p:childTnLst><p:set><p:cBhvr><p:cTn id="26" dur="1" fill="hold"><p:stCondLst><p:cond delay="0" /></p:stCondLst></p:cTn><p:tgtEl><p:spTgt spid="4"><p:txEl><p:pRg st="66" end="66" /></p:txEl></p:spTgt></p:tgtEl><p:attrNameLst><p:attrName>style.visibility</p:attrName></p:attrNameLst></p:cBhvr><p:to><p:strVal val="visible" /></p:to></p:set></p:childTnLst></p:cTn></p:par></p:childTnLst></p:cTn></p:par></p:childTnLst></p:cTn></p:par></p:childTnLst></p:cTn><p:prevCondLst><p:cond evt="onPrev" delay="0"><p:tgtEl><p:sldTgt /></p:tgtEl></p:cond></p:prevCondLst><p:nextCondLst><p:cond evt="onNext" delay="0"><p:tgtEl><p:sldTgt /></p:tgtEl></p:cond></p:nextCondLst></p:seq></p:childTnLst></p:cTn></p:par></p:tnLst><p:bldLst><p:bldP spid="4" grpId="0" uiExpand="1" build="p" /></p:bldLst></p:timing></p:sld>
+</file>
+
+<file path=ppt/slides/slide9.xml><?xml version="1.0" encoding="UTF-8"?><p:sld xmlns:a="http://schemas.openxmlformats.org/drawingml/2006/main" xmlns:r="http://schemas.openxmlformats.org/officeDocument/2006/relationships" xmlns:p="http://schemas.openxmlformats.org/presentationml/2006/main"><p:cSld><p:spTree><p:nvGrpSpPr><p:cNvPr id="1" name="" /><p:cNvGrpSpPr /><p:nvPr /></p:nvGrpSpPr><p:grpSpPr><a:xfrm><a:off x="0" y="0" /><a:ext cx="0" cy="0" /><a:chOff x="0" y="0" /><a:chExt cx="0" cy="0" /></a:xfrm></p:grpSpPr><mc:AlternateContent xmlns:mc="http://schemas.openxmlformats.org/markup-compatibility/2006"><mc:Choice xmlns:a14="http://schemas.microsoft.com/office/drawing/2010/main" Requires="a14"><p:sp><p:nvSpPr><p:cNvPr id="4" name="Text Placeholder 3" /><p:cNvSpPr><a:spLocks noGrp="1" /></p:cNvSpPr><p:nvPr><p:ph idx="2" sz="half" type="body" /></p:nvPr></p:nvSpPr><p:spPr /><p:txBody><a:bodyPr /><a:lstStyle /><a:p><a:pPr lvl="0" indent="0" marL="1270000"><a:buNone /></a:pPr><a:r><a:rPr sz="2000" b="1" /><a:t>Write (60 seconds)</a:t></a:r></a:p><a:p><a:pPr lvl="0" indent="0" marL="1270000"><a:buNone /></a:pPr><a:r><a:rPr sz="2000" /><a:t>In one sentence, interpret Box B. Then answer: if you are advising a city that faces severe storm surge risk </a:t></a:r><a:r><a:rPr sz="2000" i="1" /><a:t>and</a:t></a:r><a:r><a:rPr sz="2000" /><a:t> deep uncertainty in SLR, which box would you recommend and why?</a:t></a:r></a:p><a:p><a:pPr lvl="0" indent="0" marL="0"><a:spcBef><a:spcPts val="3000" /></a:spcBef><a:buNone /></a:pPr><a:r><a:rPr b="1" /><a:t>Friday’s Lab: The Eijgenraam Dike Model</a:t></a:r></a:p><a:p><a:pPr lvl="0" indent="0" marL="0"><a:buNone /></a:pPr><a:r><a:rPr /><a:t>In Lab 8 you’ll apply scenario discovery to a real flood protection problem from the Netherlands (Eijgenraam et al. 2014).</a:t></a:r></a:p><a:p><a:pPr lvl="0" indent="0" marL="0"><a:buNone /></a:pPr><a:r><a:rPr /><a:t>. . .</a:t></a:r></a:p><a:p><a:pPr lvl="0" indent="0" marL="0"><a:buNone /></a:pPr><a:r><a:rPr /><a:t>You know the Van Dantzig problem: how high should we build the dike? Eijgenraam extends it — investment costs grow </a:t></a:r><a:r><a:rPr b="1" /><a:t>exponentially</a:t></a:r><a:r><a:rPr /><a:t> with height, and flood risk grows over time with sea level rise and economic growth. (</a:t></a:r><a:r><a:rPr><a:hlinkClick r:id="rId3" /></a:rPr><a:t>Rhodium example</a:t></a:r><a:r><a:rPr /><a:t>)</a:t></a:r></a:p><a:p><a:pPr lvl="0" indent="0" marL="0"><a:buNone /></a:pPr><a:r><a:rPr /><a:t>. . .</a:t></a:r></a:p><a:p><a:pPr lvl="0" indent="0" marL="0"><a:buNone /></a:pPr><a:r><a:rPr /><a:t>The decision: </a:t></a:r><a:r><a:rPr b="1" /><a:t>when</a:t></a:r><a:r><a:rPr /><a:t> to heighten the dike and by </a:t></a:r><a:r><a:rPr b="1" /><a:t>how much</a:t></a:r><a:r><a:rPr /><a:t>.</a:t></a:r></a:p><a:p><a:pPr lvl="0" /><a:r><a:rPr /><a:t>Deferring saves money (discounting) but the dike ring is unprotected while we wait</a:t></a:r></a:p><a:p><a:pPr lvl="0" /><a:r><a:rPr /><a:t>Building higher is safer but exponentially more expensive</a:t></a:r></a:p><a:p><a:pPr lvl="0" indent="0" marL="0"><a:spcBef><a:spcPts val="3000" /></a:spcBef><a:buNone /></a:pPr><a:r><a:rPr b="1" /><a:t>The Eijgenraam Model: Key Equation</a:t></a:r></a:p><a:p><a:pPr lvl="0" indent="0" marL="0"><a:buNone /></a:pPr><a:r><a:rPr /><a:t>The annual </a:t></a:r><a:r><a:rPr b="1" /><a:t>flood probability</a:t></a:r><a:r><a:rPr /><a:t> at year </a:t></a:r><a14:m><m:oMath xmlns:m="http://schemas.openxmlformats.org/officeDocument/2006/math"><m:r><m:t>t</m:t></m:r></m:oMath></a14:m><a:r><a:rPr /><a:t> is:</a:t></a:r></a:p><a:p><a:pPr lvl="0" indent="0" marL="0"><a:buNone /></a:pPr><a14:m><m:oMathPara xmlns:m="http://schemas.openxmlformats.org/officeDocument/2006/math"><m:oMathParaPr><m:jc m:val="center" /></m:oMathParaPr><m:oMath><m:r><m:t>P</m:t></m:r><m:d><m:dPr><m:begChr m:val="(" /><m:sepChr m:val="" /><m:endChr m:val=")" /><m:grow /></m:dPr><m:e><m:r><m:t>t</m:t></m:r></m:e></m:d><m:r><m:rPr><m:sty m:val="p" /></m:rPr><m:t>=</m:t></m:r><m:sSub><m:e><m:r><m:t>P</m:t></m:r></m:e><m:sub><m:r><m:t>0</m:t></m:r></m:sub></m:sSub><m:r><m:rPr><m:sty m:val="p" /></m:rPr><m:t>exp</m:t></m:r><m:d><m:dPr><m:begChr m:val="(" /><m:sepChr m:val="" /><m:endChr m:val=")" /><m:grow /></m:dPr><m:e><m:r><m:t>α</m:t></m:r><m:r><m:t>η</m:t></m:r><m:r><m:t> </m:t></m:r><m:r><m:t>t</m:t></m:r><m:r><m:rPr><m:sty m:val="p" /></m:rPr><m:t>−</m:t></m:r><m:r><m:t>α</m:t></m:r><m:r><m:t> </m:t></m:r><m:r><m:t>H</m:t></m:r><m:d><m:dPr><m:begChr m:val="(" /><m:sepChr m:val="" /><m:endChr m:val=")" /><m:grow /></m:dPr><m:e><m:r><m:t>t</m:t></m:r></m:e></m:d></m:e></m:d></m:oMath></m:oMathPara></a14:m></a:p><a:p><a:pPr lvl="0" /><a14:m><m:oMath xmlns:m="http://schemas.openxmlformats.org/officeDocument/2006/math"><m:sSub><m:e><m:r><m:t>P</m:t></m:r></m:e><m:sub><m:r><m:t>0</m:t></m:r></m:sub></m:sSub></m:oMath></a14:m><a:r><a:rPr /><a:t>: initial flood probability</a:t></a:r></a:p><a:p><a:pPr lvl="0" /><a14:m><m:oMath xmlns:m="http://schemas.openxmlformats.org/officeDocument/2006/math"><m:r><m:t>α</m:t></m:r></m:oMath></a14:m><a:r><a:rPr /><a:t>: sensitivity of flood probability to water level (1/cm)</a:t></a:r></a:p><a:p><a:pPr lvl="0" /><a14:m><m:oMath xmlns:m="http://schemas.openxmlformats.org/officeDocument/2006/math"><m:r><m:t>η</m:t></m:r></m:oMath></a14:m><a:r><a:rPr /><a:t>: rate of water level rise (cm/year)</a:t></a:r></a:p><a:p><a:pPr lvl="0" /><a14:m><m:oMath xmlns:m="http://schemas.openxmlformats.org/officeDocument/2006/math"><m:r><m:t>H</m:t></m:r><m:d><m:dPr><m:begChr m:val="(" /><m:sepChr m:val="" /><m:endChr m:val=")" /><m:grow /></m:dPr><m:e><m:r><m:t>t</m:t></m:r></m:e></m:d></m:oMath></a14:m><a:r><a:rPr /><a:t>: cumulative dike heightening at time </a:t></a:r><a14:m><m:oMath xmlns:m="http://schemas.openxmlformats.org/officeDocument/2006/math"><m:r><m:t>t</m:t></m:r></m:oMath></a14:m></a:p><a:p><a:pPr lvl="0" indent="0" marL="0"><a:buNone /></a:pPr><a:r><a:rPr /><a:t>. . .</a:t></a:r></a:p><a:p><a:pPr lvl="0" indent="0" marL="0"><a:buNone /></a:pPr><a:r><a:rPr /><a:t>This assumes an </a:t></a:r><a:r><a:rPr b="1" /><a:t>exponential distribution</a:t></a:r><a:r><a:rPr /><a:t> for water levels — analytically convenient, though real flood distributions have heavier tails.</a:t></a:r></a:p><a:p><a:pPr lvl="0" indent="0" marL="0"><a:buNone /></a:pPr><a:r><a:rPr /><a:t>. . .</a:t></a:r></a:p><a:p><a:pPr lvl="0" indent="0" marL="0"><a:buNone /></a:pPr><a:r><a:rPr /><a:t>Notice: </a:t></a:r><a14:m><m:oMath xmlns:m="http://schemas.openxmlformats.org/officeDocument/2006/math"><m:r><m:t>α</m:t></m:r></m:oMath></a14:m><a:r><a:rPr /><a:t> appears </a:t></a:r><a:r><a:rPr b="1" /><a:t>twice</a:t></a:r><a:r><a:rPr /><a:t> — it makes risk grow faster (</a:t></a:r><a14:m><m:oMath xmlns:m="http://schemas.openxmlformats.org/officeDocument/2006/math"><m:r><m:t>α</m:t></m:r><m:r><m:t>η</m:t></m:r><m:r><m:t>t</m:t></m:r></m:oMath></a14:m><a:r><a:rPr /><a:t>) </a:t></a:r><a:r><a:rPr i="1" /><a:t>and</a:t></a:r><a:r><a:rPr /><a:t> makes each cm of dike more effective (</a:t></a:r><a14:m><m:oMath xmlns:m="http://schemas.openxmlformats.org/officeDocument/2006/math"><m:r><m:rPr><m:sty m:val="p" /></m:rPr><m:t>−</m:t></m:r><m:r><m:t>α</m:t></m:r><m:r><m:t>H</m:t></m:r></m:oMath></a14:m><a:r><a:rPr /><a:t>). Its effect on failure is </a:t></a:r><a:r><a:rPr b="1" /><a:t>non-monotonic</a:t></a:r><a:r><a:rPr /><a:t>.</a:t></a:r></a:p><a:p><a:pPr lvl="0" indent="0" marL="0"><a:spcBef><a:spcPts val="3000" /></a:spcBef><a:buNone /></a:pPr><a:r><a:rPr b="1" /><a:t>Lab 8: The XLRM Setup</a:t></a:r></a:p></p:txBody></p:sp></mc:Choice></mc:AlternateContent><p:graphicFrame><p:nvGraphicFramePr><p:cNvPr id="6" name="Content Placeholder 5" /><p:cNvGraphicFramePr><a:graphicFrameLocks noGrp="1" /></p:cNvGraphicFramePr><p:nvPr><p:ph idx="1" /></p:nvPr></p:nvGraphicFramePr><p:xfrm><a:off x="3568700" y="203200" /><a:ext cx="5105400" cy="4381500" /></p:xfrm><a:graphic><a:graphicData uri="http://schemas.openxmlformats.org/drawingml/2006/table"><a:tbl><a:tblPr firstRow="1" bandRow="1"><a:tableStyleId>{5C22544A-7EE6-4342-B048-85BDC9FD1C3A}</a:tableStyleId></a:tblPr><a:tblGrid><a:gridCol w="2362200" /><a:gridCol w="2743200" /></a:tblGrid><a:tr h="0"><a:tc><a:txBody><a:bodyPr /><a:lstStyle /><a:p><a:pPr lvl="0" indent="0" marL="0" algn="l"><a:buNone /></a:pPr><a:r><a:rPr /><a:t>XLRM</a:t></a:r></a:p></a:txBody><a:tcPr /></a:tc><a:tc><a:txBody><a:bodyPr /><a:lstStyle /><a:p><a:pPr lvl="0" indent="0" marL="0" algn="l"><a:buNone /></a:pPr><a:r><a:rPr /><a:t>Lab 8</a:t></a:r></a:p></a:txBody><a:tcPr /></a:tc></a:tr><a:tr h="0"><a:tc><a:txBody><a:bodyPr /><a:lstStyle /><a:p><a:pPr lvl="0" indent="0" marL="0" algn="l"><a:buNone /></a:pPr><a:r><a:rPr b="1" /><a:t>X</a:t></a:r><a:r><a:rPr /><a:t> (uncertainties)</a:t></a:r></a:p></a:txBody></a:tc><a:tc><a:txBody><a:bodyPr /><a:lstStyle /><a:p><a:pPr lvl="0" indent="0" marL="0" algn="l"><a:buNone /></a:pPr><a14:m><m:oMath xmlns:m="http://schemas.openxmlformats.org/officeDocument/2006/math"><m:sSub><m:e><m:r><m:t>P</m:t></m:r></m:e><m:sub><m:r><m:t>0</m:t></m:r></m:sub></m:sSub></m:oMath></a14:m><a:r><a:rPr /><a:t>, </a:t></a:r><a14:m><m:oMath xmlns:m="http://schemas.openxmlformats.org/officeDocument/2006/math"><m:r><m:t>α</m:t></m:r></m:oMath></a14:m><a:r><a:rPr /><a:t>, </a:t></a:r><a14:m><m:oMath xmlns:m="http://schemas.openxmlformats.org/officeDocument/2006/math"><m:r><m:t>η</m:t></m:r></m:oMath></a14:m><a:r><a:rPr /><a:t>, </a:t></a:r><a14:m><m:oMath xmlns:m="http://schemas.openxmlformats.org/officeDocument/2006/math"><m:sSub><m:e><m:r><m:t>V</m:t></m:r></m:e><m:sub><m:r><m:t>0</m:t></m:r></m:sub></m:sSub></m:oMath></a14:m><a:r><a:rPr /><a:t>, </a:t></a:r><a14:m><m:oMath xmlns:m="http://schemas.openxmlformats.org/officeDocument/2006/math"><m:r><m:t>δ</m:t></m:r></m:oMath></a14:m></a:p></a:txBody></a:tc></a:tr><a:tr h="0"><a:tc><a:txBody><a:bodyPr /><a:lstStyle /><a:p><a:pPr lvl="0" indent="0" marL="0" algn="l"><a:buNone /></a:pPr><a:r><a:rPr b="1" /><a:t>L</a:t></a:r><a:r><a:rPr /><a:t> (levers)</a:t></a:r></a:p></a:txBody></a:tc><a:tc><a:txBody><a:bodyPr /><a:lstStyle /><a:p><a:pPr lvl="0" indent="0" marL="0" algn="l"><a:buNone /></a:pPr><a14:m><m:oMath xmlns:m="http://schemas.openxmlformats.org/officeDocument/2006/math"><m:d><m:dPr><m:begChr m:val="(" /><m:sepChr m:val="" /><m:endChr m:val=")" /><m:grow /></m:dPr><m:e><m:sSub><m:e><m:r><m:t>T</m:t></m:r></m:e><m:sub><m:r><m:rPr><m:nor /><m:sty m:val="p" /></m:rPr><m:t>heighten</m:t></m:r></m:sub></m:sSub><m:r><m:rPr><m:sty m:val="p" /></m:rPr><m:t>,</m:t></m:r><m:r><m:t> </m:t></m:r><m:r><m:t>Δ</m:t></m:r><m:r><m:t>H</m:t></m:r></m:e></m:d></m:oMath></a14:m><a:r><a:rPr /><a:t> — when to heighten, how much</a:t></a:r></a:p></a:txBody></a:tc></a:tr><a:tr h="0"><a:tc><a:txBody><a:bodyPr /><a:lstStyle /><a:p><a:pPr lvl="0" indent="0" marL="0" algn="l"><a:buNone /></a:pPr><a:r><a:rPr b="1" /><a:t>R</a:t></a:r><a:r><a:rPr /><a:t> (model)</a:t></a:r></a:p></a:txBody></a:tc><a:tc><a:txBody><a:bodyPr /><a:lstStyle /><a:p><a:pPr lvl="0" indent="0" marL="0" algn="l"><a:buNone /></a:pPr><a:r><a:rPr /><a:t>Eijgenraam cost-benefit model</a:t></a:r></a:p></a:txBody></a:tc></a:tr><a:tr h="0"><a:tc><a:txBody><a:bodyPr /><a:lstStyle /><a:p><a:pPr lvl="0" indent="0" marL="0" algn="l"><a:buNone /></a:pPr><a:r><a:rPr b="1" /><a:t>M</a:t></a:r><a:r><a:rPr /><a:t> (metrics)</a:t></a:r></a:p></a:txBody></a:tc><a:tc><a:txBody><a:bodyPr /><a:lstStyle /><a:p><a:pPr lvl="0" indent="0" marL="0" algn="l"><a:buNone /></a:pPr><a:r><a:rPr /><a:t>Max failure probability, total cost</a:t></a:r></a:p></a:txBody></a:tc></a:tr></a:tbl></a:graphicData></a:graphic></p:graphicFrame></p:spTree></p:cSld></p:sld>
 </file>
 
 <file path=ppt/theme/theme1.xml><?xml version="1.0" encoding="utf-8"?>

--- a/lectures/week-10/index.pptx
+++ b/lectures/week-10/index.pptx
@@ -5153,7 +5153,7 @@
             </a:pPr>
             <a:r>
               <a:rPr/>
-              <a:t>Eijgenraam, Carel, Jarl Kind, Carlijn Bak, Ruud Brekelmans, Dick den Hertog, Matthijs Duits, Kees Roos, Pieter Vermeer, and Wim Kuijken. 2014. “Economically Efficient Standards to Protect the Netherlands Against Flooding.” </a:t>
+              <a:t>Eijgenraam, Carel, Jarl Kind, Carlijn Bak, et al. 2014. “Economically Efficient Standards to Protect the Netherlands Against Flooding.” </a:t>
             </a:r>
             <a:r>
               <a:rPr i="1"/>
@@ -5207,7 +5207,7 @@
             </a:pPr>
             <a:r>
               <a:rPr/>
-              <a:t>Srikrishnan, Vivek, David C. Lafferty, Tony E. Wong, Jonathan R. Lamontagne, Julianne D. Quinn, Sanjib Sharma, Nusrat J. Molla, et al. 2022. “Uncertainty Analysis in Multi-Sector Systems: Considerations for Risk Analysis, Projection, and Planning for Complex Systems.” </a:t>
+              <a:t>Srikrishnan, Vivek, David C. Lafferty, Tony E. Wong, et al. 2022. “Uncertainty Analysis in Multi-Sector Systems: Considerations for Risk Analysis, Projection, and Planning for Complex Systems.” </a:t>
             </a:r>
             <a:r>
               <a:rPr i="1"/>
@@ -5474,7 +5474,9 @@
         <p:nvSpPr>
           <p:cNvPr id="1" name="TextBox 3"/>
           <p:cNvSpPr txBox="1"/>
-          <p:nvPr/>
+          <p:nvPr>
+            <p:ph idx="1"/>
+          </p:nvPr>
         </p:nvSpPr>
         <p:spPr>
           <a:xfrm>
@@ -6193,34 +6195,36 @@
                       <m:jc m:val="center"/>
                     </m:oMathParaPr>
                     <m:oMath>
-                      <m:d>
-                        <m:dPr>
-                          <m:begChr m:val="("/>
-                          <m:sepChr m:val=""/>
-                          <m:endChr m:val=")"/>
-                          <m:grow/>
-                        </m:dPr>
-                        <m:e>
-                          <m:r>
-                            <m:rPr>
-                              <m:sty m:val="b"/>
-                            </m:rPr>
-                            <m:t>X</m:t>
-                          </m:r>
-                          <m:r>
-                            <m:rPr>
-                              <m:sty m:val="p"/>
-                            </m:rPr>
-                            <m:t>,</m:t>
-                          </m:r>
-                          <m:r>
-                            <m:rPr>
-                              <m:sty m:val="b"/>
-                            </m:rPr>
-                            <m:t>L</m:t>
-                          </m:r>
-                        </m:e>
-                      </m:d>
+                      <m:r>
+                        <m:rPr>
+                          <m:sty m:val="p"/>
+                        </m:rPr>
+                        <m:t>(</m:t>
+                      </m:r>
+                      <m:r>
+                        <m:rPr>
+                          <m:sty m:val="b"/>
+                        </m:rPr>
+                        <m:t>X</m:t>
+                      </m:r>
+                      <m:r>
+                        <m:rPr>
+                          <m:sty m:val="p"/>
+                        </m:rPr>
+                        <m:t>,</m:t>
+                      </m:r>
+                      <m:r>
+                        <m:rPr>
+                          <m:sty m:val="b"/>
+                        </m:rPr>
+                        <m:t>L</m:t>
+                      </m:r>
+                      <m:r>
+                        <m:rPr>
+                          <m:sty m:val="p"/>
+                        </m:rPr>
+                        <m:t>)</m:t>
+                      </m:r>
                       <m:limUpp>
                         <m:e>
                           <m:r>
@@ -7128,13 +7132,13 @@
 </p:sld>
 </file>
 
-<file path=ppt/slides/slide7.xml><?xml version="1.0" encoding="UTF-8"?><p:sld xmlns:a="http://schemas.openxmlformats.org/drawingml/2006/main" xmlns:r="http://schemas.openxmlformats.org/officeDocument/2006/relationships" xmlns:p="http://schemas.openxmlformats.org/presentationml/2006/main"><p:cSld><p:spTree><p:nvGrpSpPr><p:cNvPr id="1" name="" /><p:cNvGrpSpPr /><p:nvPr /></p:nvGrpSpPr><p:grpSpPr><a:xfrm><a:off x="0" y="0" /><a:ext cx="0" cy="0" /><a:chOff x="0" y="0" /><a:chExt cx="0" cy="0" /></a:xfrm></p:grpSpPr><mc:AlternateContent xmlns:mc="http://schemas.openxmlformats.org/markup-compatibility/2006"><mc:Choice xmlns:a14="http://schemas.microsoft.com/office/drawing/2010/main" Requires="a14"><p:sp><p:nvSpPr><p:cNvPr id="4" name="Text Placeholder 3" /><p:cNvSpPr><a:spLocks noGrp="1" /></p:cNvSpPr><p:nvPr><p:ph idx="2" sz="half" type="body" /></p:nvPr></p:nvSpPr><p:spPr /><p:txBody><a:bodyPr /><a:lstStyle /><a:p><a:pPr lvl="0" indent="0" marL="0"><a:buNone /></a:pPr><a:r><a:rPr /><a:t>. . .</a:t></a:r></a:p><a:p><a:pPr lvl="0" indent="0" marL="0"><a:buNone /></a:pPr><a:r><a:rPr /><a:t>The right choice depends on the problem — interpretability often matters more than classification accuracy.</a:t></a:r></a:p><a:p><a:pPr lvl="0" indent="0" marL="0"><a:spcBef><a:spcPts val="3000" /></a:spcBef><a:buNone /></a:pPr><a:r><a:rPr b="1" /><a:t>CART: Recursive Splitting</a:t></a:r></a:p><a:p><a:pPr lvl="0" indent="0" marL="0"><a:buNone /></a:pPr><a:r><a:rPr /><a:t>CART partitions the input space by recursive binary splits. At each node, find the variable </a:t></a:r><a14:m><m:oMath xmlns:m="http://schemas.openxmlformats.org/officeDocument/2006/math"><m:sSub><m:e><m:r><m:t>X</m:t></m:r></m:e><m:sub><m:r><m:t>k</m:t></m:r></m:sub></m:sSub></m:oMath></a14:m><a:r><a:rPr /><a:t> and threshold </a:t></a:r><a14:m><m:oMath xmlns:m="http://schemas.openxmlformats.org/officeDocument/2006/math"><m:r><m:t>t</m:t></m:r></m:oMath></a14:m><a:r><a:rPr /><a:t> that minimizes </a:t></a:r><a:r><a:rPr b="1" /><a:t>Gini impurity</a:t></a:r><a:r><a:rPr /><a:t> in the two resulting child nodes:</a:t></a:r></a:p><a:p><a:pPr lvl="0" indent="0" marL="0"><a:buNone /></a:pPr><a14:m><m:oMathPara xmlns:m="http://schemas.openxmlformats.org/officeDocument/2006/math"><m:oMathParaPr><m:jc m:val="center" /></m:oMathParaPr><m:oMath><m:sSub><m:e><m:r><m:t>G</m:t></m:r></m:e><m:sub><m:r><m:t>m</m:t></m:r></m:sub></m:sSub><m:r><m:rPr><m:sty m:val="p" /></m:rPr><m:t>=</m:t></m:r><m:r><m:t>2</m:t></m:r><m:r><m:t> </m:t></m:r><m:sSub><m:e><m:r><m:t>p</m:t></m:r></m:e><m:sub><m:r><m:t>m</m:t></m:r></m:sub></m:sSub><m:r><m:t> </m:t></m:r><m:d><m:dPr><m:begChr m:val="(" /><m:sepChr m:val="" /><m:endChr m:val=")" /><m:grow /></m:dPr><m:e><m:r><m:t>1</m:t></m:r><m:r><m:rPr><m:sty m:val="p" /></m:rPr><m:t>−</m:t></m:r><m:sSub><m:e><m:r><m:t>p</m:t></m:r></m:e><m:sub><m:r><m:t>m</m:t></m:r></m:sub></m:sSub></m:e></m:d></m:oMath></m:oMathPara></a14:m></a:p><a:p><a:pPr lvl="0" indent="0" marL="0"><a:buNone /></a:pPr><a:r><a:rPr /><a:t>where </a:t></a:r><a14:m><m:oMath xmlns:m="http://schemas.openxmlformats.org/officeDocument/2006/math"><m:sSub><m:e><m:r><m:t>p</m:t></m:r></m:e><m:sub><m:r><m:t>m</m:t></m:r></m:sub></m:sSub></m:oMath></a14:m><a:r><a:rPr /><a:t> is the fraction of failures in node </a:t></a:r><a14:m><m:oMath xmlns:m="http://schemas.openxmlformats.org/officeDocument/2006/math"><m:r><m:t>m</m:t></m:r></m:oMath></a14:m><a:r><a:rPr /><a:t> (</a:t></a:r><a14:m><m:oMath xmlns:m="http://schemas.openxmlformats.org/officeDocument/2006/math"><m:sSub><m:e><m:r><m:t>G</m:t></m:r></m:e><m:sub><m:r><m:t>m</m:t></m:r></m:sub></m:sSub><m:r><m:rPr><m:sty m:val="p" /></m:rPr><m:t>=</m:t></m:r><m:r><m:t>0</m:t></m:r></m:oMath></a14:m><a:r><a:rPr /><a:t> is pure; </a:t></a:r><a14:m><m:oMath xmlns:m="http://schemas.openxmlformats.org/officeDocument/2006/math"><m:sSub><m:e><m:r><m:t>G</m:t></m:r></m:e><m:sub><m:r><m:t>m</m:t></m:r></m:sub></m:sSub><m:r><m:rPr><m:sty m:val="p" /></m:rPr><m:t>=</m:t></m:r><m:r><m:t>0.5</m:t></m:r></m:oMath></a14:m><a:r><a:rPr /><a:t> is maximally mixed).</a:t></a:r></a:p><a:p><a:pPr lvl="0" indent="0" marL="0"><a:buNone /></a:pPr><a:r><a:rPr /><a:t>. . .</a:t></a:r></a:p><a:p><a:pPr lvl="0" indent="0" marL="0"><a:buNone /></a:pPr><a14:m><m:oMathPara xmlns:m="http://schemas.openxmlformats.org/officeDocument/2006/math"><m:oMathParaPr><m:jc m:val="center" /></m:oMathParaPr><m:oMath><m:r><m:rPr><m:nor /><m:sty m:val="p" /></m:rPr><m:t>Best split: </m:t></m:r><m:limLow><m:e><m:r><m:rPr><m:sty m:val="p" /></m:rPr><m:t>arg</m:t></m:r><m:r><m:rPr><m:sty m:val="p" /></m:rPr><m:t>min</m:t></m:r></m:e><m:lim><m:sSub><m:e><m:r><m:t>X</m:t></m:r></m:e><m:sub><m:r><m:t>k</m:t></m:r></m:sub></m:sSub><m:r><m:rPr><m:sty m:val="p" /></m:rPr><m:t>,</m:t></m:r><m:r><m:t> </m:t></m:r><m:r><m:t>t</m:t></m:r></m:lim></m:limLow><m:r><m:t> </m:t></m:r><m:f><m:fPr><m:type m:val="bar" /></m:fPr><m:num><m:sSub><m:e><m:r><m:t>N</m:t></m:r></m:e><m:sub><m:r><m:t>L</m:t></m:r></m:sub></m:sSub></m:num><m:den><m:r><m:t>N</m:t></m:r></m:den></m:f><m:sSub><m:e><m:r><m:t>G</m:t></m:r></m:e><m:sub><m:r><m:t>L</m:t></m:r></m:sub></m:sSub><m:r><m:rPr><m:sty m:val="p" /></m:rPr><m:t>+</m:t></m:r><m:f><m:fPr><m:type m:val="bar" /></m:fPr><m:num><m:sSub><m:e><m:r><m:t>N</m:t></m:r></m:e><m:sub><m:r><m:t>R</m:t></m:r></m:sub></m:sSub></m:num><m:den><m:r><m:t>N</m:t></m:r></m:den></m:f><m:sSub><m:e><m:r><m:t>G</m:t></m:r></m:e><m:sub><m:r><m:t>R</m:t></m:r></m:sub></m:sSub></m:oMath></m:oMathPara></a14:m></a:p><a:p><a:pPr lvl="0" indent="0" marL="0"><a:buNone /></a:pPr><a:r><a:rPr /><a:t>. . .</a:t></a:r></a:p><a:p><a:pPr lvl="0" indent="0" marL="0"><a:buNone /></a:pPr><a:r><a:rPr /><a:t>Why minimize Gini? Each split should make the children as </a:t></a:r><a:r><a:rPr i="1" /><a:t>pure</a:t></a:r><a:r><a:rPr /><a:t> as possible — nodes where almost all scenarios are failures, or almost none are.</a:t></a:r></a:p><a:p><a:pPr lvl="0" indent="0" marL="0"><a:spcBef><a:spcPts val="3000" /></a:spcBef><a:buNone /></a:pPr><a:r><a:rPr b="1" /><a:t>CART vs. Random Forests</a:t></a:r></a:p><a:p><a:pPr lvl="0" indent="0" marL="0"><a:buNone /></a:pPr><a:r><a:rPr /><a:t>A single CART tree is a </a:t></a:r><a:r><a:rPr b="1" /><a:t>deterministic</a:t></a:r><a:r><a:rPr /><a:t> partition: one tree, one set of rules.</a:t></a:r></a:p><a:p><a:pPr lvl="0" indent="0" marL="0"><a:buNone /></a:pPr><a:r><a:rPr /><a:t>. . .</a:t></a:r></a:p><a:p><a:pPr lvl="0" indent="0" marL="0"><a:buNone /></a:pPr><a:r><a:rPr /><a:t>A </a:t></a:r><a:r><a:rPr b="1" /><a:t>random forest</a:t></a:r><a:r><a:rPr /><a:t> builds hundreds of trees, each on a random subsample of the data and features, then averages their predictions.</a:t></a:r></a:p><a:p><a:pPr lvl="0" /><a:r><a:rPr /><a:t>Random forests are more accurate and more stable</a:t></a:r></a:p><a:p><a:pPr lvl="0" /><a:r><a:rPr /><a:t>But the output is a black box — you can’t read off simple “if/then” rules</a:t></a:r></a:p><a:p><a:pPr lvl="0" /><a:r><a:rPr /><a:t>For scenario discovery, we want </a:t></a:r><a:r><a:rPr i="1" /><a:t>interpretable boundaries</a:t></a:r><a:r><a:rPr /><a:t>, not maximum accuracy</a:t></a:r></a:p><a:p><a:pPr lvl="0" indent="0" marL="0"><a:buNone /></a:pPr><a:r><a:rPr /><a:t>. . .</a:t></a:r></a:p><a:p><a:pPr lvl="0" indent="0" marL="1270000"><a:buNone /></a:pPr><a:r><a:rPr sz="2000" b="1" /><a:t>Discussion</a:t></a:r></a:p><a:p><a:pPr lvl="0" indent="0" marL="1270000"><a:buNone /></a:pPr><a:r><a:rPr sz="2000" /><a:t>Why might a decision-maker prefer a single, less accurate tree over a more accurate but opaque ensemble?</a:t></a:r></a:p><a:p><a:pPr lvl="0" indent="0" marL="0"><a:spcBef><a:spcPts val="3000" /></a:spcBef><a:buNone /></a:pPr><a:r><a:rPr b="1" /><a:t>CART: From Tree to Partition</a:t></a:r></a:p><a:p><a:pPr lvl="0" indent="0" marL="0"><a:buNone /></a:pPr><a:r><a:rPr /><a:t>Each leaf predicts the </a:t></a:r><a:r><a:rPr b="1" /><a:t>majority class</a:t></a:r><a:r><a:rPr /><a:t> — failure (</a:t></a:r><a14:m><m:oMath xmlns:m="http://schemas.openxmlformats.org/officeDocument/2006/math"><m:r><m:t>y</m:t></m:r><m:r><m:rPr><m:sty m:val="p" /></m:rPr><m:t>=</m:t></m:r><m:r><m:t>1</m:t></m:r></m:oMath></a14:m><a:r><a:rPr /><a:t>) if more than half its scenarios are failures.</a:t></a:r></a:p><a:p><a:pPr lvl="0" indent="0" marL="0"><a:buNone /></a:pPr><a:r><a:rPr /><a:t>. . .</a:t></a:r></a:p><a:p><a:pPr lvl="0" indent="0" marL="0"><a:buNone /></a:pPr><a:r><a:rPr /><a:t>Example: a two-level tree on SLR rate and flood damage might produce:</a:t></a:r></a:p></p:txBody></p:sp></mc:Choice></mc:AlternateContent><p:graphicFrame><p:nvGraphicFramePr><p:cNvPr id="6" name="Content Placeholder 5" /><p:cNvGraphicFramePr><a:graphicFrameLocks noGrp="1" /></p:cNvGraphicFramePr><p:nvPr><p:ph idx="1" /></p:nvPr></p:nvGraphicFramePr><p:xfrm><a:off x="3568700" y="203200" /><a:ext cx="5105400" cy="4381500" /></p:xfrm><a:graphic><a:graphicData uri="http://schemas.openxmlformats.org/drawingml/2006/table"><a:tbl><a:tblPr firstRow="1" bandRow="1"><a:tableStyleId>{5C22544A-7EE6-4342-B048-85BDC9FD1C3A}</a:tableStyleId></a:tblPr><a:tblGrid><a:gridCol w="1270000" /><a:gridCol w="1270000" /><a:gridCol w="1270000" /><a:gridCol w="1270000" /></a:tblGrid><a:tr h="0"><a:tc><a:txBody><a:bodyPr /><a:lstStyle /><a:p><a:pPr lvl="0" indent="0" marL="0" algn="l"><a:buNone /></a:pPr><a:r><a:rPr /><a:t>Leaf</a:t></a:r></a:p></a:txBody><a:tcPr /></a:tc><a:tc><a:txBody><a:bodyPr /><a:lstStyle /><a:p><a:pPr lvl="0" indent="0" marL="0" algn="ctr"><a:buNone /></a:pPr><a:r><a:rPr /><a:t>SLR (m/century)</a:t></a:r></a:p></a:txBody><a:tcPr /></a:tc><a:tc><a:txBody><a:bodyPr /><a:lstStyle /><a:p><a:pPr lvl="0" indent="0" marL="0" algn="ctr"><a:buNone /></a:pPr><a:r><a:rPr /><a:t>Flood Damage ($B)</a:t></a:r></a:p></a:txBody><a:tcPr /></a:tc><a:tc><a:txBody><a:bodyPr /><a:lstStyle /><a:p><a:pPr lvl="0" indent="0" marL="0" algn="ctr"><a:buNone /></a:pPr><a:r><a:rPr /><a:t>Majority</a:t></a:r></a:p></a:txBody><a:tcPr /></a:tc></a:tr><a:tr h="0"><a:tc><a:txBody><a:bodyPr /><a:lstStyle /><a:p><a:pPr lvl="0" indent="0" marL="0" algn="l"><a:buNone /></a:pPr><a:r><a:rPr /><a:t>1</a:t></a:r></a:p></a:txBody></a:tc><a:tc><a:txBody><a:bodyPr /><a:lstStyle /><a:p><a:pPr lvl="0" indent="0" marL="0" algn="ctr"><a:buNone /></a:pPr><a14:m><m:oMath xmlns:m="http://schemas.openxmlformats.org/officeDocument/2006/math"><m:r><m:rPr><m:sty m:val="p" /></m:rPr><m:t>≤</m:t></m:r><m:r><m:t>0.5</m:t></m:r></m:oMath></a14:m></a:p></a:txBody></a:tc><a:tc><a:txBody><a:bodyPr /><a:lstStyle /><a:p><a:pPr lvl="0" indent="0" marL="0" algn="ctr"><a:buNone /></a:pPr><a:r><a:rPr /><a:t>any</a:t></a:r></a:p></a:txBody></a:tc><a:tc><a:txBody><a:bodyPr /><a:lstStyle /><a:p><a:pPr lvl="0" indent="0" marL="0" algn="ctr"><a:buNone /></a:pPr><a:r><a:rPr /><a:t>success</a:t></a:r></a:p></a:txBody></a:tc></a:tr><a:tr h="0"><a:tc><a:txBody><a:bodyPr /><a:lstStyle /><a:p><a:pPr lvl="0" indent="0" marL="0" algn="l"><a:buNone /></a:pPr><a:r><a:rPr /><a:t>2</a:t></a:r></a:p></a:txBody></a:tc><a:tc><a:txBody><a:bodyPr /><a:lstStyle /><a:p><a:pPr lvl="0" indent="0" marL="0" algn="ctr"><a:buNone /></a:pPr><a14:m><m:oMath xmlns:m="http://schemas.openxmlformats.org/officeDocument/2006/math"><m:r><m:rPr><m:sty m:val="p" /></m:rPr><m:t>&gt;</m:t></m:r><m:r><m:t>0.5</m:t></m:r></m:oMath></a14:m></a:p></a:txBody></a:tc><a:tc><a:txBody><a:bodyPr /><a:lstStyle /><a:p><a:pPr lvl="0" indent="0" marL="0" algn="ctr"><a:buNone /></a:pPr><a14:m><m:oMath xmlns:m="http://schemas.openxmlformats.org/officeDocument/2006/math"><m:r><m:rPr><m:sty m:val="p" /></m:rPr><m:t>≤</m:t></m:r><m:r><m:t>2</m:t></m:r></m:oMath></a14:m></a:p></a:txBody></a:tc><a:tc><a:txBody><a:bodyPr /><a:lstStyle /><a:p><a:pPr lvl="0" indent="0" marL="0" algn="ctr"><a:buNone /></a:pPr><a:r><a:rPr /><a:t>success</a:t></a:r></a:p></a:txBody></a:tc></a:tr><a:tr h="0"><a:tc><a:txBody><a:bodyPr /><a:lstStyle /><a:p><a:pPr lvl="0" indent="0" marL="0" algn="l"><a:buNone /></a:pPr><a:r><a:rPr /><a:t>3</a:t></a:r></a:p></a:txBody></a:tc><a:tc><a:txBody><a:bodyPr /><a:lstStyle /><a:p><a:pPr lvl="0" indent="0" marL="0" algn="ctr"><a:buNone /></a:pPr><a14:m><m:oMath xmlns:m="http://schemas.openxmlformats.org/officeDocument/2006/math"><m:r><m:rPr><m:sty m:val="p" /></m:rPr><m:t>&gt;</m:t></m:r><m:r><m:t>0.5</m:t></m:r></m:oMath></a14:m></a:p></a:txBody></a:tc><a:tc><a:txBody><a:bodyPr /><a:lstStyle /><a:p><a:pPr lvl="0" indent="0" marL="0" algn="ctr"><a:buNone /></a:pPr><a14:m><m:oMath xmlns:m="http://schemas.openxmlformats.org/officeDocument/2006/math"><m:r><m:rPr><m:sty m:val="p" /></m:rPr><m:t>&gt;</m:t></m:r><m:r><m:t>2</m:t></m:r></m:oMath></a14:m></a:p></a:txBody></a:tc><a:tc><a:txBody><a:bodyPr /><a:lstStyle /><a:p><a:pPr lvl="0" indent="0" marL="0" algn="ctr"><a:buNone /></a:pPr><a:r><a:rPr b="1" /><a:t>failure</a:t></a:r></a:p></a:txBody></a:tc></a:tr></a:tbl></a:graphicData></a:graphic></p:graphicFrame></p:spTree></p:cSld><p:timing><p:tnLst><p:par><p:cTn id="1" dur="indefinite" restart="never" nodeType="tmRoot"><p:childTnLst><p:seq concurrent="1" nextAc="seek"><p:cTn id="2" dur="indefinite" nodeType="mainSeq"><p:childTnLst><p:par><p:cTn id="3" fill="hold"><p:stCondLst><p:cond delay="indefinite" /></p:stCondLst><p:childTnLst><p:par><p:cTn id="4" fill="hold"><p:stCondLst><p:cond delay="0" /></p:stCondLst><p:childTnLst><p:par><p:cTn id="5" presetID="1" presetClass="entr" presetSubtype="0" fill="hold" grpId="0" nodeType="clickEffect"><p:stCondLst><p:cond delay="0" /></p:stCondLst><p:childTnLst><p:set><p:cBhvr><p:cTn id="6" dur="1" fill="hold"><p:stCondLst><p:cond delay="0" /></p:stCondLst></p:cTn><p:tgtEl><p:spTgt spid="4"><p:txEl><p:pRg st="14" end="14" /></p:txEl></p:spTgt></p:tgtEl><p:attrNameLst><p:attrName>style.visibility</p:attrName></p:attrNameLst></p:cBhvr><p:to><p:strVal val="visible" /></p:to></p:set></p:childTnLst></p:cTn></p:par></p:childTnLst></p:cTn></p:par></p:childTnLst></p:cTn></p:par><p:par><p:cTn id="7" fill="hold"><p:stCondLst><p:cond delay="indefinite" /></p:stCondLst><p:childTnLst><p:par><p:cTn id="8" fill="hold"><p:stCondLst><p:cond delay="0" /></p:stCondLst><p:childTnLst><p:par><p:cTn id="9" presetID="1" presetClass="entr" presetSubtype="0" fill="hold" grpId="0" nodeType="clickEffect"><p:stCondLst><p:cond delay="0" /></p:stCondLst><p:childTnLst><p:set><p:cBhvr><p:cTn id="10" dur="1" fill="hold"><p:stCondLst><p:cond delay="0" /></p:stCondLst></p:cTn><p:tgtEl><p:spTgt spid="4"><p:txEl><p:pRg st="15" end="15" /></p:txEl></p:spTgt></p:tgtEl><p:attrNameLst><p:attrName>style.visibility</p:attrName></p:attrNameLst></p:cBhvr><p:to><p:strVal val="visible" /></p:to></p:set></p:childTnLst></p:cTn></p:par></p:childTnLst></p:cTn></p:par></p:childTnLst></p:cTn></p:par><p:par><p:cTn id="11" fill="hold"><p:stCondLst><p:cond delay="indefinite" /></p:stCondLst><p:childTnLst><p:par><p:cTn id="12" fill="hold"><p:stCondLst><p:cond delay="0" /></p:stCondLst><p:childTnLst><p:par><p:cTn id="13" presetID="1" presetClass="entr" presetSubtype="0" fill="hold" grpId="0" nodeType="clickEffect"><p:stCondLst><p:cond delay="0" /></p:stCondLst><p:childTnLst><p:set><p:cBhvr><p:cTn id="14" dur="1" fill="hold"><p:stCondLst><p:cond delay="0" /></p:stCondLst></p:cTn><p:tgtEl><p:spTgt spid="4"><p:txEl><p:pRg st="16" end="16" /></p:txEl></p:spTgt></p:tgtEl><p:attrNameLst><p:attrName>style.visibility</p:attrName></p:attrNameLst></p:cBhvr><p:to><p:strVal val="visible" /></p:to></p:set></p:childTnLst></p:cTn></p:par></p:childTnLst></p:cTn></p:par></p:childTnLst></p:cTn></p:par></p:childTnLst></p:cTn><p:prevCondLst><p:cond evt="onPrev" delay="0"><p:tgtEl><p:sldTgt /></p:tgtEl></p:cond></p:prevCondLst><p:nextCondLst><p:cond evt="onNext" delay="0"><p:tgtEl><p:sldTgt /></p:tgtEl></p:cond></p:nextCondLst></p:seq></p:childTnLst></p:cTn></p:par></p:tnLst><p:bldLst><p:bldP spid="4" grpId="0" uiExpand="1" build="p" /></p:bldLst></p:timing></p:sld>
+<file path=ppt/slides/slide7.xml><?xml version="1.0" encoding="UTF-8"?><p:sld xmlns:a="http://schemas.openxmlformats.org/drawingml/2006/main" xmlns:r="http://schemas.openxmlformats.org/officeDocument/2006/relationships" xmlns:p="http://schemas.openxmlformats.org/presentationml/2006/main"><p:cSld><p:spTree><p:nvGrpSpPr><p:cNvPr id="1" name="" /><p:cNvGrpSpPr /><p:nvPr /></p:nvGrpSpPr><p:grpSpPr><a:xfrm><a:off x="0" y="0" /><a:ext cx="0" cy="0" /><a:chOff x="0" y="0" /><a:chExt cx="0" cy="0" /></a:xfrm></p:grpSpPr><mc:AlternateContent xmlns:mc="http://schemas.openxmlformats.org/markup-compatibility/2006"><mc:Choice xmlns:a14="http://schemas.microsoft.com/office/drawing/2010/main" Requires="a14"><p:sp><p:nvSpPr><p:cNvPr id="4" name="Text Placeholder 3" /><p:cNvSpPr><a:spLocks noGrp="1" /></p:cNvSpPr><p:nvPr><p:ph idx="2" sz="half" type="body" /></p:nvPr></p:nvSpPr><p:spPr /><p:txBody><a:bodyPr /><a:lstStyle /><a:p><a:pPr lvl="0" indent="0" marL="0"><a:buNone /></a:pPr><a:r><a:rPr /><a:t>. . .</a:t></a:r></a:p><a:p><a:pPr lvl="0" indent="0" marL="0"><a:buNone /></a:pPr><a:r><a:rPr /><a:t>The right choice depends on the problem — interpretability often matters more than classification accuracy.</a:t></a:r></a:p><a:p><a:pPr lvl="0" indent="0" marL="0"><a:spcBef><a:spcPts val="3000" /></a:spcBef><a:buNone /></a:pPr><a:r><a:rPr b="1" /><a:t>CART: Recursive Splitting</a:t></a:r></a:p><a:p><a:pPr lvl="0" indent="0" marL="0"><a:buNone /></a:pPr><a:r><a:rPr /><a:t>CART partitions the input space by recursive binary splits. At each node, find the variable </a:t></a:r><a14:m><m:oMath xmlns:m="http://schemas.openxmlformats.org/officeDocument/2006/math"><m:sSub><m:e><m:r><m:t>X</m:t></m:r></m:e><m:sub><m:r><m:t>k</m:t></m:r></m:sub></m:sSub></m:oMath></a14:m><a:r><a:rPr /><a:t> and threshold </a:t></a:r><a14:m><m:oMath xmlns:m="http://schemas.openxmlformats.org/officeDocument/2006/math"><m:r><m:t>t</m:t></m:r></m:oMath></a14:m><a:r><a:rPr /><a:t> that minimizes </a:t></a:r><a:r><a:rPr b="1" /><a:t>Gini impurity</a:t></a:r><a:r><a:rPr /><a:t> in the two resulting child nodes:</a:t></a:r></a:p><a:p><a:pPr lvl="0" indent="0" marL="0"><a:buNone /></a:pPr><a14:m><m:oMathPara xmlns:m="http://schemas.openxmlformats.org/officeDocument/2006/math"><m:oMathParaPr><m:jc m:val="center" /></m:oMathParaPr><m:oMath><m:sSub><m:e><m:r><m:t>G</m:t></m:r></m:e><m:sub><m:r><m:t>m</m:t></m:r></m:sub></m:sSub><m:r><m:rPr><m:sty m:val="p" /></m:rPr><m:t>=</m:t></m:r><m:r><m:t>2</m:t></m:r><m:r><m:t> </m:t></m:r><m:sSub><m:e><m:r><m:t>p</m:t></m:r></m:e><m:sub><m:r><m:t>m</m:t></m:r></m:sub></m:sSub><m:r><m:t> </m:t></m:r><m:r><m:rPr><m:sty m:val="p" /></m:rPr><m:t>(</m:t></m:r><m:r><m:t>1</m:t></m:r><m:r><m:rPr><m:sty m:val="p" /></m:rPr><m:t>−</m:t></m:r><m:sSub><m:e><m:r><m:t>p</m:t></m:r></m:e><m:sub><m:r><m:t>m</m:t></m:r></m:sub></m:sSub><m:r><m:rPr><m:sty m:val="p" /></m:rPr><m:t>)</m:t></m:r></m:oMath></m:oMathPara></a14:m></a:p><a:p><a:pPr lvl="0" indent="0" marL="0"><a:buNone /></a:pPr><a:r><a:rPr /><a:t>where </a:t></a:r><a14:m><m:oMath xmlns:m="http://schemas.openxmlformats.org/officeDocument/2006/math"><m:sSub><m:e><m:r><m:t>p</m:t></m:r></m:e><m:sub><m:r><m:t>m</m:t></m:r></m:sub></m:sSub></m:oMath></a14:m><a:r><a:rPr /><a:t> is the fraction of failures in node </a:t></a:r><a14:m><m:oMath xmlns:m="http://schemas.openxmlformats.org/officeDocument/2006/math"><m:r><m:t>m</m:t></m:r></m:oMath></a14:m><a:r><a:rPr /><a:t> (</a:t></a:r><a14:m><m:oMath xmlns:m="http://schemas.openxmlformats.org/officeDocument/2006/math"><m:sSub><m:e><m:r><m:t>G</m:t></m:r></m:e><m:sub><m:r><m:t>m</m:t></m:r></m:sub></m:sSub><m:r><m:rPr><m:sty m:val="p" /></m:rPr><m:t>=</m:t></m:r><m:r><m:t>0</m:t></m:r></m:oMath></a14:m><a:r><a:rPr /><a:t> is pure; </a:t></a:r><a14:m><m:oMath xmlns:m="http://schemas.openxmlformats.org/officeDocument/2006/math"><m:sSub><m:e><m:r><m:t>G</m:t></m:r></m:e><m:sub><m:r><m:t>m</m:t></m:r></m:sub></m:sSub><m:r><m:rPr><m:sty m:val="p" /></m:rPr><m:t>=</m:t></m:r><m:r><m:t>0.5</m:t></m:r></m:oMath></a14:m><a:r><a:rPr /><a:t> is maximally mixed).</a:t></a:r></a:p><a:p><a:pPr lvl="0" indent="0" marL="0"><a:buNone /></a:pPr><a:r><a:rPr /><a:t>. . .</a:t></a:r></a:p><a:p><a:pPr lvl="0" indent="0" marL="0"><a:buNone /></a:pPr><a14:m><m:oMathPara xmlns:m="http://schemas.openxmlformats.org/officeDocument/2006/math"><m:oMathParaPr><m:jc m:val="center" /></m:oMathParaPr><m:oMath><m:r><m:rPr><m:nor /><m:sty m:val="p" /></m:rPr><m:t>Best split: </m:t></m:r><m:limLow><m:e><m:r><m:rPr><m:sty m:val="p" /></m:rPr><m:t>arg</m:t></m:r><m:r><m:rPr><m:sty m:val="p" /></m:rPr><m:t>min</m:t></m:r></m:e><m:lim><m:sSub><m:e><m:r><m:t>X</m:t></m:r></m:e><m:sub><m:r><m:t>k</m:t></m:r></m:sub></m:sSub><m:r><m:rPr><m:sty m:val="p" /></m:rPr><m:t>,</m:t></m:r><m:r><m:t> </m:t></m:r><m:r><m:t>t</m:t></m:r></m:lim></m:limLow><m:r><m:t> </m:t></m:r><m:f><m:fPr><m:type m:val="bar" /></m:fPr><m:num><m:sSub><m:e><m:r><m:t>N</m:t></m:r></m:e><m:sub><m:r><m:t>L</m:t></m:r></m:sub></m:sSub></m:num><m:den><m:r><m:t>N</m:t></m:r></m:den></m:f><m:sSub><m:e><m:r><m:t>G</m:t></m:r></m:e><m:sub><m:r><m:t>L</m:t></m:r></m:sub></m:sSub><m:r><m:rPr><m:sty m:val="p" /></m:rPr><m:t>+</m:t></m:r><m:f><m:fPr><m:type m:val="bar" /></m:fPr><m:num><m:sSub><m:e><m:r><m:t>N</m:t></m:r></m:e><m:sub><m:r><m:t>R</m:t></m:r></m:sub></m:sSub></m:num><m:den><m:r><m:t>N</m:t></m:r></m:den></m:f><m:sSub><m:e><m:r><m:t>G</m:t></m:r></m:e><m:sub><m:r><m:t>R</m:t></m:r></m:sub></m:sSub></m:oMath></m:oMathPara></a14:m></a:p><a:p><a:pPr lvl="0" indent="0" marL="0"><a:buNone /></a:pPr><a:r><a:rPr /><a:t>. . .</a:t></a:r></a:p><a:p><a:pPr lvl="0" indent="0" marL="0"><a:buNone /></a:pPr><a:r><a:rPr /><a:t>Why minimize Gini? Each split should make the children as </a:t></a:r><a:r><a:rPr i="1" /><a:t>pure</a:t></a:r><a:r><a:rPr /><a:t> as possible — nodes where almost all scenarios are failures, or almost none are.</a:t></a:r></a:p><a:p><a:pPr lvl="0" indent="0" marL="0"><a:spcBef><a:spcPts val="3000" /></a:spcBef><a:buNone /></a:pPr><a:r><a:rPr b="1" /><a:t>CART vs. Random Forests</a:t></a:r></a:p><a:p><a:pPr lvl="0" indent="0" marL="0"><a:buNone /></a:pPr><a:r><a:rPr /><a:t>A single CART tree is a </a:t></a:r><a:r><a:rPr b="1" /><a:t>deterministic</a:t></a:r><a:r><a:rPr /><a:t> partition: one tree, one set of rules.</a:t></a:r></a:p><a:p><a:pPr lvl="0" indent="0" marL="0"><a:buNone /></a:pPr><a:r><a:rPr /><a:t>. . .</a:t></a:r></a:p><a:p><a:pPr lvl="0" indent="0" marL="0"><a:buNone /></a:pPr><a:r><a:rPr /><a:t>A </a:t></a:r><a:r><a:rPr b="1" /><a:t>random forest</a:t></a:r><a:r><a:rPr /><a:t> builds hundreds of trees, each on a random subsample of the data and features, then averages their predictions.</a:t></a:r></a:p><a:p><a:pPr lvl="0" /><a:r><a:rPr /><a:t>Random forests are more accurate and more stable</a:t></a:r></a:p><a:p><a:pPr lvl="0" /><a:r><a:rPr /><a:t>But the output is a black box — you can’t read off simple “if/then” rules</a:t></a:r></a:p><a:p><a:pPr lvl="0" /><a:r><a:rPr /><a:t>For scenario discovery, we want </a:t></a:r><a:r><a:rPr i="1" /><a:t>interpretable boundaries</a:t></a:r><a:r><a:rPr /><a:t>, not maximum accuracy</a:t></a:r></a:p><a:p><a:pPr lvl="0" indent="0" marL="0"><a:buNone /></a:pPr><a:r><a:rPr /><a:t>. . .</a:t></a:r></a:p><a:p><a:pPr lvl="0" indent="0" marL="1270000"><a:buNone /></a:pPr><a:r><a:rPr sz="2000" b="1" /><a:t>Discussion</a:t></a:r></a:p><a:p><a:pPr lvl="0" indent="0" marL="1270000"><a:buNone /></a:pPr><a:r><a:rPr sz="2000" /><a:t>Why might a decision-maker prefer a single, less accurate tree over a more accurate but opaque ensemble?</a:t></a:r></a:p><a:p><a:pPr lvl="0" indent="0" marL="0"><a:spcBef><a:spcPts val="3000" /></a:spcBef><a:buNone /></a:pPr><a:r><a:rPr b="1" /><a:t>CART: From Tree to Partition</a:t></a:r></a:p><a:p><a:pPr lvl="0" indent="0" marL="0"><a:buNone /></a:pPr><a:r><a:rPr /><a:t>Each leaf predicts the </a:t></a:r><a:r><a:rPr b="1" /><a:t>majority class</a:t></a:r><a:r><a:rPr /><a:t> — failure (</a:t></a:r><a14:m><m:oMath xmlns:m="http://schemas.openxmlformats.org/officeDocument/2006/math"><m:r><m:t>y</m:t></m:r><m:r><m:rPr><m:sty m:val="p" /></m:rPr><m:t>=</m:t></m:r><m:r><m:t>1</m:t></m:r></m:oMath></a14:m><a:r><a:rPr /><a:t>) if more than half its scenarios are failures.</a:t></a:r></a:p><a:p><a:pPr lvl="0" indent="0" marL="0"><a:buNone /></a:pPr><a:r><a:rPr /><a:t>. . .</a:t></a:r></a:p><a:p><a:pPr lvl="0" indent="0" marL="0"><a:buNone /></a:pPr><a:r><a:rPr /><a:t>Example: a two-level tree on SLR rate and flood damage might produce:</a:t></a:r></a:p></p:txBody></p:sp></mc:Choice></mc:AlternateContent><p:graphicFrame><p:nvGraphicFramePr><p:cNvPr id="6" name="Content Placeholder 5" /><p:cNvGraphicFramePr><a:graphicFrameLocks noGrp="1" /></p:cNvGraphicFramePr><p:nvPr><p:ph idx="1" /></p:nvPr></p:nvGraphicFramePr><p:xfrm><a:off x="3568700" y="203200" /><a:ext cx="5105400" cy="4381500" /></p:xfrm><a:graphic><a:graphicData uri="http://schemas.openxmlformats.org/drawingml/2006/table"><a:tbl><a:tblPr firstRow="1" bandRow="1"><a:tableStyleId>{5C22544A-7EE6-4342-B048-85BDC9FD1C3A}</a:tableStyleId></a:tblPr><a:tblGrid><a:gridCol w="1270000" /><a:gridCol w="1270000" /><a:gridCol w="1270000" /><a:gridCol w="1270000" /></a:tblGrid><a:tr h="0"><a:tc><a:txBody><a:bodyPr /><a:lstStyle /><a:p><a:pPr lvl="0" indent="0" marL="0" algn="l"><a:buNone /></a:pPr><a:r><a:rPr /><a:t>Leaf</a:t></a:r></a:p></a:txBody><a:tcPr /></a:tc><a:tc><a:txBody><a:bodyPr /><a:lstStyle /><a:p><a:pPr lvl="0" indent="0" marL="0" algn="ctr"><a:buNone /></a:pPr><a:r><a:rPr /><a:t>SLR (m/century)</a:t></a:r></a:p></a:txBody><a:tcPr /></a:tc><a:tc><a:txBody><a:bodyPr /><a:lstStyle /><a:p><a:pPr lvl="0" indent="0" marL="0" algn="ctr"><a:buNone /></a:pPr><a:r><a:rPr /><a:t>Flood Damage ($B)</a:t></a:r></a:p></a:txBody><a:tcPr /></a:tc><a:tc><a:txBody><a:bodyPr /><a:lstStyle /><a:p><a:pPr lvl="0" indent="0" marL="0" algn="ctr"><a:buNone /></a:pPr><a:r><a:rPr /><a:t>Majority</a:t></a:r></a:p></a:txBody><a:tcPr /></a:tc></a:tr><a:tr h="0"><a:tc><a:txBody><a:bodyPr /><a:lstStyle /><a:p><a:pPr lvl="0" indent="0" marL="0" algn="l"><a:buNone /></a:pPr><a:r><a:rPr /><a:t>1</a:t></a:r></a:p></a:txBody></a:tc><a:tc><a:txBody><a:bodyPr /><a:lstStyle /><a:p><a:pPr lvl="0" indent="0" marL="0" algn="ctr"><a:buNone /></a:pPr><a14:m><m:oMath xmlns:m="http://schemas.openxmlformats.org/officeDocument/2006/math"><m:r><m:rPr><m:sty m:val="p" /></m:rPr><m:t>≤</m:t></m:r><m:r><m:t>0.5</m:t></m:r></m:oMath></a14:m></a:p></a:txBody></a:tc><a:tc><a:txBody><a:bodyPr /><a:lstStyle /><a:p><a:pPr lvl="0" indent="0" marL="0" algn="ctr"><a:buNone /></a:pPr><a:r><a:rPr /><a:t>any</a:t></a:r></a:p></a:txBody></a:tc><a:tc><a:txBody><a:bodyPr /><a:lstStyle /><a:p><a:pPr lvl="0" indent="0" marL="0" algn="ctr"><a:buNone /></a:pPr><a:r><a:rPr /><a:t>success</a:t></a:r></a:p></a:txBody></a:tc></a:tr><a:tr h="0"><a:tc><a:txBody><a:bodyPr /><a:lstStyle /><a:p><a:pPr lvl="0" indent="0" marL="0" algn="l"><a:buNone /></a:pPr><a:r><a:rPr /><a:t>2</a:t></a:r></a:p></a:txBody></a:tc><a:tc><a:txBody><a:bodyPr /><a:lstStyle /><a:p><a:pPr lvl="0" indent="0" marL="0" algn="ctr"><a:buNone /></a:pPr><a14:m><m:oMath xmlns:m="http://schemas.openxmlformats.org/officeDocument/2006/math"><m:r><m:rPr><m:sty m:val="p" /></m:rPr><m:t>&gt;</m:t></m:r><m:r><m:t>0.5</m:t></m:r></m:oMath></a14:m></a:p></a:txBody></a:tc><a:tc><a:txBody><a:bodyPr /><a:lstStyle /><a:p><a:pPr lvl="0" indent="0" marL="0" algn="ctr"><a:buNone /></a:pPr><a14:m><m:oMath xmlns:m="http://schemas.openxmlformats.org/officeDocument/2006/math"><m:r><m:rPr><m:sty m:val="p" /></m:rPr><m:t>≤</m:t></m:r><m:r><m:t>2</m:t></m:r></m:oMath></a14:m></a:p></a:txBody></a:tc><a:tc><a:txBody><a:bodyPr /><a:lstStyle /><a:p><a:pPr lvl="0" indent="0" marL="0" algn="ctr"><a:buNone /></a:pPr><a:r><a:rPr /><a:t>success</a:t></a:r></a:p></a:txBody></a:tc></a:tr><a:tr h="0"><a:tc><a:txBody><a:bodyPr /><a:lstStyle /><a:p><a:pPr lvl="0" indent="0" marL="0" algn="l"><a:buNone /></a:pPr><a:r><a:rPr /><a:t>3</a:t></a:r></a:p></a:txBody></a:tc><a:tc><a:txBody><a:bodyPr /><a:lstStyle /><a:p><a:pPr lvl="0" indent="0" marL="0" algn="ctr"><a:buNone /></a:pPr><a14:m><m:oMath xmlns:m="http://schemas.openxmlformats.org/officeDocument/2006/math"><m:r><m:rPr><m:sty m:val="p" /></m:rPr><m:t>&gt;</m:t></m:r><m:r><m:t>0.5</m:t></m:r></m:oMath></a14:m></a:p></a:txBody></a:tc><a:tc><a:txBody><a:bodyPr /><a:lstStyle /><a:p><a:pPr lvl="0" indent="0" marL="0" algn="ctr"><a:buNone /></a:pPr><a14:m><m:oMath xmlns:m="http://schemas.openxmlformats.org/officeDocument/2006/math"><m:r><m:rPr><m:sty m:val="p" /></m:rPr><m:t>&gt;</m:t></m:r><m:r><m:t>2</m:t></m:r></m:oMath></a14:m></a:p></a:txBody></a:tc><a:tc><a:txBody><a:bodyPr /><a:lstStyle /><a:p><a:pPr lvl="0" indent="0" marL="0" algn="ctr"><a:buNone /></a:pPr><a:r><a:rPr b="1" /><a:t>failure</a:t></a:r></a:p></a:txBody></a:tc></a:tr></a:tbl></a:graphicData></a:graphic></p:graphicFrame></p:spTree></p:cSld><p:timing><p:tnLst><p:par><p:cTn id="1" dur="indefinite" restart="never" nodeType="tmRoot"><p:childTnLst><p:seq concurrent="1" nextAc="seek"><p:cTn id="2" dur="indefinite" nodeType="mainSeq"><p:childTnLst><p:par><p:cTn id="3" fill="hold"><p:stCondLst><p:cond delay="indefinite" /></p:stCondLst><p:childTnLst><p:par><p:cTn id="4" fill="hold"><p:stCondLst><p:cond delay="0" /></p:stCondLst><p:childTnLst><p:par><p:cTn id="5" presetID="1" presetClass="entr" presetSubtype="0" fill="hold" grpId="0" nodeType="clickEffect"><p:stCondLst><p:cond delay="0" /></p:stCondLst><p:childTnLst><p:set><p:cBhvr><p:cTn id="6" dur="1" fill="hold"><p:stCondLst><p:cond delay="0" /></p:stCondLst></p:cTn><p:tgtEl><p:spTgt spid="4"><p:txEl><p:pRg st="14" end="14" /></p:txEl></p:spTgt></p:tgtEl><p:attrNameLst><p:attrName>style.visibility</p:attrName></p:attrNameLst></p:cBhvr><p:to><p:strVal val="visible" /></p:to></p:set></p:childTnLst></p:cTn></p:par></p:childTnLst></p:cTn></p:par></p:childTnLst></p:cTn></p:par><p:par><p:cTn id="7" fill="hold"><p:stCondLst><p:cond delay="indefinite" /></p:stCondLst><p:childTnLst><p:par><p:cTn id="8" fill="hold"><p:stCondLst><p:cond delay="0" /></p:stCondLst><p:childTnLst><p:par><p:cTn id="9" presetID="1" presetClass="entr" presetSubtype="0" fill="hold" grpId="0" nodeType="clickEffect"><p:stCondLst><p:cond delay="0" /></p:stCondLst><p:childTnLst><p:set><p:cBhvr><p:cTn id="10" dur="1" fill="hold"><p:stCondLst><p:cond delay="0" /></p:stCondLst></p:cTn><p:tgtEl><p:spTgt spid="4"><p:txEl><p:pRg st="15" end="15" /></p:txEl></p:spTgt></p:tgtEl><p:attrNameLst><p:attrName>style.visibility</p:attrName></p:attrNameLst></p:cBhvr><p:to><p:strVal val="visible" /></p:to></p:set></p:childTnLst></p:cTn></p:par></p:childTnLst></p:cTn></p:par></p:childTnLst></p:cTn></p:par><p:par><p:cTn id="11" fill="hold"><p:stCondLst><p:cond delay="indefinite" /></p:stCondLst><p:childTnLst><p:par><p:cTn id="12" fill="hold"><p:stCondLst><p:cond delay="0" /></p:stCondLst><p:childTnLst><p:par><p:cTn id="13" presetID="1" presetClass="entr" presetSubtype="0" fill="hold" grpId="0" nodeType="clickEffect"><p:stCondLst><p:cond delay="0" /></p:stCondLst><p:childTnLst><p:set><p:cBhvr><p:cTn id="14" dur="1" fill="hold"><p:stCondLst><p:cond delay="0" /></p:stCondLst></p:cTn><p:tgtEl><p:spTgt spid="4"><p:txEl><p:pRg st="16" end="16" /></p:txEl></p:spTgt></p:tgtEl><p:attrNameLst><p:attrName>style.visibility</p:attrName></p:attrNameLst></p:cBhvr><p:to><p:strVal val="visible" /></p:to></p:set></p:childTnLst></p:cTn></p:par></p:childTnLst></p:cTn></p:par></p:childTnLst></p:cTn></p:par></p:childTnLst></p:cTn><p:prevCondLst><p:cond evt="onPrev" delay="0"><p:tgtEl><p:sldTgt /></p:tgtEl></p:cond></p:prevCondLst><p:nextCondLst><p:cond evt="onNext" delay="0"><p:tgtEl><p:sldTgt /></p:tgtEl></p:cond></p:nextCondLst></p:seq></p:childTnLst></p:cTn></p:par></p:tnLst><p:bldLst><p:bldP spid="4" grpId="0" uiExpand="1" build="p" /></p:bldLst></p:timing></p:sld>
 </file>
 
-<file path=ppt/slides/slide8.xml><?xml version="1.0" encoding="UTF-8"?><p:sld xmlns:a="http://schemas.openxmlformats.org/drawingml/2006/main" xmlns:r="http://schemas.openxmlformats.org/officeDocument/2006/relationships" xmlns:p="http://schemas.openxmlformats.org/presentationml/2006/main"><p:cSld><p:spTree><p:nvGrpSpPr><p:cNvPr id="1" name="" /><p:cNvGrpSpPr /><p:nvPr /></p:nvGrpSpPr><p:grpSpPr><a:xfrm><a:off x="0" y="0" /><a:ext cx="0" cy="0" /><a:chOff x="0" y="0" /><a:chExt cx="0" cy="0" /></a:xfrm></p:grpSpPr><mc:AlternateContent xmlns:mc="http://schemas.openxmlformats.org/markup-compatibility/2006"><mc:Choice xmlns:a14="http://schemas.microsoft.com/office/drawing/2010/main" Requires="a14"><p:sp><p:nvSpPr><p:cNvPr id="4" name="Text Placeholder 3" /><p:cNvSpPr><a:spLocks noGrp="1" /></p:cNvSpPr><p:nvPr><p:ph idx="2" sz="half" type="body" /></p:nvPr></p:nvSpPr><p:spPr /><p:txBody><a:bodyPr /><a:lstStyle /><a:p><a:pPr lvl="0" indent="0" marL="0"><a:buNone /></a:pPr><a:r><a:rPr /><a:t>. . .</a:t></a:r></a:p><a:p><a:pPr lvl="0" indent="0" marL="0"><a:buNone /></a:pPr><a:r><a:rPr /><a:t>Result: interpretable “if/then” rules — but boundaries are fixed top-down, not iteratively refined.</a:t></a:r></a:p><a:p><a:pPr lvl="0" indent="0" marL="0"><a:spcBef><a:spcPts val="3000" /></a:spcBef><a:buNone /></a:pPr><a:r><a:rPr b="1" /><a:t>Think-Pair-Share: Labeling Failures</a:t></a:r></a:p><a:p><a:pPr lvl="0" indent="0" marL="1270000"><a:buNone /></a:pPr><a:r><a:rPr sz="2000" b="1" /><a:t>Scenario</a:t></a:r></a:p><a:p><a:pPr lvl="0" indent="0" marL="1270000"><a:buNone /></a:pPr><a:r><a:rPr sz="2000" /><a:t>A city is evaluating a coastal sea wall sized for a 1-in-50-year storm surge, at a cost of $200M. Uncertain inputs: storm surge magnitude, sea level rise rate, future population exposure, discount rate, construction cost overrun.</a:t></a:r></a:p><a:p><a:pPr lvl="0" indent="0" marL="1270000"><a:buNone /></a:pPr><a:r><a:rPr sz="2000" b="1" /><a:t>Write (90 seconds)</a:t></a:r></a:p><a:p><a:pPr lvl="0" indent="0" marL="1270000"><a:buNone /></a:pPr><a:r><a:rPr sz="2000" /><a:t>In one sentence, define what “failure” means for this decision. Then write which two inputs you expect most drive failures and why.</a:t></a:r></a:p><a:p><a:pPr lvl="0" indent="0" marL="0"><a:buNone /></a:pPr><a:r><a:rPr b="1" /><a:t>Pair</a:t></a:r><a:r><a:rPr /><a:t>: Compare with your neighbor. Did you define failure the same way?</a:t></a:r></a:p><a:p><a:pPr lvl="0" indent="0" marL="0"><a:spcBef><a:spcPts val="3000" /></a:spcBef><a:buNone /></a:pPr><a:r><a:rPr b="1" /><a:t>Logistic Regression: The Model</a:t></a:r></a:p><a:p><a:pPr lvl="0" indent="0" marL="0"><a:buNone /></a:pPr><a:r><a:rPr /><a:t>For scenario </a:t></a:r><a14:m><m:oMath xmlns:m="http://schemas.openxmlformats.org/officeDocument/2006/math"><m:r><m:t>i</m:t></m:r></m:oMath></a14:m><a:r><a:rPr /><a:t> with input vector </a:t></a:r><a14:m><m:oMath xmlns:m="http://schemas.openxmlformats.org/officeDocument/2006/math"><m:sSub><m:e><m:r><m:rPr><m:sty m:val="b" /></m:rPr><m:t>z</m:t></m:r></m:e><m:sub><m:r><m:t>i</m:t></m:r></m:sub></m:sSub></m:oMath></a14:m><a:r><a:rPr /><a:t>, model the log-odds of failure:</a:t></a:r></a:p><a:p><a:pPr lvl="0" indent="0" marL="0"><a:buNone /></a:pPr><a14:m><m:oMathPara xmlns:m="http://schemas.openxmlformats.org/officeDocument/2006/math"><m:oMathParaPr><m:jc m:val="center" /></m:oMathParaPr><m:oMath><m:r><m:rPr><m:sty m:val="p" /></m:rPr><m:t>log</m:t></m:r><m:f><m:fPr><m:type m:val="bar" /></m:fPr><m:num><m:sSub><m:e><m:r><m:t>p</m:t></m:r></m:e><m:sub><m:r><m:t>i</m:t></m:r></m:sub></m:sSub></m:num><m:den><m:r><m:t>1</m:t></m:r><m:r><m:rPr><m:sty m:val="p" /></m:rPr><m:t>−</m:t></m:r><m:sSub><m:e><m:r><m:t>p</m:t></m:r></m:e><m:sub><m:r><m:t>i</m:t></m:r></m:sub></m:sSub></m:den></m:f><m:r><m:rPr><m:sty m:val="p" /></m:rPr><m:t>=</m:t></m:r><m:sSub><m:e><m:r><m:t>b</m:t></m:r></m:e><m:sub><m:r><m:t>0</m:t></m:r></m:sub></m:sSub><m:r><m:rPr><m:sty m:val="p" /></m:rPr><m:t>+</m:t></m:r><m:sSub><m:e><m:r><m:t>b</m:t></m:r></m:e><m:sub><m:r><m:t>1</m:t></m:r></m:sub></m:sSub><m:sSub><m:e><m:r><m:t>z</m:t></m:r></m:e><m:sub><m:r><m:t>i</m:t></m:r><m:r><m:t>1</m:t></m:r></m:sub></m:sSub><m:r><m:rPr><m:sty m:val="p" /></m:rPr><m:t>+</m:t></m:r><m:sSub><m:e><m:r><m:t>b</m:t></m:r></m:e><m:sub><m:r><m:t>2</m:t></m:r></m:sub></m:sSub><m:sSub><m:e><m:r><m:t>z</m:t></m:r></m:e><m:sub><m:r><m:t>i</m:t></m:r><m:r><m:t>2</m:t></m:r></m:sub></m:sSub><m:r><m:rPr><m:sty m:val="p" /></m:rPr><m:t>+</m:t></m:r><m:r><m:rPr><m:sty m:val="p" /></m:rPr><m:t>⋯</m:t></m:r><m:r><m:rPr><m:sty m:val="p" /></m:rPr><m:t>=</m:t></m:r><m:sSup><m:e><m:r><m:rPr><m:sty m:val="b" /></m:rPr><m:t>b</m:t></m:r></m:e><m:sup><m:r><m:rPr><m:sty m:val="p" /></m:rPr><m:t>⊤</m:t></m:r></m:sup></m:sSup><m:sSub><m:e><m:r><m:rPr><m:sty m:val="b" /></m:rPr><m:t>z</m:t></m:r></m:e><m:sub><m:r><m:t>i</m:t></m:r></m:sub></m:sSub></m:oMath></m:oMathPara></a14:m></a:p><a:p><a:pPr lvl="0" indent="0" marL="0"><a:buNone /></a:pPr><a:r><a:rPr /><a:t>. . .</a:t></a:r></a:p><a:p><a:pPr lvl="0" indent="0" marL="0"><a:buNone /></a:pPr><a:r><a:rPr /><a:t>Solving for </a:t></a:r><a14:m><m:oMath xmlns:m="http://schemas.openxmlformats.org/officeDocument/2006/math"><m:sSub><m:e><m:r><m:t>p</m:t></m:r></m:e><m:sub><m:r><m:t>i</m:t></m:r></m:sub></m:sSub></m:oMath></a14:m><a:r><a:rPr /><a:t> gives the </a:t></a:r><a:r><a:rPr b="1" /><a:t>sigmoid function</a:t></a:r><a:r><a:rPr /><a:t>:</a:t></a:r></a:p><a:p><a:pPr lvl="0" indent="0" marL="0"><a:buNone /></a:pPr><a14:m><m:oMathPara xmlns:m="http://schemas.openxmlformats.org/officeDocument/2006/math"><m:oMathParaPr><m:jc m:val="center" /></m:oMathParaPr><m:oMath><m:sSub><m:e><m:r><m:t>p</m:t></m:r></m:e><m:sub><m:r><m:t>i</m:t></m:r></m:sub></m:sSub><m:r><m:rPr><m:sty m:val="p" /></m:rPr><m:t>=</m:t></m:r><m:f><m:fPr><m:type m:val="bar" /></m:fPr><m:num><m:r><m:t>1</m:t></m:r></m:num><m:den><m:r><m:t>1</m:t></m:r><m:r><m:rPr><m:sty m:val="p" /></m:rPr><m:t>+</m:t></m:r><m:sSup><m:e><m:r><m:t>e</m:t></m:r></m:e><m:sup><m:r><m:rPr><m:sty m:val="p" /></m:rPr><m:t>−</m:t></m:r><m:sSup><m:e><m:r><m:rPr><m:sty m:val="b" /></m:rPr><m:t>b</m:t></m:r></m:e><m:sup><m:r><m:rPr><m:sty m:val="p" /></m:rPr><m:t>⊤</m:t></m:r></m:sup></m:sSup><m:sSub><m:e><m:r><m:rPr><m:sty m:val="b" /></m:rPr><m:t>z</m:t></m:r></m:e><m:sub><m:r><m:t>i</m:t></m:r></m:sub></m:sSub></m:sup></m:sSup></m:den></m:f></m:oMath></m:oMathPara></a14:m></a:p><a:p><a:pPr lvl="0" indent="0" marL="0"><a:buNone /></a:pPr><a:r><a:rPr /><a:t>. . .</a:t></a:r></a:p><a:p><a:pPr lvl="0" indent="0" marL="0"><a:buNone /></a:pPr><a14:m><m:oMath xmlns:m="http://schemas.openxmlformats.org/officeDocument/2006/math"><m:sSub><m:e><m:r><m:t>p</m:t></m:r></m:e><m:sub><m:r><m:t>i</m:t></m:r></m:sub></m:sSub><m:r><m:rPr><m:sty m:val="p" /></m:rPr><m:t>∈</m:t></m:r><m:d><m:dPr><m:begChr m:val="(" /><m:sepChr m:val="" /><m:endChr m:val=")" /><m:grow /></m:dPr><m:e><m:r><m:t>0</m:t></m:r><m:r><m:rPr><m:sty m:val="p" /></m:rPr><m:t>,</m:t></m:r><m:r><m:t>1</m:t></m:r></m:e></m:d></m:oMath></a14:m><a:r><a:rPr /><a:t> always. Classify as failure if </a:t></a:r><a14:m><m:oMath xmlns:m="http://schemas.openxmlformats.org/officeDocument/2006/math"><m:sSub><m:e><m:r><m:t>p</m:t></m:r></m:e><m:sub><m:r><m:t>i</m:t></m:r></m:sub></m:sSub><m:r><m:rPr><m:sty m:val="p" /></m:rPr><m:t>≥</m:t></m:r><m:r><m:t>0.5</m:t></m:r></m:oMath></a14:m><a:r><a:rPr /><a:t>, which is equivalent to </a:t></a:r><a14:m><m:oMath xmlns:m="http://schemas.openxmlformats.org/officeDocument/2006/math"><m:sSup><m:e><m:r><m:rPr><m:sty m:val="b" /></m:rPr><m:t>b</m:t></m:r></m:e><m:sup><m:r><m:rPr><m:sty m:val="p" /></m:rPr><m:t>⊤</m:t></m:r></m:sup></m:sSup><m:sSub><m:e><m:r><m:rPr><m:sty m:val="b" /></m:rPr><m:t>z</m:t></m:r></m:e><m:sub><m:r><m:t>i</m:t></m:r></m:sub></m:sSub><m:r><m:rPr><m:sty m:val="p" /></m:rPr><m:t>≥</m:t></m:r><m:r><m:t>0</m:t></m:r></m:oMath></a14:m><a:r><a:rPr /><a:t>.</a:t></a:r></a:p><a:p><a:pPr lvl="0" indent="0" marL="0"><a:spcBef><a:spcPts val="3000" /></a:spcBef><a:buNone /></a:pPr><a:r><a:rPr b="1" /><a:t>Interpreting Logistic Regression</a:t></a:r></a:p><a:p><a:pPr lvl="0" indent="0" marL="0"><a:buNone /></a:pPr><a:r><a:rPr /><a:t>The quantity </a:t></a:r><a14:m><m:oMath xmlns:m="http://schemas.openxmlformats.org/officeDocument/2006/math"><m:r><m:rPr><m:sty m:val="p" /></m:rPr><m:t>log</m:t></m:r><m:f><m:fPr><m:type m:val="bar" /></m:fPr><m:num><m:r><m:t>p</m:t></m:r></m:num><m:den><m:r><m:t>1</m:t></m:r><m:r><m:rPr><m:sty m:val="p" /></m:rPr><m:t>−</m:t></m:r><m:r><m:t>p</m:t></m:r></m:den></m:f></m:oMath></a14:m><a:r><a:rPr /><a:t> is the </a:t></a:r><a:r><a:rPr b="1" /><a:t>log-odds</a:t></a:r><a:r><a:rPr /><a:t> — the logarithm of the odds of failure. A fitted coefficient </a:t></a:r><a14:m><m:oMath xmlns:m="http://schemas.openxmlformats.org/officeDocument/2006/math"><m:sSub><m:e><m:r><m:t>b</m:t></m:r></m:e><m:sub><m:r><m:t>k</m:t></m:r></m:sub></m:sSub></m:oMath></a14:m><a:r><a:rPr /><a:t> tells you: a one-unit increase in </a:t></a:r><a14:m><m:oMath xmlns:m="http://schemas.openxmlformats.org/officeDocument/2006/math"><m:sSub><m:e><m:r><m:t>X</m:t></m:r></m:e><m:sub><m:r><m:t>k</m:t></m:r></m:sub></m:sSub></m:oMath></a14:m><a:r><a:rPr /><a:t> shifts the log-odds by </a:t></a:r><a14:m><m:oMath xmlns:m="http://schemas.openxmlformats.org/officeDocument/2006/math"><m:sSub><m:e><m:r><m:t>b</m:t></m:r></m:e><m:sub><m:r><m:t>k</m:t></m:r></m:sub></m:sSub></m:oMath></a14:m><a:r><a:rPr /><a:t>.</a:t></a:r></a:p><a:p><a:pPr lvl="0" indent="0" marL="0"><a:buNone /></a:pPr><a:r><a:rPr /><a:t>. . .</a:t></a:r></a:p><a:p><a:pPr lvl="0" indent="0" marL="0"><a:buNone /></a:pPr><a:r><a:rPr /><a:t>The </a:t></a:r><a:r><a:rPr b="1" /><a:t>odds ratio</a:t></a:r><a:r><a:rPr /><a:t> </a:t></a:r><a14:m><m:oMath xmlns:m="http://schemas.openxmlformats.org/officeDocument/2006/math"><m:sSup><m:e><m:r><m:t>e</m:t></m:r></m:e><m:sup><m:sSub><m:e><m:r><m:t>b</m:t></m:r></m:e><m:sub><m:r><m:t>k</m:t></m:r></m:sub></m:sSub></m:sup></m:sSup></m:oMath></a14:m><a:r><a:rPr /><a:t> gives a multiplicative interpretation:</a:t></a:r></a:p><a:p><a:pPr lvl="0" indent="0" marL="1270000"><a:buNone /></a:pPr><a:r><a:rPr sz="2000" /><a:t>“A one-unit increase in </a:t></a:r><a14:m><m:oMath xmlns:m="http://schemas.openxmlformats.org/officeDocument/2006/math"><m:sSub><m:e><m:r><m:t>X</m:t></m:r></m:e><m:sub><m:r><m:t>k</m:t></m:r></m:sub></m:sSub></m:oMath></a14:m><a:r><a:rPr sz="2000" /><a:t> multiplies the odds of failure by </a:t></a:r><a14:m><m:oMath xmlns:m="http://schemas.openxmlformats.org/officeDocument/2006/math"><m:sSup><m:e><m:r><m:t>e</m:t></m:r></m:e><m:sup><m:sSub><m:e><m:r><m:t>b</m:t></m:r></m:e><m:sub><m:r><m:t>k</m:t></m:r></m:sub></m:sSub></m:sup></m:sSup></m:oMath></a14:m><a:r><a:rPr sz="2000" /><a:t>.”</a:t></a:r></a:p><a:p><a:pPr lvl="0" indent="0" marL="0"><a:buNone /></a:pPr><a:r><a:rPr i="1" /><a:t>Example: if </a:t></a:r><a14:m><m:oMath xmlns:m="http://schemas.openxmlformats.org/officeDocument/2006/math"><m:sSub><m:e><m:r><m:t>b</m:t></m:r></m:e><m:sub><m:r><m:t>k</m:t></m:r></m:sub></m:sSub><m:r><m:rPr><m:sty m:val="p" /></m:rPr><m:t>=</m:t></m:r><m:r><m:t>0.7</m:t></m:r></m:oMath></a14:m><a:r><a:rPr i="1" /><a:t>, then </a:t></a:r><a14:m><m:oMath xmlns:m="http://schemas.openxmlformats.org/officeDocument/2006/math"><m:sSup><m:e><m:r><m:t>e</m:t></m:r></m:e><m:sup><m:r><m:t>0.7</m:t></m:r></m:sup></m:sSup><m:r><m:rPr><m:sty m:val="p" /></m:rPr><m:t>≈</m:t></m:r><m:r><m:t>2</m:t></m:r></m:oMath></a14:m><a:r><a:rPr i="1" /><a:t> — a unit increase in </a:t></a:r><a14:m><m:oMath xmlns:m="http://schemas.openxmlformats.org/officeDocument/2006/math"><m:sSub><m:e><m:r><m:t>X</m:t></m:r></m:e><m:sub><m:r><m:t>k</m:t></m:r></m:sub></m:sSub></m:oMath></a14:m><a:r><a:rPr i="1" /><a:t> doubles the odds of failure.</a:t></a:r></a:p><a:p><a:pPr lvl="0" indent="0" marL="0"><a:buNone /></a:pPr><a:r><a:rPr /><a:t>. . .</a:t></a:r></a:p><a:p><a:pPr lvl="0" indent="0" marL="0"><a:buNone /></a:pPr><a:r><a:rPr /><a:t>Rank inputs by </a:t></a:r><a14:m><m:oMath xmlns:m="http://schemas.openxmlformats.org/officeDocument/2006/math"><m:d><m:dPr><m:begChr m:val="|" /><m:sepChr m:val="" /><m:endChr m:val="|" /><m:grow /></m:dPr><m:e><m:sSub><m:e><m:r><m:t>b</m:t></m:r></m:e><m:sub><m:r><m:t>k</m:t></m:r></m:sub></m:sSub></m:e></m:d></m:oMath></a14:m><a:r><a:rPr /><a:t> (after standardizing) to answer: </a:t></a:r><a:r><a:rPr b="1" /><a:t>which inputs most drive failure?</a:t></a:r></a:p><a:p><a:pPr lvl="0" indent="0" marL="0"><a:spcBef><a:spcPts val="3000" /></a:spcBef><a:buNone /></a:pPr><a:r><a:rPr b="1" /><a:t>Lamontagne et al. (2019): The Setup</a:t></a:r></a:p><a:p><a:pPr lvl="0" indent="0" marL="0"><a:buNone /></a:pPr><a:r><a:rPr /><a:t>Lamontagne et al. (2019) ask: what abatement pathways lead to </a:t></a:r><a:r><a:rPr i="1" /><a:t>tolerable</a:t></a:r><a:r><a:rPr /><a:t> climate/economic futures, given deep uncertainty about human-Earth system (HES) dynamics?</a:t></a:r></a:p><a:p><a:pPr lvl="0" indent="0" marL="0"><a:buNone /></a:pPr><a:r><a:rPr /><a:t>. . .</a:t></a:r></a:p><a:p><a:pPr lvl="0" indent="0" marL="0"><a:buNone /></a:pPr><a:r><a:rPr b="1" /><a:t>Model</a:t></a:r><a:r><a:rPr /><a:t>: DICE integrated assessment model (climate + economy coupled)</a:t></a:r></a:p><a:p><a:pPr lvl="0" indent="0" marL="0"><a:buNone /></a:pPr><a:r><a:rPr b="1" /><a:t>Ensemble</a:t></a:r><a:r><a:rPr /><a:t>: 5,200,000 scenarios — 24 HES uncertain parameters + abatement growth rate (</a:t></a:r><a14:m><m:oMath xmlns:m="http://schemas.openxmlformats.org/officeDocument/2006/math"><m:r><m:t>α</m:t></m:r></m:oMath></a14:m><a:r><a:rPr /><a:t>)</a:t></a:r></a:p><a:p><a:pPr lvl="0" indent="0" marL="0"><a:buNone /></a:pPr><a:r><a:rPr b="1" /><a:t>Failure label</a:t></a:r><a:r><a:rPr /><a:t>: “intolerable” if warming </a:t></a:r><a14:m><m:oMath xmlns:m="http://schemas.openxmlformats.org/officeDocument/2006/math"><m:r><m:rPr><m:sty m:val="p" /></m:rPr><m:t>&gt;</m:t></m:r><m:sSup><m:e><m:r><m:t>2</m:t></m:r></m:e><m:sup><m:r><m:rPr><m:sty m:val="p" /></m:rPr><m:t>∘</m:t></m:r></m:sup></m:sSup></m:oMath></a14:m><a:r><a:rPr /><a:t>C in 2100, OR abatement cost </a:t></a:r><a14:m><m:oMath xmlns:m="http://schemas.openxmlformats.org/officeDocument/2006/math"><m:r><m:rPr><m:sty m:val="p" /></m:rPr><m:t>&gt;</m:t></m:r><m:r><m:t>3</m:t></m:r><m:r><m:rPr><m:sty m:val="p" /></m:rPr><m:t>%</m:t></m:r></m:oMath></a14:m><a:r><a:rPr /><a:t> of GWP, OR climate damages </a:t></a:r><a14:m><m:oMath xmlns:m="http://schemas.openxmlformats.org/officeDocument/2006/math"><m:r><m:rPr><m:sty m:val="p" /></m:rPr><m:t>&gt;</m:t></m:r><m:r><m:t>2</m:t></m:r><m:r><m:rPr><m:sty m:val="p" /></m:rPr><m:t>%</m:t></m:r></m:oMath></a14:m><a:r><a:rPr /><a:t> of GWP</a:t></a:r></a:p><a:p><a:pPr lvl="0" indent="0" marL="0"><a:buNone /></a:pPr><a:r><a:rPr /><a:t>. . .</a:t></a:r></a:p><a:p><a:pPr lvl="0" indent="0" marL="0"><a:buNone /></a:pPr><a:r><a:rPr /><a:t>Their methodology combines two tools you already know:</a:t></a:r></a:p><a:p><a:pPr lvl="0" indent="-342900" marL="342900"><a:buAutoNum type="arabicPeriod" /></a:pPr><a:r><a:rPr b="1" /><a:t>Sobol sensitivity analysis</a:t></a:r><a:r><a:rPr /><a:t> (Week 7) to rank the 24 uncertain parameters by importance — identifying which factors explain the most variance</a:t></a:r></a:p><a:p><a:pPr lvl="0" indent="-342900" marL="342900"><a:buAutoNum type="arabicPeriod" /></a:pPr><a:r><a:rPr b="1" /><a:t>Logistic regression</a:t></a:r><a:r><a:rPr /><a:t> (scenario discovery) to map how failure probability varies across the dominant factors — identifying </a:t></a:r><a:r><a:rPr i="1" /><a:t>where</a:t></a:r><a:r><a:rPr /><a:t> in the input space failure concentrates</a:t></a:r></a:p><a:p><a:pPr lvl="0" indent="0" marL="0"><a:spcBef><a:spcPts val="3000" /></a:spcBef><a:buNone /></a:pPr><a:r><a:rPr b="1" /><a:t>Lamontagne et al. (2019): The Finding</a:t></a:r></a:p><a:p><a:pPr lvl="0" indent="0" marL="0"><a:buNone /></a:pPr><a:r><a:rPr /><a:t>After labeling 5.2M runs as tolerable/intolerable, logistic regression on the dominant inputs shows:</a:t></a:r></a:p><a:p><a:pPr lvl="0" indent="0" marL="0"><a:buNone /></a:pPr><a:r><a:rPr /><a:t>. . .</a:t></a:r></a:p><a:p><a:pPr lvl="0" indent="0" marL="0"><a:buNone /></a:pPr><a:r><a:rPr /><a:t>The primary control on 2100 warming is the </a:t></a:r><a:r><a:rPr b="1" /><a:t>abatement growth rate</a:t></a:r><a:r><a:rPr /><a:t> — a societal choice, not an exogenous physical uncertainty.</a:t></a:r></a:p><a:p><a:pPr lvl="0" indent="0" marL="0"><a:buNone /></a:pPr><a:r><a:rPr /><a:t>. . .</a:t></a:r></a:p><a:p><a:pPr lvl="0" indent="0" marL="0"><a:buNone /></a:pPr><a:r><a:rPr /><a:t>Near-term warming is controlled by climate sensitivity (a physical parameter). Long-term warming is controlled by earlier abatement actions (a policy choice).</a:t></a:r></a:p><a:p><a:pPr lvl="0" indent="0" marL="0"><a:buNone /></a:pPr><a:r><a:rPr /><a:t>. . .</a:t></a:r></a:p><a:p><a:pPr lvl="0" indent="0" marL="0"><a:buNone /></a:pPr><a:r><a:rPr /><a:t>It is mostly a question of </a:t></a:r><a:r><a:rPr b="1" /><a:t>whether we choose</a:t></a:r><a:r><a:rPr /><a:t> to limit warming — not whether we </a:t></a:r><a:r><a:rPr i="1" /><a:t>can</a:t></a:r><a:r><a:rPr /><a:t>.</a:t></a:r></a:p><a:p><a:pPr lvl="0" indent="0" marL="0"><a:buNone /></a:pPr><a:r><a:rPr /><a:t>. . .</a:t></a:r></a:p><a:p><a:pPr lvl="0" indent="0" marL="0"><a:buNone /></a:pPr><a:r><a:rPr /><a:t>Wednesday we will dig into the figures: how the Sobol indices shift over time (Fig 2), and what the logistic regression contours look like (Fig 3).</a:t></a:r></a:p><a:p><a:pPr lvl="0" indent="0" marL="0"><a:spcBef><a:spcPts val="3000" /></a:spcBef><a:buNone /></a:pPr><a:r><a:rPr b="1" /><a:t>PRIM: Patient Rule Induction Method</a:t></a:r></a:p><a:p><a:pPr lvl="0" indent="0" marL="0"><a:buNone /></a:pPr><a:r><a:rPr /><a:t>PRIM finds a </a:t></a:r><a:r><a:rPr b="1" /><a:t>box</a:t></a:r><a:r><a:rPr /><a:t> in the input space that concentrates failures:</a:t></a:r></a:p><a:p><a:pPr lvl="0" indent="0" marL="0"><a:buNone /></a:pPr><a14:m><m:oMathPara xmlns:m="http://schemas.openxmlformats.org/officeDocument/2006/math"><m:oMathParaPr><m:jc m:val="center" /></m:oMathParaPr><m:oMath><m:sSub><m:e><m:r><m:t>a</m:t></m:r></m:e><m:sub><m:r><m:t>k</m:t></m:r></m:sub></m:sSub><m:r><m:rPr><m:sty m:val="p" /></m:rPr><m:t>≤</m:t></m:r><m:sSub><m:e><m:r><m:t>X</m:t></m:r></m:e><m:sub><m:r><m:t>k</m:t></m:r></m:sub></m:sSub><m:r><m:rPr><m:sty m:val="p" /></m:rPr><m:t>≤</m:t></m:r><m:sSub><m:e><m:r><m:t>b</m:t></m:r></m:e><m:sub><m:r><m:t>k</m:t></m:r></m:sub></m:sSub><m:r><m:t> </m:t></m:r><m:r><m:rPr><m:nor /><m:sty m:val="p" /></m:rPr><m:t>for each input </m:t></m:r><m:r><m:t>k</m:t></m:r></m:oMath></m:oMathPara></a14:m></a:p><a:p><a:pPr lvl="0" indent="0" marL="0"><a:buNone /></a:pPr><a:r><a:rPr /><a:t>. . .</a:t></a:r></a:p><a:p><a:pPr lvl="0" indent="0" marL="0"><a:buNone /></a:pPr><a:r><a:rPr b="1" /><a:t>Interpretation</a:t></a:r><a:r><a:rPr /><a:t>: “The strategy fails when SLR </a:t></a:r><a14:m><m:oMath xmlns:m="http://schemas.openxmlformats.org/officeDocument/2006/math"><m:r><m:rPr><m:sty m:val="p" /></m:rPr><m:t>&gt;</m:t></m:r><m:r><m:t>0.8</m:t></m:r><m:r><m:t> </m:t></m:r><m:r><m:rPr><m:nor /><m:sty m:val="p" /></m:rPr><m:t>m</m:t></m:r></m:oMath></a14:m><a:r><a:rPr /><a:t> AND storm surge return period </a:t></a:r><a14:m><m:oMath xmlns:m="http://schemas.openxmlformats.org/officeDocument/2006/math"><m:r><m:rPr><m:sty m:val="p" /></m:rPr><m:t>&lt;</m:t></m:r><m:r><m:t>25</m:t></m:r><m:r><m:t> </m:t></m:r><m:r><m:rPr><m:nor /><m:sty m:val="p" /></m:rPr><m:t>years</m:t></m:r></m:oMath></a14:m><a:r><a:rPr /><a:t>” is a PRIM box in two dimensions.</a:t></a:r></a:p><a:p><a:pPr lvl="0" indent="0" marL="0"><a:buNone /></a:pPr><a:r><a:rPr /><a:t>. . .</a:t></a:r></a:p><a:p><a:pPr lvl="0" indent="0" marL="0"><a:buNone /></a:pPr><a:r><a:rPr /><a:t>“Patient” refers to the algorithm: PRIM peels small slices from the box one at a time. Each peel removes the thinnest slice with the fewest failures.</a:t></a:r></a:p><a:p><a:pPr lvl="0" indent="0" marL="0"><a:spcBef><a:spcPts val="3000" /></a:spcBef><a:buNone /></a:pPr><a:r><a:rPr b="1" /><a:t>PRIM: Coverage and Density</a:t></a:r></a:p><a:p><a:pPr lvl="0" indent="0" marL="0"><a:buNone /></a:pPr><a:r><a:rPr /><a:t>For a box </a:t></a:r><a14:m><m:oMath xmlns:m="http://schemas.openxmlformats.org/officeDocument/2006/math"><m:r><m:t>B</m:t></m:r></m:oMath></a14:m><a:r><a:rPr /><a:t> over an ensemble with </a:t></a:r><a14:m><m:oMath xmlns:m="http://schemas.openxmlformats.org/officeDocument/2006/math"><m:r><m:t>N</m:t></m:r></m:oMath></a14:m><a:r><a:rPr /><a:t> total runs, </a:t></a:r><a14:m><m:oMath xmlns:m="http://schemas.openxmlformats.org/officeDocument/2006/math"><m:sSub><m:e><m:r><m:t>N</m:t></m:r></m:e><m:sub><m:r><m:t>f</m:t></m:r></m:sub></m:sSub></m:oMath></a14:m><a:r><a:rPr /><a:t> of which are failures:</a:t></a:r></a:p><a:p><a:pPr lvl="0" indent="0" marL="0"><a:buNone /></a:pPr><a:r><a:rPr /><a:t>. . .</a:t></a:r></a:p><a:p><a:pPr lvl="0" indent="0" marL="0"><a:buNone /></a:pPr><a14:m><m:oMathPara xmlns:m="http://schemas.openxmlformats.org/officeDocument/2006/math"><m:oMathParaPr><m:jc m:val="center" /></m:oMathParaPr><m:oMath><m:r><m:rPr><m:nor /><m:sty m:val="p" /></m:rPr><m:t>Coverage</m:t></m:r><m:r><m:rPr><m:sty m:val="p" /></m:rPr><m:t>=</m:t></m:r><m:f><m:fPr><m:type m:val="bar" /></m:fPr><m:num><m:d><m:dPr><m:begChr m:val="|" /><m:sepChr m:val="" /><m:endChr m:val="|" /><m:grow /></m:dPr><m:e><m:r><m:rPr><m:sty m:val="p" /></m:rPr><m:t>{</m:t></m:r><m:r><m:rPr><m:nor /><m:sty m:val="p" /></m:rPr><m:t>failures inside </m:t></m:r><m:r><m:t>B</m:t></m:r><m:r><m:rPr><m:sty m:val="p" /></m:rPr><m:t>}</m:t></m:r></m:e></m:d></m:num><m:den><m:sSub><m:e><m:r><m:t>N</m:t></m:r></m:e><m:sub><m:r><m:t>f</m:t></m:r></m:sub></m:sSub></m:den></m:f><m:r><m:t>  </m:t></m:r><m:r><m:rPr><m:nor /><m:sty m:val="p" /></m:rPr><m:t>(recall)</m:t></m:r></m:oMath></m:oMathPara></a14:m></a:p><a:p><a:pPr lvl="0" indent="0" marL="0"><a:buNone /></a:pPr><a:r><a:rPr i="1" /><a:t>What fraction of all failures does the box capture?</a:t></a:r></a:p><a:p><a:pPr lvl="0" indent="0" marL="0"><a:buNone /></a:pPr><a:r><a:rPr /><a:t>. . .</a:t></a:r></a:p><a:p><a:pPr lvl="0" indent="0" marL="0"><a:buNone /></a:pPr><a14:m><m:oMathPara xmlns:m="http://schemas.openxmlformats.org/officeDocument/2006/math"><m:oMathParaPr><m:jc m:val="center" /></m:oMathParaPr><m:oMath><m:r><m:rPr><m:nor /><m:sty m:val="p" /></m:rPr><m:t>Density</m:t></m:r><m:r><m:rPr><m:sty m:val="p" /></m:rPr><m:t>=</m:t></m:r><m:f><m:fPr><m:type m:val="bar" /></m:fPr><m:num><m:d><m:dPr><m:begChr m:val="|" /><m:sepChr m:val="" /><m:endChr m:val="|" /><m:grow /></m:dPr><m:e><m:r><m:rPr><m:sty m:val="p" /></m:rPr><m:t>{</m:t></m:r><m:r><m:rPr><m:nor /><m:sty m:val="p" /></m:rPr><m:t>failures inside </m:t></m:r><m:r><m:t>B</m:t></m:r><m:r><m:rPr><m:sty m:val="p" /></m:rPr><m:t>}</m:t></m:r></m:e></m:d></m:num><m:den><m:d><m:dPr><m:begChr m:val="|" /><m:sepChr m:val="" /><m:endChr m:val="|" /><m:grow /></m:dPr><m:e><m:r><m:rPr><m:sty m:val="p" /></m:rPr><m:t>{</m:t></m:r><m:r><m:rPr><m:nor /><m:sty m:val="p" /></m:rPr><m:t>scenarios inside </m:t></m:r><m:r><m:t>B</m:t></m:r><m:r><m:rPr><m:sty m:val="p" /></m:rPr><m:t>}</m:t></m:r></m:e></m:d></m:den></m:f><m:r><m:t>  </m:t></m:r><m:r><m:rPr><m:nor /><m:sty m:val="p" /></m:rPr><m:t>(precision)</m:t></m:r></m:oMath></m:oMathPara></a14:m></a:p><a:p><a:pPr lvl="0" indent="0" marL="0"><a:buNone /></a:pPr><a:r><a:rPr i="1" /><a:t>Of all scenarios in the box, what fraction are failures?</a:t></a:r></a:p><a:p><a:pPr lvl="0" indent="0" marL="0"><a:spcBef><a:spcPts val="3000" /></a:spcBef><a:buNone /></a:pPr><a:r><a:rPr b="1" /><a:t>The Coverage–Density Trade-off</a:t></a:r></a:p><a:p><a:pPr lvl="0" indent="0" marL="0"><a:buNone /></a:pPr><a:r><a:rPr /><a:t>PRIM starts with the full input space and </a:t></a:r><a:r><a:rPr b="1" /><a:t>peels</a:t></a:r><a:r><a:rPr /><a:t> away small slices to increase density, recording coverage as it goes.</a:t></a:r></a:p><a:p><a:pPr lvl="0" indent="0" marL="0"><a:buNone /></a:pPr><a:r><a:rPr /><a:t>. . .</a:t></a:r></a:p><a:p><a:pPr lvl="0" indent="0" marL="0"><a:buNone /></a:pPr><a:r><a:rPr /><a:t>The output is a </a:t></a:r><a:r><a:rPr b="1" /><a:t>peeling trajectory</a:t></a:r><a:r><a:rPr /><a:t>: a set of nested boxes tracing the Pareto frontier in coverage–density space.</a:t></a:r></a:p><a:p><a:pPr lvl="0" /><a:r><a:rPr /><a:t>Start: large box, high coverage, low density</a:t></a:r></a:p><a:p><a:pPr lvl="0" /><a:r><a:rPr /><a:t>Peel: remove slices where failures are sparse</a:t></a:r></a:p><a:p><a:pPr lvl="0" /><a:r><a:rPr /><a:t>End: small box, high density, low coverage</a:t></a:r></a:p><a:p><a:pPr lvl="0" /><a:r><a:rPr /><a:t>The analyst </a:t></a:r><a:r><a:rPr b="1" /><a:t>chooses</a:t></a:r><a:r><a:rPr /><a:t> the box that best matches their decision context</a:t></a:r></a:p><a:p><a:pPr lvl="0" indent="0" marL="0"><a:spcBef><a:spcPts val="3000" /></a:spcBef><a:buNone /></a:pPr><a:r><a:rPr b="1" /><a:t>Write-and-Respond: Interpreting a PRIM Box</a:t></a:r></a:p><a:p><a:pPr lvl="0" indent="0" marL="0"><a:buNone /></a:pPr><a:r><a:rPr /><a:t>PRIM analysis of a 1-meter house elevation policy returns:</a:t></a:r></a:p></p:txBody></p:sp></mc:Choice></mc:AlternateContent><p:graphicFrame><p:nvGraphicFramePr><p:cNvPr id="6" name="Content Placeholder 5" /><p:cNvGraphicFramePr><a:graphicFrameLocks noGrp="1" /></p:cNvGraphicFramePr><p:nvPr><p:ph idx="1" /></p:nvPr></p:nvGraphicFramePr><p:xfrm><a:off x="3568700" y="203200" /><a:ext cx="5105400" cy="4381500" /></p:xfrm><a:graphic><a:graphicData uri="http://schemas.openxmlformats.org/drawingml/2006/table"><a:tbl><a:tblPr firstRow="1" bandRow="1"><a:tableStyleId>{5C22544A-7EE6-4342-B048-85BDC9FD1C3A}</a:tableStyleId></a:tblPr><a:tblGrid><a:gridCol w="1016000" /><a:gridCol w="1016000" /><a:gridCol w="1016000" /><a:gridCol w="1016000" /><a:gridCol w="1016000" /></a:tblGrid><a:tr h="0"><a:tc><a:txBody><a:bodyPr /><a:lstStyle /><a:p><a:pPr lvl="0" indent="0" marL="0" algn="l"><a:buNone /></a:pPr><a:r><a:rPr /><a:t>Box</a:t></a:r></a:p></a:txBody><a:tcPr /></a:tc><a:tc><a:txBody><a:bodyPr /><a:lstStyle /><a:p><a:pPr lvl="0" indent="0" marL="0" algn="ctr"><a:buNone /></a:pPr><a:r><a:rPr /><a:t>SLR Rate (m/century)</a:t></a:r></a:p></a:txBody><a:tcPr /></a:tc><a:tc><a:txBody><a:bodyPr /><a:lstStyle /><a:p><a:pPr lvl="0" indent="0" marL="0" algn="ctr"><a:buNone /></a:pPr><a:r><a:rPr /><a:t>Storm Return Period</a:t></a:r></a:p></a:txBody><a:tcPr /></a:tc><a:tc><a:txBody><a:bodyPr /><a:lstStyle /><a:p><a:pPr lvl="0" indent="0" marL="0" algn="ctr"><a:buNone /></a:pPr><a:r><a:rPr /><a:t>Coverage</a:t></a:r></a:p></a:txBody><a:tcPr /></a:tc><a:tc><a:txBody><a:bodyPr /><a:lstStyle /><a:p><a:pPr lvl="0" indent="0" marL="0" algn="ctr"><a:buNone /></a:pPr><a:r><a:rPr /><a:t>Density</a:t></a:r></a:p></a:txBody><a:tcPr /></a:tc></a:tr><a:tr h="0"><a:tc><a:txBody><a:bodyPr /><a:lstStyle /><a:p><a:pPr lvl="0" indent="0" marL="0" algn="l"><a:buNone /></a:pPr><a:r><a:rPr /><a:t>A</a:t></a:r></a:p></a:txBody></a:tc><a:tc><a:txBody><a:bodyPr /><a:lstStyle /><a:p><a:pPr lvl="0" indent="0" marL="0" algn="ctr"><a:buNone /></a:pPr><a14:m><m:oMath xmlns:m="http://schemas.openxmlformats.org/officeDocument/2006/math"><m:r><m:rPr><m:sty m:val="p" /></m:rPr><m:t>&gt;</m:t></m:r><m:r><m:t>0.4</m:t></m:r></m:oMath></a14:m></a:p></a:txBody></a:tc><a:tc><a:txBody><a:bodyPr /><a:lstStyle /><a:p><a:pPr lvl="0" indent="0" marL="0" algn="ctr"><a:buNone /></a:pPr><a:r><a:rPr /><a:t>any</a:t></a:r></a:p></a:txBody></a:tc><a:tc><a:txBody><a:bodyPr /><a:lstStyle /><a:p><a:pPr lvl="0" indent="0" marL="0" algn="ctr"><a:buNone /></a:pPr><a:r><a:rPr /><a:t>94%</a:t></a:r></a:p></a:txBody></a:tc><a:tc><a:txBody><a:bodyPr /><a:lstStyle /><a:p><a:pPr lvl="0" indent="0" marL="0" algn="ctr"><a:buNone /></a:pPr><a:r><a:rPr /><a:t>31%</a:t></a:r></a:p></a:txBody></a:tc></a:tr><a:tr h="0"><a:tc><a:txBody><a:bodyPr /><a:lstStyle /><a:p><a:pPr lvl="0" indent="0" marL="0" algn="l"><a:buNone /></a:pPr><a:r><a:rPr /><a:t>B</a:t></a:r></a:p></a:txBody></a:tc><a:tc><a:txBody><a:bodyPr /><a:lstStyle /><a:p><a:pPr lvl="0" indent="0" marL="0" algn="ctr"><a:buNone /></a:pPr><a14:m><m:oMath xmlns:m="http://schemas.openxmlformats.org/officeDocument/2006/math"><m:r><m:rPr><m:sty m:val="p" /></m:rPr><m:t>&gt;</m:t></m:r><m:r><m:t>0.8</m:t></m:r></m:oMath></a14:m></a:p></a:txBody></a:tc><a:tc><a:txBody><a:bodyPr /><a:lstStyle /><a:p><a:pPr lvl="0" indent="0" marL="0" algn="ctr"><a:buNone /></a:pPr><a14:m><m:oMath xmlns:m="http://schemas.openxmlformats.org/officeDocument/2006/math"><m:r><m:rPr><m:sty m:val="p" /></m:rPr><m:t>&lt;</m:t></m:r><m:r><m:t>25</m:t></m:r></m:oMath></a14:m><a:r><a:rPr /><a:t> yr</a:t></a:r></a:p></a:txBody></a:tc><a:tc><a:txBody><a:bodyPr /><a:lstStyle /><a:p><a:pPr lvl="0" indent="0" marL="0" algn="ctr"><a:buNone /></a:pPr><a:r><a:rPr /><a:t>71%</a:t></a:r></a:p></a:txBody></a:tc><a:tc><a:txBody><a:bodyPr /><a:lstStyle /><a:p><a:pPr lvl="0" indent="0" marL="0" algn="ctr"><a:buNone /></a:pPr><a:r><a:rPr /><a:t>82%</a:t></a:r></a:p></a:txBody></a:tc></a:tr><a:tr h="0"><a:tc><a:txBody><a:bodyPr /><a:lstStyle /><a:p><a:pPr lvl="0" indent="0" marL="0" algn="l"><a:buNone /></a:pPr><a:r><a:rPr /><a:t>C</a:t></a:r></a:p></a:txBody></a:tc><a:tc><a:txBody><a:bodyPr /><a:lstStyle /><a:p><a:pPr lvl="0" indent="0" marL="0" algn="ctr"><a:buNone /></a:pPr><a14:m><m:oMath xmlns:m="http://schemas.openxmlformats.org/officeDocument/2006/math"><m:r><m:rPr><m:sty m:val="p" /></m:rPr><m:t>&gt;</m:t></m:r><m:r><m:t>1.1</m:t></m:r></m:oMath></a14:m></a:p></a:txBody></a:tc><a:tc><a:txBody><a:bodyPr /><a:lstStyle /><a:p><a:pPr lvl="0" indent="0" marL="0" algn="ctr"><a:buNone /></a:pPr><a14:m><m:oMath xmlns:m="http://schemas.openxmlformats.org/officeDocument/2006/math"><m:r><m:rPr><m:sty m:val="p" /></m:rPr><m:t>&lt;</m:t></m:r><m:r><m:t>10</m:t></m:r></m:oMath></a14:m><a:r><a:rPr /><a:t> yr</a:t></a:r></a:p></a:txBody></a:tc><a:tc><a:txBody><a:bodyPr /><a:lstStyle /><a:p><a:pPr lvl="0" indent="0" marL="0" algn="ctr"><a:buNone /></a:pPr><a:r><a:rPr /><a:t>34%</a:t></a:r></a:p></a:txBody></a:tc><a:tc><a:txBody><a:bodyPr /><a:lstStyle /><a:p><a:pPr lvl="0" indent="0" marL="0" algn="ctr"><a:buNone /></a:pPr><a:r><a:rPr /><a:t>96%</a:t></a:r></a:p></a:txBody></a:tc></a:tr></a:tbl></a:graphicData></a:graphic></p:graphicFrame></p:spTree></p:cSld><p:timing><p:tnLst><p:par><p:cTn id="1" dur="indefinite" restart="never" nodeType="tmRoot"><p:childTnLst><p:seq concurrent="1" nextAc="seek"><p:cTn id="2" dur="indefinite" nodeType="mainSeq"><p:childTnLst><p:par><p:cTn id="3" fill="hold"><p:stCondLst><p:cond delay="indefinite" /></p:stCondLst><p:childTnLst><p:par><p:cTn id="4" fill="hold"><p:stCondLst><p:cond delay="0" /></p:stCondLst><p:childTnLst><p:par><p:cTn id="5" presetID="1" presetClass="entr" presetSubtype="0" fill="hold" grpId="0" nodeType="clickEffect"><p:stCondLst><p:cond delay="0" /></p:stCondLst><p:childTnLst><p:set><p:cBhvr><p:cTn id="6" dur="1" fill="hold"><p:stCondLst><p:cond delay="0" /></p:stCondLst></p:cTn><p:tgtEl><p:spTgt spid="4"><p:txEl><p:pRg st="32" end="32" /></p:txEl></p:spTgt></p:tgtEl><p:attrNameLst><p:attrName>style.visibility</p:attrName></p:attrNameLst></p:cBhvr><p:to><p:strVal val="visible" /></p:to></p:set></p:childTnLst></p:cTn></p:par></p:childTnLst></p:cTn></p:par></p:childTnLst></p:cTn></p:par><p:par><p:cTn id="7" fill="hold"><p:stCondLst><p:cond delay="indefinite" /></p:stCondLst><p:childTnLst><p:par><p:cTn id="8" fill="hold"><p:stCondLst><p:cond delay="0" /></p:stCondLst><p:childTnLst><p:par><p:cTn id="9" presetID="1" presetClass="entr" presetSubtype="0" fill="hold" grpId="0" nodeType="clickEffect"><p:stCondLst><p:cond delay="0" /></p:stCondLst><p:childTnLst><p:set><p:cBhvr><p:cTn id="10" dur="1" fill="hold"><p:stCondLst><p:cond delay="0" /></p:stCondLst></p:cTn><p:tgtEl><p:spTgt spid="4"><p:txEl><p:pRg st="33" end="33" /></p:txEl></p:spTgt></p:tgtEl><p:attrNameLst><p:attrName>style.visibility</p:attrName></p:attrNameLst></p:cBhvr><p:to><p:strVal val="visible" /></p:to></p:set></p:childTnLst></p:cTn></p:par></p:childTnLst></p:cTn></p:par></p:childTnLst></p:cTn></p:par><p:par><p:cTn id="11" fill="hold"><p:stCondLst><p:cond delay="indefinite" /></p:stCondLst><p:childTnLst><p:par><p:cTn id="12" fill="hold"><p:stCondLst><p:cond delay="0" /></p:stCondLst><p:childTnLst><p:par><p:cTn id="13" presetID="1" presetClass="entr" presetSubtype="0" fill="hold" grpId="0" nodeType="clickEffect"><p:stCondLst><p:cond delay="0" /></p:stCondLst><p:childTnLst><p:set><p:cBhvr><p:cTn id="14" dur="1" fill="hold"><p:stCondLst><p:cond delay="0" /></p:stCondLst></p:cTn><p:tgtEl><p:spTgt spid="4"><p:txEl><p:pRg st="63" end="63" /></p:txEl></p:spTgt></p:tgtEl><p:attrNameLst><p:attrName>style.visibility</p:attrName></p:attrNameLst></p:cBhvr><p:to><p:strVal val="visible" /></p:to></p:set></p:childTnLst></p:cTn></p:par></p:childTnLst></p:cTn></p:par></p:childTnLst></p:cTn></p:par><p:par><p:cTn id="15" fill="hold"><p:stCondLst><p:cond delay="indefinite" /></p:stCondLst><p:childTnLst><p:par><p:cTn id="16" fill="hold"><p:stCondLst><p:cond delay="0" /></p:stCondLst><p:childTnLst><p:par><p:cTn id="17" presetID="1" presetClass="entr" presetSubtype="0" fill="hold" grpId="0" nodeType="clickEffect"><p:stCondLst><p:cond delay="0" /></p:stCondLst><p:childTnLst><p:set><p:cBhvr><p:cTn id="18" dur="1" fill="hold"><p:stCondLst><p:cond delay="0" /></p:stCondLst></p:cTn><p:tgtEl><p:spTgt spid="4"><p:txEl><p:pRg st="64" end="64" /></p:txEl></p:spTgt></p:tgtEl><p:attrNameLst><p:attrName>style.visibility</p:attrName></p:attrNameLst></p:cBhvr><p:to><p:strVal val="visible" /></p:to></p:set></p:childTnLst></p:cTn></p:par></p:childTnLst></p:cTn></p:par></p:childTnLst></p:cTn></p:par><p:par><p:cTn id="19" fill="hold"><p:stCondLst><p:cond delay="indefinite" /></p:stCondLst><p:childTnLst><p:par><p:cTn id="20" fill="hold"><p:stCondLst><p:cond delay="0" /></p:stCondLst><p:childTnLst><p:par><p:cTn id="21" presetID="1" presetClass="entr" presetSubtype="0" fill="hold" grpId="0" nodeType="clickEffect"><p:stCondLst><p:cond delay="0" /></p:stCondLst><p:childTnLst><p:set><p:cBhvr><p:cTn id="22" dur="1" fill="hold"><p:stCondLst><p:cond delay="0" /></p:stCondLst></p:cTn><p:tgtEl><p:spTgt spid="4"><p:txEl><p:pRg st="65" end="65" /></p:txEl></p:spTgt></p:tgtEl><p:attrNameLst><p:attrName>style.visibility</p:attrName></p:attrNameLst></p:cBhvr><p:to><p:strVal val="visible" /></p:to></p:set></p:childTnLst></p:cTn></p:par></p:childTnLst></p:cTn></p:par></p:childTnLst></p:cTn></p:par><p:par><p:cTn id="23" fill="hold"><p:stCondLst><p:cond delay="indefinite" /></p:stCondLst><p:childTnLst><p:par><p:cTn id="24" fill="hold"><p:stCondLst><p:cond delay="0" /></p:stCondLst><p:childTnLst><p:par><p:cTn id="25" presetID="1" presetClass="entr" presetSubtype="0" fill="hold" grpId="0" nodeType="clickEffect"><p:stCondLst><p:cond delay="0" /></p:stCondLst><p:childTnLst><p:set><p:cBhvr><p:cTn id="26" dur="1" fill="hold"><p:stCondLst><p:cond delay="0" /></p:stCondLst></p:cTn><p:tgtEl><p:spTgt spid="4"><p:txEl><p:pRg st="66" end="66" /></p:txEl></p:spTgt></p:tgtEl><p:attrNameLst><p:attrName>style.visibility</p:attrName></p:attrNameLst></p:cBhvr><p:to><p:strVal val="visible" /></p:to></p:set></p:childTnLst></p:cTn></p:par></p:childTnLst></p:cTn></p:par></p:childTnLst></p:cTn></p:par></p:childTnLst></p:cTn><p:prevCondLst><p:cond evt="onPrev" delay="0"><p:tgtEl><p:sldTgt /></p:tgtEl></p:cond></p:prevCondLst><p:nextCondLst><p:cond evt="onNext" delay="0"><p:tgtEl><p:sldTgt /></p:tgtEl></p:cond></p:nextCondLst></p:seq></p:childTnLst></p:cTn></p:par></p:tnLst><p:bldLst><p:bldP spid="4" grpId="0" uiExpand="1" build="p" /></p:bldLst></p:timing></p:sld>
+<file path=ppt/slides/slide8.xml><?xml version="1.0" encoding="UTF-8"?><p:sld xmlns:a="http://schemas.openxmlformats.org/drawingml/2006/main" xmlns:r="http://schemas.openxmlformats.org/officeDocument/2006/relationships" xmlns:p="http://schemas.openxmlformats.org/presentationml/2006/main"><p:cSld><p:spTree><p:nvGrpSpPr><p:cNvPr id="1" name="" /><p:cNvGrpSpPr /><p:nvPr /></p:nvGrpSpPr><p:grpSpPr><a:xfrm><a:off x="0" y="0" /><a:ext cx="0" cy="0" /><a:chOff x="0" y="0" /><a:chExt cx="0" cy="0" /></a:xfrm></p:grpSpPr><mc:AlternateContent xmlns:mc="http://schemas.openxmlformats.org/markup-compatibility/2006"><mc:Choice xmlns:a14="http://schemas.microsoft.com/office/drawing/2010/main" Requires="a14"><p:sp><p:nvSpPr><p:cNvPr id="4" name="Text Placeholder 3" /><p:cNvSpPr><a:spLocks noGrp="1" /></p:cNvSpPr><p:nvPr><p:ph idx="2" sz="half" type="body" /></p:nvPr></p:nvSpPr><p:spPr /><p:txBody><a:bodyPr /><a:lstStyle /><a:p><a:pPr lvl="0" indent="0" marL="0"><a:buNone /></a:pPr><a:r><a:rPr /><a:t>. . .</a:t></a:r></a:p><a:p><a:pPr lvl="0" indent="0" marL="0"><a:buNone /></a:pPr><a:r><a:rPr /><a:t>Result: interpretable “if/then” rules — but boundaries are fixed top-down, not iteratively refined.</a:t></a:r></a:p><a:p><a:pPr lvl="0" indent="0" marL="0"><a:spcBef><a:spcPts val="3000" /></a:spcBef><a:buNone /></a:pPr><a:r><a:rPr b="1" /><a:t>Think-Pair-Share: Labeling Failures</a:t></a:r></a:p><a:p><a:pPr lvl="0" indent="0" marL="1270000"><a:buNone /></a:pPr><a:r><a:rPr sz="2000" b="1" /><a:t>Scenario</a:t></a:r></a:p><a:p><a:pPr lvl="0" indent="0" marL="1270000"><a:buNone /></a:pPr><a:r><a:rPr sz="2000" /><a:t>A city is evaluating a coastal sea wall sized for a 1-in-50-year storm surge, at a cost of $200M. Uncertain inputs: storm surge magnitude, sea level rise rate, future population exposure, discount rate, construction cost overrun.</a:t></a:r></a:p><a:p><a:pPr lvl="0" indent="0" marL="1270000"><a:buNone /></a:pPr><a:r><a:rPr sz="2000" b="1" /><a:t>Write (90 seconds)</a:t></a:r></a:p><a:p><a:pPr lvl="0" indent="0" marL="1270000"><a:buNone /></a:pPr><a:r><a:rPr sz="2000" /><a:t>In one sentence, define what “failure” means for this decision. Then write which two inputs you expect most drive failures and why.</a:t></a:r></a:p><a:p><a:pPr lvl="0" indent="0" marL="0"><a:buNone /></a:pPr><a:r><a:rPr b="1" /><a:t>Pair</a:t></a:r><a:r><a:rPr /><a:t>: Compare with your neighbor. Did you define failure the same way?</a:t></a:r></a:p><a:p><a:pPr lvl="0" indent="0" marL="0"><a:spcBef><a:spcPts val="3000" /></a:spcBef><a:buNone /></a:pPr><a:r><a:rPr b="1" /><a:t>Logistic Regression: The Model</a:t></a:r></a:p><a:p><a:pPr lvl="0" indent="0" marL="0"><a:buNone /></a:pPr><a:r><a:rPr /><a:t>For scenario </a:t></a:r><a14:m><m:oMath xmlns:m="http://schemas.openxmlformats.org/officeDocument/2006/math"><m:r><m:t>i</m:t></m:r></m:oMath></a14:m><a:r><a:rPr /><a:t> with input vector </a:t></a:r><a14:m><m:oMath xmlns:m="http://schemas.openxmlformats.org/officeDocument/2006/math"><m:sSub><m:e><m:r><m:rPr><m:sty m:val="b" /></m:rPr><m:t>z</m:t></m:r></m:e><m:sub><m:r><m:t>i</m:t></m:r></m:sub></m:sSub></m:oMath></a14:m><a:r><a:rPr /><a:t>, model the log-odds of failure:</a:t></a:r></a:p><a:p><a:pPr lvl="0" indent="0" marL="0"><a:buNone /></a:pPr><a14:m><m:oMathPara xmlns:m="http://schemas.openxmlformats.org/officeDocument/2006/math"><m:oMathParaPr><m:jc m:val="center" /></m:oMathParaPr><m:oMath><m:r><m:rPr><m:sty m:val="p" /></m:rPr><m:t>log</m:t></m:r><m:f><m:fPr><m:type m:val="bar" /></m:fPr><m:num><m:sSub><m:e><m:r><m:t>p</m:t></m:r></m:e><m:sub><m:r><m:t>i</m:t></m:r></m:sub></m:sSub></m:num><m:den><m:r><m:t>1</m:t></m:r><m:r><m:rPr><m:sty m:val="p" /></m:rPr><m:t>−</m:t></m:r><m:sSub><m:e><m:r><m:t>p</m:t></m:r></m:e><m:sub><m:r><m:t>i</m:t></m:r></m:sub></m:sSub></m:den></m:f><m:r><m:rPr><m:sty m:val="p" /></m:rPr><m:t>=</m:t></m:r><m:sSub><m:e><m:r><m:t>b</m:t></m:r></m:e><m:sub><m:r><m:t>0</m:t></m:r></m:sub></m:sSub><m:r><m:rPr><m:sty m:val="p" /></m:rPr><m:t>+</m:t></m:r><m:sSub><m:e><m:r><m:t>b</m:t></m:r></m:e><m:sub><m:r><m:t>1</m:t></m:r></m:sub></m:sSub><m:sSub><m:e><m:r><m:t>z</m:t></m:r></m:e><m:sub><m:r><m:t>i</m:t></m:r><m:r><m:t>1</m:t></m:r></m:sub></m:sSub><m:r><m:rPr><m:sty m:val="p" /></m:rPr><m:t>+</m:t></m:r><m:sSub><m:e><m:r><m:t>b</m:t></m:r></m:e><m:sub><m:r><m:t>2</m:t></m:r></m:sub></m:sSub><m:sSub><m:e><m:r><m:t>z</m:t></m:r></m:e><m:sub><m:r><m:t>i</m:t></m:r><m:r><m:t>2</m:t></m:r></m:sub></m:sSub><m:r><m:rPr><m:sty m:val="p" /></m:rPr><m:t>+</m:t></m:r><m:r><m:rPr><m:sty m:val="p" /></m:rPr><m:t>⋯</m:t></m:r><m:r><m:rPr><m:sty m:val="p" /></m:rPr><m:t>=</m:t></m:r><m:sSup><m:e><m:r><m:rPr><m:sty m:val="b" /></m:rPr><m:t>b</m:t></m:r></m:e><m:sup><m:r><m:rPr><m:sty m:val="p" /></m:rPr><m:t>⊤</m:t></m:r></m:sup></m:sSup><m:sSub><m:e><m:r><m:rPr><m:sty m:val="b" /></m:rPr><m:t>z</m:t></m:r></m:e><m:sub><m:r><m:t>i</m:t></m:r></m:sub></m:sSub></m:oMath></m:oMathPara></a14:m></a:p><a:p><a:pPr lvl="0" indent="0" marL="0"><a:buNone /></a:pPr><a:r><a:rPr /><a:t>. . .</a:t></a:r></a:p><a:p><a:pPr lvl="0" indent="0" marL="0"><a:buNone /></a:pPr><a:r><a:rPr /><a:t>Solving for </a:t></a:r><a14:m><m:oMath xmlns:m="http://schemas.openxmlformats.org/officeDocument/2006/math"><m:sSub><m:e><m:r><m:t>p</m:t></m:r></m:e><m:sub><m:r><m:t>i</m:t></m:r></m:sub></m:sSub></m:oMath></a14:m><a:r><a:rPr /><a:t> gives the </a:t></a:r><a:r><a:rPr b="1" /><a:t>sigmoid function</a:t></a:r><a:r><a:rPr /><a:t>:</a:t></a:r></a:p><a:p><a:pPr lvl="0" indent="0" marL="0"><a:buNone /></a:pPr><a14:m><m:oMathPara xmlns:m="http://schemas.openxmlformats.org/officeDocument/2006/math"><m:oMathParaPr><m:jc m:val="center" /></m:oMathParaPr><m:oMath><m:sSub><m:e><m:r><m:t>p</m:t></m:r></m:e><m:sub><m:r><m:t>i</m:t></m:r></m:sub></m:sSub><m:r><m:rPr><m:sty m:val="p" /></m:rPr><m:t>=</m:t></m:r><m:f><m:fPr><m:type m:val="bar" /></m:fPr><m:num><m:r><m:t>1</m:t></m:r></m:num><m:den><m:r><m:t>1</m:t></m:r><m:r><m:rPr><m:sty m:val="p" /></m:rPr><m:t>+</m:t></m:r><m:sSup><m:e><m:r><m:t>e</m:t></m:r></m:e><m:sup><m:r><m:rPr><m:sty m:val="p" /></m:rPr><m:t>−</m:t></m:r><m:sSup><m:e><m:r><m:rPr><m:sty m:val="b" /></m:rPr><m:t>b</m:t></m:r></m:e><m:sup><m:r><m:rPr><m:sty m:val="p" /></m:rPr><m:t>⊤</m:t></m:r></m:sup></m:sSup><m:sSub><m:e><m:r><m:rPr><m:sty m:val="b" /></m:rPr><m:t>z</m:t></m:r></m:e><m:sub><m:r><m:t>i</m:t></m:r></m:sub></m:sSub></m:sup></m:sSup></m:den></m:f></m:oMath></m:oMathPara></a14:m></a:p><a:p><a:pPr lvl="0" indent="0" marL="0"><a:buNone /></a:pPr><a:r><a:rPr /><a:t>. . .</a:t></a:r></a:p><a:p><a:pPr lvl="0" indent="0" marL="0"><a:buNone /></a:pPr><a14:m><m:oMath xmlns:m="http://schemas.openxmlformats.org/officeDocument/2006/math"><m:sSub><m:e><m:r><m:t>p</m:t></m:r></m:e><m:sub><m:r><m:t>i</m:t></m:r></m:sub></m:sSub><m:r><m:rPr><m:sty m:val="p" /></m:rPr><m:t>∈</m:t></m:r><m:r><m:rPr><m:sty m:val="p" /></m:rPr><m:t>(</m:t></m:r><m:r><m:t>0</m:t></m:r><m:r><m:rPr><m:sty m:val="p" /></m:rPr><m:t>,</m:t></m:r><m:r><m:t>1</m:t></m:r><m:r><m:rPr><m:sty m:val="p" /></m:rPr><m:t>)</m:t></m:r></m:oMath></a14:m><a:r><a:rPr /><a:t> always. Classify as failure if </a:t></a:r><a14:m><m:oMath xmlns:m="http://schemas.openxmlformats.org/officeDocument/2006/math"><m:sSub><m:e><m:r><m:t>p</m:t></m:r></m:e><m:sub><m:r><m:t>i</m:t></m:r></m:sub></m:sSub><m:r><m:rPr><m:sty m:val="p" /></m:rPr><m:t>≥</m:t></m:r><m:r><m:t>0.5</m:t></m:r></m:oMath></a14:m><a:r><a:rPr /><a:t>, which is equivalent to </a:t></a:r><a14:m><m:oMath xmlns:m="http://schemas.openxmlformats.org/officeDocument/2006/math"><m:sSup><m:e><m:r><m:rPr><m:sty m:val="b" /></m:rPr><m:t>b</m:t></m:r></m:e><m:sup><m:r><m:rPr><m:sty m:val="p" /></m:rPr><m:t>⊤</m:t></m:r></m:sup></m:sSup><m:sSub><m:e><m:r><m:rPr><m:sty m:val="b" /></m:rPr><m:t>z</m:t></m:r></m:e><m:sub><m:r><m:t>i</m:t></m:r></m:sub></m:sSub><m:r><m:rPr><m:sty m:val="p" /></m:rPr><m:t>≥</m:t></m:r><m:r><m:t>0</m:t></m:r></m:oMath></a14:m><a:r><a:rPr /><a:t>.</a:t></a:r></a:p><a:p><a:pPr lvl="0" indent="0" marL="0"><a:spcBef><a:spcPts val="3000" /></a:spcBef><a:buNone /></a:pPr><a:r><a:rPr b="1" /><a:t>Interpreting Logistic Regression</a:t></a:r></a:p><a:p><a:pPr lvl="0" indent="0" marL="0"><a:buNone /></a:pPr><a:r><a:rPr /><a:t>The quantity </a:t></a:r><a14:m><m:oMath xmlns:m="http://schemas.openxmlformats.org/officeDocument/2006/math"><m:r><m:rPr><m:sty m:val="p" /></m:rPr><m:t>log</m:t></m:r><m:f><m:fPr><m:type m:val="bar" /></m:fPr><m:num><m:r><m:t>p</m:t></m:r></m:num><m:den><m:r><m:t>1</m:t></m:r><m:r><m:rPr><m:sty m:val="p" /></m:rPr><m:t>−</m:t></m:r><m:r><m:t>p</m:t></m:r></m:den></m:f></m:oMath></a14:m><a:r><a:rPr /><a:t> is the </a:t></a:r><a:r><a:rPr b="1" /><a:t>log-odds</a:t></a:r><a:r><a:rPr /><a:t> — the logarithm of the odds of failure. A fitted coefficient </a:t></a:r><a14:m><m:oMath xmlns:m="http://schemas.openxmlformats.org/officeDocument/2006/math"><m:sSub><m:e><m:r><m:t>b</m:t></m:r></m:e><m:sub><m:r><m:t>k</m:t></m:r></m:sub></m:sSub></m:oMath></a14:m><a:r><a:rPr /><a:t> tells you: a one-unit increase in </a:t></a:r><a14:m><m:oMath xmlns:m="http://schemas.openxmlformats.org/officeDocument/2006/math"><m:sSub><m:e><m:r><m:t>X</m:t></m:r></m:e><m:sub><m:r><m:t>k</m:t></m:r></m:sub></m:sSub></m:oMath></a14:m><a:r><a:rPr /><a:t> shifts the log-odds by </a:t></a:r><a14:m><m:oMath xmlns:m="http://schemas.openxmlformats.org/officeDocument/2006/math"><m:sSub><m:e><m:r><m:t>b</m:t></m:r></m:e><m:sub><m:r><m:t>k</m:t></m:r></m:sub></m:sSub></m:oMath></a14:m><a:r><a:rPr /><a:t>.</a:t></a:r></a:p><a:p><a:pPr lvl="0" indent="0" marL="0"><a:buNone /></a:pPr><a:r><a:rPr /><a:t>. . .</a:t></a:r></a:p><a:p><a:pPr lvl="0" indent="0" marL="0"><a:buNone /></a:pPr><a:r><a:rPr /><a:t>The </a:t></a:r><a:r><a:rPr b="1" /><a:t>odds ratio</a:t></a:r><a:r><a:rPr /><a:t> </a:t></a:r><a14:m><m:oMath xmlns:m="http://schemas.openxmlformats.org/officeDocument/2006/math"><m:sSup><m:e><m:r><m:t>e</m:t></m:r></m:e><m:sup><m:sSub><m:e><m:r><m:t>b</m:t></m:r></m:e><m:sub><m:r><m:t>k</m:t></m:r></m:sub></m:sSub></m:sup></m:sSup></m:oMath></a14:m><a:r><a:rPr /><a:t> gives a multiplicative interpretation:</a:t></a:r></a:p><a:p><a:pPr lvl="0" indent="0" marL="1270000"><a:buNone /></a:pPr><a:r><a:rPr sz="2000" /><a:t>“A one-unit increase in </a:t></a:r><a14:m><m:oMath xmlns:m="http://schemas.openxmlformats.org/officeDocument/2006/math"><m:sSub><m:e><m:r><m:t>X</m:t></m:r></m:e><m:sub><m:r><m:t>k</m:t></m:r></m:sub></m:sSub></m:oMath></a14:m><a:r><a:rPr sz="2000" /><a:t> multiplies the odds of failure by </a:t></a:r><a14:m><m:oMath xmlns:m="http://schemas.openxmlformats.org/officeDocument/2006/math"><m:sSup><m:e><m:r><m:t>e</m:t></m:r></m:e><m:sup><m:sSub><m:e><m:r><m:t>b</m:t></m:r></m:e><m:sub><m:r><m:t>k</m:t></m:r></m:sub></m:sSub></m:sup></m:sSup></m:oMath></a14:m><a:r><a:rPr sz="2000" /><a:t>.”</a:t></a:r></a:p><a:p><a:pPr lvl="0" indent="0" marL="0"><a:buNone /></a:pPr><a:r><a:rPr i="1" /><a:t>Example: if </a:t></a:r><a14:m><m:oMath xmlns:m="http://schemas.openxmlformats.org/officeDocument/2006/math"><m:sSub><m:e><m:r><m:t>b</m:t></m:r></m:e><m:sub><m:r><m:t>k</m:t></m:r></m:sub></m:sSub><m:r><m:rPr><m:sty m:val="p" /></m:rPr><m:t>=</m:t></m:r><m:r><m:t>0.7</m:t></m:r></m:oMath></a14:m><a:r><a:rPr i="1" /><a:t>, then </a:t></a:r><a14:m><m:oMath xmlns:m="http://schemas.openxmlformats.org/officeDocument/2006/math"><m:sSup><m:e><m:r><m:t>e</m:t></m:r></m:e><m:sup><m:r><m:t>0.7</m:t></m:r></m:sup></m:sSup><m:r><m:rPr><m:sty m:val="p" /></m:rPr><m:t>≈</m:t></m:r><m:r><m:t>2</m:t></m:r></m:oMath></a14:m><a:r><a:rPr i="1" /><a:t> — a unit increase in </a:t></a:r><a14:m><m:oMath xmlns:m="http://schemas.openxmlformats.org/officeDocument/2006/math"><m:sSub><m:e><m:r><m:t>X</m:t></m:r></m:e><m:sub><m:r><m:t>k</m:t></m:r></m:sub></m:sSub></m:oMath></a14:m><a:r><a:rPr i="1" /><a:t> doubles the odds of failure.</a:t></a:r></a:p><a:p><a:pPr lvl="0" indent="0" marL="0"><a:buNone /></a:pPr><a:r><a:rPr /><a:t>. . .</a:t></a:r></a:p><a:p><a:pPr lvl="0" indent="0" marL="0"><a:buNone /></a:pPr><a:r><a:rPr /><a:t>Rank inputs by </a:t></a:r><a14:m><m:oMath xmlns:m="http://schemas.openxmlformats.org/officeDocument/2006/math"><m:r><m:rPr><m:sty m:val="p" /></m:rPr><m:t>|</m:t></m:r><m:sSub><m:e><m:r><m:t>b</m:t></m:r></m:e><m:sub><m:r><m:t>k</m:t></m:r></m:sub></m:sSub><m:r><m:rPr><m:sty m:val="p" /></m:rPr><m:t>|</m:t></m:r></m:oMath></a14:m><a:r><a:rPr /><a:t> (after standardizing) to answer: </a:t></a:r><a:r><a:rPr b="1" /><a:t>which inputs most drive failure?</a:t></a:r></a:p><a:p><a:pPr lvl="0" indent="0" marL="0"><a:spcBef><a:spcPts val="3000" /></a:spcBef><a:buNone /></a:pPr><a:r><a:rPr b="1" /><a:t>Lamontagne et al. (2019): The Setup</a:t></a:r></a:p><a:p><a:pPr lvl="0" indent="0" marL="0"><a:buNone /></a:pPr><a:r><a:rPr /><a:t>Lamontagne et al. (2019) ask: what abatement pathways lead to </a:t></a:r><a:r><a:rPr i="1" /><a:t>tolerable</a:t></a:r><a:r><a:rPr /><a:t> climate/economic futures, given deep uncertainty about human-Earth system (HES) dynamics?</a:t></a:r></a:p><a:p><a:pPr lvl="0" indent="0" marL="0"><a:buNone /></a:pPr><a:r><a:rPr /><a:t>. . .</a:t></a:r></a:p><a:p><a:pPr lvl="0" indent="0" marL="0"><a:buNone /></a:pPr><a:r><a:rPr b="1" /><a:t>Model</a:t></a:r><a:r><a:rPr /><a:t>: DICE integrated assessment model (climate + economy coupled)</a:t></a:r></a:p><a:p><a:pPr lvl="0" indent="0" marL="0"><a:buNone /></a:pPr><a:r><a:rPr b="1" /><a:t>Ensemble</a:t></a:r><a:r><a:rPr /><a:t>: 5,200,000 scenarios — 24 HES uncertain parameters + abatement growth rate (</a:t></a:r><a14:m><m:oMath xmlns:m="http://schemas.openxmlformats.org/officeDocument/2006/math"><m:r><m:t>α</m:t></m:r></m:oMath></a14:m><a:r><a:rPr /><a:t>)</a:t></a:r></a:p><a:p><a:pPr lvl="0" indent="0" marL="0"><a:buNone /></a:pPr><a:r><a:rPr b="1" /><a:t>Failure label</a:t></a:r><a:r><a:rPr /><a:t>: “intolerable” if warming </a:t></a:r><a14:m><m:oMath xmlns:m="http://schemas.openxmlformats.org/officeDocument/2006/math"><m:r><m:rPr><m:sty m:val="p" /></m:rPr><m:t>&gt;</m:t></m:r><m:sSup><m:e><m:r><m:t>2</m:t></m:r></m:e><m:sup><m:r><m:rPr><m:sty m:val="p" /></m:rPr><m:t>∘</m:t></m:r></m:sup></m:sSup></m:oMath></a14:m><a:r><a:rPr /><a:t>C in 2100, OR abatement cost </a:t></a:r><a14:m><m:oMath xmlns:m="http://schemas.openxmlformats.org/officeDocument/2006/math"><m:r><m:rPr><m:sty m:val="p" /></m:rPr><m:t>&gt;</m:t></m:r><m:r><m:t>3</m:t></m:r><m:r><m:rPr><m:sty m:val="p" /></m:rPr><m:t>%</m:t></m:r></m:oMath></a14:m><a:r><a:rPr /><a:t> of GWP, OR climate damages </a:t></a:r><a14:m><m:oMath xmlns:m="http://schemas.openxmlformats.org/officeDocument/2006/math"><m:r><m:rPr><m:sty m:val="p" /></m:rPr><m:t>&gt;</m:t></m:r><m:r><m:t>2</m:t></m:r><m:r><m:rPr><m:sty m:val="p" /></m:rPr><m:t>%</m:t></m:r></m:oMath></a14:m><a:r><a:rPr /><a:t> of GWP</a:t></a:r></a:p><a:p><a:pPr lvl="0" indent="0" marL="0"><a:buNone /></a:pPr><a:r><a:rPr /><a:t>. . .</a:t></a:r></a:p><a:p><a:pPr lvl="0" indent="0" marL="0"><a:buNone /></a:pPr><a:r><a:rPr /><a:t>Their methodology combines two tools you already know:</a:t></a:r></a:p><a:p><a:pPr lvl="0" indent="-342900" marL="342900"><a:buAutoNum type="arabicPeriod" /></a:pPr><a:r><a:rPr b="1" /><a:t>Sobol sensitivity analysis</a:t></a:r><a:r><a:rPr /><a:t> (Week 7) to rank the 24 uncertain parameters by importance — identifying which factors explain the most variance</a:t></a:r></a:p><a:p><a:pPr lvl="0" indent="-342900" marL="342900"><a:buAutoNum type="arabicPeriod" /></a:pPr><a:r><a:rPr b="1" /><a:t>Logistic regression</a:t></a:r><a:r><a:rPr /><a:t> (scenario discovery) to map how failure probability varies across the dominant factors — identifying </a:t></a:r><a:r><a:rPr i="1" /><a:t>where</a:t></a:r><a:r><a:rPr /><a:t> in the input space failure concentrates</a:t></a:r></a:p><a:p><a:pPr lvl="0" indent="0" marL="0"><a:spcBef><a:spcPts val="3000" /></a:spcBef><a:buNone /></a:pPr><a:r><a:rPr b="1" /><a:t>Lamontagne et al. (2019): The Finding</a:t></a:r></a:p><a:p><a:pPr lvl="0" indent="0" marL="0"><a:buNone /></a:pPr><a:r><a:rPr /><a:t>After labeling 5.2M runs as tolerable/intolerable, logistic regression on the dominant inputs shows:</a:t></a:r></a:p><a:p><a:pPr lvl="0" indent="0" marL="0"><a:buNone /></a:pPr><a:r><a:rPr /><a:t>. . .</a:t></a:r></a:p><a:p><a:pPr lvl="0" indent="0" marL="0"><a:buNone /></a:pPr><a:r><a:rPr /><a:t>The primary control on 2100 warming is the </a:t></a:r><a:r><a:rPr b="1" /><a:t>abatement growth rate</a:t></a:r><a:r><a:rPr /><a:t> — a societal choice, not an exogenous physical uncertainty.</a:t></a:r></a:p><a:p><a:pPr lvl="0" indent="0" marL="0"><a:buNone /></a:pPr><a:r><a:rPr /><a:t>. . .</a:t></a:r></a:p><a:p><a:pPr lvl="0" indent="0" marL="0"><a:buNone /></a:pPr><a:r><a:rPr /><a:t>Near-term warming is controlled by climate sensitivity (a physical parameter). Long-term warming is controlled by earlier abatement actions (a policy choice).</a:t></a:r></a:p><a:p><a:pPr lvl="0" indent="0" marL="0"><a:buNone /></a:pPr><a:r><a:rPr /><a:t>. . .</a:t></a:r></a:p><a:p><a:pPr lvl="0" indent="0" marL="0"><a:buNone /></a:pPr><a:r><a:rPr /><a:t>It is mostly a question of </a:t></a:r><a:r><a:rPr b="1" /><a:t>whether we choose</a:t></a:r><a:r><a:rPr /><a:t> to limit warming — not whether we </a:t></a:r><a:r><a:rPr i="1" /><a:t>can</a:t></a:r><a:r><a:rPr /><a:t>.</a:t></a:r></a:p><a:p><a:pPr lvl="0" indent="0" marL="0"><a:buNone /></a:pPr><a:r><a:rPr /><a:t>. . .</a:t></a:r></a:p><a:p><a:pPr lvl="0" indent="0" marL="0"><a:buNone /></a:pPr><a:r><a:rPr /><a:t>Wednesday we will dig into the figures: how the Sobol indices shift over time (Fig 2), and what the logistic regression contours look like (Fig 3).</a:t></a:r></a:p><a:p><a:pPr lvl="0" indent="0" marL="0"><a:spcBef><a:spcPts val="3000" /></a:spcBef><a:buNone /></a:pPr><a:r><a:rPr b="1" /><a:t>PRIM: Patient Rule Induction Method</a:t></a:r></a:p><a:p><a:pPr lvl="0" indent="0" marL="0"><a:buNone /></a:pPr><a:r><a:rPr /><a:t>PRIM finds a </a:t></a:r><a:r><a:rPr b="1" /><a:t>box</a:t></a:r><a:r><a:rPr /><a:t> in the input space that concentrates failures:</a:t></a:r></a:p><a:p><a:pPr lvl="0" indent="0" marL="0"><a:buNone /></a:pPr><a14:m><m:oMathPara xmlns:m="http://schemas.openxmlformats.org/officeDocument/2006/math"><m:oMathParaPr><m:jc m:val="center" /></m:oMathParaPr><m:oMath><m:sSub><m:e><m:r><m:t>a</m:t></m:r></m:e><m:sub><m:r><m:t>k</m:t></m:r></m:sub></m:sSub><m:r><m:rPr><m:sty m:val="p" /></m:rPr><m:t>≤</m:t></m:r><m:sSub><m:e><m:r><m:t>X</m:t></m:r></m:e><m:sub><m:r><m:t>k</m:t></m:r></m:sub></m:sSub><m:r><m:rPr><m:sty m:val="p" /></m:rPr><m:t>≤</m:t></m:r><m:sSub><m:e><m:r><m:t>b</m:t></m:r></m:e><m:sub><m:r><m:t>k</m:t></m:r></m:sub></m:sSub><m:r><m:t> </m:t></m:r><m:r><m:rPr><m:nor /><m:sty m:val="p" /></m:rPr><m:t>for each input </m:t></m:r><m:r><m:t>k</m:t></m:r></m:oMath></m:oMathPara></a14:m></a:p><a:p><a:pPr lvl="0" indent="0" marL="0"><a:buNone /></a:pPr><a:r><a:rPr /><a:t>. . .</a:t></a:r></a:p><a:p><a:pPr lvl="0" indent="0" marL="0"><a:buNone /></a:pPr><a:r><a:rPr b="1" /><a:t>Interpretation</a:t></a:r><a:r><a:rPr /><a:t>: “The strategy fails when SLR </a:t></a:r><a14:m><m:oMath xmlns:m="http://schemas.openxmlformats.org/officeDocument/2006/math"><m:r><m:rPr><m:sty m:val="p" /></m:rPr><m:t>&gt;</m:t></m:r><m:r><m:t>0.8</m:t></m:r><m:r><m:t> </m:t></m:r><m:r><m:rPr><m:nor /><m:sty m:val="p" /></m:rPr><m:t>m</m:t></m:r></m:oMath></a14:m><a:r><a:rPr /><a:t> AND storm surge return period </a:t></a:r><a14:m><m:oMath xmlns:m="http://schemas.openxmlformats.org/officeDocument/2006/math"><m:r><m:rPr><m:sty m:val="p" /></m:rPr><m:t>&lt;</m:t></m:r><m:r><m:t>25</m:t></m:r><m:r><m:t> </m:t></m:r><m:r><m:rPr><m:nor /><m:sty m:val="p" /></m:rPr><m:t>years</m:t></m:r></m:oMath></a14:m><a:r><a:rPr /><a:t>” is a PRIM box in two dimensions.</a:t></a:r></a:p><a:p><a:pPr lvl="0" indent="0" marL="0"><a:buNone /></a:pPr><a:r><a:rPr /><a:t>. . .</a:t></a:r></a:p><a:p><a:pPr lvl="0" indent="0" marL="0"><a:buNone /></a:pPr><a:r><a:rPr /><a:t>“Patient” refers to the algorithm: PRIM peels small slices from the box one at a time. Each peel removes the thinnest slice with the fewest failures.</a:t></a:r></a:p><a:p><a:pPr lvl="0" indent="0" marL="0"><a:spcBef><a:spcPts val="3000" /></a:spcBef><a:buNone /></a:pPr><a:r><a:rPr b="1" /><a:t>PRIM: Coverage and Density</a:t></a:r></a:p><a:p><a:pPr lvl="0" indent="0" marL="0"><a:buNone /></a:pPr><a:r><a:rPr /><a:t>For a box </a:t></a:r><a14:m><m:oMath xmlns:m="http://schemas.openxmlformats.org/officeDocument/2006/math"><m:r><m:t>B</m:t></m:r></m:oMath></a14:m><a:r><a:rPr /><a:t> over an ensemble with </a:t></a:r><a14:m><m:oMath xmlns:m="http://schemas.openxmlformats.org/officeDocument/2006/math"><m:r><m:t>N</m:t></m:r></m:oMath></a14:m><a:r><a:rPr /><a:t> total runs, </a:t></a:r><a14:m><m:oMath xmlns:m="http://schemas.openxmlformats.org/officeDocument/2006/math"><m:sSub><m:e><m:r><m:t>N</m:t></m:r></m:e><m:sub><m:r><m:t>f</m:t></m:r></m:sub></m:sSub></m:oMath></a14:m><a:r><a:rPr /><a:t> of which are failures:</a:t></a:r></a:p><a:p><a:pPr lvl="0" indent="0" marL="0"><a:buNone /></a:pPr><a:r><a:rPr /><a:t>. . .</a:t></a:r></a:p><a:p><a:pPr lvl="0" indent="0" marL="0"><a:buNone /></a:pPr><a14:m><m:oMathPara xmlns:m="http://schemas.openxmlformats.org/officeDocument/2006/math"><m:oMathParaPr><m:jc m:val="center" /></m:oMathParaPr><m:oMath><m:r><m:rPr><m:nor /><m:sty m:val="p" /></m:rPr><m:t>Coverage</m:t></m:r><m:r><m:rPr><m:sty m:val="p" /></m:rPr><m:t>=</m:t></m:r><m:f><m:fPr><m:type m:val="bar" /></m:fPr><m:num><m:r><m:rPr><m:sty m:val="p" /></m:rPr><m:t>|</m:t></m:r><m:r><m:rPr><m:sty m:val="p" /></m:rPr><m:t>{</m:t></m:r><m:r><m:rPr><m:nor /><m:sty m:val="p" /></m:rPr><m:t>failures inside </m:t></m:r><m:r><m:t>B</m:t></m:r><m:r><m:rPr><m:sty m:val="p" /></m:rPr><m:t>}</m:t></m:r><m:r><m:rPr><m:sty m:val="p" /></m:rPr><m:t>|</m:t></m:r></m:num><m:den><m:sSub><m:e><m:r><m:t>N</m:t></m:r></m:e><m:sub><m:r><m:t>f</m:t></m:r></m:sub></m:sSub></m:den></m:f><m:r><m:t>  </m:t></m:r><m:r><m:rPr><m:nor /><m:sty m:val="p" /></m:rPr><m:t>(recall)</m:t></m:r></m:oMath></m:oMathPara></a14:m></a:p><a:p><a:pPr lvl="0" indent="0" marL="0"><a:buNone /></a:pPr><a:r><a:rPr i="1" /><a:t>What fraction of all failures does the box capture?</a:t></a:r></a:p><a:p><a:pPr lvl="0" indent="0" marL="0"><a:buNone /></a:pPr><a:r><a:rPr /><a:t>. . .</a:t></a:r></a:p><a:p><a:pPr lvl="0" indent="0" marL="0"><a:buNone /></a:pPr><a14:m><m:oMathPara xmlns:m="http://schemas.openxmlformats.org/officeDocument/2006/math"><m:oMathParaPr><m:jc m:val="center" /></m:oMathParaPr><m:oMath><m:r><m:rPr><m:nor /><m:sty m:val="p" /></m:rPr><m:t>Density</m:t></m:r><m:r><m:rPr><m:sty m:val="p" /></m:rPr><m:t>=</m:t></m:r><m:f><m:fPr><m:type m:val="bar" /></m:fPr><m:num><m:r><m:rPr><m:sty m:val="p" /></m:rPr><m:t>|</m:t></m:r><m:r><m:rPr><m:sty m:val="p" /></m:rPr><m:t>{</m:t></m:r><m:r><m:rPr><m:nor /><m:sty m:val="p" /></m:rPr><m:t>failures inside </m:t></m:r><m:r><m:t>B</m:t></m:r><m:r><m:rPr><m:sty m:val="p" /></m:rPr><m:t>}</m:t></m:r><m:r><m:rPr><m:sty m:val="p" /></m:rPr><m:t>|</m:t></m:r></m:num><m:den><m:r><m:rPr><m:sty m:val="p" /></m:rPr><m:t>|</m:t></m:r><m:r><m:rPr><m:sty m:val="p" /></m:rPr><m:t>{</m:t></m:r><m:r><m:rPr><m:nor /><m:sty m:val="p" /></m:rPr><m:t>scenarios inside </m:t></m:r><m:r><m:t>B</m:t></m:r><m:r><m:rPr><m:sty m:val="p" /></m:rPr><m:t>}</m:t></m:r><m:r><m:rPr><m:sty m:val="p" /></m:rPr><m:t>|</m:t></m:r></m:den></m:f><m:r><m:t>  </m:t></m:r><m:r><m:rPr><m:nor /><m:sty m:val="p" /></m:rPr><m:t>(precision)</m:t></m:r></m:oMath></m:oMathPara></a14:m></a:p><a:p><a:pPr lvl="0" indent="0" marL="0"><a:buNone /></a:pPr><a:r><a:rPr i="1" /><a:t>Of all scenarios in the box, what fraction are failures?</a:t></a:r></a:p><a:p><a:pPr lvl="0" indent="0" marL="0"><a:spcBef><a:spcPts val="3000" /></a:spcBef><a:buNone /></a:pPr><a:r><a:rPr b="1" /><a:t>The Coverage–Density Trade-off</a:t></a:r></a:p><a:p><a:pPr lvl="0" indent="0" marL="0"><a:buNone /></a:pPr><a:r><a:rPr /><a:t>PRIM starts with the full input space and </a:t></a:r><a:r><a:rPr b="1" /><a:t>peels</a:t></a:r><a:r><a:rPr /><a:t> away small slices to increase density, recording coverage as it goes.</a:t></a:r></a:p><a:p><a:pPr lvl="0" indent="0" marL="0"><a:buNone /></a:pPr><a:r><a:rPr /><a:t>. . .</a:t></a:r></a:p><a:p><a:pPr lvl="0" indent="0" marL="0"><a:buNone /></a:pPr><a:r><a:rPr /><a:t>The output is a </a:t></a:r><a:r><a:rPr b="1" /><a:t>peeling trajectory</a:t></a:r><a:r><a:rPr /><a:t>: a set of nested boxes tracing the Pareto frontier in coverage–density space.</a:t></a:r></a:p><a:p><a:pPr lvl="0" /><a:r><a:rPr /><a:t>Start: large box, high coverage, low density</a:t></a:r></a:p><a:p><a:pPr lvl="0" /><a:r><a:rPr /><a:t>Peel: remove slices where failures are sparse</a:t></a:r></a:p><a:p><a:pPr lvl="0" /><a:r><a:rPr /><a:t>End: small box, high density, low coverage</a:t></a:r></a:p><a:p><a:pPr lvl="0" /><a:r><a:rPr /><a:t>The analyst </a:t></a:r><a:r><a:rPr b="1" /><a:t>chooses</a:t></a:r><a:r><a:rPr /><a:t> the box that best matches their decision context</a:t></a:r></a:p><a:p><a:pPr lvl="0" indent="0" marL="0"><a:spcBef><a:spcPts val="3000" /></a:spcBef><a:buNone /></a:pPr><a:r><a:rPr b="1" /><a:t>Write-and-Respond: Interpreting a PRIM Box</a:t></a:r></a:p><a:p><a:pPr lvl="0" indent="0" marL="0"><a:buNone /></a:pPr><a:r><a:rPr /><a:t>PRIM analysis of a 1-meter house elevation policy returns:</a:t></a:r></a:p></p:txBody></p:sp></mc:Choice></mc:AlternateContent><p:graphicFrame><p:nvGraphicFramePr><p:cNvPr id="6" name="Content Placeholder 5" /><p:cNvGraphicFramePr><a:graphicFrameLocks noGrp="1" /></p:cNvGraphicFramePr><p:nvPr><p:ph idx="1" /></p:nvPr></p:nvGraphicFramePr><p:xfrm><a:off x="3568700" y="203200" /><a:ext cx="5105400" cy="4381500" /></p:xfrm><a:graphic><a:graphicData uri="http://schemas.openxmlformats.org/drawingml/2006/table"><a:tbl><a:tblPr firstRow="1" bandRow="1"><a:tableStyleId>{5C22544A-7EE6-4342-B048-85BDC9FD1C3A}</a:tableStyleId></a:tblPr><a:tblGrid><a:gridCol w="1016000" /><a:gridCol w="1016000" /><a:gridCol w="1016000" /><a:gridCol w="1016000" /><a:gridCol w="1016000" /></a:tblGrid><a:tr h="0"><a:tc><a:txBody><a:bodyPr /><a:lstStyle /><a:p><a:pPr lvl="0" indent="0" marL="0" algn="l"><a:buNone /></a:pPr><a:r><a:rPr /><a:t>Box</a:t></a:r></a:p></a:txBody><a:tcPr /></a:tc><a:tc><a:txBody><a:bodyPr /><a:lstStyle /><a:p><a:pPr lvl="0" indent="0" marL="0" algn="ctr"><a:buNone /></a:pPr><a:r><a:rPr /><a:t>SLR Rate (m/century)</a:t></a:r></a:p></a:txBody><a:tcPr /></a:tc><a:tc><a:txBody><a:bodyPr /><a:lstStyle /><a:p><a:pPr lvl="0" indent="0" marL="0" algn="ctr"><a:buNone /></a:pPr><a:r><a:rPr /><a:t>Storm Return Period</a:t></a:r></a:p></a:txBody><a:tcPr /></a:tc><a:tc><a:txBody><a:bodyPr /><a:lstStyle /><a:p><a:pPr lvl="0" indent="0" marL="0" algn="ctr"><a:buNone /></a:pPr><a:r><a:rPr /><a:t>Coverage</a:t></a:r></a:p></a:txBody><a:tcPr /></a:tc><a:tc><a:txBody><a:bodyPr /><a:lstStyle /><a:p><a:pPr lvl="0" indent="0" marL="0" algn="ctr"><a:buNone /></a:pPr><a:r><a:rPr /><a:t>Density</a:t></a:r></a:p></a:txBody><a:tcPr /></a:tc></a:tr><a:tr h="0"><a:tc><a:txBody><a:bodyPr /><a:lstStyle /><a:p><a:pPr lvl="0" indent="0" marL="0" algn="l"><a:buNone /></a:pPr><a:r><a:rPr /><a:t>A</a:t></a:r></a:p></a:txBody></a:tc><a:tc><a:txBody><a:bodyPr /><a:lstStyle /><a:p><a:pPr lvl="0" indent="0" marL="0" algn="ctr"><a:buNone /></a:pPr><a14:m><m:oMath xmlns:m="http://schemas.openxmlformats.org/officeDocument/2006/math"><m:r><m:rPr><m:sty m:val="p" /></m:rPr><m:t>&gt;</m:t></m:r><m:r><m:t>0.4</m:t></m:r></m:oMath></a14:m></a:p></a:txBody></a:tc><a:tc><a:txBody><a:bodyPr /><a:lstStyle /><a:p><a:pPr lvl="0" indent="0" marL="0" algn="ctr"><a:buNone /></a:pPr><a:r><a:rPr /><a:t>any</a:t></a:r></a:p></a:txBody></a:tc><a:tc><a:txBody><a:bodyPr /><a:lstStyle /><a:p><a:pPr lvl="0" indent="0" marL="0" algn="ctr"><a:buNone /></a:pPr><a:r><a:rPr /><a:t>94%</a:t></a:r></a:p></a:txBody></a:tc><a:tc><a:txBody><a:bodyPr /><a:lstStyle /><a:p><a:pPr lvl="0" indent="0" marL="0" algn="ctr"><a:buNone /></a:pPr><a:r><a:rPr /><a:t>31%</a:t></a:r></a:p></a:txBody></a:tc></a:tr><a:tr h="0"><a:tc><a:txBody><a:bodyPr /><a:lstStyle /><a:p><a:pPr lvl="0" indent="0" marL="0" algn="l"><a:buNone /></a:pPr><a:r><a:rPr /><a:t>B</a:t></a:r></a:p></a:txBody></a:tc><a:tc><a:txBody><a:bodyPr /><a:lstStyle /><a:p><a:pPr lvl="0" indent="0" marL="0" algn="ctr"><a:buNone /></a:pPr><a14:m><m:oMath xmlns:m="http://schemas.openxmlformats.org/officeDocument/2006/math"><m:r><m:rPr><m:sty m:val="p" /></m:rPr><m:t>&gt;</m:t></m:r><m:r><m:t>0.8</m:t></m:r></m:oMath></a14:m></a:p></a:txBody></a:tc><a:tc><a:txBody><a:bodyPr /><a:lstStyle /><a:p><a:pPr lvl="0" indent="0" marL="0" algn="ctr"><a:buNone /></a:pPr><a14:m><m:oMath xmlns:m="http://schemas.openxmlformats.org/officeDocument/2006/math"><m:r><m:rPr><m:sty m:val="p" /></m:rPr><m:t>&lt;</m:t></m:r><m:r><m:t>25</m:t></m:r></m:oMath></a14:m><a:r><a:rPr /><a:t> yr</a:t></a:r></a:p></a:txBody></a:tc><a:tc><a:txBody><a:bodyPr /><a:lstStyle /><a:p><a:pPr lvl="0" indent="0" marL="0" algn="ctr"><a:buNone /></a:pPr><a:r><a:rPr /><a:t>71%</a:t></a:r></a:p></a:txBody></a:tc><a:tc><a:txBody><a:bodyPr /><a:lstStyle /><a:p><a:pPr lvl="0" indent="0" marL="0" algn="ctr"><a:buNone /></a:pPr><a:r><a:rPr /><a:t>82%</a:t></a:r></a:p></a:txBody></a:tc></a:tr><a:tr h="0"><a:tc><a:txBody><a:bodyPr /><a:lstStyle /><a:p><a:pPr lvl="0" indent="0" marL="0" algn="l"><a:buNone /></a:pPr><a:r><a:rPr /><a:t>C</a:t></a:r></a:p></a:txBody></a:tc><a:tc><a:txBody><a:bodyPr /><a:lstStyle /><a:p><a:pPr lvl="0" indent="0" marL="0" algn="ctr"><a:buNone /></a:pPr><a14:m><m:oMath xmlns:m="http://schemas.openxmlformats.org/officeDocument/2006/math"><m:r><m:rPr><m:sty m:val="p" /></m:rPr><m:t>&gt;</m:t></m:r><m:r><m:t>1.1</m:t></m:r></m:oMath></a14:m></a:p></a:txBody></a:tc><a:tc><a:txBody><a:bodyPr /><a:lstStyle /><a:p><a:pPr lvl="0" indent="0" marL="0" algn="ctr"><a:buNone /></a:pPr><a14:m><m:oMath xmlns:m="http://schemas.openxmlformats.org/officeDocument/2006/math"><m:r><m:rPr><m:sty m:val="p" /></m:rPr><m:t>&lt;</m:t></m:r><m:r><m:t>10</m:t></m:r></m:oMath></a14:m><a:r><a:rPr /><a:t> yr</a:t></a:r></a:p></a:txBody></a:tc><a:tc><a:txBody><a:bodyPr /><a:lstStyle /><a:p><a:pPr lvl="0" indent="0" marL="0" algn="ctr"><a:buNone /></a:pPr><a:r><a:rPr /><a:t>34%</a:t></a:r></a:p></a:txBody></a:tc><a:tc><a:txBody><a:bodyPr /><a:lstStyle /><a:p><a:pPr lvl="0" indent="0" marL="0" algn="ctr"><a:buNone /></a:pPr><a:r><a:rPr /><a:t>96%</a:t></a:r></a:p></a:txBody></a:tc></a:tr></a:tbl></a:graphicData></a:graphic></p:graphicFrame></p:spTree></p:cSld><p:timing><p:tnLst><p:par><p:cTn id="1" dur="indefinite" restart="never" nodeType="tmRoot"><p:childTnLst><p:seq concurrent="1" nextAc="seek"><p:cTn id="2" dur="indefinite" nodeType="mainSeq"><p:childTnLst><p:par><p:cTn id="3" fill="hold"><p:stCondLst><p:cond delay="indefinite" /></p:stCondLst><p:childTnLst><p:par><p:cTn id="4" fill="hold"><p:stCondLst><p:cond delay="0" /></p:stCondLst><p:childTnLst><p:par><p:cTn id="5" presetID="1" presetClass="entr" presetSubtype="0" fill="hold" grpId="0" nodeType="clickEffect"><p:stCondLst><p:cond delay="0" /></p:stCondLst><p:childTnLst><p:set><p:cBhvr><p:cTn id="6" dur="1" fill="hold"><p:stCondLst><p:cond delay="0" /></p:stCondLst></p:cTn><p:tgtEl><p:spTgt spid="4"><p:txEl><p:pRg st="32" end="32" /></p:txEl></p:spTgt></p:tgtEl><p:attrNameLst><p:attrName>style.visibility</p:attrName></p:attrNameLst></p:cBhvr><p:to><p:strVal val="visible" /></p:to></p:set></p:childTnLst></p:cTn></p:par></p:childTnLst></p:cTn></p:par></p:childTnLst></p:cTn></p:par><p:par><p:cTn id="7" fill="hold"><p:stCondLst><p:cond delay="indefinite" /></p:stCondLst><p:childTnLst><p:par><p:cTn id="8" fill="hold"><p:stCondLst><p:cond delay="0" /></p:stCondLst><p:childTnLst><p:par><p:cTn id="9" presetID="1" presetClass="entr" presetSubtype="0" fill="hold" grpId="0" nodeType="clickEffect"><p:stCondLst><p:cond delay="0" /></p:stCondLst><p:childTnLst><p:set><p:cBhvr><p:cTn id="10" dur="1" fill="hold"><p:stCondLst><p:cond delay="0" /></p:stCondLst></p:cTn><p:tgtEl><p:spTgt spid="4"><p:txEl><p:pRg st="33" end="33" /></p:txEl></p:spTgt></p:tgtEl><p:attrNameLst><p:attrName>style.visibility</p:attrName></p:attrNameLst></p:cBhvr><p:to><p:strVal val="visible" /></p:to></p:set></p:childTnLst></p:cTn></p:par></p:childTnLst></p:cTn></p:par></p:childTnLst></p:cTn></p:par><p:par><p:cTn id="11" fill="hold"><p:stCondLst><p:cond delay="indefinite" /></p:stCondLst><p:childTnLst><p:par><p:cTn id="12" fill="hold"><p:stCondLst><p:cond delay="0" /></p:stCondLst><p:childTnLst><p:par><p:cTn id="13" presetID="1" presetClass="entr" presetSubtype="0" fill="hold" grpId="0" nodeType="clickEffect"><p:stCondLst><p:cond delay="0" /></p:stCondLst><p:childTnLst><p:set><p:cBhvr><p:cTn id="14" dur="1" fill="hold"><p:stCondLst><p:cond delay="0" /></p:stCondLst></p:cTn><p:tgtEl><p:spTgt spid="4"><p:txEl><p:pRg st="63" end="63" /></p:txEl></p:spTgt></p:tgtEl><p:attrNameLst><p:attrName>style.visibility</p:attrName></p:attrNameLst></p:cBhvr><p:to><p:strVal val="visible" /></p:to></p:set></p:childTnLst></p:cTn></p:par></p:childTnLst></p:cTn></p:par></p:childTnLst></p:cTn></p:par><p:par><p:cTn id="15" fill="hold"><p:stCondLst><p:cond delay="indefinite" /></p:stCondLst><p:childTnLst><p:par><p:cTn id="16" fill="hold"><p:stCondLst><p:cond delay="0" /></p:stCondLst><p:childTnLst><p:par><p:cTn id="17" presetID="1" presetClass="entr" presetSubtype="0" fill="hold" grpId="0" nodeType="clickEffect"><p:stCondLst><p:cond delay="0" /></p:stCondLst><p:childTnLst><p:set><p:cBhvr><p:cTn id="18" dur="1" fill="hold"><p:stCondLst><p:cond delay="0" /></p:stCondLst></p:cTn><p:tgtEl><p:spTgt spid="4"><p:txEl><p:pRg st="64" end="64" /></p:txEl></p:spTgt></p:tgtEl><p:attrNameLst><p:attrName>style.visibility</p:attrName></p:attrNameLst></p:cBhvr><p:to><p:strVal val="visible" /></p:to></p:set></p:childTnLst></p:cTn></p:par></p:childTnLst></p:cTn></p:par></p:childTnLst></p:cTn></p:par><p:par><p:cTn id="19" fill="hold"><p:stCondLst><p:cond delay="indefinite" /></p:stCondLst><p:childTnLst><p:par><p:cTn id="20" fill="hold"><p:stCondLst><p:cond delay="0" /></p:stCondLst><p:childTnLst><p:par><p:cTn id="21" presetID="1" presetClass="entr" presetSubtype="0" fill="hold" grpId="0" nodeType="clickEffect"><p:stCondLst><p:cond delay="0" /></p:stCondLst><p:childTnLst><p:set><p:cBhvr><p:cTn id="22" dur="1" fill="hold"><p:stCondLst><p:cond delay="0" /></p:stCondLst></p:cTn><p:tgtEl><p:spTgt spid="4"><p:txEl><p:pRg st="65" end="65" /></p:txEl></p:spTgt></p:tgtEl><p:attrNameLst><p:attrName>style.visibility</p:attrName></p:attrNameLst></p:cBhvr><p:to><p:strVal val="visible" /></p:to></p:set></p:childTnLst></p:cTn></p:par></p:childTnLst></p:cTn></p:par></p:childTnLst></p:cTn></p:par><p:par><p:cTn id="23" fill="hold"><p:stCondLst><p:cond delay="indefinite" /></p:stCondLst><p:childTnLst><p:par><p:cTn id="24" fill="hold"><p:stCondLst><p:cond delay="0" /></p:stCondLst><p:childTnLst><p:par><p:cTn id="25" presetID="1" presetClass="entr" presetSubtype="0" fill="hold" grpId="0" nodeType="clickEffect"><p:stCondLst><p:cond delay="0" /></p:stCondLst><p:childTnLst><p:set><p:cBhvr><p:cTn id="26" dur="1" fill="hold"><p:stCondLst><p:cond delay="0" /></p:stCondLst></p:cTn><p:tgtEl><p:spTgt spid="4"><p:txEl><p:pRg st="66" end="66" /></p:txEl></p:spTgt></p:tgtEl><p:attrNameLst><p:attrName>style.visibility</p:attrName></p:attrNameLst></p:cBhvr><p:to><p:strVal val="visible" /></p:to></p:set></p:childTnLst></p:cTn></p:par></p:childTnLst></p:cTn></p:par></p:childTnLst></p:cTn></p:par></p:childTnLst></p:cTn><p:prevCondLst><p:cond evt="onPrev" delay="0"><p:tgtEl><p:sldTgt /></p:tgtEl></p:cond></p:prevCondLst><p:nextCondLst><p:cond evt="onNext" delay="0"><p:tgtEl><p:sldTgt /></p:tgtEl></p:cond></p:nextCondLst></p:seq></p:childTnLst></p:cTn></p:par></p:tnLst><p:bldLst><p:bldP spid="4" grpId="0" uiExpand="1" build="p" /></p:bldLst></p:timing></p:sld>
 </file>
 
-<file path=ppt/slides/slide9.xml><?xml version="1.0" encoding="UTF-8"?><p:sld xmlns:a="http://schemas.openxmlformats.org/drawingml/2006/main" xmlns:r="http://schemas.openxmlformats.org/officeDocument/2006/relationships" xmlns:p="http://schemas.openxmlformats.org/presentationml/2006/main"><p:cSld><p:spTree><p:nvGrpSpPr><p:cNvPr id="1" name="" /><p:cNvGrpSpPr /><p:nvPr /></p:nvGrpSpPr><p:grpSpPr><a:xfrm><a:off x="0" y="0" /><a:ext cx="0" cy="0" /><a:chOff x="0" y="0" /><a:chExt cx="0" cy="0" /></a:xfrm></p:grpSpPr><mc:AlternateContent xmlns:mc="http://schemas.openxmlformats.org/markup-compatibility/2006"><mc:Choice xmlns:a14="http://schemas.microsoft.com/office/drawing/2010/main" Requires="a14"><p:sp><p:nvSpPr><p:cNvPr id="4" name="Text Placeholder 3" /><p:cNvSpPr><a:spLocks noGrp="1" /></p:cNvSpPr><p:nvPr><p:ph idx="2" sz="half" type="body" /></p:nvPr></p:nvSpPr><p:spPr /><p:txBody><a:bodyPr /><a:lstStyle /><a:p><a:pPr lvl="0" indent="0" marL="1270000"><a:buNone /></a:pPr><a:r><a:rPr sz="2000" b="1" /><a:t>Write (60 seconds)</a:t></a:r></a:p><a:p><a:pPr lvl="0" indent="0" marL="1270000"><a:buNone /></a:pPr><a:r><a:rPr sz="2000" /><a:t>In one sentence, interpret Box B. Then answer: if you are advising a city that faces severe storm surge risk </a:t></a:r><a:r><a:rPr sz="2000" i="1" /><a:t>and</a:t></a:r><a:r><a:rPr sz="2000" /><a:t> deep uncertainty in SLR, which box would you recommend and why?</a:t></a:r></a:p><a:p><a:pPr lvl="0" indent="0" marL="0"><a:spcBef><a:spcPts val="3000" /></a:spcBef><a:buNone /></a:pPr><a:r><a:rPr b="1" /><a:t>Friday’s Lab: The Eijgenraam Dike Model</a:t></a:r></a:p><a:p><a:pPr lvl="0" indent="0" marL="0"><a:buNone /></a:pPr><a:r><a:rPr /><a:t>In Lab 8 you’ll apply scenario discovery to a real flood protection problem from the Netherlands (Eijgenraam et al. 2014).</a:t></a:r></a:p><a:p><a:pPr lvl="0" indent="0" marL="0"><a:buNone /></a:pPr><a:r><a:rPr /><a:t>. . .</a:t></a:r></a:p><a:p><a:pPr lvl="0" indent="0" marL="0"><a:buNone /></a:pPr><a:r><a:rPr /><a:t>You know the Van Dantzig problem: how high should we build the dike? Eijgenraam extends it — investment costs grow </a:t></a:r><a:r><a:rPr b="1" /><a:t>exponentially</a:t></a:r><a:r><a:rPr /><a:t> with height, and flood risk grows over time with sea level rise and economic growth. (</a:t></a:r><a:r><a:rPr><a:hlinkClick r:id="rId3" /></a:rPr><a:t>Rhodium example</a:t></a:r><a:r><a:rPr /><a:t>)</a:t></a:r></a:p><a:p><a:pPr lvl="0" indent="0" marL="0"><a:buNone /></a:pPr><a:r><a:rPr /><a:t>. . .</a:t></a:r></a:p><a:p><a:pPr lvl="0" indent="0" marL="0"><a:buNone /></a:pPr><a:r><a:rPr /><a:t>The decision: </a:t></a:r><a:r><a:rPr b="1" /><a:t>when</a:t></a:r><a:r><a:rPr /><a:t> to heighten the dike and by </a:t></a:r><a:r><a:rPr b="1" /><a:t>how much</a:t></a:r><a:r><a:rPr /><a:t>.</a:t></a:r></a:p><a:p><a:pPr lvl="0" /><a:r><a:rPr /><a:t>Deferring saves money (discounting) but the dike ring is unprotected while we wait</a:t></a:r></a:p><a:p><a:pPr lvl="0" /><a:r><a:rPr /><a:t>Building higher is safer but exponentially more expensive</a:t></a:r></a:p><a:p><a:pPr lvl="0" indent="0" marL="0"><a:spcBef><a:spcPts val="3000" /></a:spcBef><a:buNone /></a:pPr><a:r><a:rPr b="1" /><a:t>The Eijgenraam Model: Key Equation</a:t></a:r></a:p><a:p><a:pPr lvl="0" indent="0" marL="0"><a:buNone /></a:pPr><a:r><a:rPr /><a:t>The annual </a:t></a:r><a:r><a:rPr b="1" /><a:t>flood probability</a:t></a:r><a:r><a:rPr /><a:t> at year </a:t></a:r><a14:m><m:oMath xmlns:m="http://schemas.openxmlformats.org/officeDocument/2006/math"><m:r><m:t>t</m:t></m:r></m:oMath></a14:m><a:r><a:rPr /><a:t> is:</a:t></a:r></a:p><a:p><a:pPr lvl="0" indent="0" marL="0"><a:buNone /></a:pPr><a14:m><m:oMathPara xmlns:m="http://schemas.openxmlformats.org/officeDocument/2006/math"><m:oMathParaPr><m:jc m:val="center" /></m:oMathParaPr><m:oMath><m:r><m:t>P</m:t></m:r><m:d><m:dPr><m:begChr m:val="(" /><m:sepChr m:val="" /><m:endChr m:val=")" /><m:grow /></m:dPr><m:e><m:r><m:t>t</m:t></m:r></m:e></m:d><m:r><m:rPr><m:sty m:val="p" /></m:rPr><m:t>=</m:t></m:r><m:sSub><m:e><m:r><m:t>P</m:t></m:r></m:e><m:sub><m:r><m:t>0</m:t></m:r></m:sub></m:sSub><m:r><m:rPr><m:sty m:val="p" /></m:rPr><m:t>exp</m:t></m:r><m:d><m:dPr><m:begChr m:val="(" /><m:sepChr m:val="" /><m:endChr m:val=")" /><m:grow /></m:dPr><m:e><m:r><m:t>α</m:t></m:r><m:r><m:t>η</m:t></m:r><m:r><m:t> </m:t></m:r><m:r><m:t>t</m:t></m:r><m:r><m:rPr><m:sty m:val="p" /></m:rPr><m:t>−</m:t></m:r><m:r><m:t>α</m:t></m:r><m:r><m:t> </m:t></m:r><m:r><m:t>H</m:t></m:r><m:d><m:dPr><m:begChr m:val="(" /><m:sepChr m:val="" /><m:endChr m:val=")" /><m:grow /></m:dPr><m:e><m:r><m:t>t</m:t></m:r></m:e></m:d></m:e></m:d></m:oMath></m:oMathPara></a14:m></a:p><a:p><a:pPr lvl="0" /><a14:m><m:oMath xmlns:m="http://schemas.openxmlformats.org/officeDocument/2006/math"><m:sSub><m:e><m:r><m:t>P</m:t></m:r></m:e><m:sub><m:r><m:t>0</m:t></m:r></m:sub></m:sSub></m:oMath></a14:m><a:r><a:rPr /><a:t>: initial flood probability</a:t></a:r></a:p><a:p><a:pPr lvl="0" /><a14:m><m:oMath xmlns:m="http://schemas.openxmlformats.org/officeDocument/2006/math"><m:r><m:t>α</m:t></m:r></m:oMath></a14:m><a:r><a:rPr /><a:t>: sensitivity of flood probability to water level (1/cm)</a:t></a:r></a:p><a:p><a:pPr lvl="0" /><a14:m><m:oMath xmlns:m="http://schemas.openxmlformats.org/officeDocument/2006/math"><m:r><m:t>η</m:t></m:r></m:oMath></a14:m><a:r><a:rPr /><a:t>: rate of water level rise (cm/year)</a:t></a:r></a:p><a:p><a:pPr lvl="0" /><a14:m><m:oMath xmlns:m="http://schemas.openxmlformats.org/officeDocument/2006/math"><m:r><m:t>H</m:t></m:r><m:d><m:dPr><m:begChr m:val="(" /><m:sepChr m:val="" /><m:endChr m:val=")" /><m:grow /></m:dPr><m:e><m:r><m:t>t</m:t></m:r></m:e></m:d></m:oMath></a14:m><a:r><a:rPr /><a:t>: cumulative dike heightening at time </a:t></a:r><a14:m><m:oMath xmlns:m="http://schemas.openxmlformats.org/officeDocument/2006/math"><m:r><m:t>t</m:t></m:r></m:oMath></a14:m></a:p><a:p><a:pPr lvl="0" indent="0" marL="0"><a:buNone /></a:pPr><a:r><a:rPr /><a:t>. . .</a:t></a:r></a:p><a:p><a:pPr lvl="0" indent="0" marL="0"><a:buNone /></a:pPr><a:r><a:rPr /><a:t>This assumes an </a:t></a:r><a:r><a:rPr b="1" /><a:t>exponential distribution</a:t></a:r><a:r><a:rPr /><a:t> for water levels — analytically convenient, though real flood distributions have heavier tails.</a:t></a:r></a:p><a:p><a:pPr lvl="0" indent="0" marL="0"><a:buNone /></a:pPr><a:r><a:rPr /><a:t>. . .</a:t></a:r></a:p><a:p><a:pPr lvl="0" indent="0" marL="0"><a:buNone /></a:pPr><a:r><a:rPr /><a:t>Notice: </a:t></a:r><a14:m><m:oMath xmlns:m="http://schemas.openxmlformats.org/officeDocument/2006/math"><m:r><m:t>α</m:t></m:r></m:oMath></a14:m><a:r><a:rPr /><a:t> appears </a:t></a:r><a:r><a:rPr b="1" /><a:t>twice</a:t></a:r><a:r><a:rPr /><a:t> — it makes risk grow faster (</a:t></a:r><a14:m><m:oMath xmlns:m="http://schemas.openxmlformats.org/officeDocument/2006/math"><m:r><m:t>α</m:t></m:r><m:r><m:t>η</m:t></m:r><m:r><m:t>t</m:t></m:r></m:oMath></a14:m><a:r><a:rPr /><a:t>) </a:t></a:r><a:r><a:rPr i="1" /><a:t>and</a:t></a:r><a:r><a:rPr /><a:t> makes each cm of dike more effective (</a:t></a:r><a14:m><m:oMath xmlns:m="http://schemas.openxmlformats.org/officeDocument/2006/math"><m:r><m:rPr><m:sty m:val="p" /></m:rPr><m:t>−</m:t></m:r><m:r><m:t>α</m:t></m:r><m:r><m:t>H</m:t></m:r></m:oMath></a14:m><a:r><a:rPr /><a:t>). Its effect on failure is </a:t></a:r><a:r><a:rPr b="1" /><a:t>non-monotonic</a:t></a:r><a:r><a:rPr /><a:t>.</a:t></a:r></a:p><a:p><a:pPr lvl="0" indent="0" marL="0"><a:spcBef><a:spcPts val="3000" /></a:spcBef><a:buNone /></a:pPr><a:r><a:rPr b="1" /><a:t>Lab 8: The XLRM Setup</a:t></a:r></a:p></p:txBody></p:sp></mc:Choice></mc:AlternateContent><p:graphicFrame><p:nvGraphicFramePr><p:cNvPr id="6" name="Content Placeholder 5" /><p:cNvGraphicFramePr><a:graphicFrameLocks noGrp="1" /></p:cNvGraphicFramePr><p:nvPr><p:ph idx="1" /></p:nvPr></p:nvGraphicFramePr><p:xfrm><a:off x="3568700" y="203200" /><a:ext cx="5105400" cy="4381500" /></p:xfrm><a:graphic><a:graphicData uri="http://schemas.openxmlformats.org/drawingml/2006/table"><a:tbl><a:tblPr firstRow="1" bandRow="1"><a:tableStyleId>{5C22544A-7EE6-4342-B048-85BDC9FD1C3A}</a:tableStyleId></a:tblPr><a:tblGrid><a:gridCol w="2362200" /><a:gridCol w="2743200" /></a:tblGrid><a:tr h="0"><a:tc><a:txBody><a:bodyPr /><a:lstStyle /><a:p><a:pPr lvl="0" indent="0" marL="0" algn="l"><a:buNone /></a:pPr><a:r><a:rPr /><a:t>XLRM</a:t></a:r></a:p></a:txBody><a:tcPr /></a:tc><a:tc><a:txBody><a:bodyPr /><a:lstStyle /><a:p><a:pPr lvl="0" indent="0" marL="0" algn="l"><a:buNone /></a:pPr><a:r><a:rPr /><a:t>Lab 8</a:t></a:r></a:p></a:txBody><a:tcPr /></a:tc></a:tr><a:tr h="0"><a:tc><a:txBody><a:bodyPr /><a:lstStyle /><a:p><a:pPr lvl="0" indent="0" marL="0" algn="l"><a:buNone /></a:pPr><a:r><a:rPr b="1" /><a:t>X</a:t></a:r><a:r><a:rPr /><a:t> (uncertainties)</a:t></a:r></a:p></a:txBody></a:tc><a:tc><a:txBody><a:bodyPr /><a:lstStyle /><a:p><a:pPr lvl="0" indent="0" marL="0" algn="l"><a:buNone /></a:pPr><a14:m><m:oMath xmlns:m="http://schemas.openxmlformats.org/officeDocument/2006/math"><m:sSub><m:e><m:r><m:t>P</m:t></m:r></m:e><m:sub><m:r><m:t>0</m:t></m:r></m:sub></m:sSub></m:oMath></a14:m><a:r><a:rPr /><a:t>, </a:t></a:r><a14:m><m:oMath xmlns:m="http://schemas.openxmlformats.org/officeDocument/2006/math"><m:r><m:t>α</m:t></m:r></m:oMath></a14:m><a:r><a:rPr /><a:t>, </a:t></a:r><a14:m><m:oMath xmlns:m="http://schemas.openxmlformats.org/officeDocument/2006/math"><m:r><m:t>η</m:t></m:r></m:oMath></a14:m><a:r><a:rPr /><a:t>, </a:t></a:r><a14:m><m:oMath xmlns:m="http://schemas.openxmlformats.org/officeDocument/2006/math"><m:sSub><m:e><m:r><m:t>V</m:t></m:r></m:e><m:sub><m:r><m:t>0</m:t></m:r></m:sub></m:sSub></m:oMath></a14:m><a:r><a:rPr /><a:t>, </a:t></a:r><a14:m><m:oMath xmlns:m="http://schemas.openxmlformats.org/officeDocument/2006/math"><m:r><m:t>δ</m:t></m:r></m:oMath></a14:m></a:p></a:txBody></a:tc></a:tr><a:tr h="0"><a:tc><a:txBody><a:bodyPr /><a:lstStyle /><a:p><a:pPr lvl="0" indent="0" marL="0" algn="l"><a:buNone /></a:pPr><a:r><a:rPr b="1" /><a:t>L</a:t></a:r><a:r><a:rPr /><a:t> (levers)</a:t></a:r></a:p></a:txBody></a:tc><a:tc><a:txBody><a:bodyPr /><a:lstStyle /><a:p><a:pPr lvl="0" indent="0" marL="0" algn="l"><a:buNone /></a:pPr><a14:m><m:oMath xmlns:m="http://schemas.openxmlformats.org/officeDocument/2006/math"><m:d><m:dPr><m:begChr m:val="(" /><m:sepChr m:val="" /><m:endChr m:val=")" /><m:grow /></m:dPr><m:e><m:sSub><m:e><m:r><m:t>T</m:t></m:r></m:e><m:sub><m:r><m:rPr><m:nor /><m:sty m:val="p" /></m:rPr><m:t>heighten</m:t></m:r></m:sub></m:sSub><m:r><m:rPr><m:sty m:val="p" /></m:rPr><m:t>,</m:t></m:r><m:r><m:t> </m:t></m:r><m:r><m:t>Δ</m:t></m:r><m:r><m:t>H</m:t></m:r></m:e></m:d></m:oMath></a14:m><a:r><a:rPr /><a:t> — when to heighten, how much</a:t></a:r></a:p></a:txBody></a:tc></a:tr><a:tr h="0"><a:tc><a:txBody><a:bodyPr /><a:lstStyle /><a:p><a:pPr lvl="0" indent="0" marL="0" algn="l"><a:buNone /></a:pPr><a:r><a:rPr b="1" /><a:t>R</a:t></a:r><a:r><a:rPr /><a:t> (model)</a:t></a:r></a:p></a:txBody></a:tc><a:tc><a:txBody><a:bodyPr /><a:lstStyle /><a:p><a:pPr lvl="0" indent="0" marL="0" algn="l"><a:buNone /></a:pPr><a:r><a:rPr /><a:t>Eijgenraam cost-benefit model</a:t></a:r></a:p></a:txBody></a:tc></a:tr><a:tr h="0"><a:tc><a:txBody><a:bodyPr /><a:lstStyle /><a:p><a:pPr lvl="0" indent="0" marL="0" algn="l"><a:buNone /></a:pPr><a:r><a:rPr b="1" /><a:t>M</a:t></a:r><a:r><a:rPr /><a:t> (metrics)</a:t></a:r></a:p></a:txBody></a:tc><a:tc><a:txBody><a:bodyPr /><a:lstStyle /><a:p><a:pPr lvl="0" indent="0" marL="0" algn="l"><a:buNone /></a:pPr><a:r><a:rPr /><a:t>Max failure probability, total cost</a:t></a:r></a:p></a:txBody></a:tc></a:tr></a:tbl></a:graphicData></a:graphic></p:graphicFrame></p:spTree></p:cSld></p:sld>
+<file path=ppt/slides/slide9.xml><?xml version="1.0" encoding="UTF-8"?><p:sld xmlns:a="http://schemas.openxmlformats.org/drawingml/2006/main" xmlns:r="http://schemas.openxmlformats.org/officeDocument/2006/relationships" xmlns:p="http://schemas.openxmlformats.org/presentationml/2006/main"><p:cSld><p:spTree><p:nvGrpSpPr><p:cNvPr id="1" name="" /><p:cNvGrpSpPr /><p:nvPr /></p:nvGrpSpPr><p:grpSpPr><a:xfrm><a:off x="0" y="0" /><a:ext cx="0" cy="0" /><a:chOff x="0" y="0" /><a:chExt cx="0" cy="0" /></a:xfrm></p:grpSpPr><mc:AlternateContent xmlns:mc="http://schemas.openxmlformats.org/markup-compatibility/2006"><mc:Choice xmlns:a14="http://schemas.microsoft.com/office/drawing/2010/main" Requires="a14"><p:sp><p:nvSpPr><p:cNvPr id="4" name="Text Placeholder 3" /><p:cNvSpPr><a:spLocks noGrp="1" /></p:cNvSpPr><p:nvPr><p:ph idx="2" sz="half" type="body" /></p:nvPr></p:nvSpPr><p:spPr /><p:txBody><a:bodyPr /><a:lstStyle /><a:p><a:pPr lvl="0" indent="0" marL="1270000"><a:buNone /></a:pPr><a:r><a:rPr sz="2000" b="1" /><a:t>Write (60 seconds)</a:t></a:r></a:p><a:p><a:pPr lvl="0" indent="0" marL="1270000"><a:buNone /></a:pPr><a:r><a:rPr sz="2000" /><a:t>In one sentence, interpret Box B. Then answer: if you are advising a city that faces severe storm surge risk </a:t></a:r><a:r><a:rPr sz="2000" i="1" /><a:t>and</a:t></a:r><a:r><a:rPr sz="2000" /><a:t> deep uncertainty in SLR, which box would you recommend and why?</a:t></a:r></a:p><a:p><a:pPr lvl="0" indent="0" marL="0"><a:spcBef><a:spcPts val="3000" /></a:spcBef><a:buNone /></a:pPr><a:r><a:rPr b="1" /><a:t>Friday’s Lab: The Eijgenraam Dike Model</a:t></a:r></a:p><a:p><a:pPr lvl="0" indent="0" marL="0"><a:buNone /></a:pPr><a:r><a:rPr /><a:t>In Lab 8 you’ll apply scenario discovery to a real flood protection problem from the Netherlands (Eijgenraam et al. 2014).</a:t></a:r></a:p><a:p><a:pPr lvl="0" indent="0" marL="0"><a:buNone /></a:pPr><a:r><a:rPr /><a:t>. . .</a:t></a:r></a:p><a:p><a:pPr lvl="0" indent="0" marL="0"><a:buNone /></a:pPr><a:r><a:rPr /><a:t>You know the Van Dantzig problem: how high should we build the dike? Eijgenraam extends it — investment costs grow </a:t></a:r><a:r><a:rPr b="1" /><a:t>exponentially</a:t></a:r><a:r><a:rPr /><a:t> with height, and flood risk grows over time with sea level rise and economic growth. (</a:t></a:r><a:r><a:rPr><a:hlinkClick r:id="rId3" /></a:rPr><a:t>Rhodium example</a:t></a:r><a:r><a:rPr /><a:t>)</a:t></a:r></a:p><a:p><a:pPr lvl="0" indent="0" marL="0"><a:buNone /></a:pPr><a:r><a:rPr /><a:t>. . .</a:t></a:r></a:p><a:p><a:pPr lvl="0" indent="0" marL="0"><a:buNone /></a:pPr><a:r><a:rPr /><a:t>The decision: </a:t></a:r><a:r><a:rPr b="1" /><a:t>when</a:t></a:r><a:r><a:rPr /><a:t> to heighten the dike and by </a:t></a:r><a:r><a:rPr b="1" /><a:t>how much</a:t></a:r><a:r><a:rPr /><a:t>.</a:t></a:r></a:p><a:p><a:pPr lvl="0" /><a:r><a:rPr /><a:t>Deferring saves money (discounting) but the dike ring is unprotected while we wait</a:t></a:r></a:p><a:p><a:pPr lvl="0" /><a:r><a:rPr /><a:t>Building higher is safer but exponentially more expensive</a:t></a:r></a:p><a:p><a:pPr lvl="0" indent="0" marL="0"><a:spcBef><a:spcPts val="3000" /></a:spcBef><a:buNone /></a:pPr><a:r><a:rPr b="1" /><a:t>The Eijgenraam Model: Key Equation</a:t></a:r></a:p><a:p><a:pPr lvl="0" indent="0" marL="0"><a:buNone /></a:pPr><a:r><a:rPr /><a:t>The annual </a:t></a:r><a:r><a:rPr b="1" /><a:t>flood probability</a:t></a:r><a:r><a:rPr /><a:t> at year </a:t></a:r><a14:m><m:oMath xmlns:m="http://schemas.openxmlformats.org/officeDocument/2006/math"><m:r><m:t>t</m:t></m:r></m:oMath></a14:m><a:r><a:rPr /><a:t> is:</a:t></a:r></a:p><a:p><a:pPr lvl="0" indent="0" marL="0"><a:buNone /></a:pPr><a14:m><m:oMathPara xmlns:m="http://schemas.openxmlformats.org/officeDocument/2006/math"><m:oMathParaPr><m:jc m:val="center" /></m:oMathParaPr><m:oMath><m:r><m:t>P</m:t></m:r><m:r><m:rPr><m:sty m:val="p" /></m:rPr><m:t>(</m:t></m:r><m:r><m:t>t</m:t></m:r><m:r><m:rPr><m:sty m:val="p" /></m:rPr><m:t>)</m:t></m:r><m:r><m:rPr><m:sty m:val="p" /></m:rPr><m:t>=</m:t></m:r><m:sSub><m:e><m:r><m:t>P</m:t></m:r></m:e><m:sub><m:r><m:t>0</m:t></m:r></m:sub></m:sSub><m:r><m:rPr><m:sty m:val="p" /></m:rPr><m:t>exp</m:t></m:r><m:d><m:dPr><m:begChr m:val="(" /><m:sepChr m:val="" /><m:endChr m:val=")" /><m:grow /></m:dPr><m:e><m:r><m:t>α</m:t></m:r><m:r><m:t>η</m:t></m:r><m:r><m:t> </m:t></m:r><m:r><m:t>t</m:t></m:r><m:r><m:rPr><m:sty m:val="p" /></m:rPr><m:t>−</m:t></m:r><m:r><m:t>α</m:t></m:r><m:r><m:t> </m:t></m:r><m:r><m:t>H</m:t></m:r><m:r><m:rPr><m:sty m:val="p" /></m:rPr><m:t>(</m:t></m:r><m:r><m:t>t</m:t></m:r><m:r><m:rPr><m:sty m:val="p" /></m:rPr><m:t>)</m:t></m:r></m:e></m:d></m:oMath></m:oMathPara></a14:m></a:p><a:p><a:pPr lvl="0" /><a14:m><m:oMath xmlns:m="http://schemas.openxmlformats.org/officeDocument/2006/math"><m:sSub><m:e><m:r><m:t>P</m:t></m:r></m:e><m:sub><m:r><m:t>0</m:t></m:r></m:sub></m:sSub></m:oMath></a14:m><a:r><a:rPr /><a:t>: initial flood probability</a:t></a:r></a:p><a:p><a:pPr lvl="0" /><a14:m><m:oMath xmlns:m="http://schemas.openxmlformats.org/officeDocument/2006/math"><m:r><m:t>α</m:t></m:r></m:oMath></a14:m><a:r><a:rPr /><a:t>: sensitivity of flood probability to water level (1/cm)</a:t></a:r></a:p><a:p><a:pPr lvl="0" /><a14:m><m:oMath xmlns:m="http://schemas.openxmlformats.org/officeDocument/2006/math"><m:r><m:t>η</m:t></m:r></m:oMath></a14:m><a:r><a:rPr /><a:t>: rate of water level rise (cm/year)</a:t></a:r></a:p><a:p><a:pPr lvl="0" /><a14:m><m:oMath xmlns:m="http://schemas.openxmlformats.org/officeDocument/2006/math"><m:r><m:t>H</m:t></m:r><m:r><m:rPr><m:sty m:val="p" /></m:rPr><m:t>(</m:t></m:r><m:r><m:t>t</m:t></m:r><m:r><m:rPr><m:sty m:val="p" /></m:rPr><m:t>)</m:t></m:r></m:oMath></a14:m><a:r><a:rPr /><a:t>: cumulative dike heightening at time </a:t></a:r><a14:m><m:oMath xmlns:m="http://schemas.openxmlformats.org/officeDocument/2006/math"><m:r><m:t>t</m:t></m:r></m:oMath></a14:m></a:p><a:p><a:pPr lvl="0" indent="0" marL="0"><a:buNone /></a:pPr><a:r><a:rPr /><a:t>. . .</a:t></a:r></a:p><a:p><a:pPr lvl="0" indent="0" marL="0"><a:buNone /></a:pPr><a:r><a:rPr /><a:t>This assumes an </a:t></a:r><a:r><a:rPr b="1" /><a:t>exponential distribution</a:t></a:r><a:r><a:rPr /><a:t> for water levels — analytically convenient, though real flood distributions have heavier tails.</a:t></a:r></a:p><a:p><a:pPr lvl="0" indent="0" marL="0"><a:buNone /></a:pPr><a:r><a:rPr /><a:t>. . .</a:t></a:r></a:p><a:p><a:pPr lvl="0" indent="0" marL="0"><a:buNone /></a:pPr><a:r><a:rPr /><a:t>Notice: </a:t></a:r><a14:m><m:oMath xmlns:m="http://schemas.openxmlformats.org/officeDocument/2006/math"><m:r><m:t>α</m:t></m:r></m:oMath></a14:m><a:r><a:rPr /><a:t> appears </a:t></a:r><a:r><a:rPr b="1" /><a:t>twice</a:t></a:r><a:r><a:rPr /><a:t> — it makes risk grow faster (</a:t></a:r><a14:m><m:oMath xmlns:m="http://schemas.openxmlformats.org/officeDocument/2006/math"><m:r><m:t>α</m:t></m:r><m:r><m:t>η</m:t></m:r><m:r><m:t>t</m:t></m:r></m:oMath></a14:m><a:r><a:rPr /><a:t>) </a:t></a:r><a:r><a:rPr i="1" /><a:t>and</a:t></a:r><a:r><a:rPr /><a:t> makes each cm of dike more effective (</a:t></a:r><a14:m><m:oMath xmlns:m="http://schemas.openxmlformats.org/officeDocument/2006/math"><m:r><m:rPr><m:sty m:val="p" /></m:rPr><m:t>−</m:t></m:r><m:r><m:t>α</m:t></m:r><m:r><m:t>H</m:t></m:r></m:oMath></a14:m><a:r><a:rPr /><a:t>). Its effect on failure is </a:t></a:r><a:r><a:rPr b="1" /><a:t>non-monotonic</a:t></a:r><a:r><a:rPr /><a:t>.</a:t></a:r></a:p><a:p><a:pPr lvl="0" indent="0" marL="0"><a:spcBef><a:spcPts val="3000" /></a:spcBef><a:buNone /></a:pPr><a:r><a:rPr b="1" /><a:t>Lab 8: The XLRM Setup</a:t></a:r></a:p></p:txBody></p:sp></mc:Choice></mc:AlternateContent><p:graphicFrame><p:nvGraphicFramePr><p:cNvPr id="6" name="Content Placeholder 5" /><p:cNvGraphicFramePr><a:graphicFrameLocks noGrp="1" /></p:cNvGraphicFramePr><p:nvPr><p:ph idx="1" /></p:nvPr></p:nvGraphicFramePr><p:xfrm><a:off x="3568700" y="203200" /><a:ext cx="5105400" cy="4381500" /></p:xfrm><a:graphic><a:graphicData uri="http://schemas.openxmlformats.org/drawingml/2006/table"><a:tbl><a:tblPr firstRow="1" bandRow="1"><a:tableStyleId>{5C22544A-7EE6-4342-B048-85BDC9FD1C3A}</a:tableStyleId></a:tblPr><a:tblGrid><a:gridCol w="2362200" /><a:gridCol w="2743200" /></a:tblGrid><a:tr h="0"><a:tc><a:txBody><a:bodyPr /><a:lstStyle /><a:p><a:pPr lvl="0" indent="0" marL="0" algn="l"><a:buNone /></a:pPr><a:r><a:rPr /><a:t>XLRM</a:t></a:r></a:p></a:txBody><a:tcPr /></a:tc><a:tc><a:txBody><a:bodyPr /><a:lstStyle /><a:p><a:pPr lvl="0" indent="0" marL="0" algn="l"><a:buNone /></a:pPr><a:r><a:rPr /><a:t>Lab 8</a:t></a:r></a:p></a:txBody><a:tcPr /></a:tc></a:tr><a:tr h="0"><a:tc><a:txBody><a:bodyPr /><a:lstStyle /><a:p><a:pPr lvl="0" indent="0" marL="0" algn="l"><a:buNone /></a:pPr><a:r><a:rPr b="1" /><a:t>X</a:t></a:r><a:r><a:rPr /><a:t> (uncertainties)</a:t></a:r></a:p></a:txBody></a:tc><a:tc><a:txBody><a:bodyPr /><a:lstStyle /><a:p><a:pPr lvl="0" indent="0" marL="0" algn="l"><a:buNone /></a:pPr><a14:m><m:oMath xmlns:m="http://schemas.openxmlformats.org/officeDocument/2006/math"><m:sSub><m:e><m:r><m:t>P</m:t></m:r></m:e><m:sub><m:r><m:t>0</m:t></m:r></m:sub></m:sSub></m:oMath></a14:m><a:r><a:rPr /><a:t>, </a:t></a:r><a14:m><m:oMath xmlns:m="http://schemas.openxmlformats.org/officeDocument/2006/math"><m:r><m:t>α</m:t></m:r></m:oMath></a14:m><a:r><a:rPr /><a:t>, </a:t></a:r><a14:m><m:oMath xmlns:m="http://schemas.openxmlformats.org/officeDocument/2006/math"><m:r><m:t>η</m:t></m:r></m:oMath></a14:m><a:r><a:rPr /><a:t>, </a:t></a:r><a14:m><m:oMath xmlns:m="http://schemas.openxmlformats.org/officeDocument/2006/math"><m:sSub><m:e><m:r><m:t>V</m:t></m:r></m:e><m:sub><m:r><m:t>0</m:t></m:r></m:sub></m:sSub></m:oMath></a14:m><a:r><a:rPr /><a:t>, </a:t></a:r><a14:m><m:oMath xmlns:m="http://schemas.openxmlformats.org/officeDocument/2006/math"><m:r><m:t>δ</m:t></m:r></m:oMath></a14:m></a:p></a:txBody></a:tc></a:tr><a:tr h="0"><a:tc><a:txBody><a:bodyPr /><a:lstStyle /><a:p><a:pPr lvl="0" indent="0" marL="0" algn="l"><a:buNone /></a:pPr><a:r><a:rPr b="1" /><a:t>L</a:t></a:r><a:r><a:rPr /><a:t> (levers)</a:t></a:r></a:p></a:txBody></a:tc><a:tc><a:txBody><a:bodyPr /><a:lstStyle /><a:p><a:pPr lvl="0" indent="0" marL="0" algn="l"><a:buNone /></a:pPr><a14:m><m:oMath xmlns:m="http://schemas.openxmlformats.org/officeDocument/2006/math"><m:r><m:rPr><m:sty m:val="p" /></m:rPr><m:t>(</m:t></m:r><m:sSub><m:e><m:r><m:t>T</m:t></m:r></m:e><m:sub><m:r><m:rPr><m:nor /><m:sty m:val="p" /></m:rPr><m:t>heighten</m:t></m:r></m:sub></m:sSub><m:r><m:rPr><m:sty m:val="p" /></m:rPr><m:t>,</m:t></m:r><m:r><m:t> </m:t></m:r><m:r><m:rPr><m:sty m:val="p" /></m:rPr><m:t>Δ</m:t></m:r><m:r><m:t>H</m:t></m:r><m:r><m:rPr><m:sty m:val="p" /></m:rPr><m:t>)</m:t></m:r></m:oMath></a14:m><a:r><a:rPr /><a:t> — when to heighten, how much</a:t></a:r></a:p></a:txBody></a:tc></a:tr><a:tr h="0"><a:tc><a:txBody><a:bodyPr /><a:lstStyle /><a:p><a:pPr lvl="0" indent="0" marL="0" algn="l"><a:buNone /></a:pPr><a:r><a:rPr b="1" /><a:t>R</a:t></a:r><a:r><a:rPr /><a:t> (model)</a:t></a:r></a:p></a:txBody></a:tc><a:tc><a:txBody><a:bodyPr /><a:lstStyle /><a:p><a:pPr lvl="0" indent="0" marL="0" algn="l"><a:buNone /></a:pPr><a:r><a:rPr /><a:t>Eijgenraam cost-benefit model</a:t></a:r></a:p></a:txBody></a:tc></a:tr><a:tr h="0"><a:tc><a:txBody><a:bodyPr /><a:lstStyle /><a:p><a:pPr lvl="0" indent="0" marL="0" algn="l"><a:buNone /></a:pPr><a:r><a:rPr b="1" /><a:t>M</a:t></a:r><a:r><a:rPr /><a:t> (metrics)</a:t></a:r></a:p></a:txBody></a:tc><a:tc><a:txBody><a:bodyPr /><a:lstStyle /><a:p><a:pPr lvl="0" indent="0" marL="0" algn="l"><a:buNone /></a:pPr><a:r><a:rPr /><a:t>Max failure probability, total cost</a:t></a:r></a:p></a:txBody></a:tc></a:tr></a:tbl></a:graphicData></a:graphic></p:graphicFrame></p:spTree></p:cSld></p:sld>
 </file>
 
 <file path=ppt/theme/theme1.xml><?xml version="1.0" encoding="utf-8"?>
